--- a/deliverables/项目验收汇报_极光版.pptx
+++ b/deliverables/项目验收汇报_极光版.pptx
@@ -2,25 +2,25 @@
 <file path=ppt/presentation.xml><?xml version="1.0" encoding="utf-8"?>
 <p:presentation xmlns:p="http://schemas.openxmlformats.org/presentationml/2006/main">
   <p:sldMasterIdLst>
-    <p:sldMasterId xmlns:r="http://schemas.openxmlformats.org/officeDocument/2006/relationships" id="2147483648" r:id="Rcf717440ae5c4451"/>
+    <p:sldMasterId xmlns:r="http://schemas.openxmlformats.org/officeDocument/2006/relationships" id="2147483648" r:id="R63e84c9ea2914228"/>
   </p:sldMasterIdLst>
   <p:notesMasterIdLst>
-    <p:notesMasterId xmlns:r="http://schemas.openxmlformats.org/officeDocument/2006/relationships" r:id="R7e3d9ab56cd34af8"/>
+    <p:notesMasterId xmlns:r="http://schemas.openxmlformats.org/officeDocument/2006/relationships" r:id="R5f7c7650feed4e92"/>
   </p:notesMasterIdLst>
   <p:sldIdLst>
-    <p:sldId xmlns:r="http://schemas.openxmlformats.org/officeDocument/2006/relationships" id="256" r:id="Rc4e5349300374539"/>
-    <p:sldId xmlns:r="http://schemas.openxmlformats.org/officeDocument/2006/relationships" id="257" r:id="Rca5b28f628514c21"/>
-    <p:sldId xmlns:r="http://schemas.openxmlformats.org/officeDocument/2006/relationships" id="258" r:id="R1e28fa3f0dbc42a1"/>
-    <p:sldId xmlns:r="http://schemas.openxmlformats.org/officeDocument/2006/relationships" id="259" r:id="R19d2a70a5b1c4738"/>
-    <p:sldId xmlns:r="http://schemas.openxmlformats.org/officeDocument/2006/relationships" id="260" r:id="Raac1243f93bc4b75"/>
-    <p:sldId xmlns:r="http://schemas.openxmlformats.org/officeDocument/2006/relationships" id="261" r:id="Rf8497cc0ee784b30"/>
-    <p:sldId xmlns:r="http://schemas.openxmlformats.org/officeDocument/2006/relationships" id="262" r:id="R7a2271e111cc4b0a"/>
-    <p:sldId xmlns:r="http://schemas.openxmlformats.org/officeDocument/2006/relationships" id="263" r:id="Rd12c9381d09a4ebe"/>
-    <p:sldId xmlns:r="http://schemas.openxmlformats.org/officeDocument/2006/relationships" id="264" r:id="R781177c00c3c42cf"/>
-    <p:sldId xmlns:r="http://schemas.openxmlformats.org/officeDocument/2006/relationships" id="265" r:id="R333ef368bcb64caa"/>
-    <p:sldId xmlns:r="http://schemas.openxmlformats.org/officeDocument/2006/relationships" id="266" r:id="Rfcbd42114eff4437"/>
-    <p:sldId xmlns:r="http://schemas.openxmlformats.org/officeDocument/2006/relationships" id="267" r:id="R454138640003423b"/>
-    <p:sldId xmlns:r="http://schemas.openxmlformats.org/officeDocument/2006/relationships" id="268" r:id="Rb95fa13b549e4a9f"/>
+    <p:sldId xmlns:r="http://schemas.openxmlformats.org/officeDocument/2006/relationships" id="256" r:id="Rfc6611c9ea0341b6"/>
+    <p:sldId xmlns:r="http://schemas.openxmlformats.org/officeDocument/2006/relationships" id="257" r:id="R5c3052cd88c644a6"/>
+    <p:sldId xmlns:r="http://schemas.openxmlformats.org/officeDocument/2006/relationships" id="258" r:id="R9d67eb7fd1cd45df"/>
+    <p:sldId xmlns:r="http://schemas.openxmlformats.org/officeDocument/2006/relationships" id="259" r:id="Rc60dacdd5aee47f2"/>
+    <p:sldId xmlns:r="http://schemas.openxmlformats.org/officeDocument/2006/relationships" id="260" r:id="R003b8c91076a47ce"/>
+    <p:sldId xmlns:r="http://schemas.openxmlformats.org/officeDocument/2006/relationships" id="261" r:id="R679b94ebba5f4bad"/>
+    <p:sldId xmlns:r="http://schemas.openxmlformats.org/officeDocument/2006/relationships" id="262" r:id="Rf53c5d2ee23b4385"/>
+    <p:sldId xmlns:r="http://schemas.openxmlformats.org/officeDocument/2006/relationships" id="263" r:id="R25104bbb173a4258"/>
+    <p:sldId xmlns:r="http://schemas.openxmlformats.org/officeDocument/2006/relationships" id="264" r:id="R71f5416dcf2d4c91"/>
+    <p:sldId xmlns:r="http://schemas.openxmlformats.org/officeDocument/2006/relationships" id="265" r:id="Rca880bd98e174b96"/>
+    <p:sldId xmlns:r="http://schemas.openxmlformats.org/officeDocument/2006/relationships" id="266" r:id="R170a23bf4d6e4723"/>
+    <p:sldId xmlns:r="http://schemas.openxmlformats.org/officeDocument/2006/relationships" id="267" r:id="R12e43fbe32024dd5"/>
+    <p:sldId xmlns:r="http://schemas.openxmlformats.org/officeDocument/2006/relationships" id="268" r:id="Re9d60bc7c92f4c05"/>
   </p:sldIdLst>
   <p:sldSz cx="12192000" cy="6858000"/>
   <p:notesSz cx="6858000" cy="9144000"/>
@@ -594,7 +594,7 @@
           <a:lstStyle xmlns:a="http://schemas.openxmlformats.org/drawingml/2006/main"/>
           <a:p xmlns:a="http://schemas.openxmlformats.org/drawingml/2006/main">
             <a:r>
-              <a:t>AGENTS.md §10.2；server/services/growth.py；server/services/recruiter.py。成长只比较同人同岗可比训练；企业同人同岗取最近合格报告并能回链原报告。</a:t>
+              <a:t>server/services/growth.py、server/services/recruiter.py；同人同岗的可比记录作比较，候选记录可回链原报告。命题05项目端目标为学生训练—企业筛选双向闭环。</a:t>
             </a:r>
           </a:p>
         </p:txBody>
@@ -664,7 +664,7 @@
           <a:lstStyle xmlns:a="http://schemas.openxmlformats.org/drawingml/2006/main"/>
           <a:p xmlns:a="http://schemas.openxmlformats.org/drawingml/2006/main">
             <a:r>
-              <a:t>AGENTS.md §4/§5；web/package.json；requirements.txt；server/services/llm.py:38-49、59-95。三档链在代码中实现；不宣称每次调用都经历三档。</a:t>
+              <a:t>AGENTS.md §4–6；server/services/llm.py。模型名称和接入地址由配置决定。旗舰云端、备用云端、本地模型按可用配置尝试；超时和错误触发回退，并保留后续时间预算。</a:t>
             </a:r>
           </a:p>
         </p:txBody>
@@ -1084,7 +1084,7 @@
           <a:lstStyle xmlns:a="http://schemas.openxmlformats.org/drawingml/2006/main"/>
           <a:p xmlns:a="http://schemas.openxmlformats.org/drawingml/2006/main">
             <a:r>
-              <a:t>AGENTS.md §6/§9；server/api/sessions.py；server/services/orchestrator.py；web/app/page.tsx。每题最多一次追问。</a:t>
+              <a:t>server/services/question_bank.py 当前单场仍按通用2、专业3、情景1取题。题库内容可维护；server/services/orchestrator.py 结合回答决定追问，每题最多一次。</a:t>
             </a:r>
           </a:p>
         </p:txBody>
@@ -1154,7 +1154,7 @@
           <a:lstStyle xmlns:a="http://schemas.openxmlformats.org/drawingml/2006/main"/>
           <a:p xmlns:a="http://schemas.openxmlformats.org/drawingml/2006/main">
             <a:r>
-              <a:t>AGENTS.md §6；server/api/sessions.py；两个种子岗位为智驾测试与三电系统测试。这里展示题型结构，不表示岗位数量扩张。</a:t>
+              <a:t>产品介绍按用户要求采用通用岗位定位。实现证据：server/api/jobs.py 支持题库维护和权重设置；jd_parse.py 生成评估建议。当前单场题型比例与正式评分字段仍固定，未宣称已开放这两项配置。当前种子岗位为智能汽车岗位，跨行业适配是产品方向。</a:t>
             </a:r>
           </a:p>
         </p:txBody>
@@ -1294,7 +1294,7 @@
           <a:lstStyle xmlns:a="http://schemas.openxmlformats.org/drawingml/2006/main"/>
           <a:p xmlns:a="http://schemas.openxmlformats.org/drawingml/2006/main">
             <a:r>
-              <a:t>示例为 memory/TESTING.md M1 真实浏览器报告 session #2：专业匹配度65.0、逻辑结构72.5、岗位素养65.0、表达流畅度null；overall 67.5。仅代表该份样本。</a:t>
+              <a:t>评分、证据引用和建议依据 server/services/scoring.py；文本输入缺失语音维度不补零。替换原单份文本样本分数页，解释报告用途。</a:t>
             </a:r>
           </a:p>
         </p:txBody>
@@ -1362,7 +1362,7 @@
   </p:cSld>
   <p:clrMap bg1="lt1" tx1="dk1" bg2="lt2" tx2="dk2" accent1="accent1" accent2="accent2" accent3="accent3" accent4="accent4" accent5="accent5" accent6="accent6" hlink="hlink" folHlink="folHlink"/>
   <p:sldLayoutIdLst>
-    <p:sldLayoutId xmlns:r="http://schemas.openxmlformats.org/officeDocument/2006/relationships" id="2147483649" r:id="Reb06086014b74e3e"/>
+    <p:sldLayoutId xmlns:r="http://schemas.openxmlformats.org/officeDocument/2006/relationships" id="2147483649" r:id="Ra2da1553f83349fc"/>
   </p:sldLayoutIdLst>
   <p:txStyles>
     <p:titleStyle>
@@ -1917,8 +1917,8 @@
           <p:nvPr/>
         </p:nvPicPr>
         <p:blipFill>
-          <a:blip xmlns:r="http://schemas.openxmlformats.org/officeDocument/2006/relationships" xmlns:a="http://schemas.openxmlformats.org/drawingml/2006/main" r:embed="R2f8664ba57454734"/>
-          <a:srcRect xmlns:a="http://schemas.openxmlformats.org/drawingml/2006/main" l="0" t="0" r="0" b="0"/>
+          <a:blip xmlns:r="http://schemas.openxmlformats.org/officeDocument/2006/relationships" xmlns:a="http://schemas.openxmlformats.org/drawingml/2006/main" r:embed="Rb39a87ec57ca40b7"/>
+          <a:srcRect xmlns:a="http://schemas.openxmlformats.org/drawingml/2006/main" l="0" t="27" r="0" b="27"/>
           <a:stretch xmlns:a="http://schemas.openxmlformats.org/drawingml/2006/main">
             <a:fillRect l="0" t="0" r="0" b="0"/>
           </a:stretch>
@@ -1938,7 +1938,7 @@
           <p:cNvPr id="2" name="">
             <a:extLst xmlns:a="http://schemas.openxmlformats.org/drawingml/2006/main">
               <a:ext uri="{FF2B5EF4-FFF2-40B4-BE49-F238E27FC236}">
-                <a16:creationId xmlns:a16="http://schemas.microsoft.com/office/drawing/2014/main" id="{6B114824-AC8A-4AF0-96F1-AE2B1D95E510}"/>
+                <a16:creationId xmlns:a16="http://schemas.microsoft.com/office/drawing/2014/main" id="{B5098CA5-2454-4545-89F0-FA4BFCFDE754}"/>
               </a:ext>
             </a:extLst>
           </p:cNvPr>
@@ -1975,7 +1975,7 @@
           <p:cNvPr id="3" name="">
             <a:extLst xmlns:a="http://schemas.openxmlformats.org/drawingml/2006/main">
               <a:ext uri="{FF2B5EF4-FFF2-40B4-BE49-F238E27FC236}">
-                <a16:creationId xmlns:a16="http://schemas.microsoft.com/office/drawing/2014/main" id="{76DFE5AB-FDCF-484F-8410-3A6C4D61AB9D}"/>
+                <a16:creationId xmlns:a16="http://schemas.microsoft.com/office/drawing/2014/main" id="{C15901CE-7C9A-4438-9441-810569B64681}"/>
               </a:ext>
             </a:extLst>
           </p:cNvPr>
@@ -2032,7 +2032,7 @@
           <p:cNvPr id="4" name="">
             <a:extLst xmlns:a="http://schemas.openxmlformats.org/drawingml/2006/main">
               <a:ext uri="{FF2B5EF4-FFF2-40B4-BE49-F238E27FC236}">
-                <a16:creationId xmlns:a16="http://schemas.microsoft.com/office/drawing/2014/main" id="{EAB9837F-F0A8-4DE0-B151-1756BF262AAA}"/>
+                <a16:creationId xmlns:a16="http://schemas.microsoft.com/office/drawing/2014/main" id="{86BAFFDA-516B-47DE-93F1-1EFD5AA1B3CF}"/>
               </a:ext>
             </a:extLst>
           </p:cNvPr>
@@ -2089,7 +2089,7 @@
           <p:cNvPr id="5" name="">
             <a:extLst xmlns:a="http://schemas.openxmlformats.org/drawingml/2006/main">
               <a:ext uri="{FF2B5EF4-FFF2-40B4-BE49-F238E27FC236}">
-                <a16:creationId xmlns:a16="http://schemas.microsoft.com/office/drawing/2014/main" id="{CCE755EC-0A23-4445-BE61-FEE0AE5C5CB5}"/>
+                <a16:creationId xmlns:a16="http://schemas.microsoft.com/office/drawing/2014/main" id="{8F279B96-A470-4195-838A-850BB2B76841}"/>
               </a:ext>
             </a:extLst>
           </p:cNvPr>
@@ -2146,7 +2146,7 @@
           <p:cNvPr id="6" name="">
             <a:extLst xmlns:a="http://schemas.openxmlformats.org/drawingml/2006/main">
               <a:ext uri="{FF2B5EF4-FFF2-40B4-BE49-F238E27FC236}">
-                <a16:creationId xmlns:a16="http://schemas.microsoft.com/office/drawing/2014/main" id="{5B189681-99C1-4BF3-AE23-A3BE5F556965}"/>
+                <a16:creationId xmlns:a16="http://schemas.microsoft.com/office/drawing/2014/main" id="{1D5C4F20-5A06-4F63-8626-AD405E671919}"/>
               </a:ext>
             </a:extLst>
           </p:cNvPr>
@@ -2193,7 +2193,7 @@
                 <a:ea typeface="Microsoft YaHei"/>
                 <a:cs typeface="Microsoft YaHei"/>
               </a:rPr>
-              <a:t>面向智能汽车岗位的训练与初筛平台</a:t>
+              <a:t>面向岗位需求的 AI 面试训练与人才初筛平台</a:t>
             </a:r>
           </a:p>
         </p:txBody>
@@ -2203,7 +2203,7 @@
           <p:cNvPr id="7" name="">
             <a:extLst xmlns:a="http://schemas.openxmlformats.org/drawingml/2006/main">
               <a:ext uri="{FF2B5EF4-FFF2-40B4-BE49-F238E27FC236}">
-                <a16:creationId xmlns:a16="http://schemas.microsoft.com/office/drawing/2014/main" id="{FEBC6C49-5B20-4AAC-95FA-322F7A9580CA}"/>
+                <a16:creationId xmlns:a16="http://schemas.microsoft.com/office/drawing/2014/main" id="{6068C221-AA7B-4BA7-9F5A-959080D1FA5A}"/>
               </a:ext>
             </a:extLst>
           </p:cNvPr>
@@ -2250,7 +2250,7 @@
                 <a:ea typeface="Microsoft YaHei"/>
                 <a:cs typeface="Microsoft YaHei"/>
               </a:rPr>
-              <a:t>智驾未来·AI面试仓  /  2026.09.27</a:t>
+              <a:t>智驾未来·AI面试仓</a:t>
             </a:r>
           </a:p>
         </p:txBody>
@@ -2258,7 +2258,7 @@
     </p:spTree>
     <p:extLst>
       <p:ext uri="{BB962C8B-B14F-4D97-AF65-F5344CB8AC3E}">
-        <p14:creationId xmlns:p14="http://schemas.microsoft.com/office/powerpoint/2010/main" val="1982471208"/>
+        <p14:creationId xmlns:p14="http://schemas.microsoft.com/office/powerpoint/2010/main" val="789011627"/>
       </p:ext>
     </p:extLst>
   </p:cSld>
@@ -2296,8 +2296,8 @@
           <p:nvPr/>
         </p:nvPicPr>
         <p:blipFill>
-          <a:blip xmlns:r="http://schemas.openxmlformats.org/officeDocument/2006/relationships" xmlns:a="http://schemas.openxmlformats.org/drawingml/2006/main" r:embed="Rf7e1e02ffcc14990"/>
-          <a:srcRect xmlns:a="http://schemas.openxmlformats.org/drawingml/2006/main" l="0" t="0" r="0" b="0"/>
+          <a:blip xmlns:r="http://schemas.openxmlformats.org/officeDocument/2006/relationships" xmlns:a="http://schemas.openxmlformats.org/drawingml/2006/main" r:embed="Rc731dce20f984318"/>
+          <a:srcRect xmlns:a="http://schemas.openxmlformats.org/drawingml/2006/main" l="0" t="27" r="0" b="27"/>
           <a:stretch xmlns:a="http://schemas.openxmlformats.org/drawingml/2006/main">
             <a:fillRect l="0" t="0" r="0" b="0"/>
           </a:stretch>
@@ -2317,7 +2317,7 @@
           <p:cNvPr id="2" name="">
             <a:extLst xmlns:a="http://schemas.openxmlformats.org/drawingml/2006/main">
               <a:ext uri="{FF2B5EF4-FFF2-40B4-BE49-F238E27FC236}">
-                <a16:creationId xmlns:a16="http://schemas.microsoft.com/office/drawing/2014/main" id="{A4E2E373-25A5-49D2-89FA-8B69FC686D2C}"/>
+                <a16:creationId xmlns:a16="http://schemas.microsoft.com/office/drawing/2014/main" id="{AFEC81A5-5737-4E31-A713-FF4297C6F33B}"/>
               </a:ext>
             </a:extLst>
           </p:cNvPr>
@@ -2354,7 +2354,7 @@
           <p:cNvPr id="3" name="">
             <a:extLst xmlns:a="http://schemas.openxmlformats.org/drawingml/2006/main">
               <a:ext uri="{FF2B5EF4-FFF2-40B4-BE49-F238E27FC236}">
-                <a16:creationId xmlns:a16="http://schemas.microsoft.com/office/drawing/2014/main" id="{661E64FE-60AC-4FE2-B4B8-EFA0342D38F2}"/>
+                <a16:creationId xmlns:a16="http://schemas.microsoft.com/office/drawing/2014/main" id="{F5C9BEC3-0FDA-4DD9-89FC-1F01C9E62CFE}"/>
               </a:ext>
             </a:extLst>
           </p:cNvPr>
@@ -2411,7 +2411,7 @@
           <p:cNvPr id="4" name="">
             <a:extLst xmlns:a="http://schemas.openxmlformats.org/drawingml/2006/main">
               <a:ext uri="{FF2B5EF4-FFF2-40B4-BE49-F238E27FC236}">
-                <a16:creationId xmlns:a16="http://schemas.microsoft.com/office/drawing/2014/main" id="{B2736982-3BC7-46E6-8325-0DC68855EDFE}"/>
+                <a16:creationId xmlns:a16="http://schemas.microsoft.com/office/drawing/2014/main" id="{6D7EB3F2-1323-42DA-B18C-CE85C21A817D}"/>
               </a:ext>
             </a:extLst>
           </p:cNvPr>
@@ -2468,7 +2468,7 @@
           <p:cNvPr id="5" name="">
             <a:extLst xmlns:a="http://schemas.openxmlformats.org/drawingml/2006/main">
               <a:ext uri="{FF2B5EF4-FFF2-40B4-BE49-F238E27FC236}">
-                <a16:creationId xmlns:a16="http://schemas.microsoft.com/office/drawing/2014/main" id="{35330409-D380-4515-AC80-B342A834E756}"/>
+                <a16:creationId xmlns:a16="http://schemas.microsoft.com/office/drawing/2014/main" id="{DF811115-E0B1-47B3-9C67-7BF3087BF1D0}"/>
               </a:ext>
             </a:extLst>
           </p:cNvPr>
@@ -2525,7 +2525,7 @@
           <p:cNvPr id="6" name="">
             <a:extLst xmlns:a="http://schemas.openxmlformats.org/drawingml/2006/main">
               <a:ext uri="{FF2B5EF4-FFF2-40B4-BE49-F238E27FC236}">
-                <a16:creationId xmlns:a16="http://schemas.microsoft.com/office/drawing/2014/main" id="{396BC96A-041C-42F7-9759-38837F899B22}"/>
+                <a16:creationId xmlns:a16="http://schemas.microsoft.com/office/drawing/2014/main" id="{0161ACC9-AE2E-4E89-B64B-B0F5E45ED8CE}"/>
               </a:ext>
             </a:extLst>
           </p:cNvPr>
@@ -2572,7 +2572,7 @@
                 <a:ea typeface="Microsoft YaHei"/>
                 <a:cs typeface="Microsoft YaHei"/>
               </a:rPr>
-              <a:t>evidence ≤25 字，且必须命中单条回答的连续原文</a:t>
+              <a:t>用回答中的原话解释评分，让学生知道问题出在哪里</a:t>
             </a:r>
           </a:p>
         </p:txBody>
@@ -2582,7 +2582,7 @@
           <p:cNvPr id="7" name="">
             <a:extLst xmlns:a="http://schemas.openxmlformats.org/drawingml/2006/main">
               <a:ext uri="{FF2B5EF4-FFF2-40B4-BE49-F238E27FC236}">
-                <a16:creationId xmlns:a16="http://schemas.microsoft.com/office/drawing/2014/main" id="{5573D773-E52E-467D-8F63-01010B7CB9F5}"/>
+                <a16:creationId xmlns:a16="http://schemas.microsoft.com/office/drawing/2014/main" id="{7E151EE7-3376-422B-A393-6AC87AE2C51C}"/>
               </a:ext>
             </a:extLst>
           </p:cNvPr>
@@ -2641,7 +2641,7 @@
     </p:spTree>
     <p:extLst>
       <p:ext uri="{BB962C8B-B14F-4D97-AF65-F5344CB8AC3E}">
-        <p14:creationId xmlns:p14="http://schemas.microsoft.com/office/powerpoint/2010/main" val="1887006869"/>
+        <p14:creationId xmlns:p14="http://schemas.microsoft.com/office/powerpoint/2010/main" val="1263213366"/>
       </p:ext>
     </p:extLst>
   </p:cSld>
@@ -2672,15 +2672,15 @@
       </p:grpSpPr>
       <p:pic>
         <p:nvPicPr>
-          <p:cNvPr id="18" name=""/>
+          <p:cNvPr id="23" name=""/>
           <p:cNvPicPr>
             <a:picLocks xmlns:a="http://schemas.openxmlformats.org/drawingml/2006/main" noChangeAspect="1"/>
           </p:cNvPicPr>
           <p:nvPr/>
         </p:nvPicPr>
         <p:blipFill>
-          <a:blip xmlns:r="http://schemas.openxmlformats.org/officeDocument/2006/relationships" xmlns:a="http://schemas.openxmlformats.org/drawingml/2006/main" r:embed="R46ed27b70dc449c0"/>
-          <a:srcRect xmlns:a="http://schemas.openxmlformats.org/drawingml/2006/main" l="0" t="0" r="0" b="0"/>
+          <a:blip xmlns:r="http://schemas.openxmlformats.org/officeDocument/2006/relationships" xmlns:a="http://schemas.openxmlformats.org/drawingml/2006/main" r:embed="R93c26ffb2d244d5b"/>
+          <a:srcRect xmlns:a="http://schemas.openxmlformats.org/drawingml/2006/main" l="0" t="27" r="0" b="27"/>
           <a:stretch xmlns:a="http://schemas.openxmlformats.org/drawingml/2006/main">
             <a:fillRect l="0" t="0" r="0" b="0"/>
           </a:stretch>
@@ -2700,7 +2700,7 @@
           <p:cNvPr id="2" name="">
             <a:extLst xmlns:a="http://schemas.openxmlformats.org/drawingml/2006/main">
               <a:ext uri="{FF2B5EF4-FFF2-40B4-BE49-F238E27FC236}">
-                <a16:creationId xmlns:a16="http://schemas.microsoft.com/office/drawing/2014/main" id="{7287A3B4-F13E-408F-8F5F-B3DF150B59B7}"/>
+                <a16:creationId xmlns:a16="http://schemas.microsoft.com/office/drawing/2014/main" id="{5208DB40-9BE3-4F63-98C9-2AD78CBD66C5}"/>
               </a:ext>
             </a:extLst>
           </p:cNvPr>
@@ -2737,7 +2737,7 @@
           <p:cNvPr id="3" name="">
             <a:extLst xmlns:a="http://schemas.openxmlformats.org/drawingml/2006/main">
               <a:ext uri="{FF2B5EF4-FFF2-40B4-BE49-F238E27FC236}">
-                <a16:creationId xmlns:a16="http://schemas.microsoft.com/office/drawing/2014/main" id="{EB5AECAC-D703-466E-84A8-FCCAD7E84054}"/>
+                <a16:creationId xmlns:a16="http://schemas.microsoft.com/office/drawing/2014/main" id="{704C38BE-9064-4C54-8F96-7C6155297BC6}"/>
               </a:ext>
             </a:extLst>
           </p:cNvPr>
@@ -2794,7 +2794,7 @@
           <p:cNvPr id="4" name="">
             <a:extLst xmlns:a="http://schemas.openxmlformats.org/drawingml/2006/main">
               <a:ext uri="{FF2B5EF4-FFF2-40B4-BE49-F238E27FC236}">
-                <a16:creationId xmlns:a16="http://schemas.microsoft.com/office/drawing/2014/main" id="{AA28B719-25D5-477C-9614-20CB130141DD}"/>
+                <a16:creationId xmlns:a16="http://schemas.microsoft.com/office/drawing/2014/main" id="{5F59DBD4-B50E-4560-ABD4-35ABA1AE87DB}"/>
               </a:ext>
             </a:extLst>
           </p:cNvPr>
@@ -2841,7 +2841,7 @@
                 <a:ea typeface="Microsoft YaHei"/>
                 <a:cs typeface="Microsoft YaHei"/>
               </a:rPr>
-              <a:t>同一份报告连接成长与初筛</a:t>
+              <a:t>一份训练报告，同时服务成长与初筛</a:t>
             </a:r>
           </a:p>
         </p:txBody>
@@ -2851,7 +2851,7 @@
           <p:cNvPr id="5" name="">
             <a:extLst xmlns:a="http://schemas.openxmlformats.org/drawingml/2006/main">
               <a:ext uri="{FF2B5EF4-FFF2-40B4-BE49-F238E27FC236}">
-                <a16:creationId xmlns:a16="http://schemas.microsoft.com/office/drawing/2014/main" id="{D0F9061B-C05B-4E4F-BDF1-B984F2A8DE7B}"/>
+                <a16:creationId xmlns:a16="http://schemas.microsoft.com/office/drawing/2014/main" id="{D5AB9BE3-D3C5-4FCA-9D58-509EDEC6C550}"/>
               </a:ext>
             </a:extLst>
           </p:cNvPr>
@@ -2912,251 +2912,23 @@
           <p:cNvPr id="6" name="">
             <a:extLst xmlns:a="http://schemas.openxmlformats.org/drawingml/2006/main">
               <a:ext uri="{FF2B5EF4-FFF2-40B4-BE49-F238E27FC236}">
-                <a16:creationId xmlns:a16="http://schemas.microsoft.com/office/drawing/2014/main" id="{1297D039-C3E9-495F-BE47-5314E1B21250}"/>
-              </a:ext>
-            </a:extLst>
-          </p:cNvPr>
-          <p:cNvSpPr>
-            <a:spLocks xmlns:a="http://schemas.openxmlformats.org/drawingml/2006/main" noGrp="1"/>
-          </p:cNvSpPr>
-          <p:nvPr/>
-        </p:nvSpPr>
-        <p:spPr>
-          <a:xfrm xmlns:a="http://schemas.openxmlformats.org/drawingml/2006/main">
-            <a:off x="5095875" y="2162175"/>
+                <a16:creationId xmlns:a16="http://schemas.microsoft.com/office/drawing/2014/main" id="{73A8814D-C4CB-4AE3-9D94-CA0CFBCD3168}"/>
+              </a:ext>
+            </a:extLst>
+          </p:cNvPr>
+          <p:cNvSpPr>
+            <a:spLocks xmlns:a="http://schemas.openxmlformats.org/drawingml/2006/main" noGrp="1"/>
+          </p:cNvSpPr>
+          <p:nvPr/>
+        </p:nvSpPr>
+        <p:spPr>
+          <a:xfrm xmlns:a="http://schemas.openxmlformats.org/drawingml/2006/main">
+            <a:off x="5095875" y="1952625"/>
             <a:ext cx="2000250" cy="904875"/>
           </a:xfrm>
           <a:prstGeom xmlns:a="http://schemas.openxmlformats.org/drawingml/2006/main" prst="roundRect">
             <a:avLst>
               <a:gd name="adj" fmla="val 8421"/>
-            </a:avLst>
-          </a:prstGeom>
-          <a:solidFill xmlns:a="http://schemas.openxmlformats.org/drawingml/2006/main">
-            <a:srgbClr val="0B1020">
-              <a:alpha val="72000"/>
-            </a:srgbClr>
-          </a:solidFill>
-          <a:ln xmlns:a="http://schemas.openxmlformats.org/drawingml/2006/main" w="10478">
-            <a:solidFill>
-              <a:srgbClr val="FF7AD9">
-                <a:alpha val="72000"/>
-              </a:srgbClr>
-            </a:solidFill>
-            <a:prstDash val="solid"/>
-          </a:ln>
-        </p:spPr>
-      </p:sp>
-      <p:sp>
-        <p:nvSpPr>
-          <p:cNvPr id="7" name="">
-            <a:extLst xmlns:a="http://schemas.openxmlformats.org/drawingml/2006/main">
-              <a:ext uri="{FF2B5EF4-FFF2-40B4-BE49-F238E27FC236}">
-                <a16:creationId xmlns:a16="http://schemas.microsoft.com/office/drawing/2014/main" id="{63EA4E83-29E8-4F02-8618-A1F0DE9B4C33}"/>
-              </a:ext>
-            </a:extLst>
-          </p:cNvPr>
-          <p:cNvSpPr>
-            <a:spLocks xmlns:a="http://schemas.openxmlformats.org/drawingml/2006/main" noGrp="1"/>
-          </p:cNvSpPr>
-          <p:nvPr/>
-        </p:nvSpPr>
-        <p:spPr>
-          <a:xfrm xmlns:a="http://schemas.openxmlformats.org/drawingml/2006/main">
-            <a:off x="5248275" y="2419350"/>
-            <a:ext cx="1714500" cy="419100"/>
-          </a:xfrm>
-          <a:prstGeom xmlns:a="http://schemas.openxmlformats.org/drawingml/2006/main" prst="rect">
-            <a:avLst/>
-          </a:prstGeom>
-          <a:noFill xmlns:a="http://schemas.openxmlformats.org/drawingml/2006/main"/>
-          <a:ln xmlns:a="http://schemas.openxmlformats.org/drawingml/2006/main" w="0">
-            <a:noFill/>
-          </a:ln>
-        </p:spPr>
-        <p:txBody>
-          <a:bodyPr xmlns:a="http://schemas.openxmlformats.org/drawingml/2006/main">
-            <a:noAutofit/>
-          </a:bodyPr>
-          <a:lstStyle xmlns:a="http://schemas.openxmlformats.org/drawingml/2006/main"/>
-          <a:p xmlns:a="http://schemas.openxmlformats.org/drawingml/2006/main">
-            <a:pPr>
-              <a:defRPr sz="2025" b="1">
-                <a:solidFill>
-                  <a:srgbClr val="F5F7FF"/>
-                </a:solidFill>
-                <a:latin typeface="Microsoft YaHei"/>
-                <a:ea typeface="Microsoft YaHei"/>
-                <a:cs typeface="Microsoft YaHei"/>
-              </a:defRPr>
-            </a:pPr>
-            <a:r>
-              <a:rPr sz="2025" b="1">
-                <a:solidFill>
-                  <a:srgbClr val="F5F7FF"/>
-                </a:solidFill>
-                <a:latin typeface="Microsoft YaHei"/>
-                <a:ea typeface="Microsoft YaHei"/>
-                <a:cs typeface="Microsoft YaHei"/>
-              </a:rPr>
-              <a:t>学生报告</a:t>
-            </a:r>
-          </a:p>
-        </p:txBody>
-      </p:sp>
-      <p:sp>
-        <p:nvSpPr>
-          <p:cNvPr id="8" name="">
-            <a:extLst xmlns:a="http://schemas.openxmlformats.org/drawingml/2006/main">
-              <a:ext uri="{FF2B5EF4-FFF2-40B4-BE49-F238E27FC236}">
-                <a16:creationId xmlns:a16="http://schemas.microsoft.com/office/drawing/2014/main" id="{3147D63C-F63D-421A-8657-DF6C0986534A}"/>
-              </a:ext>
-            </a:extLst>
-          </p:cNvPr>
-          <p:cNvSpPr>
-            <a:spLocks xmlns:a="http://schemas.openxmlformats.org/drawingml/2006/main" noGrp="1"/>
-          </p:cNvSpPr>
-          <p:nvPr/>
-        </p:nvSpPr>
-        <p:spPr>
-          <a:xfrm xmlns:a="http://schemas.openxmlformats.org/drawingml/2006/main">
-            <a:off x="6048375" y="3114675"/>
-            <a:ext cx="19050" cy="542925"/>
-          </a:xfrm>
-          <a:prstGeom xmlns:a="http://schemas.openxmlformats.org/drawingml/2006/main" prst="rect">
-            <a:avLst/>
-          </a:prstGeom>
-          <a:solidFill xmlns:a="http://schemas.openxmlformats.org/drawingml/2006/main">
-            <a:srgbClr val="F5F7FF">
-              <a:alpha val="55000"/>
-            </a:srgbClr>
-          </a:solidFill>
-          <a:ln xmlns:a="http://schemas.openxmlformats.org/drawingml/2006/main" w="0">
-            <a:noFill/>
-            <a:prstDash val="solid"/>
-          </a:ln>
-        </p:spPr>
-      </p:sp>
-      <p:sp>
-        <p:nvSpPr>
-          <p:cNvPr id="9" name="">
-            <a:extLst xmlns:a="http://schemas.openxmlformats.org/drawingml/2006/main">
-              <a:ext uri="{FF2B5EF4-FFF2-40B4-BE49-F238E27FC236}">
-                <a16:creationId xmlns:a16="http://schemas.microsoft.com/office/drawing/2014/main" id="{C543EFB5-26C2-4122-AE9A-3FB85C2D36F4}"/>
-              </a:ext>
-            </a:extLst>
-          </p:cNvPr>
-          <p:cNvSpPr>
-            <a:spLocks xmlns:a="http://schemas.openxmlformats.org/drawingml/2006/main" noGrp="1"/>
-          </p:cNvSpPr>
-          <p:nvPr/>
-        </p:nvSpPr>
-        <p:spPr>
-          <a:xfrm xmlns:a="http://schemas.openxmlformats.org/drawingml/2006/main">
-            <a:off x="3171825" y="3638550"/>
-            <a:ext cx="5762625" cy="19050"/>
-          </a:xfrm>
-          <a:prstGeom xmlns:a="http://schemas.openxmlformats.org/drawingml/2006/main" prst="rect">
-            <a:avLst/>
-          </a:prstGeom>
-          <a:solidFill xmlns:a="http://schemas.openxmlformats.org/drawingml/2006/main">
-            <a:srgbClr val="F5F7FF">
-              <a:alpha val="55000"/>
-            </a:srgbClr>
-          </a:solidFill>
-          <a:ln xmlns:a="http://schemas.openxmlformats.org/drawingml/2006/main" w="0">
-            <a:noFill/>
-            <a:prstDash val="solid"/>
-          </a:ln>
-        </p:spPr>
-      </p:sp>
-      <p:sp>
-        <p:nvSpPr>
-          <p:cNvPr id="10" name="">
-            <a:extLst xmlns:a="http://schemas.openxmlformats.org/drawingml/2006/main">
-              <a:ext uri="{FF2B5EF4-FFF2-40B4-BE49-F238E27FC236}">
-                <a16:creationId xmlns:a16="http://schemas.microsoft.com/office/drawing/2014/main" id="{22DBED66-853B-409F-86D2-9F2C1EC9B1E1}"/>
-              </a:ext>
-            </a:extLst>
-          </p:cNvPr>
-          <p:cNvSpPr>
-            <a:spLocks xmlns:a="http://schemas.openxmlformats.org/drawingml/2006/main" noGrp="1"/>
-          </p:cNvSpPr>
-          <p:nvPr/>
-        </p:nvSpPr>
-        <p:spPr>
-          <a:xfrm xmlns:a="http://schemas.openxmlformats.org/drawingml/2006/main">
-            <a:off x="3171825" y="3638550"/>
-            <a:ext cx="19050" cy="371475"/>
-          </a:xfrm>
-          <a:prstGeom xmlns:a="http://schemas.openxmlformats.org/drawingml/2006/main" prst="rect">
-            <a:avLst/>
-          </a:prstGeom>
-          <a:solidFill xmlns:a="http://schemas.openxmlformats.org/drawingml/2006/main">
-            <a:srgbClr val="F5F7FF">
-              <a:alpha val="55000"/>
-            </a:srgbClr>
-          </a:solidFill>
-          <a:ln xmlns:a="http://schemas.openxmlformats.org/drawingml/2006/main" w="0">
-            <a:noFill/>
-            <a:prstDash val="solid"/>
-          </a:ln>
-        </p:spPr>
-      </p:sp>
-      <p:sp>
-        <p:nvSpPr>
-          <p:cNvPr id="11" name="">
-            <a:extLst xmlns:a="http://schemas.openxmlformats.org/drawingml/2006/main">
-              <a:ext uri="{FF2B5EF4-FFF2-40B4-BE49-F238E27FC236}">
-                <a16:creationId xmlns:a16="http://schemas.microsoft.com/office/drawing/2014/main" id="{E723F8A3-D93E-49F7-9D1D-80E460569EA3}"/>
-              </a:ext>
-            </a:extLst>
-          </p:cNvPr>
-          <p:cNvSpPr>
-            <a:spLocks xmlns:a="http://schemas.openxmlformats.org/drawingml/2006/main" noGrp="1"/>
-          </p:cNvSpPr>
-          <p:nvPr/>
-        </p:nvSpPr>
-        <p:spPr>
-          <a:xfrm xmlns:a="http://schemas.openxmlformats.org/drawingml/2006/main">
-            <a:off x="8915400" y="3638550"/>
-            <a:ext cx="19050" cy="371475"/>
-          </a:xfrm>
-          <a:prstGeom xmlns:a="http://schemas.openxmlformats.org/drawingml/2006/main" prst="rect">
-            <a:avLst/>
-          </a:prstGeom>
-          <a:solidFill xmlns:a="http://schemas.openxmlformats.org/drawingml/2006/main">
-            <a:srgbClr val="F5F7FF">
-              <a:alpha val="55000"/>
-            </a:srgbClr>
-          </a:solidFill>
-          <a:ln xmlns:a="http://schemas.openxmlformats.org/drawingml/2006/main" w="0">
-            <a:noFill/>
-            <a:prstDash val="solid"/>
-          </a:ln>
-        </p:spPr>
-      </p:sp>
-      <p:sp>
-        <p:nvSpPr>
-          <p:cNvPr id="12" name="">
-            <a:extLst xmlns:a="http://schemas.openxmlformats.org/drawingml/2006/main">
-              <a:ext uri="{FF2B5EF4-FFF2-40B4-BE49-F238E27FC236}">
-                <a16:creationId xmlns:a16="http://schemas.microsoft.com/office/drawing/2014/main" id="{EC2A93EE-181F-4480-814C-B8239BE42594}"/>
-              </a:ext>
-            </a:extLst>
-          </p:cNvPr>
-          <p:cNvSpPr>
-            <a:spLocks xmlns:a="http://schemas.openxmlformats.org/drawingml/2006/main" noGrp="1"/>
-          </p:cNvSpPr>
-          <p:nvPr/>
-        </p:nvSpPr>
-        <p:spPr>
-          <a:xfrm xmlns:a="http://schemas.openxmlformats.org/drawingml/2006/main">
-            <a:off x="819150" y="4010025"/>
-            <a:ext cx="4772025" cy="1438275"/>
-          </a:xfrm>
-          <a:prstGeom xmlns:a="http://schemas.openxmlformats.org/drawingml/2006/main" prst="roundRect">
-            <a:avLst>
-              <a:gd name="adj" fmla="val 5298"/>
             </a:avLst>
           </a:prstGeom>
           <a:solidFill xmlns:a="http://schemas.openxmlformats.org/drawingml/2006/main">
@@ -3167,7 +2939,7 @@
           <a:ln xmlns:a="http://schemas.openxmlformats.org/drawingml/2006/main" w="10478">
             <a:solidFill>
               <a:srgbClr val="7CFFCB">
-                <a:alpha val="68000"/>
+                <a:alpha val="72000"/>
               </a:srgbClr>
             </a:solidFill>
             <a:prstDash val="solid"/>
@@ -3176,140 +2948,215 @@
       </p:sp>
       <p:sp>
         <p:nvSpPr>
-          <p:cNvPr id="13" name="">
-            <a:extLst xmlns:a="http://schemas.openxmlformats.org/drawingml/2006/main">
-              <a:ext uri="{FF2B5EF4-FFF2-40B4-BE49-F238E27FC236}">
-                <a16:creationId xmlns:a16="http://schemas.microsoft.com/office/drawing/2014/main" id="{FA6F0053-3592-4EDE-953D-9F55FDA7197D}"/>
-              </a:ext>
-            </a:extLst>
-          </p:cNvPr>
-          <p:cNvSpPr>
-            <a:spLocks xmlns:a="http://schemas.openxmlformats.org/drawingml/2006/main" noGrp="1"/>
-          </p:cNvSpPr>
-          <p:nvPr/>
-        </p:nvSpPr>
-        <p:spPr>
-          <a:xfrm xmlns:a="http://schemas.openxmlformats.org/drawingml/2006/main">
-            <a:off x="1076325" y="4257675"/>
-            <a:ext cx="4105275" cy="400050"/>
-          </a:xfrm>
-          <a:prstGeom xmlns:a="http://schemas.openxmlformats.org/drawingml/2006/main" prst="rect">
-            <a:avLst/>
-          </a:prstGeom>
-          <a:noFill xmlns:a="http://schemas.openxmlformats.org/drawingml/2006/main"/>
-          <a:ln xmlns:a="http://schemas.openxmlformats.org/drawingml/2006/main" w="0">
-            <a:noFill/>
-          </a:ln>
-        </p:spPr>
-        <p:txBody>
-          <a:bodyPr xmlns:a="http://schemas.openxmlformats.org/drawingml/2006/main">
-            <a:noAutofit/>
-          </a:bodyPr>
-          <a:lstStyle xmlns:a="http://schemas.openxmlformats.org/drawingml/2006/main"/>
-          <a:p xmlns:a="http://schemas.openxmlformats.org/drawingml/2006/main">
-            <a:pPr>
-              <a:defRPr sz="2175" b="1">
-                <a:solidFill>
-                  <a:srgbClr val="7CFFCB"/>
-                </a:solidFill>
-                <a:latin typeface="Microsoft YaHei"/>
-                <a:ea typeface="Microsoft YaHei"/>
-                <a:cs typeface="Microsoft YaHei"/>
-              </a:defRPr>
-            </a:pPr>
-            <a:r>
-              <a:rPr sz="2175" b="1">
-                <a:solidFill>
-                  <a:srgbClr val="7CFFCB"/>
-                </a:solidFill>
-                <a:latin typeface="Microsoft YaHei"/>
-                <a:ea typeface="Microsoft YaHei"/>
-                <a:cs typeface="Microsoft YaHei"/>
-              </a:rPr>
-              <a:t>成长追踪</a:t>
-            </a:r>
-          </a:p>
-        </p:txBody>
-      </p:sp>
-      <p:sp>
-        <p:nvSpPr>
-          <p:cNvPr id="14" name="">
-            <a:extLst xmlns:a="http://schemas.openxmlformats.org/drawingml/2006/main">
-              <a:ext uri="{FF2B5EF4-FFF2-40B4-BE49-F238E27FC236}">
-                <a16:creationId xmlns:a16="http://schemas.microsoft.com/office/drawing/2014/main" id="{C2FAA3A4-F5E2-467C-A5ED-85C418B06377}"/>
-              </a:ext>
-            </a:extLst>
-          </p:cNvPr>
-          <p:cNvSpPr>
-            <a:spLocks xmlns:a="http://schemas.openxmlformats.org/drawingml/2006/main" noGrp="1"/>
-          </p:cNvSpPr>
-          <p:nvPr/>
-        </p:nvSpPr>
-        <p:spPr>
-          <a:xfrm xmlns:a="http://schemas.openxmlformats.org/drawingml/2006/main">
-            <a:off x="1076325" y="4819650"/>
-            <a:ext cx="4105275" cy="400050"/>
-          </a:xfrm>
-          <a:prstGeom xmlns:a="http://schemas.openxmlformats.org/drawingml/2006/main" prst="rect">
-            <a:avLst/>
-          </a:prstGeom>
-          <a:noFill xmlns:a="http://schemas.openxmlformats.org/drawingml/2006/main"/>
-          <a:ln xmlns:a="http://schemas.openxmlformats.org/drawingml/2006/main" w="0">
-            <a:noFill/>
-          </a:ln>
-        </p:spPr>
-        <p:txBody>
-          <a:bodyPr xmlns:a="http://schemas.openxmlformats.org/drawingml/2006/main">
-            <a:noAutofit/>
-          </a:bodyPr>
-          <a:lstStyle xmlns:a="http://schemas.openxmlformats.org/drawingml/2006/main"/>
-          <a:p xmlns:a="http://schemas.openxmlformats.org/drawingml/2006/main">
-            <a:pPr>
-              <a:defRPr sz="1725" b="0">
-                <a:solidFill>
-                  <a:srgbClr val="F5F7FF"/>
-                </a:solidFill>
-                <a:latin typeface="Microsoft YaHei"/>
-                <a:ea typeface="Microsoft YaHei"/>
-                <a:cs typeface="Microsoft YaHei"/>
-              </a:defRPr>
-            </a:pPr>
-            <a:r>
-              <a:rPr sz="1725" b="0">
-                <a:solidFill>
-                  <a:srgbClr val="F5F7FF"/>
-                </a:solidFill>
-                <a:latin typeface="Microsoft YaHei"/>
-                <a:ea typeface="Microsoft YaHei"/>
-                <a:cs typeface="Microsoft YaHei"/>
-              </a:rPr>
-              <a:t>同人同岗历史与可比趋势</a:t>
-            </a:r>
-          </a:p>
-        </p:txBody>
-      </p:sp>
-      <p:sp>
-        <p:nvSpPr>
-          <p:cNvPr id="15" name="">
-            <a:extLst xmlns:a="http://schemas.openxmlformats.org/drawingml/2006/main">
-              <a:ext uri="{FF2B5EF4-FFF2-40B4-BE49-F238E27FC236}">
-                <a16:creationId xmlns:a16="http://schemas.microsoft.com/office/drawing/2014/main" id="{867A3498-ABA2-48DD-919F-50F85F5771FB}"/>
-              </a:ext>
-            </a:extLst>
-          </p:cNvPr>
-          <p:cNvSpPr>
-            <a:spLocks xmlns:a="http://schemas.openxmlformats.org/drawingml/2006/main" noGrp="1"/>
-          </p:cNvSpPr>
-          <p:nvPr/>
-        </p:nvSpPr>
-        <p:spPr>
-          <a:xfrm xmlns:a="http://schemas.openxmlformats.org/drawingml/2006/main">
-            <a:off x="6591300" y="4010025"/>
-            <a:ext cx="4772025" cy="1438275"/>
+          <p:cNvPr id="7" name="">
+            <a:extLst xmlns:a="http://schemas.openxmlformats.org/drawingml/2006/main">
+              <a:ext uri="{FF2B5EF4-FFF2-40B4-BE49-F238E27FC236}">
+                <a16:creationId xmlns:a16="http://schemas.microsoft.com/office/drawing/2014/main" id="{45B875AE-45AF-436D-8691-F46DD6B86A00}"/>
+              </a:ext>
+            </a:extLst>
+          </p:cNvPr>
+          <p:cNvSpPr>
+            <a:spLocks xmlns:a="http://schemas.openxmlformats.org/drawingml/2006/main" noGrp="1"/>
+          </p:cNvSpPr>
+          <p:nvPr/>
+        </p:nvSpPr>
+        <p:spPr>
+          <a:xfrm xmlns:a="http://schemas.openxmlformats.org/drawingml/2006/main">
+            <a:off x="5191125" y="2047875"/>
+            <a:ext cx="1809750" cy="714375"/>
+          </a:xfrm>
+          <a:prstGeom xmlns:a="http://schemas.openxmlformats.org/drawingml/2006/main" prst="rect">
+            <a:avLst/>
+          </a:prstGeom>
+          <a:noFill xmlns:a="http://schemas.openxmlformats.org/drawingml/2006/main"/>
+          <a:ln xmlns:a="http://schemas.openxmlformats.org/drawingml/2006/main" w="0">
+            <a:noFill/>
+          </a:ln>
+        </p:spPr>
+        <p:txBody>
+          <a:bodyPr xmlns:a="http://schemas.openxmlformats.org/drawingml/2006/main" anchor="ctr">
+            <a:noAutofit/>
+          </a:bodyPr>
+          <a:lstStyle xmlns:a="http://schemas.openxmlformats.org/drawingml/2006/main"/>
+          <a:p xmlns:a="http://schemas.openxmlformats.org/drawingml/2006/main">
+            <a:pPr algn="ctr">
+              <a:defRPr sz="2025" b="1">
+                <a:solidFill>
+                  <a:srgbClr val="F5F7FF"/>
+                </a:solidFill>
+                <a:latin typeface="Microsoft YaHei"/>
+                <a:ea typeface="Microsoft YaHei"/>
+                <a:cs typeface="Microsoft YaHei"/>
+              </a:defRPr>
+            </a:pPr>
+            <a:r>
+              <a:rPr sz="2025" b="1">
+                <a:solidFill>
+                  <a:srgbClr val="F5F7FF"/>
+                </a:solidFill>
+                <a:latin typeface="Microsoft YaHei"/>
+                <a:ea typeface="Microsoft YaHei"/>
+                <a:cs typeface="Microsoft YaHei"/>
+              </a:rPr>
+              <a:t>训练报告</a:t>
+            </a:r>
+          </a:p>
+        </p:txBody>
+      </p:sp>
+      <p:sp>
+        <p:nvSpPr>
+          <p:cNvPr id="8" name="">
+            <a:extLst xmlns:a="http://schemas.openxmlformats.org/drawingml/2006/main">
+              <a:ext uri="{FF2B5EF4-FFF2-40B4-BE49-F238E27FC236}">
+                <a16:creationId xmlns:a16="http://schemas.microsoft.com/office/drawing/2014/main" id="{C9EE20D6-2746-4188-B723-17F1C85CA571}"/>
+              </a:ext>
+            </a:extLst>
+          </p:cNvPr>
+          <p:cNvSpPr>
+            <a:spLocks xmlns:a="http://schemas.openxmlformats.org/drawingml/2006/main" noGrp="1"/>
+          </p:cNvSpPr>
+          <p:nvPr/>
+        </p:nvSpPr>
+        <p:spPr>
+          <a:xfrm xmlns:a="http://schemas.openxmlformats.org/drawingml/2006/main">
+            <a:off x="6076950" y="2857500"/>
+            <a:ext cx="19050" cy="381000"/>
+          </a:xfrm>
+          <a:prstGeom xmlns:a="http://schemas.openxmlformats.org/drawingml/2006/main" prst="rect">
+            <a:avLst/>
+          </a:prstGeom>
+          <a:solidFill xmlns:a="http://schemas.openxmlformats.org/drawingml/2006/main">
+            <a:srgbClr val="F5F7FF">
+              <a:alpha val="55000"/>
+            </a:srgbClr>
+          </a:solidFill>
+          <a:ln xmlns:a="http://schemas.openxmlformats.org/drawingml/2006/main" w="0">
+            <a:noFill/>
+            <a:prstDash val="solid"/>
+          </a:ln>
+        </p:spPr>
+      </p:sp>
+      <p:sp>
+        <p:nvSpPr>
+          <p:cNvPr id="9" name="">
+            <a:extLst xmlns:a="http://schemas.openxmlformats.org/drawingml/2006/main">
+              <a:ext uri="{FF2B5EF4-FFF2-40B4-BE49-F238E27FC236}">
+                <a16:creationId xmlns:a16="http://schemas.microsoft.com/office/drawing/2014/main" id="{89554BB2-18FC-40FD-A227-1978C69D354E}"/>
+              </a:ext>
+            </a:extLst>
+          </p:cNvPr>
+          <p:cNvSpPr>
+            <a:spLocks xmlns:a="http://schemas.openxmlformats.org/drawingml/2006/main" noGrp="1"/>
+          </p:cNvSpPr>
+          <p:nvPr/>
+        </p:nvSpPr>
+        <p:spPr>
+          <a:xfrm xmlns:a="http://schemas.openxmlformats.org/drawingml/2006/main">
+            <a:off x="3190875" y="3219450"/>
+            <a:ext cx="5781675" cy="19050"/>
+          </a:xfrm>
+          <a:prstGeom xmlns:a="http://schemas.openxmlformats.org/drawingml/2006/main" prst="rect">
+            <a:avLst/>
+          </a:prstGeom>
+          <a:solidFill xmlns:a="http://schemas.openxmlformats.org/drawingml/2006/main">
+            <a:srgbClr val="F5F7FF">
+              <a:alpha val="55000"/>
+            </a:srgbClr>
+          </a:solidFill>
+          <a:ln xmlns:a="http://schemas.openxmlformats.org/drawingml/2006/main" w="0">
+            <a:noFill/>
+            <a:prstDash val="solid"/>
+          </a:ln>
+        </p:spPr>
+      </p:sp>
+      <p:sp>
+        <p:nvSpPr>
+          <p:cNvPr id="10" name="">
+            <a:extLst xmlns:a="http://schemas.openxmlformats.org/drawingml/2006/main">
+              <a:ext uri="{FF2B5EF4-FFF2-40B4-BE49-F238E27FC236}">
+                <a16:creationId xmlns:a16="http://schemas.microsoft.com/office/drawing/2014/main" id="{BBBC3851-7CB2-4A9A-A77D-B17A7CF1C2CD}"/>
+              </a:ext>
+            </a:extLst>
+          </p:cNvPr>
+          <p:cNvSpPr>
+            <a:spLocks xmlns:a="http://schemas.openxmlformats.org/drawingml/2006/main" noGrp="1"/>
+          </p:cNvSpPr>
+          <p:nvPr/>
+        </p:nvSpPr>
+        <p:spPr>
+          <a:xfrm xmlns:a="http://schemas.openxmlformats.org/drawingml/2006/main">
+            <a:off x="3190875" y="3219450"/>
+            <a:ext cx="19050" cy="285750"/>
+          </a:xfrm>
+          <a:prstGeom xmlns:a="http://schemas.openxmlformats.org/drawingml/2006/main" prst="rect">
+            <a:avLst/>
+          </a:prstGeom>
+          <a:solidFill xmlns:a="http://schemas.openxmlformats.org/drawingml/2006/main">
+            <a:srgbClr val="F5F7FF">
+              <a:alpha val="55000"/>
+            </a:srgbClr>
+          </a:solidFill>
+          <a:ln xmlns:a="http://schemas.openxmlformats.org/drawingml/2006/main" w="0">
+            <a:noFill/>
+            <a:prstDash val="solid"/>
+          </a:ln>
+        </p:spPr>
+      </p:sp>
+      <p:sp>
+        <p:nvSpPr>
+          <p:cNvPr id="11" name="">
+            <a:extLst xmlns:a="http://schemas.openxmlformats.org/drawingml/2006/main">
+              <a:ext uri="{FF2B5EF4-FFF2-40B4-BE49-F238E27FC236}">
+                <a16:creationId xmlns:a16="http://schemas.microsoft.com/office/drawing/2014/main" id="{EB15AF99-789A-41A8-81FF-E4DDFF41C7E7}"/>
+              </a:ext>
+            </a:extLst>
+          </p:cNvPr>
+          <p:cNvSpPr>
+            <a:spLocks xmlns:a="http://schemas.openxmlformats.org/drawingml/2006/main" noGrp="1"/>
+          </p:cNvSpPr>
+          <p:nvPr/>
+        </p:nvSpPr>
+        <p:spPr>
+          <a:xfrm xmlns:a="http://schemas.openxmlformats.org/drawingml/2006/main">
+            <a:off x="8953500" y="3219450"/>
+            <a:ext cx="19050" cy="285750"/>
+          </a:xfrm>
+          <a:prstGeom xmlns:a="http://schemas.openxmlformats.org/drawingml/2006/main" prst="rect">
+            <a:avLst/>
+          </a:prstGeom>
+          <a:solidFill xmlns:a="http://schemas.openxmlformats.org/drawingml/2006/main">
+            <a:srgbClr val="F5F7FF">
+              <a:alpha val="55000"/>
+            </a:srgbClr>
+          </a:solidFill>
+          <a:ln xmlns:a="http://schemas.openxmlformats.org/drawingml/2006/main" w="0">
+            <a:noFill/>
+            <a:prstDash val="solid"/>
+          </a:ln>
+        </p:spPr>
+      </p:sp>
+      <p:sp>
+        <p:nvSpPr>
+          <p:cNvPr id="12" name="">
+            <a:extLst xmlns:a="http://schemas.openxmlformats.org/drawingml/2006/main">
+              <a:ext uri="{FF2B5EF4-FFF2-40B4-BE49-F238E27FC236}">
+                <a16:creationId xmlns:a16="http://schemas.microsoft.com/office/drawing/2014/main" id="{88EE66CF-A3C8-4145-A09D-A91F0BC1CFB3}"/>
+              </a:ext>
+            </a:extLst>
+          </p:cNvPr>
+          <p:cNvSpPr>
+            <a:spLocks xmlns:a="http://schemas.openxmlformats.org/drawingml/2006/main" noGrp="1"/>
+          </p:cNvSpPr>
+          <p:nvPr/>
+        </p:nvSpPr>
+        <p:spPr>
+          <a:xfrm xmlns:a="http://schemas.openxmlformats.org/drawingml/2006/main">
+            <a:off x="819150" y="3476625"/>
+            <a:ext cx="4772025" cy="2152650"/>
           </a:xfrm>
           <a:prstGeom xmlns:a="http://schemas.openxmlformats.org/drawingml/2006/main" prst="roundRect">
             <a:avLst>
-              <a:gd name="adj" fmla="val 5298"/>
+              <a:gd name="adj" fmla="val 3540"/>
             </a:avLst>
           </a:prstGeom>
           <a:solidFill xmlns:a="http://schemas.openxmlformats.org/drawingml/2006/main">
@@ -3319,8 +3166,8 @@
           </a:solidFill>
           <a:ln xmlns:a="http://schemas.openxmlformats.org/drawingml/2006/main" w="10478">
             <a:solidFill>
-              <a:srgbClr val="6A8DFF">
-                <a:alpha val="68000"/>
+              <a:srgbClr val="F5F7FF">
+                <a:alpha val="20000"/>
               </a:srgbClr>
             </a:solidFill>
             <a:prstDash val="solid"/>
@@ -3329,22 +3176,193 @@
       </p:sp>
       <p:sp>
         <p:nvSpPr>
+          <p:cNvPr id="13" name="">
+            <a:extLst xmlns:a="http://schemas.openxmlformats.org/drawingml/2006/main">
+              <a:ext uri="{FF2B5EF4-FFF2-40B4-BE49-F238E27FC236}">
+                <a16:creationId xmlns:a16="http://schemas.microsoft.com/office/drawing/2014/main" id="{2E7CDBF3-F73D-403F-A1BF-49F6B3420AC0}"/>
+              </a:ext>
+            </a:extLst>
+          </p:cNvPr>
+          <p:cNvSpPr>
+            <a:spLocks xmlns:a="http://schemas.openxmlformats.org/drawingml/2006/main" noGrp="1"/>
+          </p:cNvSpPr>
+          <p:nvPr/>
+        </p:nvSpPr>
+        <p:spPr>
+          <a:xfrm xmlns:a="http://schemas.openxmlformats.org/drawingml/2006/main">
+            <a:off x="1057275" y="3657600"/>
+            <a:ext cx="4286250" cy="438150"/>
+          </a:xfrm>
+          <a:prstGeom xmlns:a="http://schemas.openxmlformats.org/drawingml/2006/main" prst="rect">
+            <a:avLst/>
+          </a:prstGeom>
+          <a:noFill xmlns:a="http://schemas.openxmlformats.org/drawingml/2006/main"/>
+          <a:ln xmlns:a="http://schemas.openxmlformats.org/drawingml/2006/main" w="0">
+            <a:noFill/>
+          </a:ln>
+        </p:spPr>
+        <p:txBody>
+          <a:bodyPr xmlns:a="http://schemas.openxmlformats.org/drawingml/2006/main">
+            <a:noAutofit/>
+          </a:bodyPr>
+          <a:lstStyle xmlns:a="http://schemas.openxmlformats.org/drawingml/2006/main"/>
+          <a:p xmlns:a="http://schemas.openxmlformats.org/drawingml/2006/main">
+            <a:pPr>
+              <a:defRPr sz="2175" b="1">
+                <a:solidFill>
+                  <a:srgbClr val="7CFFCB"/>
+                </a:solidFill>
+                <a:latin typeface="Microsoft YaHei"/>
+                <a:ea typeface="Microsoft YaHei"/>
+                <a:cs typeface="Microsoft YaHei"/>
+              </a:defRPr>
+            </a:pPr>
+            <a:r>
+              <a:rPr sz="2175" b="1">
+                <a:solidFill>
+                  <a:srgbClr val="7CFFCB"/>
+                </a:solidFill>
+                <a:latin typeface="Microsoft YaHei"/>
+                <a:ea typeface="Microsoft YaHei"/>
+                <a:cs typeface="Microsoft YaHei"/>
+              </a:rPr>
+              <a:t>学生：持续改进</a:t>
+            </a:r>
+          </a:p>
+        </p:txBody>
+      </p:sp>
+      <p:sp>
+        <p:nvSpPr>
+          <p:cNvPr id="14" name="">
+            <a:extLst xmlns:a="http://schemas.openxmlformats.org/drawingml/2006/main">
+              <a:ext uri="{FF2B5EF4-FFF2-40B4-BE49-F238E27FC236}">
+                <a16:creationId xmlns:a16="http://schemas.microsoft.com/office/drawing/2014/main" id="{EA5D9489-D6E4-4506-9FC4-8EDF5C112D8F}"/>
+              </a:ext>
+            </a:extLst>
+          </p:cNvPr>
+          <p:cNvSpPr>
+            <a:spLocks xmlns:a="http://schemas.openxmlformats.org/drawingml/2006/main" noGrp="1"/>
+          </p:cNvSpPr>
+          <p:nvPr/>
+        </p:nvSpPr>
+        <p:spPr>
+          <a:xfrm xmlns:a="http://schemas.openxmlformats.org/drawingml/2006/main">
+            <a:off x="1057275" y="4257675"/>
+            <a:ext cx="4295775" cy="333375"/>
+          </a:xfrm>
+          <a:prstGeom xmlns:a="http://schemas.openxmlformats.org/drawingml/2006/main" prst="rect">
+            <a:avLst/>
+          </a:prstGeom>
+          <a:noFill xmlns:a="http://schemas.openxmlformats.org/drawingml/2006/main"/>
+          <a:ln xmlns:a="http://schemas.openxmlformats.org/drawingml/2006/main" w="0">
+            <a:noFill/>
+          </a:ln>
+        </p:spPr>
+        <p:txBody>
+          <a:bodyPr xmlns:a="http://schemas.openxmlformats.org/drawingml/2006/main">
+            <a:noAutofit/>
+          </a:bodyPr>
+          <a:lstStyle xmlns:a="http://schemas.openxmlformats.org/drawingml/2006/main"/>
+          <a:p xmlns:a="http://schemas.openxmlformats.org/drawingml/2006/main">
+            <a:pPr>
+              <a:defRPr sz="1575" b="0">
+                <a:solidFill>
+                  <a:srgbClr val="F5F7FF"/>
+                </a:solidFill>
+                <a:latin typeface="Microsoft YaHei"/>
+                <a:ea typeface="Microsoft YaHei"/>
+                <a:cs typeface="Microsoft YaHei"/>
+              </a:defRPr>
+            </a:pPr>
+            <a:r>
+              <a:rPr sz="1575" b="0">
+                <a:solidFill>
+                  <a:srgbClr val="F5F7FF"/>
+                </a:solidFill>
+                <a:latin typeface="Microsoft YaHei"/>
+                <a:ea typeface="Microsoft YaHei"/>
+                <a:cs typeface="Microsoft YaHei"/>
+              </a:rPr>
+              <a:t>按学生、岗位保存训练历史</a:t>
+            </a:r>
+          </a:p>
+        </p:txBody>
+      </p:sp>
+      <p:sp>
+        <p:nvSpPr>
+          <p:cNvPr id="15" name="">
+            <a:extLst xmlns:a="http://schemas.openxmlformats.org/drawingml/2006/main">
+              <a:ext uri="{FF2B5EF4-FFF2-40B4-BE49-F238E27FC236}">
+                <a16:creationId xmlns:a16="http://schemas.microsoft.com/office/drawing/2014/main" id="{E696C599-5069-4D85-9481-45A78F45AF3A}"/>
+              </a:ext>
+            </a:extLst>
+          </p:cNvPr>
+          <p:cNvSpPr>
+            <a:spLocks xmlns:a="http://schemas.openxmlformats.org/drawingml/2006/main" noGrp="1"/>
+          </p:cNvSpPr>
+          <p:nvPr/>
+        </p:nvSpPr>
+        <p:spPr>
+          <a:xfrm xmlns:a="http://schemas.openxmlformats.org/drawingml/2006/main">
+            <a:off x="1057275" y="4657725"/>
+            <a:ext cx="4295775" cy="333375"/>
+          </a:xfrm>
+          <a:prstGeom xmlns:a="http://schemas.openxmlformats.org/drawingml/2006/main" prst="rect">
+            <a:avLst/>
+          </a:prstGeom>
+          <a:noFill xmlns:a="http://schemas.openxmlformats.org/drawingml/2006/main"/>
+          <a:ln xmlns:a="http://schemas.openxmlformats.org/drawingml/2006/main" w="0">
+            <a:noFill/>
+          </a:ln>
+        </p:spPr>
+        <p:txBody>
+          <a:bodyPr xmlns:a="http://schemas.openxmlformats.org/drawingml/2006/main">
+            <a:noAutofit/>
+          </a:bodyPr>
+          <a:lstStyle xmlns:a="http://schemas.openxmlformats.org/drawingml/2006/main"/>
+          <a:p xmlns:a="http://schemas.openxmlformats.org/drawingml/2006/main">
+            <a:pPr>
+              <a:defRPr sz="1575" b="0">
+                <a:solidFill>
+                  <a:srgbClr val="F5F7FF"/>
+                </a:solidFill>
+                <a:latin typeface="Microsoft YaHei"/>
+                <a:ea typeface="Microsoft YaHei"/>
+                <a:cs typeface="Microsoft YaHei"/>
+              </a:defRPr>
+            </a:pPr>
+            <a:r>
+              <a:rPr sz="1575" b="0">
+                <a:solidFill>
+                  <a:srgbClr val="F5F7FF"/>
+                </a:solidFill>
+                <a:latin typeface="Microsoft YaHei"/>
+                <a:ea typeface="Microsoft YaHei"/>
+                <a:cs typeface="Microsoft YaHei"/>
+              </a:rPr>
+              <a:t>回看原报告、回答依据与改进建议</a:t>
+            </a:r>
+          </a:p>
+        </p:txBody>
+      </p:sp>
+      <p:sp>
+        <p:nvSpPr>
           <p:cNvPr id="16" name="">
             <a:extLst xmlns:a="http://schemas.openxmlformats.org/drawingml/2006/main">
               <a:ext uri="{FF2B5EF4-FFF2-40B4-BE49-F238E27FC236}">
-                <a16:creationId xmlns:a16="http://schemas.microsoft.com/office/drawing/2014/main" id="{118622D8-4928-44BF-913E-CD4E26B4C024}"/>
-              </a:ext>
-            </a:extLst>
-          </p:cNvPr>
-          <p:cNvSpPr>
-            <a:spLocks xmlns:a="http://schemas.openxmlformats.org/drawingml/2006/main" noGrp="1"/>
-          </p:cNvSpPr>
-          <p:nvPr/>
-        </p:nvSpPr>
-        <p:spPr>
-          <a:xfrm xmlns:a="http://schemas.openxmlformats.org/drawingml/2006/main">
-            <a:off x="6848475" y="4257675"/>
-            <a:ext cx="4105275" cy="400050"/>
+                <a16:creationId xmlns:a16="http://schemas.microsoft.com/office/drawing/2014/main" id="{E57C16F3-028A-4CA2-A0B0-979F99878948}"/>
+              </a:ext>
+            </a:extLst>
+          </p:cNvPr>
+          <p:cNvSpPr>
+            <a:spLocks xmlns:a="http://schemas.openxmlformats.org/drawingml/2006/main" noGrp="1"/>
+          </p:cNvSpPr>
+          <p:nvPr/>
+        </p:nvSpPr>
+        <p:spPr>
+          <a:xfrm xmlns:a="http://schemas.openxmlformats.org/drawingml/2006/main">
+            <a:off x="1057275" y="5057775"/>
+            <a:ext cx="4295775" cy="333375"/>
           </a:xfrm>
           <a:prstGeom xmlns:a="http://schemas.openxmlformats.org/drawingml/2006/main" prst="rect">
             <a:avLst/>
@@ -3361,9 +3379,105 @@
           <a:lstStyle xmlns:a="http://schemas.openxmlformats.org/drawingml/2006/main"/>
           <a:p xmlns:a="http://schemas.openxmlformats.org/drawingml/2006/main">
             <a:pPr>
+              <a:defRPr sz="1575" b="0">
+                <a:solidFill>
+                  <a:srgbClr val="F5F7FF"/>
+                </a:solidFill>
+                <a:latin typeface="Microsoft YaHei"/>
+                <a:ea typeface="Microsoft YaHei"/>
+                <a:cs typeface="Microsoft YaHei"/>
+              </a:defRPr>
+            </a:pPr>
+            <a:r>
+              <a:rPr sz="1575" b="0">
+                <a:solidFill>
+                  <a:srgbClr val="F5F7FF"/>
+                </a:solidFill>
+                <a:latin typeface="Microsoft YaHei"/>
+                <a:ea typeface="Microsoft YaHei"/>
+                <a:cs typeface="Microsoft YaHei"/>
+              </a:rPr>
+              <a:t>比较可比训练的变化，再次练习</a:t>
+            </a:r>
+          </a:p>
+        </p:txBody>
+      </p:sp>
+      <p:sp>
+        <p:nvSpPr>
+          <p:cNvPr id="17" name="">
+            <a:extLst xmlns:a="http://schemas.openxmlformats.org/drawingml/2006/main">
+              <a:ext uri="{FF2B5EF4-FFF2-40B4-BE49-F238E27FC236}">
+                <a16:creationId xmlns:a16="http://schemas.microsoft.com/office/drawing/2014/main" id="{B95FDA81-8CDD-48A3-9AF1-F04B1C3B16F9}"/>
+              </a:ext>
+            </a:extLst>
+          </p:cNvPr>
+          <p:cNvSpPr>
+            <a:spLocks xmlns:a="http://schemas.openxmlformats.org/drawingml/2006/main" noGrp="1"/>
+          </p:cNvSpPr>
+          <p:nvPr/>
+        </p:nvSpPr>
+        <p:spPr>
+          <a:xfrm xmlns:a="http://schemas.openxmlformats.org/drawingml/2006/main">
+            <a:off x="6591300" y="3476625"/>
+            <a:ext cx="4772025" cy="2152650"/>
+          </a:xfrm>
+          <a:prstGeom xmlns:a="http://schemas.openxmlformats.org/drawingml/2006/main" prst="roundRect">
+            <a:avLst>
+              <a:gd name="adj" fmla="val 3540"/>
+            </a:avLst>
+          </a:prstGeom>
+          <a:solidFill xmlns:a="http://schemas.openxmlformats.org/drawingml/2006/main">
+            <a:srgbClr val="0B1020">
+              <a:alpha val="72000"/>
+            </a:srgbClr>
+          </a:solidFill>
+          <a:ln xmlns:a="http://schemas.openxmlformats.org/drawingml/2006/main" w="10478">
+            <a:solidFill>
+              <a:srgbClr val="F5F7FF">
+                <a:alpha val="20000"/>
+              </a:srgbClr>
+            </a:solidFill>
+            <a:prstDash val="solid"/>
+          </a:ln>
+        </p:spPr>
+      </p:sp>
+      <p:sp>
+        <p:nvSpPr>
+          <p:cNvPr id="18" name="">
+            <a:extLst xmlns:a="http://schemas.openxmlformats.org/drawingml/2006/main">
+              <a:ext uri="{FF2B5EF4-FFF2-40B4-BE49-F238E27FC236}">
+                <a16:creationId xmlns:a16="http://schemas.microsoft.com/office/drawing/2014/main" id="{9C920518-4567-4C96-A21E-40021BA432B1}"/>
+              </a:ext>
+            </a:extLst>
+          </p:cNvPr>
+          <p:cNvSpPr>
+            <a:spLocks xmlns:a="http://schemas.openxmlformats.org/drawingml/2006/main" noGrp="1"/>
+          </p:cNvSpPr>
+          <p:nvPr/>
+        </p:nvSpPr>
+        <p:spPr>
+          <a:xfrm xmlns:a="http://schemas.openxmlformats.org/drawingml/2006/main">
+            <a:off x="6829425" y="3657600"/>
+            <a:ext cx="4286250" cy="438150"/>
+          </a:xfrm>
+          <a:prstGeom xmlns:a="http://schemas.openxmlformats.org/drawingml/2006/main" prst="rect">
+            <a:avLst/>
+          </a:prstGeom>
+          <a:noFill xmlns:a="http://schemas.openxmlformats.org/drawingml/2006/main"/>
+          <a:ln xmlns:a="http://schemas.openxmlformats.org/drawingml/2006/main" w="0">
+            <a:noFill/>
+          </a:ln>
+        </p:spPr>
+        <p:txBody>
+          <a:bodyPr xmlns:a="http://schemas.openxmlformats.org/drawingml/2006/main">
+            <a:noAutofit/>
+          </a:bodyPr>
+          <a:lstStyle xmlns:a="http://schemas.openxmlformats.org/drawingml/2006/main"/>
+          <a:p xmlns:a="http://schemas.openxmlformats.org/drawingml/2006/main">
+            <a:pPr>
               <a:defRPr sz="2175" b="1">
                 <a:solidFill>
-                  <a:srgbClr val="6A8DFF"/>
+                  <a:srgbClr val="7CFFCB"/>
                 </a:solidFill>
                 <a:latin typeface="Microsoft YaHei"/>
                 <a:ea typeface="Microsoft YaHei"/>
@@ -3373,35 +3487,35 @@
             <a:r>
               <a:rPr sz="2175" b="1">
                 <a:solidFill>
-                  <a:srgbClr val="6A8DFF"/>
-                </a:solidFill>
-                <a:latin typeface="Microsoft YaHei"/>
-                <a:ea typeface="Microsoft YaHei"/>
-                <a:cs typeface="Microsoft YaHei"/>
-              </a:rPr>
-              <a:t>企业初筛</a:t>
-            </a:r>
-          </a:p>
-        </p:txBody>
-      </p:sp>
-      <p:sp>
-        <p:nvSpPr>
-          <p:cNvPr id="17" name="">
-            <a:extLst xmlns:a="http://schemas.openxmlformats.org/drawingml/2006/main">
-              <a:ext uri="{FF2B5EF4-FFF2-40B4-BE49-F238E27FC236}">
-                <a16:creationId xmlns:a16="http://schemas.microsoft.com/office/drawing/2014/main" id="{2336ABBA-8E61-464A-8F84-98D6F640461E}"/>
-              </a:ext>
-            </a:extLst>
-          </p:cNvPr>
-          <p:cNvSpPr>
-            <a:spLocks xmlns:a="http://schemas.openxmlformats.org/drawingml/2006/main" noGrp="1"/>
-          </p:cNvSpPr>
-          <p:nvPr/>
-        </p:nvSpPr>
-        <p:spPr>
-          <a:xfrm xmlns:a="http://schemas.openxmlformats.org/drawingml/2006/main">
-            <a:off x="6848475" y="4819650"/>
-            <a:ext cx="4105275" cy="400050"/>
+                  <a:srgbClr val="7CFFCB"/>
+                </a:solidFill>
+                <a:latin typeface="Microsoft YaHei"/>
+                <a:ea typeface="Microsoft YaHei"/>
+                <a:cs typeface="Microsoft YaHei"/>
+              </a:rPr>
+              <a:t>企业：辅助初筛</a:t>
+            </a:r>
+          </a:p>
+        </p:txBody>
+      </p:sp>
+      <p:sp>
+        <p:nvSpPr>
+          <p:cNvPr id="19" name="">
+            <a:extLst xmlns:a="http://schemas.openxmlformats.org/drawingml/2006/main">
+              <a:ext uri="{FF2B5EF4-FFF2-40B4-BE49-F238E27FC236}">
+                <a16:creationId xmlns:a16="http://schemas.microsoft.com/office/drawing/2014/main" id="{F492A10F-18B8-4473-8CF3-9BA8972BCD4C}"/>
+              </a:ext>
+            </a:extLst>
+          </p:cNvPr>
+          <p:cNvSpPr>
+            <a:spLocks xmlns:a="http://schemas.openxmlformats.org/drawingml/2006/main" noGrp="1"/>
+          </p:cNvSpPr>
+          <p:nvPr/>
+        </p:nvSpPr>
+        <p:spPr>
+          <a:xfrm xmlns:a="http://schemas.openxmlformats.org/drawingml/2006/main">
+            <a:off x="6829425" y="4257675"/>
+            <a:ext cx="4295775" cy="333375"/>
           </a:xfrm>
           <a:prstGeom xmlns:a="http://schemas.openxmlformats.org/drawingml/2006/main" prst="rect">
             <a:avLst/>
@@ -3418,25 +3532,196 @@
           <a:lstStyle xmlns:a="http://schemas.openxmlformats.org/drawingml/2006/main"/>
           <a:p xmlns:a="http://schemas.openxmlformats.org/drawingml/2006/main">
             <a:pPr>
-              <a:defRPr sz="1725" b="0">
-                <a:solidFill>
-                  <a:srgbClr val="F5F7FF"/>
-                </a:solidFill>
-                <a:latin typeface="Microsoft YaHei"/>
-                <a:ea typeface="Microsoft YaHei"/>
-                <a:cs typeface="Microsoft YaHei"/>
-              </a:defRPr>
-            </a:pPr>
-            <a:r>
-              <a:rPr sz="1725" b="0">
-                <a:solidFill>
-                  <a:srgbClr val="F5F7FF"/>
-                </a:solidFill>
-                <a:latin typeface="Microsoft YaHei"/>
-                <a:ea typeface="Microsoft YaHei"/>
-                <a:cs typeface="Microsoft YaHei"/>
-              </a:rPr>
-              <a:t>候选记录可追溯 session/report</a:t>
+              <a:defRPr sz="1575" b="0">
+                <a:solidFill>
+                  <a:srgbClr val="F5F7FF"/>
+                </a:solidFill>
+                <a:latin typeface="Microsoft YaHei"/>
+                <a:ea typeface="Microsoft YaHei"/>
+                <a:cs typeface="Microsoft YaHei"/>
+              </a:defRPr>
+            </a:pPr>
+            <a:r>
+              <a:rPr sz="1575" b="0">
+                <a:solidFill>
+                  <a:srgbClr val="F5F7FF"/>
+                </a:solidFill>
+                <a:latin typeface="Microsoft YaHei"/>
+                <a:ea typeface="Microsoft YaHei"/>
+                <a:cs typeface="Microsoft YaHei"/>
+              </a:rPr>
+              <a:t>按岗位查看候选人的训练表现</a:t>
+            </a:r>
+          </a:p>
+        </p:txBody>
+      </p:sp>
+      <p:sp>
+        <p:nvSpPr>
+          <p:cNvPr id="20" name="">
+            <a:extLst xmlns:a="http://schemas.openxmlformats.org/drawingml/2006/main">
+              <a:ext uri="{FF2B5EF4-FFF2-40B4-BE49-F238E27FC236}">
+                <a16:creationId xmlns:a16="http://schemas.microsoft.com/office/drawing/2014/main" id="{333965FE-9494-4578-8220-5F237EF5020D}"/>
+              </a:ext>
+            </a:extLst>
+          </p:cNvPr>
+          <p:cNvSpPr>
+            <a:spLocks xmlns:a="http://schemas.openxmlformats.org/drawingml/2006/main" noGrp="1"/>
+          </p:cNvSpPr>
+          <p:nvPr/>
+        </p:nvSpPr>
+        <p:spPr>
+          <a:xfrm xmlns:a="http://schemas.openxmlformats.org/drawingml/2006/main">
+            <a:off x="6829425" y="4657725"/>
+            <a:ext cx="4295775" cy="333375"/>
+          </a:xfrm>
+          <a:prstGeom xmlns:a="http://schemas.openxmlformats.org/drawingml/2006/main" prst="rect">
+            <a:avLst/>
+          </a:prstGeom>
+          <a:noFill xmlns:a="http://schemas.openxmlformats.org/drawingml/2006/main"/>
+          <a:ln xmlns:a="http://schemas.openxmlformats.org/drawingml/2006/main" w="0">
+            <a:noFill/>
+          </a:ln>
+        </p:spPr>
+        <p:txBody>
+          <a:bodyPr xmlns:a="http://schemas.openxmlformats.org/drawingml/2006/main">
+            <a:noAutofit/>
+          </a:bodyPr>
+          <a:lstStyle xmlns:a="http://schemas.openxmlformats.org/drawingml/2006/main"/>
+          <a:p xmlns:a="http://schemas.openxmlformats.org/drawingml/2006/main">
+            <a:pPr>
+              <a:defRPr sz="1575" b="0">
+                <a:solidFill>
+                  <a:srgbClr val="F5F7FF"/>
+                </a:solidFill>
+                <a:latin typeface="Microsoft YaHei"/>
+                <a:ea typeface="Microsoft YaHei"/>
+                <a:cs typeface="Microsoft YaHei"/>
+              </a:defRPr>
+            </a:pPr>
+            <a:r>
+              <a:rPr sz="1575" b="0">
+                <a:solidFill>
+                  <a:srgbClr val="F5F7FF"/>
+                </a:solidFill>
+                <a:latin typeface="Microsoft YaHei"/>
+                <a:ea typeface="Microsoft YaHei"/>
+                <a:cs typeface="Microsoft YaHei"/>
+              </a:rPr>
+              <a:t>同一学生更新记录，避免重复入列</a:t>
+            </a:r>
+          </a:p>
+        </p:txBody>
+      </p:sp>
+      <p:sp>
+        <p:nvSpPr>
+          <p:cNvPr id="21" name="">
+            <a:extLst xmlns:a="http://schemas.openxmlformats.org/drawingml/2006/main">
+              <a:ext uri="{FF2B5EF4-FFF2-40B4-BE49-F238E27FC236}">
+                <a16:creationId xmlns:a16="http://schemas.microsoft.com/office/drawing/2014/main" id="{BB8294BA-F94C-4C74-83DF-43741FD4D181}"/>
+              </a:ext>
+            </a:extLst>
+          </p:cNvPr>
+          <p:cNvSpPr>
+            <a:spLocks xmlns:a="http://schemas.openxmlformats.org/drawingml/2006/main" noGrp="1"/>
+          </p:cNvSpPr>
+          <p:nvPr/>
+        </p:nvSpPr>
+        <p:spPr>
+          <a:xfrm xmlns:a="http://schemas.openxmlformats.org/drawingml/2006/main">
+            <a:off x="6829425" y="5057775"/>
+            <a:ext cx="4295775" cy="333375"/>
+          </a:xfrm>
+          <a:prstGeom xmlns:a="http://schemas.openxmlformats.org/drawingml/2006/main" prst="rect">
+            <a:avLst/>
+          </a:prstGeom>
+          <a:noFill xmlns:a="http://schemas.openxmlformats.org/drawingml/2006/main"/>
+          <a:ln xmlns:a="http://schemas.openxmlformats.org/drawingml/2006/main" w="0">
+            <a:noFill/>
+          </a:ln>
+        </p:spPr>
+        <p:txBody>
+          <a:bodyPr xmlns:a="http://schemas.openxmlformats.org/drawingml/2006/main">
+            <a:noAutofit/>
+          </a:bodyPr>
+          <a:lstStyle xmlns:a="http://schemas.openxmlformats.org/drawingml/2006/main"/>
+          <a:p xmlns:a="http://schemas.openxmlformats.org/drawingml/2006/main">
+            <a:pPr>
+              <a:defRPr sz="1575" b="0">
+                <a:solidFill>
+                  <a:srgbClr val="F5F7FF"/>
+                </a:solidFill>
+                <a:latin typeface="Microsoft YaHei"/>
+                <a:ea typeface="Microsoft YaHei"/>
+                <a:cs typeface="Microsoft YaHei"/>
+              </a:defRPr>
+            </a:pPr>
+            <a:r>
+              <a:rPr sz="1575" b="0">
+                <a:solidFill>
+                  <a:srgbClr val="F5F7FF"/>
+                </a:solidFill>
+                <a:latin typeface="Microsoft YaHei"/>
+                <a:ea typeface="Microsoft YaHei"/>
+                <a:cs typeface="Microsoft YaHei"/>
+              </a:rPr>
+              <a:t>按适用规则排序，打开原报告核对</a:t>
+            </a:r>
+          </a:p>
+        </p:txBody>
+      </p:sp>
+      <p:sp>
+        <p:nvSpPr>
+          <p:cNvPr id="22" name="">
+            <a:extLst xmlns:a="http://schemas.openxmlformats.org/drawingml/2006/main">
+              <a:ext uri="{FF2B5EF4-FFF2-40B4-BE49-F238E27FC236}">
+                <a16:creationId xmlns:a16="http://schemas.microsoft.com/office/drawing/2014/main" id="{38B5FFBA-0636-444C-B72F-110EC7A3E083}"/>
+              </a:ext>
+            </a:extLst>
+          </p:cNvPr>
+          <p:cNvSpPr>
+            <a:spLocks xmlns:a="http://schemas.openxmlformats.org/drawingml/2006/main" noGrp="1"/>
+          </p:cNvSpPr>
+          <p:nvPr/>
+        </p:nvSpPr>
+        <p:spPr>
+          <a:xfrm xmlns:a="http://schemas.openxmlformats.org/drawingml/2006/main">
+            <a:off x="819150" y="5857875"/>
+            <a:ext cx="10544175" cy="333375"/>
+          </a:xfrm>
+          <a:prstGeom xmlns:a="http://schemas.openxmlformats.org/drawingml/2006/main" prst="rect">
+            <a:avLst/>
+          </a:prstGeom>
+          <a:noFill xmlns:a="http://schemas.openxmlformats.org/drawingml/2006/main"/>
+          <a:ln xmlns:a="http://schemas.openxmlformats.org/drawingml/2006/main" w="0">
+            <a:noFill/>
+          </a:ln>
+        </p:spPr>
+        <p:txBody>
+          <a:bodyPr xmlns:a="http://schemas.openxmlformats.org/drawingml/2006/main">
+            <a:noAutofit/>
+          </a:bodyPr>
+          <a:lstStyle xmlns:a="http://schemas.openxmlformats.org/drawingml/2006/main"/>
+          <a:p xmlns:a="http://schemas.openxmlformats.org/drawingml/2006/main">
+            <a:pPr>
+              <a:defRPr sz="1575" b="0">
+                <a:solidFill>
+                  <a:srgbClr val="F5F7FF"/>
+                </a:solidFill>
+                <a:latin typeface="Microsoft YaHei"/>
+                <a:ea typeface="Microsoft YaHei"/>
+                <a:cs typeface="Microsoft YaHei"/>
+              </a:defRPr>
+            </a:pPr>
+            <a:r>
+              <a:rPr sz="1575" b="0">
+                <a:solidFill>
+                  <a:srgbClr val="F5F7FF"/>
+                </a:solidFill>
+                <a:latin typeface="Microsoft YaHei"/>
+                <a:ea typeface="Microsoft YaHei"/>
+                <a:cs typeface="Microsoft YaHei"/>
+              </a:rPr>
+              <a:t>项目端连接岗位要求、真实训练与原始报告，形成可追溯的双向闭环</a:t>
             </a:r>
           </a:p>
         </p:txBody>
@@ -3444,7 +3729,7 @@
     </p:spTree>
     <p:extLst>
       <p:ext uri="{BB962C8B-B14F-4D97-AF65-F5344CB8AC3E}">
-        <p14:creationId xmlns:p14="http://schemas.microsoft.com/office/powerpoint/2010/main" val="998656843"/>
+        <p14:creationId xmlns:p14="http://schemas.microsoft.com/office/powerpoint/2010/main" val="800401634"/>
       </p:ext>
     </p:extLst>
   </p:cSld>
@@ -3475,15 +3760,15 @@
       </p:grpSpPr>
       <p:pic>
         <p:nvPicPr>
-          <p:cNvPr id="16" name=""/>
+          <p:cNvPr id="26" name=""/>
           <p:cNvPicPr>
             <a:picLocks xmlns:a="http://schemas.openxmlformats.org/drawingml/2006/main" noChangeAspect="1"/>
           </p:cNvPicPr>
           <p:nvPr/>
         </p:nvPicPr>
         <p:blipFill>
-          <a:blip xmlns:r="http://schemas.openxmlformats.org/officeDocument/2006/relationships" xmlns:a="http://schemas.openxmlformats.org/drawingml/2006/main" r:embed="Rc99095ea551545e2"/>
-          <a:srcRect xmlns:a="http://schemas.openxmlformats.org/drawingml/2006/main" l="0" t="0" r="0" b="0"/>
+          <a:blip xmlns:r="http://schemas.openxmlformats.org/officeDocument/2006/relationships" xmlns:a="http://schemas.openxmlformats.org/drawingml/2006/main" r:embed="R6a2dfc8a13cf418b"/>
+          <a:srcRect xmlns:a="http://schemas.openxmlformats.org/drawingml/2006/main" l="0" t="27" r="0" b="27"/>
           <a:stretch xmlns:a="http://schemas.openxmlformats.org/drawingml/2006/main">
             <a:fillRect l="0" t="0" r="0" b="0"/>
           </a:stretch>
@@ -3503,7 +3788,7 @@
           <p:cNvPr id="2" name="">
             <a:extLst xmlns:a="http://schemas.openxmlformats.org/drawingml/2006/main">
               <a:ext uri="{FF2B5EF4-FFF2-40B4-BE49-F238E27FC236}">
-                <a16:creationId xmlns:a16="http://schemas.microsoft.com/office/drawing/2014/main" id="{89388182-6935-45AA-B042-92671D3A6DD7}"/>
+                <a16:creationId xmlns:a16="http://schemas.microsoft.com/office/drawing/2014/main" id="{A466CC2A-B93E-4F3D-9C99-14D2E43A393B}"/>
               </a:ext>
             </a:extLst>
           </p:cNvPr>
@@ -3540,7 +3825,7 @@
           <p:cNvPr id="3" name="">
             <a:extLst xmlns:a="http://schemas.openxmlformats.org/drawingml/2006/main">
               <a:ext uri="{FF2B5EF4-FFF2-40B4-BE49-F238E27FC236}">
-                <a16:creationId xmlns:a16="http://schemas.microsoft.com/office/drawing/2014/main" id="{89394E04-8347-454F-AF75-C292E309A026}"/>
+                <a16:creationId xmlns:a16="http://schemas.microsoft.com/office/drawing/2014/main" id="{A354DE87-C393-4187-BB65-095A7BA54A6E}"/>
               </a:ext>
             </a:extLst>
           </p:cNvPr>
@@ -3597,7 +3882,7 @@
           <p:cNvPr id="4" name="">
             <a:extLst xmlns:a="http://schemas.openxmlformats.org/drawingml/2006/main">
               <a:ext uri="{FF2B5EF4-FFF2-40B4-BE49-F238E27FC236}">
-                <a16:creationId xmlns:a16="http://schemas.microsoft.com/office/drawing/2014/main" id="{F15F8DE3-15D4-40BD-AD7D-EACADE211C92}"/>
+                <a16:creationId xmlns:a16="http://schemas.microsoft.com/office/drawing/2014/main" id="{57FF0DB7-9576-44B1-82B0-63FC3A3478E0}"/>
               </a:ext>
             </a:extLst>
           </p:cNvPr>
@@ -3644,7 +3929,7 @@
                 <a:ea typeface="Microsoft YaHei"/>
                 <a:cs typeface="Microsoft YaHei"/>
               </a:rPr>
-              <a:t>本机部署，模型调用统一回退</a:t>
+              <a:t>本机运行，模型故障时自动切换备用方案</a:t>
             </a:r>
           </a:p>
         </p:txBody>
@@ -3654,7 +3939,7 @@
           <p:cNvPr id="5" name="">
             <a:extLst xmlns:a="http://schemas.openxmlformats.org/drawingml/2006/main">
               <a:ext uri="{FF2B5EF4-FFF2-40B4-BE49-F238E27FC236}">
-                <a16:creationId xmlns:a16="http://schemas.microsoft.com/office/drawing/2014/main" id="{997C323A-9807-41E1-B334-C55D0497D80B}"/>
+                <a16:creationId xmlns:a16="http://schemas.microsoft.com/office/drawing/2014/main" id="{42564CCF-3D32-48F7-8926-92F998B10D6C}"/>
               </a:ext>
             </a:extLst>
           </p:cNvPr>
@@ -3715,23 +4000,23 @@
           <p:cNvPr id="6" name="">
             <a:extLst xmlns:a="http://schemas.openxmlformats.org/drawingml/2006/main">
               <a:ext uri="{FF2B5EF4-FFF2-40B4-BE49-F238E27FC236}">
-                <a16:creationId xmlns:a16="http://schemas.microsoft.com/office/drawing/2014/main" id="{17996009-0A90-4356-B9CD-7FD3D68B8078}"/>
-              </a:ext>
-            </a:extLst>
-          </p:cNvPr>
-          <p:cNvSpPr>
-            <a:spLocks xmlns:a="http://schemas.openxmlformats.org/drawingml/2006/main" noGrp="1"/>
-          </p:cNvSpPr>
-          <p:nvPr/>
-        </p:nvSpPr>
-        <p:spPr>
-          <a:xfrm xmlns:a="http://schemas.openxmlformats.org/drawingml/2006/main">
-            <a:off x="790575" y="1981200"/>
-            <a:ext cx="10572750" cy="781050"/>
+                <a16:creationId xmlns:a16="http://schemas.microsoft.com/office/drawing/2014/main" id="{E9C922FA-E543-48A9-B051-C8661C6B1339}"/>
+              </a:ext>
+            </a:extLst>
+          </p:cNvPr>
+          <p:cNvSpPr>
+            <a:spLocks xmlns:a="http://schemas.openxmlformats.org/drawingml/2006/main" noGrp="1"/>
+          </p:cNvSpPr>
+          <p:nvPr/>
+        </p:nvSpPr>
+        <p:spPr>
+          <a:xfrm xmlns:a="http://schemas.openxmlformats.org/drawingml/2006/main">
+            <a:off x="781050" y="1952625"/>
+            <a:ext cx="10572750" cy="904875"/>
           </a:xfrm>
           <a:prstGeom xmlns:a="http://schemas.openxmlformats.org/drawingml/2006/main" prst="roundRect">
             <a:avLst>
-              <a:gd name="adj" fmla="val 9756"/>
+              <a:gd name="adj" fmla="val 8421"/>
             </a:avLst>
           </a:prstGeom>
           <a:solidFill xmlns:a="http://schemas.openxmlformats.org/drawingml/2006/main">
@@ -3741,8 +4026,8 @@
           </a:solidFill>
           <a:ln xmlns:a="http://schemas.openxmlformats.org/drawingml/2006/main" w="10478">
             <a:solidFill>
-              <a:srgbClr val="7CFFCB">
-                <a:alpha val="48000"/>
+              <a:srgbClr val="F5F7FF">
+                <a:alpha val="20000"/>
               </a:srgbClr>
             </a:solidFill>
             <a:prstDash val="solid"/>
@@ -3754,19 +4039,19 @@
           <p:cNvPr id="7" name="">
             <a:extLst xmlns:a="http://schemas.openxmlformats.org/drawingml/2006/main">
               <a:ext uri="{FF2B5EF4-FFF2-40B4-BE49-F238E27FC236}">
-                <a16:creationId xmlns:a16="http://schemas.microsoft.com/office/drawing/2014/main" id="{6AFBCA4D-C9F9-4A33-83CB-0A8FC171C26E}"/>
-              </a:ext>
-            </a:extLst>
-          </p:cNvPr>
-          <p:cNvSpPr>
-            <a:spLocks xmlns:a="http://schemas.openxmlformats.org/drawingml/2006/main" noGrp="1"/>
-          </p:cNvSpPr>
-          <p:nvPr/>
-        </p:nvSpPr>
-        <p:spPr>
-          <a:xfrm xmlns:a="http://schemas.openxmlformats.org/drawingml/2006/main">
-            <a:off x="1057275" y="2171700"/>
-            <a:ext cx="1609725" cy="428625"/>
+                <a16:creationId xmlns:a16="http://schemas.microsoft.com/office/drawing/2014/main" id="{2DE68D82-4802-4DB1-B392-3B193AB10EAB}"/>
+              </a:ext>
+            </a:extLst>
+          </p:cNvPr>
+          <p:cNvSpPr>
+            <a:spLocks xmlns:a="http://schemas.openxmlformats.org/drawingml/2006/main" noGrp="1"/>
+          </p:cNvSpPr>
+          <p:nvPr/>
+        </p:nvSpPr>
+        <p:spPr>
+          <a:xfrm xmlns:a="http://schemas.openxmlformats.org/drawingml/2006/main">
+            <a:off x="1009650" y="2066925"/>
+            <a:ext cx="2667000" cy="323850"/>
           </a:xfrm>
           <a:prstGeom xmlns:a="http://schemas.openxmlformats.org/drawingml/2006/main" prst="rect">
             <a:avLst/>
@@ -3783,7 +4068,7 @@
           <a:lstStyle xmlns:a="http://schemas.openxmlformats.org/drawingml/2006/main"/>
           <a:p xmlns:a="http://schemas.openxmlformats.org/drawingml/2006/main">
             <a:pPr>
-              <a:defRPr sz="2025" b="1">
+              <a:defRPr sz="1650" b="1">
                 <a:solidFill>
                   <a:srgbClr val="7CFFCB"/>
                 </a:solidFill>
@@ -3793,7 +4078,7 @@
               </a:defRPr>
             </a:pPr>
             <a:r>
-              <a:rPr sz="2025" b="1">
+              <a:rPr sz="1650" b="1">
                 <a:solidFill>
                   <a:srgbClr val="7CFFCB"/>
                 </a:solidFill>
@@ -3801,7 +4086,7 @@
                 <a:ea typeface="Microsoft YaHei"/>
                 <a:cs typeface="Microsoft YaHei"/>
               </a:rPr>
-              <a:t>前端</a:t>
+              <a:t>页面交互</a:t>
             </a:r>
           </a:p>
         </p:txBody>
@@ -3811,19 +4096,19 @@
           <p:cNvPr id="8" name="">
             <a:extLst xmlns:a="http://schemas.openxmlformats.org/drawingml/2006/main">
               <a:ext uri="{FF2B5EF4-FFF2-40B4-BE49-F238E27FC236}">
-                <a16:creationId xmlns:a16="http://schemas.microsoft.com/office/drawing/2014/main" id="{B12EA300-C0FA-4A78-B4B8-7637C1333042}"/>
-              </a:ext>
-            </a:extLst>
-          </p:cNvPr>
-          <p:cNvSpPr>
-            <a:spLocks xmlns:a="http://schemas.openxmlformats.org/drawingml/2006/main" noGrp="1"/>
-          </p:cNvSpPr>
-          <p:nvPr/>
-        </p:nvSpPr>
-        <p:spPr>
-          <a:xfrm xmlns:a="http://schemas.openxmlformats.org/drawingml/2006/main">
-            <a:off x="2828925" y="2171700"/>
-            <a:ext cx="7620000" cy="428625"/>
+                <a16:creationId xmlns:a16="http://schemas.microsoft.com/office/drawing/2014/main" id="{87DBC8DE-7971-4CAA-9050-D9E7016D56F8}"/>
+              </a:ext>
+            </a:extLst>
+          </p:cNvPr>
+          <p:cNvSpPr>
+            <a:spLocks xmlns:a="http://schemas.openxmlformats.org/drawingml/2006/main" noGrp="1"/>
+          </p:cNvSpPr>
+          <p:nvPr/>
+        </p:nvSpPr>
+        <p:spPr>
+          <a:xfrm xmlns:a="http://schemas.openxmlformats.org/drawingml/2006/main">
+            <a:off x="1009650" y="2466975"/>
+            <a:ext cx="2857500" cy="295275"/>
           </a:xfrm>
           <a:prstGeom xmlns:a="http://schemas.openxmlformats.org/drawingml/2006/main" prst="rect">
             <a:avLst/>
@@ -3840,17 +4125,17 @@
           <a:lstStyle xmlns:a="http://schemas.openxmlformats.org/drawingml/2006/main"/>
           <a:p xmlns:a="http://schemas.openxmlformats.org/drawingml/2006/main">
             <a:pPr>
-              <a:defRPr sz="2025" b="1">
-                <a:solidFill>
-                  <a:srgbClr val="F5F7FF"/>
-                </a:solidFill>
-                <a:latin typeface="Microsoft YaHei"/>
-                <a:ea typeface="Microsoft YaHei"/>
-                <a:cs typeface="Microsoft YaHei"/>
-              </a:defRPr>
-            </a:pPr>
-            <a:r>
-              <a:rPr sz="2025" b="1">
+              <a:defRPr sz="1575" b="0">
+                <a:solidFill>
+                  <a:srgbClr val="F5F7FF"/>
+                </a:solidFill>
+                <a:latin typeface="Microsoft YaHei"/>
+                <a:ea typeface="Microsoft YaHei"/>
+                <a:cs typeface="Microsoft YaHei"/>
+              </a:defRPr>
+            </a:pPr>
+            <a:r>
+              <a:rPr sz="1575" b="0">
                 <a:solidFill>
                   <a:srgbClr val="F5F7FF"/>
                 </a:solidFill>
@@ -3868,23 +4153,251 @@
           <p:cNvPr id="9" name="">
             <a:extLst xmlns:a="http://schemas.openxmlformats.org/drawingml/2006/main">
               <a:ext uri="{FF2B5EF4-FFF2-40B4-BE49-F238E27FC236}">
-                <a16:creationId xmlns:a16="http://schemas.microsoft.com/office/drawing/2014/main" id="{15912A12-79E6-40C4-868C-B7121D83EAF5}"/>
-              </a:ext>
-            </a:extLst>
-          </p:cNvPr>
-          <p:cNvSpPr>
-            <a:spLocks xmlns:a="http://schemas.openxmlformats.org/drawingml/2006/main" noGrp="1"/>
-          </p:cNvSpPr>
-          <p:nvPr/>
-        </p:nvSpPr>
-        <p:spPr>
-          <a:xfrm xmlns:a="http://schemas.openxmlformats.org/drawingml/2006/main">
-            <a:off x="790575" y="3019425"/>
-            <a:ext cx="10572750" cy="781050"/>
+                <a16:creationId xmlns:a16="http://schemas.microsoft.com/office/drawing/2014/main" id="{F6E02E62-4BC9-4304-BEEA-57996B0A0964}"/>
+              </a:ext>
+            </a:extLst>
+          </p:cNvPr>
+          <p:cNvSpPr>
+            <a:spLocks xmlns:a="http://schemas.openxmlformats.org/drawingml/2006/main" noGrp="1"/>
+          </p:cNvSpPr>
+          <p:nvPr/>
+        </p:nvSpPr>
+        <p:spPr>
+          <a:xfrm xmlns:a="http://schemas.openxmlformats.org/drawingml/2006/main">
+            <a:off x="4286250" y="2066925"/>
+            <a:ext cx="2667000" cy="323850"/>
+          </a:xfrm>
+          <a:prstGeom xmlns:a="http://schemas.openxmlformats.org/drawingml/2006/main" prst="rect">
+            <a:avLst/>
+          </a:prstGeom>
+          <a:noFill xmlns:a="http://schemas.openxmlformats.org/drawingml/2006/main"/>
+          <a:ln xmlns:a="http://schemas.openxmlformats.org/drawingml/2006/main" w="0">
+            <a:noFill/>
+          </a:ln>
+        </p:spPr>
+        <p:txBody>
+          <a:bodyPr xmlns:a="http://schemas.openxmlformats.org/drawingml/2006/main">
+            <a:noAutofit/>
+          </a:bodyPr>
+          <a:lstStyle xmlns:a="http://schemas.openxmlformats.org/drawingml/2006/main"/>
+          <a:p xmlns:a="http://schemas.openxmlformats.org/drawingml/2006/main">
+            <a:pPr>
+              <a:defRPr sz="1650" b="1">
+                <a:solidFill>
+                  <a:srgbClr val="7CFFCB"/>
+                </a:solidFill>
+                <a:latin typeface="Microsoft YaHei"/>
+                <a:ea typeface="Microsoft YaHei"/>
+                <a:cs typeface="Microsoft YaHei"/>
+              </a:defRPr>
+            </a:pPr>
+            <a:r>
+              <a:rPr sz="1650" b="1">
+                <a:solidFill>
+                  <a:srgbClr val="7CFFCB"/>
+                </a:solidFill>
+                <a:latin typeface="Microsoft YaHei"/>
+                <a:ea typeface="Microsoft YaHei"/>
+                <a:cs typeface="Microsoft YaHei"/>
+              </a:rPr>
+              <a:t>业务服务</a:t>
+            </a:r>
+          </a:p>
+        </p:txBody>
+      </p:sp>
+      <p:sp>
+        <p:nvSpPr>
+          <p:cNvPr id="10" name="">
+            <a:extLst xmlns:a="http://schemas.openxmlformats.org/drawingml/2006/main">
+              <a:ext uri="{FF2B5EF4-FFF2-40B4-BE49-F238E27FC236}">
+                <a16:creationId xmlns:a16="http://schemas.microsoft.com/office/drawing/2014/main" id="{522220FE-FD84-4D72-84D2-E77ED8491D0C}"/>
+              </a:ext>
+            </a:extLst>
+          </p:cNvPr>
+          <p:cNvSpPr>
+            <a:spLocks xmlns:a="http://schemas.openxmlformats.org/drawingml/2006/main" noGrp="1"/>
+          </p:cNvSpPr>
+          <p:nvPr/>
+        </p:nvSpPr>
+        <p:spPr>
+          <a:xfrm xmlns:a="http://schemas.openxmlformats.org/drawingml/2006/main">
+            <a:off x="4286250" y="2466975"/>
+            <a:ext cx="3048000" cy="295275"/>
+          </a:xfrm>
+          <a:prstGeom xmlns:a="http://schemas.openxmlformats.org/drawingml/2006/main" prst="rect">
+            <a:avLst/>
+          </a:prstGeom>
+          <a:noFill xmlns:a="http://schemas.openxmlformats.org/drawingml/2006/main"/>
+          <a:ln xmlns:a="http://schemas.openxmlformats.org/drawingml/2006/main" w="0">
+            <a:noFill/>
+          </a:ln>
+        </p:spPr>
+        <p:txBody>
+          <a:bodyPr xmlns:a="http://schemas.openxmlformats.org/drawingml/2006/main">
+            <a:noAutofit/>
+          </a:bodyPr>
+          <a:lstStyle xmlns:a="http://schemas.openxmlformats.org/drawingml/2006/main"/>
+          <a:p xmlns:a="http://schemas.openxmlformats.org/drawingml/2006/main">
+            <a:pPr>
+              <a:defRPr sz="1575" b="0">
+                <a:solidFill>
+                  <a:srgbClr val="F5F7FF"/>
+                </a:solidFill>
+                <a:latin typeface="Microsoft YaHei"/>
+                <a:ea typeface="Microsoft YaHei"/>
+                <a:cs typeface="Microsoft YaHei"/>
+              </a:defRPr>
+            </a:pPr>
+            <a:r>
+              <a:rPr sz="1575" b="0">
+                <a:solidFill>
+                  <a:srgbClr val="F5F7FF"/>
+                </a:solidFill>
+                <a:latin typeface="Microsoft YaHei"/>
+                <a:ea typeface="Microsoft YaHei"/>
+                <a:cs typeface="Microsoft YaHei"/>
+              </a:rPr>
+              <a:t>FastAPI + SQLAlchemy</a:t>
+            </a:r>
+          </a:p>
+        </p:txBody>
+      </p:sp>
+      <p:sp>
+        <p:nvSpPr>
+          <p:cNvPr id="11" name="">
+            <a:extLst xmlns:a="http://schemas.openxmlformats.org/drawingml/2006/main">
+              <a:ext uri="{FF2B5EF4-FFF2-40B4-BE49-F238E27FC236}">
+                <a16:creationId xmlns:a16="http://schemas.microsoft.com/office/drawing/2014/main" id="{90838AF3-0A78-4BD4-99C2-F15118921C65}"/>
+              </a:ext>
+            </a:extLst>
+          </p:cNvPr>
+          <p:cNvSpPr>
+            <a:spLocks xmlns:a="http://schemas.openxmlformats.org/drawingml/2006/main" noGrp="1"/>
+          </p:cNvSpPr>
+          <p:nvPr/>
+        </p:nvSpPr>
+        <p:spPr>
+          <a:xfrm xmlns:a="http://schemas.openxmlformats.org/drawingml/2006/main">
+            <a:off x="8248650" y="2066925"/>
+            <a:ext cx="2667000" cy="323850"/>
+          </a:xfrm>
+          <a:prstGeom xmlns:a="http://schemas.openxmlformats.org/drawingml/2006/main" prst="rect">
+            <a:avLst/>
+          </a:prstGeom>
+          <a:noFill xmlns:a="http://schemas.openxmlformats.org/drawingml/2006/main"/>
+          <a:ln xmlns:a="http://schemas.openxmlformats.org/drawingml/2006/main" w="0">
+            <a:noFill/>
+          </a:ln>
+        </p:spPr>
+        <p:txBody>
+          <a:bodyPr xmlns:a="http://schemas.openxmlformats.org/drawingml/2006/main">
+            <a:noAutofit/>
+          </a:bodyPr>
+          <a:lstStyle xmlns:a="http://schemas.openxmlformats.org/drawingml/2006/main"/>
+          <a:p xmlns:a="http://schemas.openxmlformats.org/drawingml/2006/main">
+            <a:pPr>
+              <a:defRPr sz="1650" b="1">
+                <a:solidFill>
+                  <a:srgbClr val="7CFFCB"/>
+                </a:solidFill>
+                <a:latin typeface="Microsoft YaHei"/>
+                <a:ea typeface="Microsoft YaHei"/>
+                <a:cs typeface="Microsoft YaHei"/>
+              </a:defRPr>
+            </a:pPr>
+            <a:r>
+              <a:rPr sz="1650" b="1">
+                <a:solidFill>
+                  <a:srgbClr val="7CFFCB"/>
+                </a:solidFill>
+                <a:latin typeface="Microsoft YaHei"/>
+                <a:ea typeface="Microsoft YaHei"/>
+                <a:cs typeface="Microsoft YaHei"/>
+              </a:rPr>
+              <a:t>数据保存</a:t>
+            </a:r>
+          </a:p>
+        </p:txBody>
+      </p:sp>
+      <p:sp>
+        <p:nvSpPr>
+          <p:cNvPr id="12" name="">
+            <a:extLst xmlns:a="http://schemas.openxmlformats.org/drawingml/2006/main">
+              <a:ext uri="{FF2B5EF4-FFF2-40B4-BE49-F238E27FC236}">
+                <a16:creationId xmlns:a16="http://schemas.microsoft.com/office/drawing/2014/main" id="{682C1E1C-AC6F-45A4-9A4F-F22E6442D72E}"/>
+              </a:ext>
+            </a:extLst>
+          </p:cNvPr>
+          <p:cNvSpPr>
+            <a:spLocks xmlns:a="http://schemas.openxmlformats.org/drawingml/2006/main" noGrp="1"/>
+          </p:cNvSpPr>
+          <p:nvPr/>
+        </p:nvSpPr>
+        <p:spPr>
+          <a:xfrm xmlns:a="http://schemas.openxmlformats.org/drawingml/2006/main">
+            <a:off x="8248650" y="2466975"/>
+            <a:ext cx="2857500" cy="295275"/>
+          </a:xfrm>
+          <a:prstGeom xmlns:a="http://schemas.openxmlformats.org/drawingml/2006/main" prst="rect">
+            <a:avLst/>
+          </a:prstGeom>
+          <a:noFill xmlns:a="http://schemas.openxmlformats.org/drawingml/2006/main"/>
+          <a:ln xmlns:a="http://schemas.openxmlformats.org/drawingml/2006/main" w="0">
+            <a:noFill/>
+          </a:ln>
+        </p:spPr>
+        <p:txBody>
+          <a:bodyPr xmlns:a="http://schemas.openxmlformats.org/drawingml/2006/main">
+            <a:noAutofit/>
+          </a:bodyPr>
+          <a:lstStyle xmlns:a="http://schemas.openxmlformats.org/drawingml/2006/main"/>
+          <a:p xmlns:a="http://schemas.openxmlformats.org/drawingml/2006/main">
+            <a:pPr>
+              <a:defRPr sz="1575" b="0">
+                <a:solidFill>
+                  <a:srgbClr val="F5F7FF"/>
+                </a:solidFill>
+                <a:latin typeface="Microsoft YaHei"/>
+                <a:ea typeface="Microsoft YaHei"/>
+                <a:cs typeface="Microsoft YaHei"/>
+              </a:defRPr>
+            </a:pPr>
+            <a:r>
+              <a:rPr sz="1575" b="0">
+                <a:solidFill>
+                  <a:srgbClr val="F5F7FF"/>
+                </a:solidFill>
+                <a:latin typeface="Microsoft YaHei"/>
+                <a:ea typeface="Microsoft YaHei"/>
+                <a:cs typeface="Microsoft YaHei"/>
+              </a:rPr>
+              <a:t>SQLite · 本机/局域网</a:t>
+            </a:r>
+          </a:p>
+        </p:txBody>
+      </p:sp>
+      <p:sp>
+        <p:nvSpPr>
+          <p:cNvPr id="13" name="">
+            <a:extLst xmlns:a="http://schemas.openxmlformats.org/drawingml/2006/main">
+              <a:ext uri="{FF2B5EF4-FFF2-40B4-BE49-F238E27FC236}">
+                <a16:creationId xmlns:a16="http://schemas.microsoft.com/office/drawing/2014/main" id="{4983B727-C9A4-477A-8ABF-C027F99322C5}"/>
+              </a:ext>
+            </a:extLst>
+          </p:cNvPr>
+          <p:cNvSpPr>
+            <a:spLocks xmlns:a="http://schemas.openxmlformats.org/drawingml/2006/main" noGrp="1"/>
+          </p:cNvSpPr>
+          <p:nvPr/>
+        </p:nvSpPr>
+        <p:spPr>
+          <a:xfrm xmlns:a="http://schemas.openxmlformats.org/drawingml/2006/main">
+            <a:off x="781050" y="3305175"/>
+            <a:ext cx="3238500" cy="1504950"/>
           </a:xfrm>
           <a:prstGeom xmlns:a="http://schemas.openxmlformats.org/drawingml/2006/main" prst="roundRect">
             <a:avLst>
-              <a:gd name="adj" fmla="val 9756"/>
+              <a:gd name="adj" fmla="val 5063"/>
             </a:avLst>
           </a:prstGeom>
           <a:solidFill xmlns:a="http://schemas.openxmlformats.org/drawingml/2006/main">
@@ -3894,8 +4407,8 @@
           </a:solidFill>
           <a:ln xmlns:a="http://schemas.openxmlformats.org/drawingml/2006/main" w="10478">
             <a:solidFill>
-              <a:srgbClr val="6A8DFF">
-                <a:alpha val="48000"/>
+              <a:srgbClr val="F5F7FF">
+                <a:alpha val="20000"/>
               </a:srgbClr>
             </a:solidFill>
             <a:prstDash val="solid"/>
@@ -3904,22 +4417,22 @@
       </p:sp>
       <p:sp>
         <p:nvSpPr>
-          <p:cNvPr id="10" name="">
-            <a:extLst xmlns:a="http://schemas.openxmlformats.org/drawingml/2006/main">
-              <a:ext uri="{FF2B5EF4-FFF2-40B4-BE49-F238E27FC236}">
-                <a16:creationId xmlns:a16="http://schemas.microsoft.com/office/drawing/2014/main" id="{6CD0BA4C-02E7-4F30-A36F-B996079C6D85}"/>
-              </a:ext>
-            </a:extLst>
-          </p:cNvPr>
-          <p:cNvSpPr>
-            <a:spLocks xmlns:a="http://schemas.openxmlformats.org/drawingml/2006/main" noGrp="1"/>
-          </p:cNvSpPr>
-          <p:nvPr/>
-        </p:nvSpPr>
-        <p:spPr>
-          <a:xfrm xmlns:a="http://schemas.openxmlformats.org/drawingml/2006/main">
-            <a:off x="1057275" y="3209925"/>
-            <a:ext cx="1609725" cy="428625"/>
+          <p:cNvPr id="14" name="">
+            <a:extLst xmlns:a="http://schemas.openxmlformats.org/drawingml/2006/main">
+              <a:ext uri="{FF2B5EF4-FFF2-40B4-BE49-F238E27FC236}">
+                <a16:creationId xmlns:a16="http://schemas.microsoft.com/office/drawing/2014/main" id="{C7E16A43-C514-40E7-AC92-C5431E315728}"/>
+              </a:ext>
+            </a:extLst>
+          </p:cNvPr>
+          <p:cNvSpPr>
+            <a:spLocks xmlns:a="http://schemas.openxmlformats.org/drawingml/2006/main" noGrp="1"/>
+          </p:cNvSpPr>
+          <p:nvPr/>
+        </p:nvSpPr>
+        <p:spPr>
+          <a:xfrm xmlns:a="http://schemas.openxmlformats.org/drawingml/2006/main">
+            <a:off x="1009650" y="3505200"/>
+            <a:ext cx="2790825" cy="400050"/>
           </a:xfrm>
           <a:prstGeom xmlns:a="http://schemas.openxmlformats.org/drawingml/2006/main" prst="rect">
             <a:avLst/>
@@ -3938,7 +4451,7 @@
             <a:pPr>
               <a:defRPr sz="2025" b="1">
                 <a:solidFill>
-                  <a:srgbClr val="6A8DFF"/>
+                  <a:srgbClr val="7CFFCB"/>
                 </a:solidFill>
                 <a:latin typeface="Microsoft YaHei"/>
                 <a:ea typeface="Microsoft YaHei"/>
@@ -3948,35 +4461,35 @@
             <a:r>
               <a:rPr sz="2025" b="1">
                 <a:solidFill>
-                  <a:srgbClr val="6A8DFF"/>
-                </a:solidFill>
-                <a:latin typeface="Microsoft YaHei"/>
-                <a:ea typeface="Microsoft YaHei"/>
-                <a:cs typeface="Microsoft YaHei"/>
-              </a:rPr>
-              <a:t>后端</a:t>
-            </a:r>
-          </a:p>
-        </p:txBody>
-      </p:sp>
-      <p:sp>
-        <p:nvSpPr>
-          <p:cNvPr id="11" name="">
-            <a:extLst xmlns:a="http://schemas.openxmlformats.org/drawingml/2006/main">
-              <a:ext uri="{FF2B5EF4-FFF2-40B4-BE49-F238E27FC236}">
-                <a16:creationId xmlns:a16="http://schemas.microsoft.com/office/drawing/2014/main" id="{1B42086F-ED12-40A1-A0FD-5B5C17EFC536}"/>
-              </a:ext>
-            </a:extLst>
-          </p:cNvPr>
-          <p:cNvSpPr>
-            <a:spLocks xmlns:a="http://schemas.openxmlformats.org/drawingml/2006/main" noGrp="1"/>
-          </p:cNvSpPr>
-          <p:nvPr/>
-        </p:nvSpPr>
-        <p:spPr>
-          <a:xfrm xmlns:a="http://schemas.openxmlformats.org/drawingml/2006/main">
-            <a:off x="2828925" y="3209925"/>
-            <a:ext cx="7620000" cy="428625"/>
+                  <a:srgbClr val="7CFFCB"/>
+                </a:solidFill>
+                <a:latin typeface="Microsoft YaHei"/>
+                <a:ea typeface="Microsoft YaHei"/>
+                <a:cs typeface="Microsoft YaHei"/>
+              </a:rPr>
+              <a:t>首选云端</a:t>
+            </a:r>
+          </a:p>
+        </p:txBody>
+      </p:sp>
+      <p:sp>
+        <p:nvSpPr>
+          <p:cNvPr id="15" name="">
+            <a:extLst xmlns:a="http://schemas.openxmlformats.org/drawingml/2006/main">
+              <a:ext uri="{FF2B5EF4-FFF2-40B4-BE49-F238E27FC236}">
+                <a16:creationId xmlns:a16="http://schemas.microsoft.com/office/drawing/2014/main" id="{F6DA4F1D-3AC5-4FBC-AB87-24092289123A}"/>
+              </a:ext>
+            </a:extLst>
+          </p:cNvPr>
+          <p:cNvSpPr>
+            <a:spLocks xmlns:a="http://schemas.openxmlformats.org/drawingml/2006/main" noGrp="1"/>
+          </p:cNvSpPr>
+          <p:nvPr/>
+        </p:nvSpPr>
+        <p:spPr>
+          <a:xfrm xmlns:a="http://schemas.openxmlformats.org/drawingml/2006/main">
+            <a:off x="1009650" y="4124325"/>
+            <a:ext cx="2790825" cy="523875"/>
           </a:xfrm>
           <a:prstGeom xmlns:a="http://schemas.openxmlformats.org/drawingml/2006/main" prst="rect">
             <a:avLst/>
@@ -3993,51 +4506,131 @@
           <a:lstStyle xmlns:a="http://schemas.openxmlformats.org/drawingml/2006/main"/>
           <a:p xmlns:a="http://schemas.openxmlformats.org/drawingml/2006/main">
             <a:pPr>
-              <a:defRPr sz="2025" b="1">
-                <a:solidFill>
-                  <a:srgbClr val="F5F7FF"/>
-                </a:solidFill>
-                <a:latin typeface="Microsoft YaHei"/>
-                <a:ea typeface="Microsoft YaHei"/>
-                <a:cs typeface="Microsoft YaHei"/>
-              </a:defRPr>
-            </a:pPr>
-            <a:r>
-              <a:rPr sz="2025" b="1">
-                <a:solidFill>
-                  <a:srgbClr val="F5F7FF"/>
-                </a:solidFill>
-                <a:latin typeface="Microsoft YaHei"/>
-                <a:ea typeface="Microsoft YaHei"/>
-                <a:cs typeface="Microsoft YaHei"/>
-              </a:rPr>
-              <a:t>FastAPI + SQLAlchemy</a:t>
-            </a:r>
-          </a:p>
-        </p:txBody>
-      </p:sp>
-      <p:sp>
-        <p:nvSpPr>
-          <p:cNvPr id="12" name="">
-            <a:extLst xmlns:a="http://schemas.openxmlformats.org/drawingml/2006/main">
-              <a:ext uri="{FF2B5EF4-FFF2-40B4-BE49-F238E27FC236}">
-                <a16:creationId xmlns:a16="http://schemas.microsoft.com/office/drawing/2014/main" id="{EE4BF897-2E6B-49FA-9323-7D3401690CF2}"/>
-              </a:ext>
-            </a:extLst>
-          </p:cNvPr>
-          <p:cNvSpPr>
-            <a:spLocks xmlns:a="http://schemas.openxmlformats.org/drawingml/2006/main" noGrp="1"/>
-          </p:cNvSpPr>
-          <p:nvPr/>
-        </p:nvSpPr>
-        <p:spPr>
-          <a:xfrm xmlns:a="http://schemas.openxmlformats.org/drawingml/2006/main">
-            <a:off x="790575" y="4057650"/>
-            <a:ext cx="10572750" cy="781050"/>
+              <a:defRPr sz="1575" b="0">
+                <a:solidFill>
+                  <a:srgbClr val="F5F7FF"/>
+                </a:solidFill>
+                <a:latin typeface="Microsoft YaHei"/>
+                <a:ea typeface="Microsoft YaHei"/>
+                <a:cs typeface="Microsoft YaHei"/>
+              </a:defRPr>
+            </a:pPr>
+            <a:r>
+              <a:rPr sz="1575" b="0">
+                <a:solidFill>
+                  <a:srgbClr val="F5F7FF"/>
+                </a:solidFill>
+                <a:latin typeface="Microsoft YaHei"/>
+                <a:ea typeface="Microsoft YaHei"/>
+                <a:cs typeface="Microsoft YaHei"/>
+              </a:rPr>
+              <a:t>完成问答编排、评分</a:t>
+            </a:r>
+          </a:p>
+          <a:p xmlns:a="http://schemas.openxmlformats.org/drawingml/2006/main">
+            <a:pPr>
+              <a:defRPr sz="1575" b="0">
+                <a:solidFill>
+                  <a:srgbClr val="F5F7FF"/>
+                </a:solidFill>
+                <a:latin typeface="Microsoft YaHei"/>
+                <a:ea typeface="Microsoft YaHei"/>
+                <a:cs typeface="Microsoft YaHei"/>
+              </a:defRPr>
+            </a:pPr>
+            <a:r>
+              <a:rPr sz="1575" b="0">
+                <a:solidFill>
+                  <a:srgbClr val="F5F7FF"/>
+                </a:solidFill>
+                <a:latin typeface="Microsoft YaHei"/>
+                <a:ea typeface="Microsoft YaHei"/>
+                <a:cs typeface="Microsoft YaHei"/>
+              </a:rPr>
+              <a:t>与岗位需求解析</a:t>
+            </a:r>
+          </a:p>
+        </p:txBody>
+      </p:sp>
+      <p:sp>
+        <p:nvSpPr>
+          <p:cNvPr id="16" name="">
+            <a:extLst xmlns:a="http://schemas.openxmlformats.org/drawingml/2006/main">
+              <a:ext uri="{FF2B5EF4-FFF2-40B4-BE49-F238E27FC236}">
+                <a16:creationId xmlns:a16="http://schemas.microsoft.com/office/drawing/2014/main" id="{B666AE97-A619-43C7-8353-C9928289C4CB}"/>
+              </a:ext>
+            </a:extLst>
+          </p:cNvPr>
+          <p:cNvSpPr>
+            <a:spLocks xmlns:a="http://schemas.openxmlformats.org/drawingml/2006/main" noGrp="1"/>
+          </p:cNvSpPr>
+          <p:nvPr/>
+        </p:nvSpPr>
+        <p:spPr>
+          <a:xfrm xmlns:a="http://schemas.openxmlformats.org/drawingml/2006/main">
+            <a:off x="4067175" y="3752850"/>
+            <a:ext cx="361950" cy="381000"/>
+          </a:xfrm>
+          <a:prstGeom xmlns:a="http://schemas.openxmlformats.org/drawingml/2006/main" prst="rect">
+            <a:avLst/>
+          </a:prstGeom>
+          <a:noFill xmlns:a="http://schemas.openxmlformats.org/drawingml/2006/main"/>
+          <a:ln xmlns:a="http://schemas.openxmlformats.org/drawingml/2006/main" w="0">
+            <a:noFill/>
+          </a:ln>
+        </p:spPr>
+        <p:txBody>
+          <a:bodyPr xmlns:a="http://schemas.openxmlformats.org/drawingml/2006/main">
+            <a:noAutofit/>
+          </a:bodyPr>
+          <a:lstStyle xmlns:a="http://schemas.openxmlformats.org/drawingml/2006/main"/>
+          <a:p xmlns:a="http://schemas.openxmlformats.org/drawingml/2006/main">
+            <a:pPr>
+              <a:defRPr sz="1950" b="1">
+                <a:solidFill>
+                  <a:srgbClr val="7CFFCB"/>
+                </a:solidFill>
+                <a:latin typeface="Microsoft YaHei"/>
+                <a:ea typeface="Microsoft YaHei"/>
+                <a:cs typeface="Microsoft YaHei"/>
+              </a:defRPr>
+            </a:pPr>
+            <a:r>
+              <a:rPr sz="1950" b="1">
+                <a:solidFill>
+                  <a:srgbClr val="7CFFCB"/>
+                </a:solidFill>
+                <a:latin typeface="Microsoft YaHei"/>
+                <a:ea typeface="Microsoft YaHei"/>
+                <a:cs typeface="Microsoft YaHei"/>
+              </a:rPr>
+              <a:t>→</a:t>
+            </a:r>
+          </a:p>
+        </p:txBody>
+      </p:sp>
+      <p:sp>
+        <p:nvSpPr>
+          <p:cNvPr id="17" name="">
+            <a:extLst xmlns:a="http://schemas.openxmlformats.org/drawingml/2006/main">
+              <a:ext uri="{FF2B5EF4-FFF2-40B4-BE49-F238E27FC236}">
+                <a16:creationId xmlns:a16="http://schemas.microsoft.com/office/drawing/2014/main" id="{23C25B8A-54A4-4ABD-BDFC-CFBB01D7A646}"/>
+              </a:ext>
+            </a:extLst>
+          </p:cNvPr>
+          <p:cNvSpPr>
+            <a:spLocks xmlns:a="http://schemas.openxmlformats.org/drawingml/2006/main" noGrp="1"/>
+          </p:cNvSpPr>
+          <p:nvPr/>
+        </p:nvSpPr>
+        <p:spPr>
+          <a:xfrm xmlns:a="http://schemas.openxmlformats.org/drawingml/2006/main">
+            <a:off x="4448175" y="3305175"/>
+            <a:ext cx="3238500" cy="1504950"/>
           </a:xfrm>
           <a:prstGeom xmlns:a="http://schemas.openxmlformats.org/drawingml/2006/main" prst="roundRect">
             <a:avLst>
-              <a:gd name="adj" fmla="val 9756"/>
+              <a:gd name="adj" fmla="val 5063"/>
             </a:avLst>
           </a:prstGeom>
           <a:solidFill xmlns:a="http://schemas.openxmlformats.org/drawingml/2006/main">
@@ -4047,8 +4640,8 @@
           </a:solidFill>
           <a:ln xmlns:a="http://schemas.openxmlformats.org/drawingml/2006/main" w="10478">
             <a:solidFill>
-              <a:srgbClr val="7CFFCB">
-                <a:alpha val="48000"/>
+              <a:srgbClr val="F5F7FF">
+                <a:alpha val="20000"/>
               </a:srgbClr>
             </a:solidFill>
             <a:prstDash val="solid"/>
@@ -4057,22 +4650,22 @@
       </p:sp>
       <p:sp>
         <p:nvSpPr>
-          <p:cNvPr id="13" name="">
-            <a:extLst xmlns:a="http://schemas.openxmlformats.org/drawingml/2006/main">
-              <a:ext uri="{FF2B5EF4-FFF2-40B4-BE49-F238E27FC236}">
-                <a16:creationId xmlns:a16="http://schemas.microsoft.com/office/drawing/2014/main" id="{24B97CC6-41CC-46F9-8DC0-C3AB76E332D7}"/>
-              </a:ext>
-            </a:extLst>
-          </p:cNvPr>
-          <p:cNvSpPr>
-            <a:spLocks xmlns:a="http://schemas.openxmlformats.org/drawingml/2006/main" noGrp="1"/>
-          </p:cNvSpPr>
-          <p:nvPr/>
-        </p:nvSpPr>
-        <p:spPr>
-          <a:xfrm xmlns:a="http://schemas.openxmlformats.org/drawingml/2006/main">
-            <a:off x="1057275" y="4248150"/>
-            <a:ext cx="1609725" cy="428625"/>
+          <p:cNvPr id="18" name="">
+            <a:extLst xmlns:a="http://schemas.openxmlformats.org/drawingml/2006/main">
+              <a:ext uri="{FF2B5EF4-FFF2-40B4-BE49-F238E27FC236}">
+                <a16:creationId xmlns:a16="http://schemas.microsoft.com/office/drawing/2014/main" id="{E96E4F6B-0713-4B4D-B556-CDCEB22DB2AE}"/>
+              </a:ext>
+            </a:extLst>
+          </p:cNvPr>
+          <p:cNvSpPr>
+            <a:spLocks xmlns:a="http://schemas.openxmlformats.org/drawingml/2006/main" noGrp="1"/>
+          </p:cNvSpPr>
+          <p:nvPr/>
+        </p:nvSpPr>
+        <p:spPr>
+          <a:xfrm xmlns:a="http://schemas.openxmlformats.org/drawingml/2006/main">
+            <a:off x="4676775" y="3505200"/>
+            <a:ext cx="2790825" cy="400050"/>
           </a:xfrm>
           <a:prstGeom xmlns:a="http://schemas.openxmlformats.org/drawingml/2006/main" prst="rect">
             <a:avLst/>
@@ -4107,29 +4700,29 @@
                 <a:ea typeface="Microsoft YaHei"/>
                 <a:cs typeface="Microsoft YaHei"/>
               </a:rPr>
-              <a:t>数据</a:t>
-            </a:r>
-          </a:p>
-        </p:txBody>
-      </p:sp>
-      <p:sp>
-        <p:nvSpPr>
-          <p:cNvPr id="14" name="">
-            <a:extLst xmlns:a="http://schemas.openxmlformats.org/drawingml/2006/main">
-              <a:ext uri="{FF2B5EF4-FFF2-40B4-BE49-F238E27FC236}">
-                <a16:creationId xmlns:a16="http://schemas.microsoft.com/office/drawing/2014/main" id="{98ED5199-3E67-41A8-964A-F7006D533D0F}"/>
-              </a:ext>
-            </a:extLst>
-          </p:cNvPr>
-          <p:cNvSpPr>
-            <a:spLocks xmlns:a="http://schemas.openxmlformats.org/drawingml/2006/main" noGrp="1"/>
-          </p:cNvSpPr>
-          <p:nvPr/>
-        </p:nvSpPr>
-        <p:spPr>
-          <a:xfrm xmlns:a="http://schemas.openxmlformats.org/drawingml/2006/main">
-            <a:off x="2828925" y="4248150"/>
-            <a:ext cx="7620000" cy="428625"/>
+              <a:t>备用云端</a:t>
+            </a:r>
+          </a:p>
+        </p:txBody>
+      </p:sp>
+      <p:sp>
+        <p:nvSpPr>
+          <p:cNvPr id="19" name="">
+            <a:extLst xmlns:a="http://schemas.openxmlformats.org/drawingml/2006/main">
+              <a:ext uri="{FF2B5EF4-FFF2-40B4-BE49-F238E27FC236}">
+                <a16:creationId xmlns:a16="http://schemas.microsoft.com/office/drawing/2014/main" id="{B019E623-A446-4399-8A9E-692273E9D188}"/>
+              </a:ext>
+            </a:extLst>
+          </p:cNvPr>
+          <p:cNvSpPr>
+            <a:spLocks xmlns:a="http://schemas.openxmlformats.org/drawingml/2006/main" noGrp="1"/>
+          </p:cNvSpPr>
+          <p:nvPr/>
+        </p:nvSpPr>
+        <p:spPr>
+          <a:xfrm xmlns:a="http://schemas.openxmlformats.org/drawingml/2006/main">
+            <a:off x="4676775" y="4124325"/>
+            <a:ext cx="2790825" cy="523875"/>
           </a:xfrm>
           <a:prstGeom xmlns:a="http://schemas.openxmlformats.org/drawingml/2006/main" prst="rect">
             <a:avLst/>
@@ -4146,9 +4739,185 @@
           <a:lstStyle xmlns:a="http://schemas.openxmlformats.org/drawingml/2006/main"/>
           <a:p xmlns:a="http://schemas.openxmlformats.org/drawingml/2006/main">
             <a:pPr>
+              <a:defRPr sz="1575" b="0">
+                <a:solidFill>
+                  <a:srgbClr val="F5F7FF"/>
+                </a:solidFill>
+                <a:latin typeface="Microsoft YaHei"/>
+                <a:ea typeface="Microsoft YaHei"/>
+                <a:cs typeface="Microsoft YaHei"/>
+              </a:defRPr>
+            </a:pPr>
+            <a:r>
+              <a:rPr sz="1575" b="0">
+                <a:solidFill>
+                  <a:srgbClr val="F5F7FF"/>
+                </a:solidFill>
+                <a:latin typeface="Microsoft YaHei"/>
+                <a:ea typeface="Microsoft YaHei"/>
+                <a:cs typeface="Microsoft YaHei"/>
+              </a:rPr>
+              <a:t>首选超时或出错</a:t>
+            </a:r>
+          </a:p>
+          <a:p xmlns:a="http://schemas.openxmlformats.org/drawingml/2006/main">
+            <a:pPr>
+              <a:defRPr sz="1575" b="0">
+                <a:solidFill>
+                  <a:srgbClr val="F5F7FF"/>
+                </a:solidFill>
+                <a:latin typeface="Microsoft YaHei"/>
+                <a:ea typeface="Microsoft YaHei"/>
+                <a:cs typeface="Microsoft YaHei"/>
+              </a:defRPr>
+            </a:pPr>
+            <a:r>
+              <a:rPr sz="1575" b="0">
+                <a:solidFill>
+                  <a:srgbClr val="F5F7FF"/>
+                </a:solidFill>
+                <a:latin typeface="Microsoft YaHei"/>
+                <a:ea typeface="Microsoft YaHei"/>
+                <a:cs typeface="Microsoft YaHei"/>
+              </a:rPr>
+              <a:t>尝试备用云端模型</a:t>
+            </a:r>
+          </a:p>
+        </p:txBody>
+      </p:sp>
+      <p:sp>
+        <p:nvSpPr>
+          <p:cNvPr id="20" name="">
+            <a:extLst xmlns:a="http://schemas.openxmlformats.org/drawingml/2006/main">
+              <a:ext uri="{FF2B5EF4-FFF2-40B4-BE49-F238E27FC236}">
+                <a16:creationId xmlns:a16="http://schemas.microsoft.com/office/drawing/2014/main" id="{1432C681-C990-4E63-8FD4-034BCC373EE5}"/>
+              </a:ext>
+            </a:extLst>
+          </p:cNvPr>
+          <p:cNvSpPr>
+            <a:spLocks xmlns:a="http://schemas.openxmlformats.org/drawingml/2006/main" noGrp="1"/>
+          </p:cNvSpPr>
+          <p:nvPr/>
+        </p:nvSpPr>
+        <p:spPr>
+          <a:xfrm xmlns:a="http://schemas.openxmlformats.org/drawingml/2006/main">
+            <a:off x="7734300" y="3752850"/>
+            <a:ext cx="361950" cy="381000"/>
+          </a:xfrm>
+          <a:prstGeom xmlns:a="http://schemas.openxmlformats.org/drawingml/2006/main" prst="rect">
+            <a:avLst/>
+          </a:prstGeom>
+          <a:noFill xmlns:a="http://schemas.openxmlformats.org/drawingml/2006/main"/>
+          <a:ln xmlns:a="http://schemas.openxmlformats.org/drawingml/2006/main" w="0">
+            <a:noFill/>
+          </a:ln>
+        </p:spPr>
+        <p:txBody>
+          <a:bodyPr xmlns:a="http://schemas.openxmlformats.org/drawingml/2006/main">
+            <a:noAutofit/>
+          </a:bodyPr>
+          <a:lstStyle xmlns:a="http://schemas.openxmlformats.org/drawingml/2006/main"/>
+          <a:p xmlns:a="http://schemas.openxmlformats.org/drawingml/2006/main">
+            <a:pPr>
+              <a:defRPr sz="1950" b="1">
+                <a:solidFill>
+                  <a:srgbClr val="7CFFCB"/>
+                </a:solidFill>
+                <a:latin typeface="Microsoft YaHei"/>
+                <a:ea typeface="Microsoft YaHei"/>
+                <a:cs typeface="Microsoft YaHei"/>
+              </a:defRPr>
+            </a:pPr>
+            <a:r>
+              <a:rPr sz="1950" b="1">
+                <a:solidFill>
+                  <a:srgbClr val="7CFFCB"/>
+                </a:solidFill>
+                <a:latin typeface="Microsoft YaHei"/>
+                <a:ea typeface="Microsoft YaHei"/>
+                <a:cs typeface="Microsoft YaHei"/>
+              </a:rPr>
+              <a:t>→</a:t>
+            </a:r>
+          </a:p>
+        </p:txBody>
+      </p:sp>
+      <p:sp>
+        <p:nvSpPr>
+          <p:cNvPr id="21" name="">
+            <a:extLst xmlns:a="http://schemas.openxmlformats.org/drawingml/2006/main">
+              <a:ext uri="{FF2B5EF4-FFF2-40B4-BE49-F238E27FC236}">
+                <a16:creationId xmlns:a16="http://schemas.microsoft.com/office/drawing/2014/main" id="{36E9CF43-C921-43D4-825D-51CD1CD527C2}"/>
+              </a:ext>
+            </a:extLst>
+          </p:cNvPr>
+          <p:cNvSpPr>
+            <a:spLocks xmlns:a="http://schemas.openxmlformats.org/drawingml/2006/main" noGrp="1"/>
+          </p:cNvSpPr>
+          <p:nvPr/>
+        </p:nvSpPr>
+        <p:spPr>
+          <a:xfrm xmlns:a="http://schemas.openxmlformats.org/drawingml/2006/main">
+            <a:off x="8115300" y="3305175"/>
+            <a:ext cx="3238500" cy="1504950"/>
+          </a:xfrm>
+          <a:prstGeom xmlns:a="http://schemas.openxmlformats.org/drawingml/2006/main" prst="roundRect">
+            <a:avLst>
+              <a:gd name="adj" fmla="val 5063"/>
+            </a:avLst>
+          </a:prstGeom>
+          <a:solidFill xmlns:a="http://schemas.openxmlformats.org/drawingml/2006/main">
+            <a:srgbClr val="0B1020">
+              <a:alpha val="72000"/>
+            </a:srgbClr>
+          </a:solidFill>
+          <a:ln xmlns:a="http://schemas.openxmlformats.org/drawingml/2006/main" w="10478">
+            <a:solidFill>
+              <a:srgbClr val="F5F7FF">
+                <a:alpha val="20000"/>
+              </a:srgbClr>
+            </a:solidFill>
+            <a:prstDash val="solid"/>
+          </a:ln>
+        </p:spPr>
+      </p:sp>
+      <p:sp>
+        <p:nvSpPr>
+          <p:cNvPr id="22" name="">
+            <a:extLst xmlns:a="http://schemas.openxmlformats.org/drawingml/2006/main">
+              <a:ext uri="{FF2B5EF4-FFF2-40B4-BE49-F238E27FC236}">
+                <a16:creationId xmlns:a16="http://schemas.microsoft.com/office/drawing/2014/main" id="{44AC263E-3CC9-4174-997F-143358512F02}"/>
+              </a:ext>
+            </a:extLst>
+          </p:cNvPr>
+          <p:cNvSpPr>
+            <a:spLocks xmlns:a="http://schemas.openxmlformats.org/drawingml/2006/main" noGrp="1"/>
+          </p:cNvSpPr>
+          <p:nvPr/>
+        </p:nvSpPr>
+        <p:spPr>
+          <a:xfrm xmlns:a="http://schemas.openxmlformats.org/drawingml/2006/main">
+            <a:off x="8343900" y="3505200"/>
+            <a:ext cx="2790825" cy="400050"/>
+          </a:xfrm>
+          <a:prstGeom xmlns:a="http://schemas.openxmlformats.org/drawingml/2006/main" prst="rect">
+            <a:avLst/>
+          </a:prstGeom>
+          <a:noFill xmlns:a="http://schemas.openxmlformats.org/drawingml/2006/main"/>
+          <a:ln xmlns:a="http://schemas.openxmlformats.org/drawingml/2006/main" w="0">
+            <a:noFill/>
+          </a:ln>
+        </p:spPr>
+        <p:txBody>
+          <a:bodyPr xmlns:a="http://schemas.openxmlformats.org/drawingml/2006/main">
+            <a:noAutofit/>
+          </a:bodyPr>
+          <a:lstStyle xmlns:a="http://schemas.openxmlformats.org/drawingml/2006/main"/>
+          <a:p xmlns:a="http://schemas.openxmlformats.org/drawingml/2006/main">
+            <a:pPr>
               <a:defRPr sz="2025" b="1">
                 <a:solidFill>
-                  <a:srgbClr val="F5F7FF"/>
+                  <a:srgbClr val="7CFFCB"/>
                 </a:solidFill>
                 <a:latin typeface="Microsoft YaHei"/>
                 <a:ea typeface="Microsoft YaHei"/>
@@ -4158,35 +4927,35 @@
             <a:r>
               <a:rPr sz="2025" b="1">
                 <a:solidFill>
-                  <a:srgbClr val="F5F7FF"/>
-                </a:solidFill>
-                <a:latin typeface="Microsoft YaHei"/>
-                <a:ea typeface="Microsoft YaHei"/>
-                <a:cs typeface="Microsoft YaHei"/>
-              </a:rPr>
-              <a:t>SQLite</a:t>
-            </a:r>
-          </a:p>
-        </p:txBody>
-      </p:sp>
-      <p:sp>
-        <p:nvSpPr>
-          <p:cNvPr id="15" name="">
-            <a:extLst xmlns:a="http://schemas.openxmlformats.org/drawingml/2006/main">
-              <a:ext uri="{FF2B5EF4-FFF2-40B4-BE49-F238E27FC236}">
-                <a16:creationId xmlns:a16="http://schemas.microsoft.com/office/drawing/2014/main" id="{9FE48AB8-6568-4B8E-81EF-59DEE726FAF3}"/>
-              </a:ext>
-            </a:extLst>
-          </p:cNvPr>
-          <p:cNvSpPr>
-            <a:spLocks xmlns:a="http://schemas.openxmlformats.org/drawingml/2006/main" noGrp="1"/>
-          </p:cNvSpPr>
-          <p:nvPr/>
-        </p:nvSpPr>
-        <p:spPr>
-          <a:xfrm xmlns:a="http://schemas.openxmlformats.org/drawingml/2006/main">
-            <a:off x="847725" y="5448300"/>
-            <a:ext cx="10382250" cy="495300"/>
+                  <a:srgbClr val="7CFFCB"/>
+                </a:solidFill>
+                <a:latin typeface="Microsoft YaHei"/>
+                <a:ea typeface="Microsoft YaHei"/>
+                <a:cs typeface="Microsoft YaHei"/>
+              </a:rPr>
+              <a:t>本地模型</a:t>
+            </a:r>
+          </a:p>
+        </p:txBody>
+      </p:sp>
+      <p:sp>
+        <p:nvSpPr>
+          <p:cNvPr id="23" name="">
+            <a:extLst xmlns:a="http://schemas.openxmlformats.org/drawingml/2006/main">
+              <a:ext uri="{FF2B5EF4-FFF2-40B4-BE49-F238E27FC236}">
+                <a16:creationId xmlns:a16="http://schemas.microsoft.com/office/drawing/2014/main" id="{4C26E062-7FC8-40D0-8A60-B4D9BFD58799}"/>
+              </a:ext>
+            </a:extLst>
+          </p:cNvPr>
+          <p:cNvSpPr>
+            <a:spLocks xmlns:a="http://schemas.openxmlformats.org/drawingml/2006/main" noGrp="1"/>
+          </p:cNvSpPr>
+          <p:nvPr/>
+        </p:nvSpPr>
+        <p:spPr>
+          <a:xfrm xmlns:a="http://schemas.openxmlformats.org/drawingml/2006/main">
+            <a:off x="8343900" y="4124325"/>
+            <a:ext cx="2790825" cy="523875"/>
           </a:xfrm>
           <a:prstGeom xmlns:a="http://schemas.openxmlformats.org/drawingml/2006/main" prst="rect">
             <a:avLst/>
@@ -4203,25 +4972,162 @@
           <a:lstStyle xmlns:a="http://schemas.openxmlformats.org/drawingml/2006/main"/>
           <a:p xmlns:a="http://schemas.openxmlformats.org/drawingml/2006/main">
             <a:pPr>
-              <a:defRPr sz="2175" b="1">
-                <a:solidFill>
-                  <a:srgbClr val="F5F7FF"/>
-                </a:solidFill>
-                <a:latin typeface="Microsoft YaHei"/>
-                <a:ea typeface="Microsoft YaHei"/>
-                <a:cs typeface="Microsoft YaHei"/>
-              </a:defRPr>
-            </a:pPr>
-            <a:r>
-              <a:rPr sz="2175" b="1">
-                <a:solidFill>
-                  <a:srgbClr val="F5F7FF"/>
-                </a:solidFill>
-                <a:latin typeface="Microsoft YaHei"/>
-                <a:ea typeface="Microsoft YaHei"/>
-                <a:cs typeface="Microsoft YaHei"/>
-              </a:rPr>
-              <a:t>LLM：旗舰模型  →  flash  →  本地模型</a:t>
+              <a:defRPr sz="1575" b="0">
+                <a:solidFill>
+                  <a:srgbClr val="F5F7FF"/>
+                </a:solidFill>
+                <a:latin typeface="Microsoft YaHei"/>
+                <a:ea typeface="Microsoft YaHei"/>
+                <a:cs typeface="Microsoft YaHei"/>
+              </a:defRPr>
+            </a:pPr>
+            <a:r>
+              <a:rPr sz="1575" b="0">
+                <a:solidFill>
+                  <a:srgbClr val="F5F7FF"/>
+                </a:solidFill>
+                <a:latin typeface="Microsoft YaHei"/>
+                <a:ea typeface="Microsoft YaHei"/>
+                <a:cs typeface="Microsoft YaHei"/>
+              </a:rPr>
+              <a:t>云端不可用时</a:t>
+            </a:r>
+          </a:p>
+          <a:p xmlns:a="http://schemas.openxmlformats.org/drawingml/2006/main">
+            <a:pPr>
+              <a:defRPr sz="1575" b="0">
+                <a:solidFill>
+                  <a:srgbClr val="F5F7FF"/>
+                </a:solidFill>
+                <a:latin typeface="Microsoft YaHei"/>
+                <a:ea typeface="Microsoft YaHei"/>
+                <a:cs typeface="Microsoft YaHei"/>
+              </a:defRPr>
+            </a:pPr>
+            <a:r>
+              <a:rPr sz="1575" b="0">
+                <a:solidFill>
+                  <a:srgbClr val="F5F7FF"/>
+                </a:solidFill>
+                <a:latin typeface="Microsoft YaHei"/>
+                <a:ea typeface="Microsoft YaHei"/>
+                <a:cs typeface="Microsoft YaHei"/>
+              </a:rPr>
+              <a:t>继续尝试本地模型服务</a:t>
+            </a:r>
+          </a:p>
+        </p:txBody>
+      </p:sp>
+      <p:sp>
+        <p:nvSpPr>
+          <p:cNvPr id="24" name="">
+            <a:extLst xmlns:a="http://schemas.openxmlformats.org/drawingml/2006/main">
+              <a:ext uri="{FF2B5EF4-FFF2-40B4-BE49-F238E27FC236}">
+                <a16:creationId xmlns:a16="http://schemas.microsoft.com/office/drawing/2014/main" id="{485842B9-9006-452A-B5BD-37A8CD378789}"/>
+              </a:ext>
+            </a:extLst>
+          </p:cNvPr>
+          <p:cNvSpPr>
+            <a:spLocks xmlns:a="http://schemas.openxmlformats.org/drawingml/2006/main" noGrp="1"/>
+          </p:cNvSpPr>
+          <p:nvPr/>
+        </p:nvSpPr>
+        <p:spPr>
+          <a:xfrm xmlns:a="http://schemas.openxmlformats.org/drawingml/2006/main">
+            <a:off x="809625" y="5153025"/>
+            <a:ext cx="10572750" cy="381000"/>
+          </a:xfrm>
+          <a:prstGeom xmlns:a="http://schemas.openxmlformats.org/drawingml/2006/main" prst="rect">
+            <a:avLst/>
+          </a:prstGeom>
+          <a:noFill xmlns:a="http://schemas.openxmlformats.org/drawingml/2006/main"/>
+          <a:ln xmlns:a="http://schemas.openxmlformats.org/drawingml/2006/main" w="0">
+            <a:noFill/>
+          </a:ln>
+        </p:spPr>
+        <p:txBody>
+          <a:bodyPr xmlns:a="http://schemas.openxmlformats.org/drawingml/2006/main">
+            <a:noAutofit/>
+          </a:bodyPr>
+          <a:lstStyle xmlns:a="http://schemas.openxmlformats.org/drawingml/2006/main"/>
+          <a:p xmlns:a="http://schemas.openxmlformats.org/drawingml/2006/main">
+            <a:pPr>
+              <a:defRPr sz="1650" b="0">
+                <a:solidFill>
+                  <a:srgbClr val="F5F7FF"/>
+                </a:solidFill>
+                <a:latin typeface="Microsoft YaHei"/>
+                <a:ea typeface="Microsoft YaHei"/>
+                <a:cs typeface="Microsoft YaHei"/>
+              </a:defRPr>
+            </a:pPr>
+            <a:r>
+              <a:rPr sz="1650" b="0">
+                <a:solidFill>
+                  <a:srgbClr val="F5F7FF"/>
+                </a:solidFill>
+                <a:latin typeface="Microsoft YaHei"/>
+                <a:ea typeface="Microsoft YaHei"/>
+                <a:cs typeface="Microsoft YaHei"/>
+              </a:rPr>
+              <a:t>每次调用设超时并检查返回格式；模型名称与地址可在配置中更换</a:t>
+            </a:r>
+          </a:p>
+        </p:txBody>
+      </p:sp>
+      <p:sp>
+        <p:nvSpPr>
+          <p:cNvPr id="25" name="">
+            <a:extLst xmlns:a="http://schemas.openxmlformats.org/drawingml/2006/main">
+              <a:ext uri="{FF2B5EF4-FFF2-40B4-BE49-F238E27FC236}">
+                <a16:creationId xmlns:a16="http://schemas.microsoft.com/office/drawing/2014/main" id="{03C95CBF-FA8D-4A88-B3D4-DC58E1D13A02}"/>
+              </a:ext>
+            </a:extLst>
+          </p:cNvPr>
+          <p:cNvSpPr>
+            <a:spLocks xmlns:a="http://schemas.openxmlformats.org/drawingml/2006/main" noGrp="1"/>
+          </p:cNvSpPr>
+          <p:nvPr/>
+        </p:nvSpPr>
+        <p:spPr>
+          <a:xfrm xmlns:a="http://schemas.openxmlformats.org/drawingml/2006/main">
+            <a:off x="809625" y="5676900"/>
+            <a:ext cx="10572750" cy="381000"/>
+          </a:xfrm>
+          <a:prstGeom xmlns:a="http://schemas.openxmlformats.org/drawingml/2006/main" prst="rect">
+            <a:avLst/>
+          </a:prstGeom>
+          <a:noFill xmlns:a="http://schemas.openxmlformats.org/drawingml/2006/main"/>
+          <a:ln xmlns:a="http://schemas.openxmlformats.org/drawingml/2006/main" w="0">
+            <a:noFill/>
+          </a:ln>
+        </p:spPr>
+        <p:txBody>
+          <a:bodyPr xmlns:a="http://schemas.openxmlformats.org/drawingml/2006/main">
+            <a:noAutofit/>
+          </a:bodyPr>
+          <a:lstStyle xmlns:a="http://schemas.openxmlformats.org/drawingml/2006/main"/>
+          <a:p xmlns:a="http://schemas.openxmlformats.org/drawingml/2006/main">
+            <a:pPr>
+              <a:defRPr sz="1650" b="0">
+                <a:solidFill>
+                  <a:srgbClr val="7CFFCB"/>
+                </a:solidFill>
+                <a:latin typeface="Microsoft YaHei"/>
+                <a:ea typeface="Microsoft YaHei"/>
+                <a:cs typeface="Microsoft YaHei"/>
+              </a:defRPr>
+            </a:pPr>
+            <a:r>
+              <a:rPr sz="1650" b="0">
+                <a:solidFill>
+                  <a:srgbClr val="7CFFCB"/>
+                </a:solidFill>
+                <a:latin typeface="Microsoft YaHei"/>
+                <a:ea typeface="Microsoft YaHei"/>
+                <a:cs typeface="Microsoft YaHei"/>
+              </a:rPr>
+              <a:t>追问失败可继续下一题；评分按可用备用方案处理</a:t>
             </a:r>
           </a:p>
         </p:txBody>
@@ -4229,7 +5135,7 @@
     </p:spTree>
     <p:extLst>
       <p:ext uri="{BB962C8B-B14F-4D97-AF65-F5344CB8AC3E}">
-        <p14:creationId xmlns:p14="http://schemas.microsoft.com/office/powerpoint/2010/main" val="1720635738"/>
+        <p14:creationId xmlns:p14="http://schemas.microsoft.com/office/powerpoint/2010/main" val="2098282802"/>
       </p:ext>
     </p:extLst>
   </p:cSld>
@@ -4267,8 +5173,8 @@
           <p:nvPr/>
         </p:nvPicPr>
         <p:blipFill>
-          <a:blip xmlns:r="http://schemas.openxmlformats.org/officeDocument/2006/relationships" xmlns:a="http://schemas.openxmlformats.org/drawingml/2006/main" r:embed="R0cc2e53b4c6f4111"/>
-          <a:srcRect xmlns:a="http://schemas.openxmlformats.org/drawingml/2006/main" l="0" t="0" r="0" b="0"/>
+          <a:blip xmlns:r="http://schemas.openxmlformats.org/officeDocument/2006/relationships" xmlns:a="http://schemas.openxmlformats.org/drawingml/2006/main" r:embed="R51964a55dfc245e8"/>
+          <a:srcRect xmlns:a="http://schemas.openxmlformats.org/drawingml/2006/main" l="0" t="27" r="0" b="27"/>
           <a:stretch xmlns:a="http://schemas.openxmlformats.org/drawingml/2006/main">
             <a:fillRect l="0" t="0" r="0" b="0"/>
           </a:stretch>
@@ -4288,7 +5194,7 @@
           <p:cNvPr id="2" name="">
             <a:extLst xmlns:a="http://schemas.openxmlformats.org/drawingml/2006/main">
               <a:ext uri="{FF2B5EF4-FFF2-40B4-BE49-F238E27FC236}">
-                <a16:creationId xmlns:a16="http://schemas.microsoft.com/office/drawing/2014/main" id="{B9035E04-F9CD-4B9D-A1A1-F63961B91B4A}"/>
+                <a16:creationId xmlns:a16="http://schemas.microsoft.com/office/drawing/2014/main" id="{2DD4B35E-AEFA-4F8C-922A-9E0BD4B7AA68}"/>
               </a:ext>
             </a:extLst>
           </p:cNvPr>
@@ -4325,7 +5231,7 @@
           <p:cNvPr id="3" name="">
             <a:extLst xmlns:a="http://schemas.openxmlformats.org/drawingml/2006/main">
               <a:ext uri="{FF2B5EF4-FFF2-40B4-BE49-F238E27FC236}">
-                <a16:creationId xmlns:a16="http://schemas.microsoft.com/office/drawing/2014/main" id="{881F09B0-D54E-4D44-B91A-050FB9A91A77}"/>
+                <a16:creationId xmlns:a16="http://schemas.microsoft.com/office/drawing/2014/main" id="{B73647A0-E03A-4BD7-B8AB-5A8749CB6ECA}"/>
               </a:ext>
             </a:extLst>
           </p:cNvPr>
@@ -4382,7 +5288,7 @@
           <p:cNvPr id="4" name="">
             <a:extLst xmlns:a="http://schemas.openxmlformats.org/drawingml/2006/main">
               <a:ext uri="{FF2B5EF4-FFF2-40B4-BE49-F238E27FC236}">
-                <a16:creationId xmlns:a16="http://schemas.microsoft.com/office/drawing/2014/main" id="{2EB8A128-ACA7-48F7-B9C9-158F976A9DEB}"/>
+                <a16:creationId xmlns:a16="http://schemas.microsoft.com/office/drawing/2014/main" id="{505F01C3-E6DE-4188-AE9A-C75B0C6A0C34}"/>
               </a:ext>
             </a:extLst>
           </p:cNvPr>
@@ -4429,7 +5335,7 @@
                 <a:ea typeface="Microsoft YaHei"/>
                 <a:cs typeface="Microsoft YaHei"/>
               </a:rPr>
-              <a:t>岗位认识、训练反馈、</a:t>
+              <a:t>岗位认知与学习规划，</a:t>
             </a:r>
           </a:p>
         </p:txBody>
@@ -4439,7 +5345,7 @@
           <p:cNvPr id="5" name="">
             <a:extLst xmlns:a="http://schemas.openxmlformats.org/drawingml/2006/main">
               <a:ext uri="{FF2B5EF4-FFF2-40B4-BE49-F238E27FC236}">
-                <a16:creationId xmlns:a16="http://schemas.microsoft.com/office/drawing/2014/main" id="{CE95EE21-333A-43C6-A593-8CF344EB32AD}"/>
+                <a16:creationId xmlns:a16="http://schemas.microsoft.com/office/drawing/2014/main" id="{C6944DBC-0122-4D00-91F6-BC2BE0836C2E}"/>
               </a:ext>
             </a:extLst>
           </p:cNvPr>
@@ -4468,7 +5374,7 @@
           <a:lstStyle xmlns:a="http://schemas.openxmlformats.org/drawingml/2006/main"/>
           <a:p xmlns:a="http://schemas.openxmlformats.org/drawingml/2006/main">
             <a:pPr>
-              <a:defRPr sz="5175" b="1">
+              <a:defRPr sz="4275" b="1">
                 <a:solidFill>
                   <a:srgbClr val="7CFFCB"/>
                 </a:solidFill>
@@ -4478,7 +5384,7 @@
               </a:defRPr>
             </a:pPr>
             <a:r>
-              <a:rPr sz="5175" b="1">
+              <a:rPr sz="4275" b="1">
                 <a:solidFill>
                   <a:srgbClr val="7CFFCB"/>
                 </a:solidFill>
@@ -4486,7 +5392,7 @@
                 <a:ea typeface="Microsoft YaHei"/>
                 <a:cs typeface="Microsoft YaHei"/>
               </a:rPr>
-              <a:t>企业初筛</a:t>
+              <a:t>面试训练与企业初筛</a:t>
             </a:r>
           </a:p>
         </p:txBody>
@@ -4496,7 +5402,7 @@
           <p:cNvPr id="6" name="">
             <a:extLst xmlns:a="http://schemas.openxmlformats.org/drawingml/2006/main">
               <a:ext uri="{FF2B5EF4-FFF2-40B4-BE49-F238E27FC236}">
-                <a16:creationId xmlns:a16="http://schemas.microsoft.com/office/drawing/2014/main" id="{FBE0BE2A-395A-4D24-8393-84854983E4AF}"/>
+                <a16:creationId xmlns:a16="http://schemas.microsoft.com/office/drawing/2014/main" id="{5B94F7A3-3FEB-4FBC-9046-43483CC01B98}"/>
               </a:ext>
             </a:extLst>
           </p:cNvPr>
@@ -4543,7 +5449,7 @@
                 <a:ea typeface="Microsoft YaHei"/>
                 <a:cs typeface="Microsoft YaHei"/>
               </a:rPr>
-              <a:t>共享同一条可信数据链</a:t>
+              <a:t>以岗位要求连接学生成长与企业用人</a:t>
             </a:r>
           </a:p>
         </p:txBody>
@@ -4553,7 +5459,7 @@
           <p:cNvPr id="7" name="">
             <a:extLst xmlns:a="http://schemas.openxmlformats.org/drawingml/2006/main">
               <a:ext uri="{FF2B5EF4-FFF2-40B4-BE49-F238E27FC236}">
-                <a16:creationId xmlns:a16="http://schemas.microsoft.com/office/drawing/2014/main" id="{7C8FEACC-1827-4D87-9835-3357EEE612A0}"/>
+                <a16:creationId xmlns:a16="http://schemas.microsoft.com/office/drawing/2014/main" id="{C6992BAF-CBC7-4254-B5BD-E526047A24ED}"/>
               </a:ext>
             </a:extLst>
           </p:cNvPr>
@@ -4600,7 +5506,7 @@
                 <a:ea typeface="Microsoft YaHei"/>
                 <a:cs typeface="Microsoft YaHei"/>
               </a:rPr>
-              <a:t>企业命题 05  /  智能面试仓的开发与应用</a:t>
+              <a:t>支持不同岗位配置，形成可落地、可推广的 AI 面试仓方案</a:t>
             </a:r>
           </a:p>
         </p:txBody>
@@ -4608,7 +5514,7 @@
     </p:spTree>
     <p:extLst>
       <p:ext uri="{BB962C8B-B14F-4D97-AF65-F5344CB8AC3E}">
-        <p14:creationId xmlns:p14="http://schemas.microsoft.com/office/powerpoint/2010/main" val="1667044219"/>
+        <p14:creationId xmlns:p14="http://schemas.microsoft.com/office/powerpoint/2010/main" val="549964260"/>
       </p:ext>
     </p:extLst>
   </p:cSld>
@@ -4646,8 +5552,8 @@
           <p:nvPr/>
         </p:nvPicPr>
         <p:blipFill>
-          <a:blip xmlns:r="http://schemas.openxmlformats.org/officeDocument/2006/relationships" xmlns:a="http://schemas.openxmlformats.org/drawingml/2006/main" r:embed="R0705cab3c25c44cf"/>
-          <a:srcRect xmlns:a="http://schemas.openxmlformats.org/drawingml/2006/main" l="0" t="0" r="0" b="0"/>
+          <a:blip xmlns:r="http://schemas.openxmlformats.org/officeDocument/2006/relationships" xmlns:a="http://schemas.openxmlformats.org/drawingml/2006/main" r:embed="Rfb2b1e299ec64317"/>
+          <a:srcRect xmlns:a="http://schemas.openxmlformats.org/drawingml/2006/main" l="0" t="27" r="0" b="27"/>
           <a:stretch xmlns:a="http://schemas.openxmlformats.org/drawingml/2006/main">
             <a:fillRect l="0" t="0" r="0" b="0"/>
           </a:stretch>
@@ -4667,7 +5573,7 @@
           <p:cNvPr id="2" name="">
             <a:extLst xmlns:a="http://schemas.openxmlformats.org/drawingml/2006/main">
               <a:ext uri="{FF2B5EF4-FFF2-40B4-BE49-F238E27FC236}">
-                <a16:creationId xmlns:a16="http://schemas.microsoft.com/office/drawing/2014/main" id="{5937C5DE-16BF-4B60-A780-1A336AAD48D8}"/>
+                <a16:creationId xmlns:a16="http://schemas.microsoft.com/office/drawing/2014/main" id="{924E4F46-B523-44D5-8006-12A66C6BCECD}"/>
               </a:ext>
             </a:extLst>
           </p:cNvPr>
@@ -4704,7 +5610,7 @@
           <p:cNvPr id="3" name="">
             <a:extLst xmlns:a="http://schemas.openxmlformats.org/drawingml/2006/main">
               <a:ext uri="{FF2B5EF4-FFF2-40B4-BE49-F238E27FC236}">
-                <a16:creationId xmlns:a16="http://schemas.microsoft.com/office/drawing/2014/main" id="{B5E59271-CE22-4B5F-B332-1DE8BF3FF46A}"/>
+                <a16:creationId xmlns:a16="http://schemas.microsoft.com/office/drawing/2014/main" id="{2B8F4AC9-B06C-4400-A59F-C88D30D4625E}"/>
               </a:ext>
             </a:extLst>
           </p:cNvPr>
@@ -4761,7 +5667,7 @@
           <p:cNvPr id="4" name="">
             <a:extLst xmlns:a="http://schemas.openxmlformats.org/drawingml/2006/main">
               <a:ext uri="{FF2B5EF4-FFF2-40B4-BE49-F238E27FC236}">
-                <a16:creationId xmlns:a16="http://schemas.microsoft.com/office/drawing/2014/main" id="{064E82E2-E3E5-47C6-A802-6C66436A3088}"/>
+                <a16:creationId xmlns:a16="http://schemas.microsoft.com/office/drawing/2014/main" id="{AA71F4A0-6DE0-4FF9-8C39-4A92D306BD2F}"/>
               </a:ext>
             </a:extLst>
           </p:cNvPr>
@@ -4818,7 +5724,7 @@
           <p:cNvPr id="5" name="">
             <a:extLst xmlns:a="http://schemas.openxmlformats.org/drawingml/2006/main">
               <a:ext uri="{FF2B5EF4-FFF2-40B4-BE49-F238E27FC236}">
-                <a16:creationId xmlns:a16="http://schemas.microsoft.com/office/drawing/2014/main" id="{8F24C169-C6BC-4598-8884-7C1D88E2439A}"/>
+                <a16:creationId xmlns:a16="http://schemas.microsoft.com/office/drawing/2014/main" id="{1ED92D5E-C5B6-4EC2-ADA8-D209F40519A1}"/>
               </a:ext>
             </a:extLst>
           </p:cNvPr>
@@ -4875,7 +5781,7 @@
           <p:cNvPr id="6" name="">
             <a:extLst xmlns:a="http://schemas.openxmlformats.org/drawingml/2006/main">
               <a:ext uri="{FF2B5EF4-FFF2-40B4-BE49-F238E27FC236}">
-                <a16:creationId xmlns:a16="http://schemas.microsoft.com/office/drawing/2014/main" id="{58BFE431-DAB9-4BB2-85BF-2A1983934F86}"/>
+                <a16:creationId xmlns:a16="http://schemas.microsoft.com/office/drawing/2014/main" id="{EC1A39FF-B00C-4F86-8AFF-AA71B4F88789}"/>
               </a:ext>
             </a:extLst>
           </p:cNvPr>
@@ -4922,7 +5828,7 @@
                 <a:ea typeface="Microsoft YaHei"/>
                 <a:cs typeface="Microsoft YaHei"/>
               </a:rPr>
-              <a:t>新生、毕业生与企业，面对同一条岗位能力链</a:t>
+              <a:t>学生获得训练反馈，企业获得筛选依据，项目形成双向闭环</a:t>
             </a:r>
           </a:p>
         </p:txBody>
@@ -4932,7 +5838,7 @@
           <p:cNvPr id="7" name="">
             <a:extLst xmlns:a="http://schemas.openxmlformats.org/drawingml/2006/main">
               <a:ext uri="{FF2B5EF4-FFF2-40B4-BE49-F238E27FC236}">
-                <a16:creationId xmlns:a16="http://schemas.microsoft.com/office/drawing/2014/main" id="{3DCACF78-5C73-4187-9DB9-DA504CE059EC}"/>
+                <a16:creationId xmlns:a16="http://schemas.microsoft.com/office/drawing/2014/main" id="{29E4A7F3-21D2-402F-9DFE-0FBCB265653D}"/>
               </a:ext>
             </a:extLst>
           </p:cNvPr>
@@ -4991,7 +5897,7 @@
     </p:spTree>
     <p:extLst>
       <p:ext uri="{BB962C8B-B14F-4D97-AF65-F5344CB8AC3E}">
-        <p14:creationId xmlns:p14="http://schemas.microsoft.com/office/powerpoint/2010/main" val="1754645426"/>
+        <p14:creationId xmlns:p14="http://schemas.microsoft.com/office/powerpoint/2010/main" val="209005433"/>
       </p:ext>
     </p:extLst>
   </p:cSld>
@@ -5029,8 +5935,8 @@
           <p:nvPr/>
         </p:nvPicPr>
         <p:blipFill>
-          <a:blip xmlns:r="http://schemas.openxmlformats.org/officeDocument/2006/relationships" xmlns:a="http://schemas.openxmlformats.org/drawingml/2006/main" r:embed="R8aa0e535b9444b8a"/>
-          <a:srcRect xmlns:a="http://schemas.openxmlformats.org/drawingml/2006/main" l="0" t="0" r="0" b="0"/>
+          <a:blip xmlns:r="http://schemas.openxmlformats.org/officeDocument/2006/relationships" xmlns:a="http://schemas.openxmlformats.org/drawingml/2006/main" r:embed="Re991553cae8e4053"/>
+          <a:srcRect xmlns:a="http://schemas.openxmlformats.org/drawingml/2006/main" l="0" t="27" r="0" b="27"/>
           <a:stretch xmlns:a="http://schemas.openxmlformats.org/drawingml/2006/main">
             <a:fillRect l="0" t="0" r="0" b="0"/>
           </a:stretch>
@@ -5050,7 +5956,7 @@
           <p:cNvPr id="2" name="">
             <a:extLst xmlns:a="http://schemas.openxmlformats.org/drawingml/2006/main">
               <a:ext uri="{FF2B5EF4-FFF2-40B4-BE49-F238E27FC236}">
-                <a16:creationId xmlns:a16="http://schemas.microsoft.com/office/drawing/2014/main" id="{393B4E12-68A5-4EFB-A76F-1330B0AD6DDE}"/>
+                <a16:creationId xmlns:a16="http://schemas.microsoft.com/office/drawing/2014/main" id="{E9B356A8-B1C9-44ED-B53B-68810D26CB1B}"/>
               </a:ext>
             </a:extLst>
           </p:cNvPr>
@@ -5087,7 +5993,7 @@
           <p:cNvPr id="3" name="">
             <a:extLst xmlns:a="http://schemas.openxmlformats.org/drawingml/2006/main">
               <a:ext uri="{FF2B5EF4-FFF2-40B4-BE49-F238E27FC236}">
-                <a16:creationId xmlns:a16="http://schemas.microsoft.com/office/drawing/2014/main" id="{982A2506-DE6C-4C6B-BA64-E16AAE59B13D}"/>
+                <a16:creationId xmlns:a16="http://schemas.microsoft.com/office/drawing/2014/main" id="{7DC01701-254F-4B70-9D6E-7C652851FD7D}"/>
               </a:ext>
             </a:extLst>
           </p:cNvPr>
@@ -5144,7 +6050,7 @@
           <p:cNvPr id="4" name="">
             <a:extLst xmlns:a="http://schemas.openxmlformats.org/drawingml/2006/main">
               <a:ext uri="{FF2B5EF4-FFF2-40B4-BE49-F238E27FC236}">
-                <a16:creationId xmlns:a16="http://schemas.microsoft.com/office/drawing/2014/main" id="{998C27CF-5CA8-448E-A80C-281DAA25B91A}"/>
+                <a16:creationId xmlns:a16="http://schemas.microsoft.com/office/drawing/2014/main" id="{1C44A82E-BD1F-4CB0-A33B-B795572BE614}"/>
               </a:ext>
             </a:extLst>
           </p:cNvPr>
@@ -5191,7 +6097,7 @@
                 <a:ea typeface="Microsoft YaHei"/>
                 <a:cs typeface="Microsoft YaHei"/>
               </a:rPr>
-              <a:t>同一平台回应三类需求</a:t>
+              <a:t>学生端、企业端、项目端协同服务</a:t>
             </a:r>
           </a:p>
         </p:txBody>
@@ -5201,7 +6107,7 @@
           <p:cNvPr id="5" name="">
             <a:extLst xmlns:a="http://schemas.openxmlformats.org/drawingml/2006/main">
               <a:ext uri="{FF2B5EF4-FFF2-40B4-BE49-F238E27FC236}">
-                <a16:creationId xmlns:a16="http://schemas.microsoft.com/office/drawing/2014/main" id="{7A972D3D-D540-4045-B143-5FCE6473A375}"/>
+                <a16:creationId xmlns:a16="http://schemas.microsoft.com/office/drawing/2014/main" id="{9C514A53-8AF9-43DD-A2D9-43A84AC2DEEA}"/>
               </a:ext>
             </a:extLst>
           </p:cNvPr>
@@ -5262,7 +6168,7 @@
           <p:cNvPr id="6" name="">
             <a:extLst xmlns:a="http://schemas.openxmlformats.org/drawingml/2006/main">
               <a:ext uri="{FF2B5EF4-FFF2-40B4-BE49-F238E27FC236}">
-                <a16:creationId xmlns:a16="http://schemas.microsoft.com/office/drawing/2014/main" id="{AEEB50A3-1C96-4BE4-8DB7-36B8F3C62FEF}"/>
+                <a16:creationId xmlns:a16="http://schemas.microsoft.com/office/drawing/2014/main" id="{C93DBF7D-BD7C-42F7-9E07-2FBF6B2FDD82}"/>
               </a:ext>
             </a:extLst>
           </p:cNvPr>
@@ -5301,7 +6207,7 @@
           <p:cNvPr id="7" name="">
             <a:extLst xmlns:a="http://schemas.openxmlformats.org/drawingml/2006/main">
               <a:ext uri="{FF2B5EF4-FFF2-40B4-BE49-F238E27FC236}">
-                <a16:creationId xmlns:a16="http://schemas.microsoft.com/office/drawing/2014/main" id="{11AFA14F-EF33-4524-B525-BCB66BACBF7C}"/>
+                <a16:creationId xmlns:a16="http://schemas.microsoft.com/office/drawing/2014/main" id="{D631310D-47CD-4AF8-BDC9-6741C68D3B10}"/>
               </a:ext>
             </a:extLst>
           </p:cNvPr>
@@ -5358,7 +6264,7 @@
           <p:cNvPr id="8" name="">
             <a:extLst xmlns:a="http://schemas.openxmlformats.org/drawingml/2006/main">
               <a:ext uri="{FF2B5EF4-FFF2-40B4-BE49-F238E27FC236}">
-                <a16:creationId xmlns:a16="http://schemas.microsoft.com/office/drawing/2014/main" id="{247EDF21-5422-400C-8BC7-EA3F0F7C11C5}"/>
+                <a16:creationId xmlns:a16="http://schemas.microsoft.com/office/drawing/2014/main" id="{39F966A5-7E26-490E-B9D5-ED4258661E79}"/>
               </a:ext>
             </a:extLst>
           </p:cNvPr>
@@ -5405,7 +6311,7 @@
                 <a:ea typeface="Microsoft YaHei"/>
                 <a:cs typeface="Microsoft YaHei"/>
               </a:rPr>
-              <a:t>新生</a:t>
+              <a:t>学生端</a:t>
             </a:r>
           </a:p>
         </p:txBody>
@@ -5415,19 +6321,19 @@
           <p:cNvPr id="9" name="">
             <a:extLst xmlns:a="http://schemas.openxmlformats.org/drawingml/2006/main">
               <a:ext uri="{FF2B5EF4-FFF2-40B4-BE49-F238E27FC236}">
-                <a16:creationId xmlns:a16="http://schemas.microsoft.com/office/drawing/2014/main" id="{44DE7CAF-D6DC-4F31-9BC2-78BB3360CD9A}"/>
-              </a:ext>
-            </a:extLst>
-          </p:cNvPr>
-          <p:cNvSpPr>
-            <a:spLocks xmlns:a="http://schemas.openxmlformats.org/drawingml/2006/main" noGrp="1"/>
-          </p:cNvSpPr>
-          <p:nvPr/>
-        </p:nvSpPr>
-        <p:spPr>
-          <a:xfrm xmlns:a="http://schemas.openxmlformats.org/drawingml/2006/main">
-            <a:off x="1000125" y="4048125"/>
-            <a:ext cx="2714625" cy="476250"/>
+                <a16:creationId xmlns:a16="http://schemas.microsoft.com/office/drawing/2014/main" id="{0479E94A-E7BA-4BD9-8029-DC74A559D52D}"/>
+              </a:ext>
+            </a:extLst>
+          </p:cNvPr>
+          <p:cNvSpPr>
+            <a:spLocks xmlns:a="http://schemas.openxmlformats.org/drawingml/2006/main" noGrp="1"/>
+          </p:cNvSpPr>
+          <p:nvPr/>
+        </p:nvSpPr>
+        <p:spPr>
+          <a:xfrm xmlns:a="http://schemas.openxmlformats.org/drawingml/2006/main">
+            <a:off x="1000125" y="4000500"/>
+            <a:ext cx="2762250" cy="685800"/>
           </a:xfrm>
           <a:prstGeom xmlns:a="http://schemas.openxmlformats.org/drawingml/2006/main" prst="rect">
             <a:avLst/>
@@ -5444,25 +6350,48 @@
           <a:lstStyle xmlns:a="http://schemas.openxmlformats.org/drawingml/2006/main"/>
           <a:p xmlns:a="http://schemas.openxmlformats.org/drawingml/2006/main">
             <a:pPr>
-              <a:defRPr sz="1575" b="0">
-                <a:solidFill>
-                  <a:srgbClr val="F5F7FF"/>
-                </a:solidFill>
-                <a:latin typeface="Microsoft YaHei"/>
-                <a:ea typeface="Microsoft YaHei"/>
-                <a:cs typeface="Microsoft YaHei"/>
-              </a:defRPr>
-            </a:pPr>
-            <a:r>
-              <a:rPr sz="1575" b="0">
-                <a:solidFill>
-                  <a:srgbClr val="F5F7FF"/>
-                </a:solidFill>
-                <a:latin typeface="Microsoft YaHei"/>
-                <a:ea typeface="Microsoft YaHei"/>
-                <a:cs typeface="Microsoft YaHei"/>
-              </a:rPr>
-              <a:t>不清楚岗位要求与学习路径</a:t>
+              <a:defRPr sz="1500" b="0">
+                <a:solidFill>
+                  <a:srgbClr val="F5F7FF"/>
+                </a:solidFill>
+                <a:latin typeface="Microsoft YaHei"/>
+                <a:ea typeface="Microsoft YaHei"/>
+                <a:cs typeface="Microsoft YaHei"/>
+              </a:defRPr>
+            </a:pPr>
+            <a:r>
+              <a:rPr sz="1500" b="0">
+                <a:solidFill>
+                  <a:srgbClr val="F5F7FF"/>
+                </a:solidFill>
+                <a:latin typeface="Microsoft YaHei"/>
+                <a:ea typeface="Microsoft YaHei"/>
+                <a:cs typeface="Microsoft YaHei"/>
+              </a:rPr>
+              <a:t>新生：了解岗位与学习方向</a:t>
+            </a:r>
+          </a:p>
+          <a:p xmlns:a="http://schemas.openxmlformats.org/drawingml/2006/main">
+            <a:pPr>
+              <a:defRPr sz="1500" b="0">
+                <a:solidFill>
+                  <a:srgbClr val="F5F7FF"/>
+                </a:solidFill>
+                <a:latin typeface="Microsoft YaHei"/>
+                <a:ea typeface="Microsoft YaHei"/>
+                <a:cs typeface="Microsoft YaHei"/>
+              </a:defRPr>
+            </a:pPr>
+            <a:r>
+              <a:rPr sz="1500" b="0">
+                <a:solidFill>
+                  <a:srgbClr val="F5F7FF"/>
+                </a:solidFill>
+                <a:latin typeface="Microsoft YaHei"/>
+                <a:ea typeface="Microsoft YaHei"/>
+                <a:cs typeface="Microsoft YaHei"/>
+              </a:rPr>
+              <a:t>毕业生：面试训练与反馈</a:t>
             </a:r>
           </a:p>
         </p:txBody>
@@ -5472,19 +6401,19 @@
           <p:cNvPr id="10" name="">
             <a:extLst xmlns:a="http://schemas.openxmlformats.org/drawingml/2006/main">
               <a:ext uri="{FF2B5EF4-FFF2-40B4-BE49-F238E27FC236}">
-                <a16:creationId xmlns:a16="http://schemas.microsoft.com/office/drawing/2014/main" id="{30051919-98E2-4733-9964-7595983ACFF6}"/>
-              </a:ext>
-            </a:extLst>
-          </p:cNvPr>
-          <p:cNvSpPr>
-            <a:spLocks xmlns:a="http://schemas.openxmlformats.org/drawingml/2006/main" noGrp="1"/>
-          </p:cNvSpPr>
-          <p:nvPr/>
-        </p:nvSpPr>
-        <p:spPr>
-          <a:xfrm xmlns:a="http://schemas.openxmlformats.org/drawingml/2006/main">
-            <a:off x="1000125" y="4810125"/>
-            <a:ext cx="2714625" cy="476250"/>
+                <a16:creationId xmlns:a16="http://schemas.microsoft.com/office/drawing/2014/main" id="{002E3F5B-B80B-4879-A067-7864303C0D00}"/>
+              </a:ext>
+            </a:extLst>
+          </p:cNvPr>
+          <p:cNvSpPr>
+            <a:spLocks xmlns:a="http://schemas.openxmlformats.org/drawingml/2006/main" noGrp="1"/>
+          </p:cNvSpPr>
+          <p:nvPr/>
+        </p:nvSpPr>
+        <p:spPr>
+          <a:xfrm xmlns:a="http://schemas.openxmlformats.org/drawingml/2006/main">
+            <a:off x="1000125" y="4905375"/>
+            <a:ext cx="2762250" cy="419100"/>
           </a:xfrm>
           <a:prstGeom xmlns:a="http://schemas.openxmlformats.org/drawingml/2006/main" prst="rect">
             <a:avLst/>
@@ -5501,7 +6430,7 @@
           <a:lstStyle xmlns:a="http://schemas.openxmlformats.org/drawingml/2006/main"/>
           <a:p xmlns:a="http://schemas.openxmlformats.org/drawingml/2006/main">
             <a:pPr>
-              <a:defRPr sz="1575" b="0">
+              <a:defRPr sz="1425" b="0">
                 <a:solidFill>
                   <a:srgbClr val="7CFFCB"/>
                 </a:solidFill>
@@ -5511,7 +6440,7 @@
               </a:defRPr>
             </a:pPr>
             <a:r>
-              <a:rPr sz="1575" b="0">
+              <a:rPr sz="1425" b="0">
                 <a:solidFill>
                   <a:srgbClr val="7CFFCB"/>
                 </a:solidFill>
@@ -5519,7 +6448,7 @@
                 <a:ea typeface="Microsoft YaHei"/>
                 <a:cs typeface="Microsoft YaHei"/>
               </a:rPr>
-              <a:t>岗位地图与分年级路径</a:t>
+              <a:t>职业规划 · 训练 · 成长追踪</a:t>
             </a:r>
           </a:p>
         </p:txBody>
@@ -5529,7 +6458,7 @@
           <p:cNvPr id="11" name="">
             <a:extLst xmlns:a="http://schemas.openxmlformats.org/drawingml/2006/main">
               <a:ext uri="{FF2B5EF4-FFF2-40B4-BE49-F238E27FC236}">
-                <a16:creationId xmlns:a16="http://schemas.microsoft.com/office/drawing/2014/main" id="{48041137-28E7-48D4-93AB-B2A559DF4E3B}"/>
+                <a16:creationId xmlns:a16="http://schemas.microsoft.com/office/drawing/2014/main" id="{9D9E0AAC-E554-4922-9F36-C6F59C420A1A}"/>
               </a:ext>
             </a:extLst>
           </p:cNvPr>
@@ -5568,7 +6497,7 @@
           <p:cNvPr id="12" name="">
             <a:extLst xmlns:a="http://schemas.openxmlformats.org/drawingml/2006/main">
               <a:ext uri="{FF2B5EF4-FFF2-40B4-BE49-F238E27FC236}">
-                <a16:creationId xmlns:a16="http://schemas.microsoft.com/office/drawing/2014/main" id="{80691AFE-DE20-4EF3-8157-8390B8F89D36}"/>
+                <a16:creationId xmlns:a16="http://schemas.microsoft.com/office/drawing/2014/main" id="{C21DD0FC-958B-4774-BDCA-4FE52ECA7797}"/>
               </a:ext>
             </a:extLst>
           </p:cNvPr>
@@ -5599,7 +6528,7 @@
             <a:pPr>
               <a:defRPr sz="5025" b="1">
                 <a:solidFill>
-                  <a:srgbClr val="FF7AD9"/>
+                  <a:srgbClr val="7CFFCB"/>
                 </a:solidFill>
                 <a:latin typeface="Microsoft YaHei"/>
                 <a:ea typeface="Microsoft YaHei"/>
@@ -5609,7 +6538,7 @@
             <a:r>
               <a:rPr sz="5025" b="1">
                 <a:solidFill>
-                  <a:srgbClr val="FF7AD9"/>
+                  <a:srgbClr val="7CFFCB"/>
                 </a:solidFill>
                 <a:latin typeface="Microsoft YaHei"/>
                 <a:ea typeface="Microsoft YaHei"/>
@@ -5625,7 +6554,7 @@
           <p:cNvPr id="13" name="">
             <a:extLst xmlns:a="http://schemas.openxmlformats.org/drawingml/2006/main">
               <a:ext uri="{FF2B5EF4-FFF2-40B4-BE49-F238E27FC236}">
-                <a16:creationId xmlns:a16="http://schemas.microsoft.com/office/drawing/2014/main" id="{28F668D6-4251-4E2C-BD4A-CD0B3BF3072D}"/>
+                <a16:creationId xmlns:a16="http://schemas.microsoft.com/office/drawing/2014/main" id="{3415F82E-5FD1-480C-A39A-7CB0197E4EAC}"/>
               </a:ext>
             </a:extLst>
           </p:cNvPr>
@@ -5672,7 +6601,7 @@
                 <a:ea typeface="Microsoft YaHei"/>
                 <a:cs typeface="Microsoft YaHei"/>
               </a:rPr>
-              <a:t>毕业生</a:t>
+              <a:t>企业端</a:t>
             </a:r>
           </a:p>
         </p:txBody>
@@ -5682,19 +6611,19 @@
           <p:cNvPr id="14" name="">
             <a:extLst xmlns:a="http://schemas.openxmlformats.org/drawingml/2006/main">
               <a:ext uri="{FF2B5EF4-FFF2-40B4-BE49-F238E27FC236}">
-                <a16:creationId xmlns:a16="http://schemas.microsoft.com/office/drawing/2014/main" id="{DB7ADC2F-F1E4-4F5B-A1D9-9EA10CE7B4E0}"/>
-              </a:ext>
-            </a:extLst>
-          </p:cNvPr>
-          <p:cNvSpPr>
-            <a:spLocks xmlns:a="http://schemas.openxmlformats.org/drawingml/2006/main" noGrp="1"/>
-          </p:cNvSpPr>
-          <p:nvPr/>
-        </p:nvSpPr>
-        <p:spPr>
-          <a:xfrm xmlns:a="http://schemas.openxmlformats.org/drawingml/2006/main">
-            <a:off x="4667250" y="4048125"/>
-            <a:ext cx="2714625" cy="476250"/>
+                <a16:creationId xmlns:a16="http://schemas.microsoft.com/office/drawing/2014/main" id="{3451D598-FAF1-4F43-93E2-CA86C257A933}"/>
+              </a:ext>
+            </a:extLst>
+          </p:cNvPr>
+          <p:cNvSpPr>
+            <a:spLocks xmlns:a="http://schemas.openxmlformats.org/drawingml/2006/main" noGrp="1"/>
+          </p:cNvSpPr>
+          <p:nvPr/>
+        </p:nvSpPr>
+        <p:spPr>
+          <a:xfrm xmlns:a="http://schemas.openxmlformats.org/drawingml/2006/main">
+            <a:off x="4667250" y="4000500"/>
+            <a:ext cx="2762250" cy="685800"/>
           </a:xfrm>
           <a:prstGeom xmlns:a="http://schemas.openxmlformats.org/drawingml/2006/main" prst="rect">
             <a:avLst/>
@@ -5711,25 +6640,48 @@
           <a:lstStyle xmlns:a="http://schemas.openxmlformats.org/drawingml/2006/main"/>
           <a:p xmlns:a="http://schemas.openxmlformats.org/drawingml/2006/main">
             <a:pPr>
-              <a:defRPr sz="1575" b="0">
-                <a:solidFill>
-                  <a:srgbClr val="F5F7FF"/>
-                </a:solidFill>
-                <a:latin typeface="Microsoft YaHei"/>
-                <a:ea typeface="Microsoft YaHei"/>
-                <a:cs typeface="Microsoft YaHei"/>
-              </a:defRPr>
-            </a:pPr>
-            <a:r>
-              <a:rPr sz="1575" b="0">
-                <a:solidFill>
-                  <a:srgbClr val="F5F7FF"/>
-                </a:solidFill>
-                <a:latin typeface="Microsoft YaHei"/>
-                <a:ea typeface="Microsoft YaHei"/>
-                <a:cs typeface="Microsoft YaHei"/>
-              </a:rPr>
-              <a:t>缺少接近岗位的面试训练</a:t>
+              <a:defRPr sz="1500" b="0">
+                <a:solidFill>
+                  <a:srgbClr val="F5F7FF"/>
+                </a:solidFill>
+                <a:latin typeface="Microsoft YaHei"/>
+                <a:ea typeface="Microsoft YaHei"/>
+                <a:cs typeface="Microsoft YaHei"/>
+              </a:defRPr>
+            </a:pPr>
+            <a:r>
+              <a:rPr sz="1500" b="0">
+                <a:solidFill>
+                  <a:srgbClr val="F5F7FF"/>
+                </a:solidFill>
+                <a:latin typeface="Microsoft YaHei"/>
+                <a:ea typeface="Microsoft YaHei"/>
+                <a:cs typeface="Microsoft YaHei"/>
+              </a:rPr>
+              <a:t>发布岗位要求与评估标准</a:t>
+            </a:r>
+          </a:p>
+          <a:p xmlns:a="http://schemas.openxmlformats.org/drawingml/2006/main">
+            <a:pPr>
+              <a:defRPr sz="1500" b="0">
+                <a:solidFill>
+                  <a:srgbClr val="F5F7FF"/>
+                </a:solidFill>
+                <a:latin typeface="Microsoft YaHei"/>
+                <a:ea typeface="Microsoft YaHei"/>
+                <a:cs typeface="Microsoft YaHei"/>
+              </a:defRPr>
+            </a:pPr>
+            <a:r>
+              <a:rPr sz="1500" b="0">
+                <a:solidFill>
+                  <a:srgbClr val="F5F7FF"/>
+                </a:solidFill>
+                <a:latin typeface="Microsoft YaHei"/>
+                <a:ea typeface="Microsoft YaHei"/>
+                <a:cs typeface="Microsoft YaHei"/>
+              </a:rPr>
+              <a:t>查看候选表现与报告依据</a:t>
             </a:r>
           </a:p>
         </p:txBody>
@@ -5739,19 +6691,19 @@
           <p:cNvPr id="15" name="">
             <a:extLst xmlns:a="http://schemas.openxmlformats.org/drawingml/2006/main">
               <a:ext uri="{FF2B5EF4-FFF2-40B4-BE49-F238E27FC236}">
-                <a16:creationId xmlns:a16="http://schemas.microsoft.com/office/drawing/2014/main" id="{A61D4844-5DEB-4E5F-AC0F-80C7DABDFE03}"/>
-              </a:ext>
-            </a:extLst>
-          </p:cNvPr>
-          <p:cNvSpPr>
-            <a:spLocks xmlns:a="http://schemas.openxmlformats.org/drawingml/2006/main" noGrp="1"/>
-          </p:cNvSpPr>
-          <p:nvPr/>
-        </p:nvSpPr>
-        <p:spPr>
-          <a:xfrm xmlns:a="http://schemas.openxmlformats.org/drawingml/2006/main">
-            <a:off x="4667250" y="4810125"/>
-            <a:ext cx="2714625" cy="476250"/>
+                <a16:creationId xmlns:a16="http://schemas.microsoft.com/office/drawing/2014/main" id="{4449C2EA-8CF8-4DC9-8D23-B5443479F56F}"/>
+              </a:ext>
+            </a:extLst>
+          </p:cNvPr>
+          <p:cNvSpPr>
+            <a:spLocks xmlns:a="http://schemas.openxmlformats.org/drawingml/2006/main" noGrp="1"/>
+          </p:cNvSpPr>
+          <p:nvPr/>
+        </p:nvSpPr>
+        <p:spPr>
+          <a:xfrm xmlns:a="http://schemas.openxmlformats.org/drawingml/2006/main">
+            <a:off x="4667250" y="4905375"/>
+            <a:ext cx="2762250" cy="419100"/>
           </a:xfrm>
           <a:prstGeom xmlns:a="http://schemas.openxmlformats.org/drawingml/2006/main" prst="rect">
             <a:avLst/>
@@ -5768,7 +6720,7 @@
           <a:lstStyle xmlns:a="http://schemas.openxmlformats.org/drawingml/2006/main"/>
           <a:p xmlns:a="http://schemas.openxmlformats.org/drawingml/2006/main">
             <a:pPr>
-              <a:defRPr sz="1575" b="0">
+              <a:defRPr sz="1425" b="0">
                 <a:solidFill>
                   <a:srgbClr val="7CFFCB"/>
                 </a:solidFill>
@@ -5778,7 +6730,7 @@
               </a:defRPr>
             </a:pPr>
             <a:r>
-              <a:rPr sz="1575" b="0">
+              <a:rPr sz="1425" b="0">
                 <a:solidFill>
                   <a:srgbClr val="7CFFCB"/>
                 </a:solidFill>
@@ -5786,7 +6738,7 @@
                 <a:ea typeface="Microsoft YaHei"/>
                 <a:cs typeface="Microsoft YaHei"/>
               </a:rPr>
-              <a:t>模拟面试与可解释报告</a:t>
+              <a:t>岗位配置 · 候选比较 · 初筛</a:t>
             </a:r>
           </a:p>
         </p:txBody>
@@ -5796,7 +6748,7 @@
           <p:cNvPr id="16" name="">
             <a:extLst xmlns:a="http://schemas.openxmlformats.org/drawingml/2006/main">
               <a:ext uri="{FF2B5EF4-FFF2-40B4-BE49-F238E27FC236}">
-                <a16:creationId xmlns:a16="http://schemas.microsoft.com/office/drawing/2014/main" id="{BA4685DF-24CA-4C8E-A108-C6BB013C10C5}"/>
+                <a16:creationId xmlns:a16="http://schemas.microsoft.com/office/drawing/2014/main" id="{E1422671-3C46-4CBA-AC4C-E93DBC56B57C}"/>
               </a:ext>
             </a:extLst>
           </p:cNvPr>
@@ -5835,7 +6787,7 @@
           <p:cNvPr id="17" name="">
             <a:extLst xmlns:a="http://schemas.openxmlformats.org/drawingml/2006/main">
               <a:ext uri="{FF2B5EF4-FFF2-40B4-BE49-F238E27FC236}">
-                <a16:creationId xmlns:a16="http://schemas.microsoft.com/office/drawing/2014/main" id="{DB2DEC53-502A-43B2-8EB2-2EE772B8D93F}"/>
+                <a16:creationId xmlns:a16="http://schemas.microsoft.com/office/drawing/2014/main" id="{DC5F5133-E4C9-44CE-8BD3-81F7F11E07D3}"/>
               </a:ext>
             </a:extLst>
           </p:cNvPr>
@@ -5892,7 +6844,7 @@
           <p:cNvPr id="18" name="">
             <a:extLst xmlns:a="http://schemas.openxmlformats.org/drawingml/2006/main">
               <a:ext uri="{FF2B5EF4-FFF2-40B4-BE49-F238E27FC236}">
-                <a16:creationId xmlns:a16="http://schemas.microsoft.com/office/drawing/2014/main" id="{1FCEFFC0-5710-4654-A881-B8BA50C0FDB7}"/>
+                <a16:creationId xmlns:a16="http://schemas.microsoft.com/office/drawing/2014/main" id="{979F7742-BB87-4965-8486-7DF21BB1C223}"/>
               </a:ext>
             </a:extLst>
           </p:cNvPr>
@@ -5939,7 +6891,7 @@
                 <a:ea typeface="Microsoft YaHei"/>
                 <a:cs typeface="Microsoft YaHei"/>
               </a:rPr>
-              <a:t>企业</a:t>
+              <a:t>项目端</a:t>
             </a:r>
           </a:p>
         </p:txBody>
@@ -5949,19 +6901,19 @@
           <p:cNvPr id="19" name="">
             <a:extLst xmlns:a="http://schemas.openxmlformats.org/drawingml/2006/main">
               <a:ext uri="{FF2B5EF4-FFF2-40B4-BE49-F238E27FC236}">
-                <a16:creationId xmlns:a16="http://schemas.microsoft.com/office/drawing/2014/main" id="{AAC7FC1D-2329-4DE1-87DF-B186E00E7B97}"/>
-              </a:ext>
-            </a:extLst>
-          </p:cNvPr>
-          <p:cNvSpPr>
-            <a:spLocks xmlns:a="http://schemas.openxmlformats.org/drawingml/2006/main" noGrp="1"/>
-          </p:cNvSpPr>
-          <p:nvPr/>
-        </p:nvSpPr>
-        <p:spPr>
-          <a:xfrm xmlns:a="http://schemas.openxmlformats.org/drawingml/2006/main">
-            <a:off x="8334375" y="4048125"/>
-            <a:ext cx="2714625" cy="476250"/>
+                <a16:creationId xmlns:a16="http://schemas.microsoft.com/office/drawing/2014/main" id="{764EFEF9-765A-4AC6-934B-8E2E6EF62AA7}"/>
+              </a:ext>
+            </a:extLst>
+          </p:cNvPr>
+          <p:cNvSpPr>
+            <a:spLocks xmlns:a="http://schemas.openxmlformats.org/drawingml/2006/main" noGrp="1"/>
+          </p:cNvSpPr>
+          <p:nvPr/>
+        </p:nvSpPr>
+        <p:spPr>
+          <a:xfrm xmlns:a="http://schemas.openxmlformats.org/drawingml/2006/main">
+            <a:off x="8334375" y="4000500"/>
+            <a:ext cx="2762250" cy="685800"/>
           </a:xfrm>
           <a:prstGeom xmlns:a="http://schemas.openxmlformats.org/drawingml/2006/main" prst="rect">
             <a:avLst/>
@@ -5978,25 +6930,48 @@
           <a:lstStyle xmlns:a="http://schemas.openxmlformats.org/drawingml/2006/main"/>
           <a:p xmlns:a="http://schemas.openxmlformats.org/drawingml/2006/main">
             <a:pPr>
-              <a:defRPr sz="1575" b="0">
-                <a:solidFill>
-                  <a:srgbClr val="F5F7FF"/>
-                </a:solidFill>
-                <a:latin typeface="Microsoft YaHei"/>
-                <a:ea typeface="Microsoft YaHei"/>
-                <a:cs typeface="Microsoft YaHei"/>
-              </a:defRPr>
-            </a:pPr>
-            <a:r>
-              <a:rPr sz="1575" b="0">
-                <a:solidFill>
-                  <a:srgbClr val="F5F7FF"/>
-                </a:solidFill>
-                <a:latin typeface="Microsoft YaHei"/>
-                <a:ea typeface="Microsoft YaHei"/>
-                <a:cs typeface="Microsoft YaHei"/>
-              </a:rPr>
-              <a:t>初筛信息分散、难以追溯</a:t>
+              <a:defRPr sz="1500" b="0">
+                <a:solidFill>
+                  <a:srgbClr val="F5F7FF"/>
+                </a:solidFill>
+                <a:latin typeface="Microsoft YaHei"/>
+                <a:ea typeface="Microsoft YaHei"/>
+                <a:cs typeface="Microsoft YaHei"/>
+              </a:defRPr>
+            </a:pPr>
+            <a:r>
+              <a:rPr sz="1500" b="0">
+                <a:solidFill>
+                  <a:srgbClr val="F5F7FF"/>
+                </a:solidFill>
+                <a:latin typeface="Microsoft YaHei"/>
+                <a:ea typeface="Microsoft YaHei"/>
+                <a:cs typeface="Microsoft YaHei"/>
+              </a:rPr>
+              <a:t>贯通学生训练与企业筛选</a:t>
+            </a:r>
+          </a:p>
+          <a:p xmlns:a="http://schemas.openxmlformats.org/drawingml/2006/main">
+            <a:pPr>
+              <a:defRPr sz="1500" b="0">
+                <a:solidFill>
+                  <a:srgbClr val="F5F7FF"/>
+                </a:solidFill>
+                <a:latin typeface="Microsoft YaHei"/>
+                <a:ea typeface="Microsoft YaHei"/>
+                <a:cs typeface="Microsoft YaHei"/>
+              </a:defRPr>
+            </a:pPr>
+            <a:r>
+              <a:rPr sz="1500" b="0">
+                <a:solidFill>
+                  <a:srgbClr val="F5F7FF"/>
+                </a:solidFill>
+                <a:latin typeface="Microsoft YaHei"/>
+                <a:ea typeface="Microsoft YaHei"/>
+                <a:cs typeface="Microsoft YaHei"/>
+              </a:rPr>
+              <a:t>形成可落地、可推广的方案</a:t>
             </a:r>
           </a:p>
         </p:txBody>
@@ -6006,19 +6981,19 @@
           <p:cNvPr id="20" name="">
             <a:extLst xmlns:a="http://schemas.openxmlformats.org/drawingml/2006/main">
               <a:ext uri="{FF2B5EF4-FFF2-40B4-BE49-F238E27FC236}">
-                <a16:creationId xmlns:a16="http://schemas.microsoft.com/office/drawing/2014/main" id="{F4911CF6-8EF4-4C68-8FBC-D1B464A5E456}"/>
-              </a:ext>
-            </a:extLst>
-          </p:cNvPr>
-          <p:cNvSpPr>
-            <a:spLocks xmlns:a="http://schemas.openxmlformats.org/drawingml/2006/main" noGrp="1"/>
-          </p:cNvSpPr>
-          <p:nvPr/>
-        </p:nvSpPr>
-        <p:spPr>
-          <a:xfrm xmlns:a="http://schemas.openxmlformats.org/drawingml/2006/main">
-            <a:off x="8334375" y="4810125"/>
-            <a:ext cx="2714625" cy="476250"/>
+                <a16:creationId xmlns:a16="http://schemas.microsoft.com/office/drawing/2014/main" id="{AA518AE0-8D3A-477C-9FFE-FEB7A759BB9A}"/>
+              </a:ext>
+            </a:extLst>
+          </p:cNvPr>
+          <p:cNvSpPr>
+            <a:spLocks xmlns:a="http://schemas.openxmlformats.org/drawingml/2006/main" noGrp="1"/>
+          </p:cNvSpPr>
+          <p:nvPr/>
+        </p:nvSpPr>
+        <p:spPr>
+          <a:xfrm xmlns:a="http://schemas.openxmlformats.org/drawingml/2006/main">
+            <a:off x="8334375" y="4905375"/>
+            <a:ext cx="2762250" cy="419100"/>
           </a:xfrm>
           <a:prstGeom xmlns:a="http://schemas.openxmlformats.org/drawingml/2006/main" prst="rect">
             <a:avLst/>
@@ -6035,7 +7010,7 @@
           <a:lstStyle xmlns:a="http://schemas.openxmlformats.org/drawingml/2006/main"/>
           <a:p xmlns:a="http://schemas.openxmlformats.org/drawingml/2006/main">
             <a:pPr>
-              <a:defRPr sz="1575" b="0">
+              <a:defRPr sz="1425" b="0">
                 <a:solidFill>
                   <a:srgbClr val="7CFFCB"/>
                 </a:solidFill>
@@ -6045,7 +7020,7 @@
               </a:defRPr>
             </a:pPr>
             <a:r>
-              <a:rPr sz="1575" b="0">
+              <a:rPr sz="1425" b="0">
                 <a:solidFill>
                   <a:srgbClr val="7CFFCB"/>
                 </a:solidFill>
@@ -6053,7 +7028,7 @@
                 <a:ea typeface="Microsoft YaHei"/>
                 <a:cs typeface="Microsoft YaHei"/>
               </a:rPr>
-              <a:t>同源报告与候选排序</a:t>
+              <a:t>双向闭环 · 岗位适配 · 复用</a:t>
             </a:r>
           </a:p>
         </p:txBody>
@@ -6061,7 +7036,7 @@
     </p:spTree>
     <p:extLst>
       <p:ext uri="{BB962C8B-B14F-4D97-AF65-F5344CB8AC3E}">
-        <p14:creationId xmlns:p14="http://schemas.microsoft.com/office/powerpoint/2010/main" val="953997900"/>
+        <p14:creationId xmlns:p14="http://schemas.microsoft.com/office/powerpoint/2010/main" val="1576518652"/>
       </p:ext>
     </p:extLst>
   </p:cSld>
@@ -6099,8 +7074,8 @@
           <p:nvPr/>
         </p:nvPicPr>
         <p:blipFill>
-          <a:blip xmlns:r="http://schemas.openxmlformats.org/officeDocument/2006/relationships" xmlns:a="http://schemas.openxmlformats.org/drawingml/2006/main" r:embed="R7ac5e0bd7eb3413a"/>
-          <a:srcRect xmlns:a="http://schemas.openxmlformats.org/drawingml/2006/main" l="0" t="0" r="0" b="0"/>
+          <a:blip xmlns:r="http://schemas.openxmlformats.org/officeDocument/2006/relationships" xmlns:a="http://schemas.openxmlformats.org/drawingml/2006/main" r:embed="R8c87df8c45c54858"/>
+          <a:srcRect xmlns:a="http://schemas.openxmlformats.org/drawingml/2006/main" l="0" t="27" r="0" b="27"/>
           <a:stretch xmlns:a="http://schemas.openxmlformats.org/drawingml/2006/main">
             <a:fillRect l="0" t="0" r="0" b="0"/>
           </a:stretch>
@@ -6120,7 +7095,7 @@
           <p:cNvPr id="2" name="">
             <a:extLst xmlns:a="http://schemas.openxmlformats.org/drawingml/2006/main">
               <a:ext uri="{FF2B5EF4-FFF2-40B4-BE49-F238E27FC236}">
-                <a16:creationId xmlns:a16="http://schemas.microsoft.com/office/drawing/2014/main" id="{C090082A-A9BA-44C8-999A-F62EF30A3AB8}"/>
+                <a16:creationId xmlns:a16="http://schemas.microsoft.com/office/drawing/2014/main" id="{9B8A08CC-C52B-410E-828B-3C01C4FF1429}"/>
               </a:ext>
             </a:extLst>
           </p:cNvPr>
@@ -6157,7 +7132,7 @@
           <p:cNvPr id="3" name="">
             <a:extLst xmlns:a="http://schemas.openxmlformats.org/drawingml/2006/main">
               <a:ext uri="{FF2B5EF4-FFF2-40B4-BE49-F238E27FC236}">
-                <a16:creationId xmlns:a16="http://schemas.microsoft.com/office/drawing/2014/main" id="{9869B06F-3FC5-4218-A7A7-20A9C21607C7}"/>
+                <a16:creationId xmlns:a16="http://schemas.microsoft.com/office/drawing/2014/main" id="{E22A5CBD-8D8C-428E-8B2A-7A16B7B1C2C5}"/>
               </a:ext>
             </a:extLst>
           </p:cNvPr>
@@ -6214,7 +7189,7 @@
           <p:cNvPr id="4" name="">
             <a:extLst xmlns:a="http://schemas.openxmlformats.org/drawingml/2006/main">
               <a:ext uri="{FF2B5EF4-FFF2-40B4-BE49-F238E27FC236}">
-                <a16:creationId xmlns:a16="http://schemas.microsoft.com/office/drawing/2014/main" id="{5E2D2C45-844F-476E-ACAA-D41735838FA9}"/>
+                <a16:creationId xmlns:a16="http://schemas.microsoft.com/office/drawing/2014/main" id="{025E0C72-DB3E-4BB6-A756-82B6EE3B268C}"/>
               </a:ext>
             </a:extLst>
           </p:cNvPr>
@@ -6261,7 +7236,7 @@
                 <a:ea typeface="Microsoft YaHei"/>
                 <a:cs typeface="Microsoft YaHei"/>
               </a:rPr>
-              <a:t>三端共用一条训练数据链</a:t>
+              <a:t>学生训练与企业筛选形成双向闭环</a:t>
             </a:r>
           </a:p>
         </p:txBody>
@@ -6271,7 +7246,7 @@
           <p:cNvPr id="5" name="">
             <a:extLst xmlns:a="http://schemas.openxmlformats.org/drawingml/2006/main">
               <a:ext uri="{FF2B5EF4-FFF2-40B4-BE49-F238E27FC236}">
-                <a16:creationId xmlns:a16="http://schemas.microsoft.com/office/drawing/2014/main" id="{BC4D0393-0063-469D-B351-E1E8A5DABD59}"/>
+                <a16:creationId xmlns:a16="http://schemas.microsoft.com/office/drawing/2014/main" id="{87BDE561-C2FC-461B-B5C2-B6D6885A1AB9}"/>
               </a:ext>
             </a:extLst>
           </p:cNvPr>
@@ -6332,7 +7307,7 @@
           <p:cNvPr id="6" name="">
             <a:extLst xmlns:a="http://schemas.openxmlformats.org/drawingml/2006/main">
               <a:ext uri="{FF2B5EF4-FFF2-40B4-BE49-F238E27FC236}">
-                <a16:creationId xmlns:a16="http://schemas.microsoft.com/office/drawing/2014/main" id="{1D8189E2-B20C-4BE3-AD2B-45820CC0E8A5}"/>
+                <a16:creationId xmlns:a16="http://schemas.microsoft.com/office/drawing/2014/main" id="{DE4ED448-62CA-448B-8D93-D10B34E5C054}"/>
               </a:ext>
             </a:extLst>
           </p:cNvPr>
@@ -6371,35 +7346,35 @@
           <p:cNvPr id="7" name="">
             <a:extLst xmlns:a="http://schemas.openxmlformats.org/drawingml/2006/main">
               <a:ext uri="{FF2B5EF4-FFF2-40B4-BE49-F238E27FC236}">
-                <a16:creationId xmlns:a16="http://schemas.microsoft.com/office/drawing/2014/main" id="{89EA1AEA-D8AB-4F3B-9BBF-F370E80D5D8E}"/>
-              </a:ext>
-            </a:extLst>
-          </p:cNvPr>
-          <p:cNvSpPr>
-            <a:spLocks xmlns:a="http://schemas.openxmlformats.org/drawingml/2006/main" noGrp="1"/>
-          </p:cNvSpPr>
-          <p:nvPr/>
-        </p:nvSpPr>
-        <p:spPr>
-          <a:xfrm xmlns:a="http://schemas.openxmlformats.org/drawingml/2006/main">
-            <a:off x="800100" y="2838450"/>
-            <a:ext cx="1524000" cy="419100"/>
-          </a:xfrm>
-          <a:prstGeom xmlns:a="http://schemas.openxmlformats.org/drawingml/2006/main" prst="rect">
-            <a:avLst/>
-          </a:prstGeom>
-          <a:noFill xmlns:a="http://schemas.openxmlformats.org/drawingml/2006/main"/>
-          <a:ln xmlns:a="http://schemas.openxmlformats.org/drawingml/2006/main" w="0">
-            <a:noFill/>
-          </a:ln>
-        </p:spPr>
-        <p:txBody>
-          <a:bodyPr xmlns:a="http://schemas.openxmlformats.org/drawingml/2006/main">
-            <a:noAutofit/>
-          </a:bodyPr>
-          <a:lstStyle xmlns:a="http://schemas.openxmlformats.org/drawingml/2006/main"/>
-          <a:p xmlns:a="http://schemas.openxmlformats.org/drawingml/2006/main">
-            <a:pPr>
+                <a16:creationId xmlns:a16="http://schemas.microsoft.com/office/drawing/2014/main" id="{E9AC5B3F-FF32-4553-8F46-7693CDCE92EF}"/>
+              </a:ext>
+            </a:extLst>
+          </p:cNvPr>
+          <p:cNvSpPr>
+            <a:spLocks xmlns:a="http://schemas.openxmlformats.org/drawingml/2006/main" noGrp="1"/>
+          </p:cNvSpPr>
+          <p:nvPr/>
+        </p:nvSpPr>
+        <p:spPr>
+          <a:xfrm xmlns:a="http://schemas.openxmlformats.org/drawingml/2006/main">
+            <a:off x="742950" y="2676525"/>
+            <a:ext cx="1619250" cy="714375"/>
+          </a:xfrm>
+          <a:prstGeom xmlns:a="http://schemas.openxmlformats.org/drawingml/2006/main" prst="rect">
+            <a:avLst/>
+          </a:prstGeom>
+          <a:noFill xmlns:a="http://schemas.openxmlformats.org/drawingml/2006/main"/>
+          <a:ln xmlns:a="http://schemas.openxmlformats.org/drawingml/2006/main" w="0">
+            <a:noFill/>
+          </a:ln>
+        </p:spPr>
+        <p:txBody>
+          <a:bodyPr xmlns:a="http://schemas.openxmlformats.org/drawingml/2006/main" anchor="ctr">
+            <a:noAutofit/>
+          </a:bodyPr>
+          <a:lstStyle xmlns:a="http://schemas.openxmlformats.org/drawingml/2006/main"/>
+          <a:p xmlns:a="http://schemas.openxmlformats.org/drawingml/2006/main">
+            <a:pPr algn="ctr">
               <a:defRPr sz="2025" b="1">
                 <a:solidFill>
                   <a:srgbClr val="F5F7FF"/>
@@ -6428,7 +7403,7 @@
           <p:cNvPr id="8" name="">
             <a:extLst xmlns:a="http://schemas.openxmlformats.org/drawingml/2006/main">
               <a:ext uri="{FF2B5EF4-FFF2-40B4-BE49-F238E27FC236}">
-                <a16:creationId xmlns:a16="http://schemas.microsoft.com/office/drawing/2014/main" id="{67FEA6CE-099D-4179-852B-6AA8658F69A7}"/>
+                <a16:creationId xmlns:a16="http://schemas.microsoft.com/office/drawing/2014/main" id="{B01C494D-6EA5-4BDA-89B8-180AC0BEBCCF}"/>
               </a:ext>
             </a:extLst>
           </p:cNvPr>
@@ -6461,7 +7436,7 @@
           <p:cNvPr id="9" name="">
             <a:extLst xmlns:a="http://schemas.openxmlformats.org/drawingml/2006/main">
               <a:ext uri="{FF2B5EF4-FFF2-40B4-BE49-F238E27FC236}">
-                <a16:creationId xmlns:a16="http://schemas.microsoft.com/office/drawing/2014/main" id="{BC679F77-B409-47C4-9AF5-5C2B40BE067B}"/>
+                <a16:creationId xmlns:a16="http://schemas.microsoft.com/office/drawing/2014/main" id="{658FC63C-3DF2-479C-8B16-96E1468FEC20}"/>
               </a:ext>
             </a:extLst>
           </p:cNvPr>
@@ -6518,7 +7493,7 @@
           <p:cNvPr id="10" name="">
             <a:extLst xmlns:a="http://schemas.openxmlformats.org/drawingml/2006/main">
               <a:ext uri="{FF2B5EF4-FFF2-40B4-BE49-F238E27FC236}">
-                <a16:creationId xmlns:a16="http://schemas.microsoft.com/office/drawing/2014/main" id="{62A07E2E-997E-4FCB-8A55-57E7A331EB2F}"/>
+                <a16:creationId xmlns:a16="http://schemas.microsoft.com/office/drawing/2014/main" id="{6ADE1F67-29FB-45BB-BD44-24255DBF095F}"/>
               </a:ext>
             </a:extLst>
           </p:cNvPr>
@@ -6557,35 +7532,35 @@
           <p:cNvPr id="11" name="">
             <a:extLst xmlns:a="http://schemas.openxmlformats.org/drawingml/2006/main">
               <a:ext uri="{FF2B5EF4-FFF2-40B4-BE49-F238E27FC236}">
-                <a16:creationId xmlns:a16="http://schemas.microsoft.com/office/drawing/2014/main" id="{A0EC438D-05A6-4A25-B00A-E97CECE276CA}"/>
-              </a:ext>
-            </a:extLst>
-          </p:cNvPr>
-          <p:cNvSpPr>
-            <a:spLocks xmlns:a="http://schemas.openxmlformats.org/drawingml/2006/main" noGrp="1"/>
-          </p:cNvSpPr>
-          <p:nvPr/>
-        </p:nvSpPr>
-        <p:spPr>
-          <a:xfrm xmlns:a="http://schemas.openxmlformats.org/drawingml/2006/main">
-            <a:off x="3105150" y="2838450"/>
-            <a:ext cx="1524000" cy="419100"/>
-          </a:xfrm>
-          <a:prstGeom xmlns:a="http://schemas.openxmlformats.org/drawingml/2006/main" prst="rect">
-            <a:avLst/>
-          </a:prstGeom>
-          <a:noFill xmlns:a="http://schemas.openxmlformats.org/drawingml/2006/main"/>
-          <a:ln xmlns:a="http://schemas.openxmlformats.org/drawingml/2006/main" w="0">
-            <a:noFill/>
-          </a:ln>
-        </p:spPr>
-        <p:txBody>
-          <a:bodyPr xmlns:a="http://schemas.openxmlformats.org/drawingml/2006/main">
-            <a:noAutofit/>
-          </a:bodyPr>
-          <a:lstStyle xmlns:a="http://schemas.openxmlformats.org/drawingml/2006/main"/>
-          <a:p xmlns:a="http://schemas.openxmlformats.org/drawingml/2006/main">
-            <a:pPr>
+                <a16:creationId xmlns:a16="http://schemas.microsoft.com/office/drawing/2014/main" id="{CC3AEBD6-C7C5-4974-B50B-47624956845C}"/>
+              </a:ext>
+            </a:extLst>
+          </p:cNvPr>
+          <p:cNvSpPr>
+            <a:spLocks xmlns:a="http://schemas.openxmlformats.org/drawingml/2006/main" noGrp="1"/>
+          </p:cNvSpPr>
+          <p:nvPr/>
+        </p:nvSpPr>
+        <p:spPr>
+          <a:xfrm xmlns:a="http://schemas.openxmlformats.org/drawingml/2006/main">
+            <a:off x="3048000" y="2676525"/>
+            <a:ext cx="1619250" cy="714375"/>
+          </a:xfrm>
+          <a:prstGeom xmlns:a="http://schemas.openxmlformats.org/drawingml/2006/main" prst="rect">
+            <a:avLst/>
+          </a:prstGeom>
+          <a:noFill xmlns:a="http://schemas.openxmlformats.org/drawingml/2006/main"/>
+          <a:ln xmlns:a="http://schemas.openxmlformats.org/drawingml/2006/main" w="0">
+            <a:noFill/>
+          </a:ln>
+        </p:spPr>
+        <p:txBody>
+          <a:bodyPr xmlns:a="http://schemas.openxmlformats.org/drawingml/2006/main" anchor="ctr">
+            <a:noAutofit/>
+          </a:bodyPr>
+          <a:lstStyle xmlns:a="http://schemas.openxmlformats.org/drawingml/2006/main"/>
+          <a:p xmlns:a="http://schemas.openxmlformats.org/drawingml/2006/main">
+            <a:pPr algn="ctr">
               <a:defRPr sz="2025" b="1">
                 <a:solidFill>
                   <a:srgbClr val="F5F7FF"/>
@@ -6614,7 +7589,7 @@
           <p:cNvPr id="12" name="">
             <a:extLst xmlns:a="http://schemas.openxmlformats.org/drawingml/2006/main">
               <a:ext uri="{FF2B5EF4-FFF2-40B4-BE49-F238E27FC236}">
-                <a16:creationId xmlns:a16="http://schemas.microsoft.com/office/drawing/2014/main" id="{90660B7D-6A80-42F9-84C1-017359C7FB30}"/>
+                <a16:creationId xmlns:a16="http://schemas.microsoft.com/office/drawing/2014/main" id="{48089FFA-40DA-4257-BF1C-A7738D114CFE}"/>
               </a:ext>
             </a:extLst>
           </p:cNvPr>
@@ -6647,7 +7622,7 @@
           <p:cNvPr id="13" name="">
             <a:extLst xmlns:a="http://schemas.openxmlformats.org/drawingml/2006/main">
               <a:ext uri="{FF2B5EF4-FFF2-40B4-BE49-F238E27FC236}">
-                <a16:creationId xmlns:a16="http://schemas.microsoft.com/office/drawing/2014/main" id="{303290DC-D9C1-4ED4-B302-EF486375058C}"/>
+                <a16:creationId xmlns:a16="http://schemas.microsoft.com/office/drawing/2014/main" id="{3B89F015-D7D2-4664-97CA-2EAD3D1DC3EF}"/>
               </a:ext>
             </a:extLst>
           </p:cNvPr>
@@ -6704,7 +7679,7 @@
           <p:cNvPr id="14" name="">
             <a:extLst xmlns:a="http://schemas.openxmlformats.org/drawingml/2006/main">
               <a:ext uri="{FF2B5EF4-FFF2-40B4-BE49-F238E27FC236}">
-                <a16:creationId xmlns:a16="http://schemas.microsoft.com/office/drawing/2014/main" id="{B0F65489-604A-40CE-9C0A-C08A90AA044B}"/>
+                <a16:creationId xmlns:a16="http://schemas.microsoft.com/office/drawing/2014/main" id="{D044B727-0FD4-4459-8272-5286DF795DA7}"/>
               </a:ext>
             </a:extLst>
           </p:cNvPr>
@@ -6743,35 +7718,35 @@
           <p:cNvPr id="15" name="">
             <a:extLst xmlns:a="http://schemas.openxmlformats.org/drawingml/2006/main">
               <a:ext uri="{FF2B5EF4-FFF2-40B4-BE49-F238E27FC236}">
-                <a16:creationId xmlns:a16="http://schemas.microsoft.com/office/drawing/2014/main" id="{0910A8C6-6C6E-47D4-9549-970DAA6F880F}"/>
-              </a:ext>
-            </a:extLst>
-          </p:cNvPr>
-          <p:cNvSpPr>
-            <a:spLocks xmlns:a="http://schemas.openxmlformats.org/drawingml/2006/main" noGrp="1"/>
-          </p:cNvSpPr>
-          <p:nvPr/>
-        </p:nvSpPr>
-        <p:spPr>
-          <a:xfrm xmlns:a="http://schemas.openxmlformats.org/drawingml/2006/main">
-            <a:off x="5410200" y="2838450"/>
-            <a:ext cx="1524000" cy="419100"/>
-          </a:xfrm>
-          <a:prstGeom xmlns:a="http://schemas.openxmlformats.org/drawingml/2006/main" prst="rect">
-            <a:avLst/>
-          </a:prstGeom>
-          <a:noFill xmlns:a="http://schemas.openxmlformats.org/drawingml/2006/main"/>
-          <a:ln xmlns:a="http://schemas.openxmlformats.org/drawingml/2006/main" w="0">
-            <a:noFill/>
-          </a:ln>
-        </p:spPr>
-        <p:txBody>
-          <a:bodyPr xmlns:a="http://schemas.openxmlformats.org/drawingml/2006/main">
-            <a:noAutofit/>
-          </a:bodyPr>
-          <a:lstStyle xmlns:a="http://schemas.openxmlformats.org/drawingml/2006/main"/>
-          <a:p xmlns:a="http://schemas.openxmlformats.org/drawingml/2006/main">
-            <a:pPr>
+                <a16:creationId xmlns:a16="http://schemas.microsoft.com/office/drawing/2014/main" id="{4E8DAAFB-DB6B-478C-9CE4-07CD949C2EE0}"/>
+              </a:ext>
+            </a:extLst>
+          </p:cNvPr>
+          <p:cNvSpPr>
+            <a:spLocks xmlns:a="http://schemas.openxmlformats.org/drawingml/2006/main" noGrp="1"/>
+          </p:cNvSpPr>
+          <p:nvPr/>
+        </p:nvSpPr>
+        <p:spPr>
+          <a:xfrm xmlns:a="http://schemas.openxmlformats.org/drawingml/2006/main">
+            <a:off x="5353050" y="2676525"/>
+            <a:ext cx="1619250" cy="714375"/>
+          </a:xfrm>
+          <a:prstGeom xmlns:a="http://schemas.openxmlformats.org/drawingml/2006/main" prst="rect">
+            <a:avLst/>
+          </a:prstGeom>
+          <a:noFill xmlns:a="http://schemas.openxmlformats.org/drawingml/2006/main"/>
+          <a:ln xmlns:a="http://schemas.openxmlformats.org/drawingml/2006/main" w="0">
+            <a:noFill/>
+          </a:ln>
+        </p:spPr>
+        <p:txBody>
+          <a:bodyPr xmlns:a="http://schemas.openxmlformats.org/drawingml/2006/main" anchor="ctr">
+            <a:noAutofit/>
+          </a:bodyPr>
+          <a:lstStyle xmlns:a="http://schemas.openxmlformats.org/drawingml/2006/main"/>
+          <a:p xmlns:a="http://schemas.openxmlformats.org/drawingml/2006/main">
+            <a:pPr algn="ctr">
               <a:defRPr sz="2025" b="1">
                 <a:solidFill>
                   <a:srgbClr val="F5F7FF"/>
@@ -6800,7 +7775,7 @@
           <p:cNvPr id="16" name="">
             <a:extLst xmlns:a="http://schemas.openxmlformats.org/drawingml/2006/main">
               <a:ext uri="{FF2B5EF4-FFF2-40B4-BE49-F238E27FC236}">
-                <a16:creationId xmlns:a16="http://schemas.microsoft.com/office/drawing/2014/main" id="{4E20759D-346A-4B9B-B182-4700023A09BC}"/>
+                <a16:creationId xmlns:a16="http://schemas.microsoft.com/office/drawing/2014/main" id="{D3E5ED78-2CE5-4C1C-8492-CB1939A0A5F0}"/>
               </a:ext>
             </a:extLst>
           </p:cNvPr>
@@ -6833,7 +7808,7 @@
           <p:cNvPr id="17" name="">
             <a:extLst xmlns:a="http://schemas.openxmlformats.org/drawingml/2006/main">
               <a:ext uri="{FF2B5EF4-FFF2-40B4-BE49-F238E27FC236}">
-                <a16:creationId xmlns:a16="http://schemas.microsoft.com/office/drawing/2014/main" id="{BBA33BCC-3B87-4B59-955C-738FF8B5670C}"/>
+                <a16:creationId xmlns:a16="http://schemas.microsoft.com/office/drawing/2014/main" id="{927120A8-73CE-46DE-9891-9377A9A9E887}"/>
               </a:ext>
             </a:extLst>
           </p:cNvPr>
@@ -6890,7 +7865,7 @@
           <p:cNvPr id="18" name="">
             <a:extLst xmlns:a="http://schemas.openxmlformats.org/drawingml/2006/main">
               <a:ext uri="{FF2B5EF4-FFF2-40B4-BE49-F238E27FC236}">
-                <a16:creationId xmlns:a16="http://schemas.microsoft.com/office/drawing/2014/main" id="{E9155450-E92F-453D-99EF-717FC00A7FAD}"/>
+                <a16:creationId xmlns:a16="http://schemas.microsoft.com/office/drawing/2014/main" id="{7E0941C2-4461-499B-AD47-9CFEF4C83644}"/>
               </a:ext>
             </a:extLst>
           </p:cNvPr>
@@ -6929,35 +7904,35 @@
           <p:cNvPr id="19" name="">
             <a:extLst xmlns:a="http://schemas.openxmlformats.org/drawingml/2006/main">
               <a:ext uri="{FF2B5EF4-FFF2-40B4-BE49-F238E27FC236}">
-                <a16:creationId xmlns:a16="http://schemas.microsoft.com/office/drawing/2014/main" id="{F155A61D-D355-4569-9B00-512616CFE923}"/>
-              </a:ext>
-            </a:extLst>
-          </p:cNvPr>
-          <p:cNvSpPr>
-            <a:spLocks xmlns:a="http://schemas.openxmlformats.org/drawingml/2006/main" noGrp="1"/>
-          </p:cNvSpPr>
-          <p:nvPr/>
-        </p:nvSpPr>
-        <p:spPr>
-          <a:xfrm xmlns:a="http://schemas.openxmlformats.org/drawingml/2006/main">
-            <a:off x="7715250" y="2838450"/>
-            <a:ext cx="1524000" cy="419100"/>
-          </a:xfrm>
-          <a:prstGeom xmlns:a="http://schemas.openxmlformats.org/drawingml/2006/main" prst="rect">
-            <a:avLst/>
-          </a:prstGeom>
-          <a:noFill xmlns:a="http://schemas.openxmlformats.org/drawingml/2006/main"/>
-          <a:ln xmlns:a="http://schemas.openxmlformats.org/drawingml/2006/main" w="0">
-            <a:noFill/>
-          </a:ln>
-        </p:spPr>
-        <p:txBody>
-          <a:bodyPr xmlns:a="http://schemas.openxmlformats.org/drawingml/2006/main">
-            <a:noAutofit/>
-          </a:bodyPr>
-          <a:lstStyle xmlns:a="http://schemas.openxmlformats.org/drawingml/2006/main"/>
-          <a:p xmlns:a="http://schemas.openxmlformats.org/drawingml/2006/main">
-            <a:pPr>
+                <a16:creationId xmlns:a16="http://schemas.microsoft.com/office/drawing/2014/main" id="{3D537559-05E7-43AD-BD99-EE448CF8F076}"/>
+              </a:ext>
+            </a:extLst>
+          </p:cNvPr>
+          <p:cNvSpPr>
+            <a:spLocks xmlns:a="http://schemas.openxmlformats.org/drawingml/2006/main" noGrp="1"/>
+          </p:cNvSpPr>
+          <p:nvPr/>
+        </p:nvSpPr>
+        <p:spPr>
+          <a:xfrm xmlns:a="http://schemas.openxmlformats.org/drawingml/2006/main">
+            <a:off x="7658100" y="2676525"/>
+            <a:ext cx="1619250" cy="714375"/>
+          </a:xfrm>
+          <a:prstGeom xmlns:a="http://schemas.openxmlformats.org/drawingml/2006/main" prst="rect">
+            <a:avLst/>
+          </a:prstGeom>
+          <a:noFill xmlns:a="http://schemas.openxmlformats.org/drawingml/2006/main"/>
+          <a:ln xmlns:a="http://schemas.openxmlformats.org/drawingml/2006/main" w="0">
+            <a:noFill/>
+          </a:ln>
+        </p:spPr>
+        <p:txBody>
+          <a:bodyPr xmlns:a="http://schemas.openxmlformats.org/drawingml/2006/main" anchor="ctr">
+            <a:noAutofit/>
+          </a:bodyPr>
+          <a:lstStyle xmlns:a="http://schemas.openxmlformats.org/drawingml/2006/main"/>
+          <a:p xmlns:a="http://schemas.openxmlformats.org/drawingml/2006/main">
+            <a:pPr algn="ctr">
               <a:defRPr sz="2025" b="1">
                 <a:solidFill>
                   <a:srgbClr val="F5F7FF"/>
@@ -6986,7 +7961,7 @@
           <p:cNvPr id="20" name="">
             <a:extLst xmlns:a="http://schemas.openxmlformats.org/drawingml/2006/main">
               <a:ext uri="{FF2B5EF4-FFF2-40B4-BE49-F238E27FC236}">
-                <a16:creationId xmlns:a16="http://schemas.microsoft.com/office/drawing/2014/main" id="{365264B2-C3C8-4524-ADF4-597BD0DA7D83}"/>
+                <a16:creationId xmlns:a16="http://schemas.microsoft.com/office/drawing/2014/main" id="{DDD9B301-51FF-43EA-B003-1D3E81977FA3}"/>
               </a:ext>
             </a:extLst>
           </p:cNvPr>
@@ -7019,7 +7994,7 @@
           <p:cNvPr id="21" name="">
             <a:extLst xmlns:a="http://schemas.openxmlformats.org/drawingml/2006/main">
               <a:ext uri="{FF2B5EF4-FFF2-40B4-BE49-F238E27FC236}">
-                <a16:creationId xmlns:a16="http://schemas.microsoft.com/office/drawing/2014/main" id="{34C23278-F99F-4F4B-B7D5-46F5F849641D}"/>
+                <a16:creationId xmlns:a16="http://schemas.microsoft.com/office/drawing/2014/main" id="{4018CBD3-1EA3-4B72-B217-83A22C3E3BAC}"/>
               </a:ext>
             </a:extLst>
           </p:cNvPr>
@@ -7076,7 +8051,7 @@
           <p:cNvPr id="22" name="">
             <a:extLst xmlns:a="http://schemas.openxmlformats.org/drawingml/2006/main">
               <a:ext uri="{FF2B5EF4-FFF2-40B4-BE49-F238E27FC236}">
-                <a16:creationId xmlns:a16="http://schemas.microsoft.com/office/drawing/2014/main" id="{2FF9F699-FBC1-4D7B-9674-507D2AFFCAAA}"/>
+                <a16:creationId xmlns:a16="http://schemas.microsoft.com/office/drawing/2014/main" id="{F69AAFEF-CB29-4707-B18D-3233FB352040}"/>
               </a:ext>
             </a:extLst>
           </p:cNvPr>
@@ -7115,35 +8090,35 @@
           <p:cNvPr id="23" name="">
             <a:extLst xmlns:a="http://schemas.openxmlformats.org/drawingml/2006/main">
               <a:ext uri="{FF2B5EF4-FFF2-40B4-BE49-F238E27FC236}">
-                <a16:creationId xmlns:a16="http://schemas.microsoft.com/office/drawing/2014/main" id="{DFFF32A1-F7C3-4E71-AC77-F7FB92D3E357}"/>
-              </a:ext>
-            </a:extLst>
-          </p:cNvPr>
-          <p:cNvSpPr>
-            <a:spLocks xmlns:a="http://schemas.openxmlformats.org/drawingml/2006/main" noGrp="1"/>
-          </p:cNvSpPr>
-          <p:nvPr/>
-        </p:nvSpPr>
-        <p:spPr>
-          <a:xfrm xmlns:a="http://schemas.openxmlformats.org/drawingml/2006/main">
-            <a:off x="10020300" y="2838450"/>
-            <a:ext cx="1524000" cy="419100"/>
-          </a:xfrm>
-          <a:prstGeom xmlns:a="http://schemas.openxmlformats.org/drawingml/2006/main" prst="rect">
-            <a:avLst/>
-          </a:prstGeom>
-          <a:noFill xmlns:a="http://schemas.openxmlformats.org/drawingml/2006/main"/>
-          <a:ln xmlns:a="http://schemas.openxmlformats.org/drawingml/2006/main" w="0">
-            <a:noFill/>
-          </a:ln>
-        </p:spPr>
-        <p:txBody>
-          <a:bodyPr xmlns:a="http://schemas.openxmlformats.org/drawingml/2006/main">
-            <a:noAutofit/>
-          </a:bodyPr>
-          <a:lstStyle xmlns:a="http://schemas.openxmlformats.org/drawingml/2006/main"/>
-          <a:p xmlns:a="http://schemas.openxmlformats.org/drawingml/2006/main">
-            <a:pPr>
+                <a16:creationId xmlns:a16="http://schemas.microsoft.com/office/drawing/2014/main" id="{24BCA0E5-340C-43CB-AE09-A1423E4ADEC4}"/>
+              </a:ext>
+            </a:extLst>
+          </p:cNvPr>
+          <p:cNvSpPr>
+            <a:spLocks xmlns:a="http://schemas.openxmlformats.org/drawingml/2006/main" noGrp="1"/>
+          </p:cNvSpPr>
+          <p:nvPr/>
+        </p:nvSpPr>
+        <p:spPr>
+          <a:xfrm xmlns:a="http://schemas.openxmlformats.org/drawingml/2006/main">
+            <a:off x="9963150" y="2676525"/>
+            <a:ext cx="1619250" cy="714375"/>
+          </a:xfrm>
+          <a:prstGeom xmlns:a="http://schemas.openxmlformats.org/drawingml/2006/main" prst="rect">
+            <a:avLst/>
+          </a:prstGeom>
+          <a:noFill xmlns:a="http://schemas.openxmlformats.org/drawingml/2006/main"/>
+          <a:ln xmlns:a="http://schemas.openxmlformats.org/drawingml/2006/main" w="0">
+            <a:noFill/>
+          </a:ln>
+        </p:spPr>
+        <p:txBody>
+          <a:bodyPr xmlns:a="http://schemas.openxmlformats.org/drawingml/2006/main" anchor="ctr">
+            <a:noAutofit/>
+          </a:bodyPr>
+          <a:lstStyle xmlns:a="http://schemas.openxmlformats.org/drawingml/2006/main"/>
+          <a:p xmlns:a="http://schemas.openxmlformats.org/drawingml/2006/main">
+            <a:pPr algn="ctr">
               <a:defRPr sz="2025" b="1">
                 <a:solidFill>
                   <a:srgbClr val="F5F7FF"/>
@@ -7172,7 +8147,7 @@
           <p:cNvPr id="24" name="">
             <a:extLst xmlns:a="http://schemas.openxmlformats.org/drawingml/2006/main">
               <a:ext uri="{FF2B5EF4-FFF2-40B4-BE49-F238E27FC236}">
-                <a16:creationId xmlns:a16="http://schemas.microsoft.com/office/drawing/2014/main" id="{12F8C85A-E318-4E0D-B50E-91A11335CEFB}"/>
+                <a16:creationId xmlns:a16="http://schemas.microsoft.com/office/drawing/2014/main" id="{E0B8B6C6-5228-4925-8E46-2817FFEE694D}"/>
               </a:ext>
             </a:extLst>
           </p:cNvPr>
@@ -7219,7 +8194,7 @@
                 <a:ea typeface="Microsoft YaHei"/>
                 <a:cs typeface="Microsoft YaHei"/>
               </a:rPr>
-              <a:t>新生进入岗位训练后，沿用同一学生身份</a:t>
+              <a:t>企业设置岗位要求 → 学生按岗位训练 → 报告回流企业初筛</a:t>
             </a:r>
           </a:p>
         </p:txBody>
@@ -7229,7 +8204,7 @@
           <p:cNvPr id="25" name="">
             <a:extLst xmlns:a="http://schemas.openxmlformats.org/drawingml/2006/main">
               <a:ext uri="{FF2B5EF4-FFF2-40B4-BE49-F238E27FC236}">
-                <a16:creationId xmlns:a16="http://schemas.microsoft.com/office/drawing/2014/main" id="{BD2D8578-B4AE-4D57-B96F-B43B68CEF18D}"/>
+                <a16:creationId xmlns:a16="http://schemas.microsoft.com/office/drawing/2014/main" id="{D782E7C1-766B-4B6B-9001-4E1A01DF7415}"/>
               </a:ext>
             </a:extLst>
           </p:cNvPr>
@@ -7276,7 +8251,7 @@
                 <a:ea typeface="Microsoft YaHei"/>
                 <a:cs typeface="Microsoft YaHei"/>
               </a:rPr>
-              <a:t>企业端候选数据来自学生真实会话与报告</a:t>
+              <a:t>项目端贯通题库、训练与报告；学生按建议再次训练</a:t>
             </a:r>
           </a:p>
         </p:txBody>
@@ -7284,7 +8259,7 @@
     </p:spTree>
     <p:extLst>
       <p:ext uri="{BB962C8B-B14F-4D97-AF65-F5344CB8AC3E}">
-        <p14:creationId xmlns:p14="http://schemas.microsoft.com/office/powerpoint/2010/main" val="638178284"/>
+        <p14:creationId xmlns:p14="http://schemas.microsoft.com/office/powerpoint/2010/main" val="1954395467"/>
       </p:ext>
     </p:extLst>
   </p:cSld>
@@ -7322,8 +8297,8 @@
           <p:nvPr/>
         </p:nvPicPr>
         <p:blipFill>
-          <a:blip xmlns:r="http://schemas.openxmlformats.org/officeDocument/2006/relationships" xmlns:a="http://schemas.openxmlformats.org/drawingml/2006/main" r:embed="Rb550b24ec465414c"/>
-          <a:srcRect xmlns:a="http://schemas.openxmlformats.org/drawingml/2006/main" l="0" t="0" r="0" b="0"/>
+          <a:blip xmlns:r="http://schemas.openxmlformats.org/officeDocument/2006/relationships" xmlns:a="http://schemas.openxmlformats.org/drawingml/2006/main" r:embed="Ra379e927ef984d29"/>
+          <a:srcRect xmlns:a="http://schemas.openxmlformats.org/drawingml/2006/main" l="0" t="27" r="0" b="27"/>
           <a:stretch xmlns:a="http://schemas.openxmlformats.org/drawingml/2006/main">
             <a:fillRect l="0" t="0" r="0" b="0"/>
           </a:stretch>
@@ -7343,7 +8318,7 @@
           <p:cNvPr id="2" name="">
             <a:extLst xmlns:a="http://schemas.openxmlformats.org/drawingml/2006/main">
               <a:ext uri="{FF2B5EF4-FFF2-40B4-BE49-F238E27FC236}">
-                <a16:creationId xmlns:a16="http://schemas.microsoft.com/office/drawing/2014/main" id="{ADA88B30-13D3-4189-8FED-E6CC56F19CC7}"/>
+                <a16:creationId xmlns:a16="http://schemas.microsoft.com/office/drawing/2014/main" id="{A0DA854C-84DD-4447-B8C5-6139AC732B5D}"/>
               </a:ext>
             </a:extLst>
           </p:cNvPr>
@@ -7380,7 +8355,7 @@
           <p:cNvPr id="3" name="">
             <a:extLst xmlns:a="http://schemas.openxmlformats.org/drawingml/2006/main">
               <a:ext uri="{FF2B5EF4-FFF2-40B4-BE49-F238E27FC236}">
-                <a16:creationId xmlns:a16="http://schemas.microsoft.com/office/drawing/2014/main" id="{D14A643F-7DA4-46E4-9A9C-F0EE7FB9FA14}"/>
+                <a16:creationId xmlns:a16="http://schemas.microsoft.com/office/drawing/2014/main" id="{E68DB5CC-E150-454D-878E-FB674037672B}"/>
               </a:ext>
             </a:extLst>
           </p:cNvPr>
@@ -7437,7 +8412,7 @@
           <p:cNvPr id="4" name="">
             <a:extLst xmlns:a="http://schemas.openxmlformats.org/drawingml/2006/main">
               <a:ext uri="{FF2B5EF4-FFF2-40B4-BE49-F238E27FC236}">
-                <a16:creationId xmlns:a16="http://schemas.microsoft.com/office/drawing/2014/main" id="{50D9DCB2-9B1F-4330-A68B-3E0DAD198126}"/>
+                <a16:creationId xmlns:a16="http://schemas.microsoft.com/office/drawing/2014/main" id="{E5A16C1B-B81F-4F42-9930-303B532FF075}"/>
               </a:ext>
             </a:extLst>
           </p:cNvPr>
@@ -7494,7 +8469,7 @@
           <p:cNvPr id="5" name="">
             <a:extLst xmlns:a="http://schemas.openxmlformats.org/drawingml/2006/main">
               <a:ext uri="{FF2B5EF4-FFF2-40B4-BE49-F238E27FC236}">
-                <a16:creationId xmlns:a16="http://schemas.microsoft.com/office/drawing/2014/main" id="{73274B3A-E550-4D32-9371-081501280C21}"/>
+                <a16:creationId xmlns:a16="http://schemas.microsoft.com/office/drawing/2014/main" id="{A7B729B1-A1E7-44BC-BC95-B7170EA0B4ED}"/>
               </a:ext>
             </a:extLst>
           </p:cNvPr>
@@ -7551,7 +8526,7 @@
           <p:cNvPr id="6" name="">
             <a:extLst xmlns:a="http://schemas.openxmlformats.org/drawingml/2006/main">
               <a:ext uri="{FF2B5EF4-FFF2-40B4-BE49-F238E27FC236}">
-                <a16:creationId xmlns:a16="http://schemas.microsoft.com/office/drawing/2014/main" id="{1156E01E-5DFC-42FA-BF87-422C798575D4}"/>
+                <a16:creationId xmlns:a16="http://schemas.microsoft.com/office/drawing/2014/main" id="{64AED57C-7204-4204-BD7C-B93C89ADB766}"/>
               </a:ext>
             </a:extLst>
           </p:cNvPr>
@@ -7608,7 +8583,7 @@
           <p:cNvPr id="7" name="">
             <a:extLst xmlns:a="http://schemas.openxmlformats.org/drawingml/2006/main">
               <a:ext uri="{FF2B5EF4-FFF2-40B4-BE49-F238E27FC236}">
-                <a16:creationId xmlns:a16="http://schemas.microsoft.com/office/drawing/2014/main" id="{430C9FBB-EB91-4723-922F-450AED4ECD71}"/>
+                <a16:creationId xmlns:a16="http://schemas.microsoft.com/office/drawing/2014/main" id="{2C4E9B0E-CF09-4B06-8B8E-FAAB311F806B}"/>
               </a:ext>
             </a:extLst>
           </p:cNvPr>
@@ -7667,7 +8642,7 @@
     </p:spTree>
     <p:extLst>
       <p:ext uri="{BB962C8B-B14F-4D97-AF65-F5344CB8AC3E}">
-        <p14:creationId xmlns:p14="http://schemas.microsoft.com/office/powerpoint/2010/main" val="2082907332"/>
+        <p14:creationId xmlns:p14="http://schemas.microsoft.com/office/powerpoint/2010/main" val="1423450105"/>
       </p:ext>
     </p:extLst>
   </p:cSld>
@@ -7705,8 +8680,8 @@
           <p:nvPr/>
         </p:nvPicPr>
         <p:blipFill>
-          <a:blip xmlns:r="http://schemas.openxmlformats.org/officeDocument/2006/relationships" xmlns:a="http://schemas.openxmlformats.org/drawingml/2006/main" r:embed="R958a37abea6e4c02"/>
-          <a:srcRect xmlns:a="http://schemas.openxmlformats.org/drawingml/2006/main" l="0" t="0" r="0" b="0"/>
+          <a:blip xmlns:r="http://schemas.openxmlformats.org/officeDocument/2006/relationships" xmlns:a="http://schemas.openxmlformats.org/drawingml/2006/main" r:embed="R15cb72603f704bcf"/>
+          <a:srcRect xmlns:a="http://schemas.openxmlformats.org/drawingml/2006/main" l="0" t="27" r="0" b="27"/>
           <a:stretch xmlns:a="http://schemas.openxmlformats.org/drawingml/2006/main">
             <a:fillRect l="0" t="0" r="0" b="0"/>
           </a:stretch>
@@ -7726,7 +8701,7 @@
           <p:cNvPr id="2" name="">
             <a:extLst xmlns:a="http://schemas.openxmlformats.org/drawingml/2006/main">
               <a:ext uri="{FF2B5EF4-FFF2-40B4-BE49-F238E27FC236}">
-                <a16:creationId xmlns:a16="http://schemas.microsoft.com/office/drawing/2014/main" id="{58BD9E63-E6D6-46D9-A151-A378D6A2529F}"/>
+                <a16:creationId xmlns:a16="http://schemas.microsoft.com/office/drawing/2014/main" id="{D2F38955-3C03-4279-860A-FF91264415FA}"/>
               </a:ext>
             </a:extLst>
           </p:cNvPr>
@@ -7763,7 +8738,7 @@
           <p:cNvPr id="3" name="">
             <a:extLst xmlns:a="http://schemas.openxmlformats.org/drawingml/2006/main">
               <a:ext uri="{FF2B5EF4-FFF2-40B4-BE49-F238E27FC236}">
-                <a16:creationId xmlns:a16="http://schemas.microsoft.com/office/drawing/2014/main" id="{A0516DA4-F3FC-4E96-8F19-95EC5CE1F7DE}"/>
+                <a16:creationId xmlns:a16="http://schemas.microsoft.com/office/drawing/2014/main" id="{DAB2302C-5C5A-483A-B798-07F083A4C79C}"/>
               </a:ext>
             </a:extLst>
           </p:cNvPr>
@@ -7820,7 +8795,7 @@
           <p:cNvPr id="4" name="">
             <a:extLst xmlns:a="http://schemas.openxmlformats.org/drawingml/2006/main">
               <a:ext uri="{FF2B5EF4-FFF2-40B4-BE49-F238E27FC236}">
-                <a16:creationId xmlns:a16="http://schemas.microsoft.com/office/drawing/2014/main" id="{356978C2-E37E-4619-8E6E-5C8B45551191}"/>
+                <a16:creationId xmlns:a16="http://schemas.microsoft.com/office/drawing/2014/main" id="{C8DAACA9-CB18-4AA3-819F-CF9EC33126E8}"/>
               </a:ext>
             </a:extLst>
           </p:cNvPr>
@@ -7867,7 +8842,7 @@
                 <a:ea typeface="Microsoft YaHei"/>
                 <a:cs typeface="Microsoft YaHei"/>
               </a:rPr>
-              <a:t>六题面试由服务端推进</a:t>
+              <a:t>围绕岗位要求完成一轮模拟面试</a:t>
             </a:r>
           </a:p>
         </p:txBody>
@@ -7877,7 +8852,7 @@
           <p:cNvPr id="5" name="">
             <a:extLst xmlns:a="http://schemas.openxmlformats.org/drawingml/2006/main">
               <a:ext uri="{FF2B5EF4-FFF2-40B4-BE49-F238E27FC236}">
-                <a16:creationId xmlns:a16="http://schemas.microsoft.com/office/drawing/2014/main" id="{7BE13CFC-85A3-4D5E-93AE-F4A0A2BE5D49}"/>
+                <a16:creationId xmlns:a16="http://schemas.microsoft.com/office/drawing/2014/main" id="{8B7F50DD-601D-440D-AC7A-D98110495061}"/>
               </a:ext>
             </a:extLst>
           </p:cNvPr>
@@ -7938,7 +8913,7 @@
           <p:cNvPr id="6" name="">
             <a:extLst xmlns:a="http://schemas.openxmlformats.org/drawingml/2006/main">
               <a:ext uri="{FF2B5EF4-FFF2-40B4-BE49-F238E27FC236}">
-                <a16:creationId xmlns:a16="http://schemas.microsoft.com/office/drawing/2014/main" id="{43F85E93-4CEE-47C5-83BE-C4F35E8BB9BC}"/>
+                <a16:creationId xmlns:a16="http://schemas.microsoft.com/office/drawing/2014/main" id="{8B9C5931-E56B-4597-A74C-77B5385469C8}"/>
               </a:ext>
             </a:extLst>
           </p:cNvPr>
@@ -7977,35 +8952,35 @@
           <p:cNvPr id="7" name="">
             <a:extLst xmlns:a="http://schemas.openxmlformats.org/drawingml/2006/main">
               <a:ext uri="{FF2B5EF4-FFF2-40B4-BE49-F238E27FC236}">
-                <a16:creationId xmlns:a16="http://schemas.microsoft.com/office/drawing/2014/main" id="{9DD09A38-2A30-4CF2-9D36-116ABB32C1DA}"/>
-              </a:ext>
-            </a:extLst>
-          </p:cNvPr>
-          <p:cNvSpPr>
-            <a:spLocks xmlns:a="http://schemas.openxmlformats.org/drawingml/2006/main" noGrp="1"/>
-          </p:cNvSpPr>
-          <p:nvPr/>
-        </p:nvSpPr>
-        <p:spPr>
-          <a:xfrm xmlns:a="http://schemas.openxmlformats.org/drawingml/2006/main">
-            <a:off x="1019175" y="2771775"/>
-            <a:ext cx="1952625" cy="419100"/>
-          </a:xfrm>
-          <a:prstGeom xmlns:a="http://schemas.openxmlformats.org/drawingml/2006/main" prst="rect">
-            <a:avLst/>
-          </a:prstGeom>
-          <a:noFill xmlns:a="http://schemas.openxmlformats.org/drawingml/2006/main"/>
-          <a:ln xmlns:a="http://schemas.openxmlformats.org/drawingml/2006/main" w="0">
-            <a:noFill/>
-          </a:ln>
-        </p:spPr>
-        <p:txBody>
-          <a:bodyPr xmlns:a="http://schemas.openxmlformats.org/drawingml/2006/main">
-            <a:noAutofit/>
-          </a:bodyPr>
-          <a:lstStyle xmlns:a="http://schemas.openxmlformats.org/drawingml/2006/main"/>
-          <a:p xmlns:a="http://schemas.openxmlformats.org/drawingml/2006/main">
-            <a:pPr>
+                <a16:creationId xmlns:a16="http://schemas.microsoft.com/office/drawing/2014/main" id="{70BBE9E2-FADA-4E7B-9D8A-018BF36C06CF}"/>
+              </a:ext>
+            </a:extLst>
+          </p:cNvPr>
+          <p:cNvSpPr>
+            <a:spLocks xmlns:a="http://schemas.openxmlformats.org/drawingml/2006/main" noGrp="1"/>
+          </p:cNvSpPr>
+          <p:nvPr/>
+        </p:nvSpPr>
+        <p:spPr>
+          <a:xfrm xmlns:a="http://schemas.openxmlformats.org/drawingml/2006/main">
+            <a:off x="962025" y="2609850"/>
+            <a:ext cx="2047875" cy="714375"/>
+          </a:xfrm>
+          <a:prstGeom xmlns:a="http://schemas.openxmlformats.org/drawingml/2006/main" prst="rect">
+            <a:avLst/>
+          </a:prstGeom>
+          <a:noFill xmlns:a="http://schemas.openxmlformats.org/drawingml/2006/main"/>
+          <a:ln xmlns:a="http://schemas.openxmlformats.org/drawingml/2006/main" w="0">
+            <a:noFill/>
+          </a:ln>
+        </p:spPr>
+        <p:txBody>
+          <a:bodyPr xmlns:a="http://schemas.openxmlformats.org/drawingml/2006/main" anchor="ctr">
+            <a:noAutofit/>
+          </a:bodyPr>
+          <a:lstStyle xmlns:a="http://schemas.openxmlformats.org/drawingml/2006/main"/>
+          <a:p xmlns:a="http://schemas.openxmlformats.org/drawingml/2006/main">
+            <a:pPr algn="ctr">
               <a:defRPr sz="2025" b="1">
                 <a:solidFill>
                   <a:srgbClr val="F5F7FF"/>
@@ -8034,7 +9009,7 @@
           <p:cNvPr id="8" name="">
             <a:extLst xmlns:a="http://schemas.openxmlformats.org/drawingml/2006/main">
               <a:ext uri="{FF2B5EF4-FFF2-40B4-BE49-F238E27FC236}">
-                <a16:creationId xmlns:a16="http://schemas.microsoft.com/office/drawing/2014/main" id="{B484D7B3-875E-4F31-AE40-4D11005217F3}"/>
+                <a16:creationId xmlns:a16="http://schemas.microsoft.com/office/drawing/2014/main" id="{9352A5F6-F3E5-4135-B38D-A8970E065F1F}"/>
               </a:ext>
             </a:extLst>
           </p:cNvPr>
@@ -8067,7 +9042,7 @@
           <p:cNvPr id="9" name="">
             <a:extLst xmlns:a="http://schemas.openxmlformats.org/drawingml/2006/main">
               <a:ext uri="{FF2B5EF4-FFF2-40B4-BE49-F238E27FC236}">
-                <a16:creationId xmlns:a16="http://schemas.microsoft.com/office/drawing/2014/main" id="{E8A9E0E8-F3FD-4F38-8461-22664DC90311}"/>
+                <a16:creationId xmlns:a16="http://schemas.microsoft.com/office/drawing/2014/main" id="{4D28957C-8D21-4D8F-A7AC-CD782C709633}"/>
               </a:ext>
             </a:extLst>
           </p:cNvPr>
@@ -8124,7 +9099,7 @@
           <p:cNvPr id="10" name="">
             <a:extLst xmlns:a="http://schemas.openxmlformats.org/drawingml/2006/main">
               <a:ext uri="{FF2B5EF4-FFF2-40B4-BE49-F238E27FC236}">
-                <a16:creationId xmlns:a16="http://schemas.microsoft.com/office/drawing/2014/main" id="{3F53ED84-118A-4847-8968-90053BF86FB4}"/>
+                <a16:creationId xmlns:a16="http://schemas.microsoft.com/office/drawing/2014/main" id="{C72B42BE-80D8-4403-804A-12DA7089A30C}"/>
               </a:ext>
             </a:extLst>
           </p:cNvPr>
@@ -8163,35 +9138,35 @@
           <p:cNvPr id="11" name="">
             <a:extLst xmlns:a="http://schemas.openxmlformats.org/drawingml/2006/main">
               <a:ext uri="{FF2B5EF4-FFF2-40B4-BE49-F238E27FC236}">
-                <a16:creationId xmlns:a16="http://schemas.microsoft.com/office/drawing/2014/main" id="{174AF172-3F47-4BC5-81A1-77E32B35003A}"/>
-              </a:ext>
-            </a:extLst>
-          </p:cNvPr>
-          <p:cNvSpPr>
-            <a:spLocks xmlns:a="http://schemas.openxmlformats.org/drawingml/2006/main" noGrp="1"/>
-          </p:cNvSpPr>
-          <p:nvPr/>
-        </p:nvSpPr>
-        <p:spPr>
-          <a:xfrm xmlns:a="http://schemas.openxmlformats.org/drawingml/2006/main">
-            <a:off x="3905250" y="2771775"/>
-            <a:ext cx="1952625" cy="419100"/>
-          </a:xfrm>
-          <a:prstGeom xmlns:a="http://schemas.openxmlformats.org/drawingml/2006/main" prst="rect">
-            <a:avLst/>
-          </a:prstGeom>
-          <a:noFill xmlns:a="http://schemas.openxmlformats.org/drawingml/2006/main"/>
-          <a:ln xmlns:a="http://schemas.openxmlformats.org/drawingml/2006/main" w="0">
-            <a:noFill/>
-          </a:ln>
-        </p:spPr>
-        <p:txBody>
-          <a:bodyPr xmlns:a="http://schemas.openxmlformats.org/drawingml/2006/main">
-            <a:noAutofit/>
-          </a:bodyPr>
-          <a:lstStyle xmlns:a="http://schemas.openxmlformats.org/drawingml/2006/main"/>
-          <a:p xmlns:a="http://schemas.openxmlformats.org/drawingml/2006/main">
-            <a:pPr>
+                <a16:creationId xmlns:a16="http://schemas.microsoft.com/office/drawing/2014/main" id="{BC4C4C45-6BBB-4009-91AB-0177B1471C22}"/>
+              </a:ext>
+            </a:extLst>
+          </p:cNvPr>
+          <p:cNvSpPr>
+            <a:spLocks xmlns:a="http://schemas.openxmlformats.org/drawingml/2006/main" noGrp="1"/>
+          </p:cNvSpPr>
+          <p:nvPr/>
+        </p:nvSpPr>
+        <p:spPr>
+          <a:xfrm xmlns:a="http://schemas.openxmlformats.org/drawingml/2006/main">
+            <a:off x="3848100" y="2609850"/>
+            <a:ext cx="2047875" cy="714375"/>
+          </a:xfrm>
+          <a:prstGeom xmlns:a="http://schemas.openxmlformats.org/drawingml/2006/main" prst="rect">
+            <a:avLst/>
+          </a:prstGeom>
+          <a:noFill xmlns:a="http://schemas.openxmlformats.org/drawingml/2006/main"/>
+          <a:ln xmlns:a="http://schemas.openxmlformats.org/drawingml/2006/main" w="0">
+            <a:noFill/>
+          </a:ln>
+        </p:spPr>
+        <p:txBody>
+          <a:bodyPr xmlns:a="http://schemas.openxmlformats.org/drawingml/2006/main" anchor="ctr">
+            <a:noAutofit/>
+          </a:bodyPr>
+          <a:lstStyle xmlns:a="http://schemas.openxmlformats.org/drawingml/2006/main"/>
+          <a:p xmlns:a="http://schemas.openxmlformats.org/drawingml/2006/main">
+            <a:pPr algn="ctr">
               <a:defRPr sz="2025" b="1">
                 <a:solidFill>
                   <a:srgbClr val="F5F7FF"/>
@@ -8220,7 +9195,7 @@
           <p:cNvPr id="12" name="">
             <a:extLst xmlns:a="http://schemas.openxmlformats.org/drawingml/2006/main">
               <a:ext uri="{FF2B5EF4-FFF2-40B4-BE49-F238E27FC236}">
-                <a16:creationId xmlns:a16="http://schemas.microsoft.com/office/drawing/2014/main" id="{F88AC26C-83F0-4C94-8E65-77CE45DDB3DE}"/>
+                <a16:creationId xmlns:a16="http://schemas.microsoft.com/office/drawing/2014/main" id="{B7CB67BA-C634-4A48-B7EC-DB9D7DC83F25}"/>
               </a:ext>
             </a:extLst>
           </p:cNvPr>
@@ -8253,7 +9228,7 @@
           <p:cNvPr id="13" name="">
             <a:extLst xmlns:a="http://schemas.openxmlformats.org/drawingml/2006/main">
               <a:ext uri="{FF2B5EF4-FFF2-40B4-BE49-F238E27FC236}">
-                <a16:creationId xmlns:a16="http://schemas.microsoft.com/office/drawing/2014/main" id="{78086A08-85FD-42B6-B844-FD7EEB1C1050}"/>
+                <a16:creationId xmlns:a16="http://schemas.microsoft.com/office/drawing/2014/main" id="{D2366FF5-6449-4B74-BF36-69DC9569FBD4}"/>
               </a:ext>
             </a:extLst>
           </p:cNvPr>
@@ -8310,7 +9285,7 @@
           <p:cNvPr id="14" name="">
             <a:extLst xmlns:a="http://schemas.openxmlformats.org/drawingml/2006/main">
               <a:ext uri="{FF2B5EF4-FFF2-40B4-BE49-F238E27FC236}">
-                <a16:creationId xmlns:a16="http://schemas.microsoft.com/office/drawing/2014/main" id="{5C8B86F6-C78B-42E8-AF87-729BA098D514}"/>
+                <a16:creationId xmlns:a16="http://schemas.microsoft.com/office/drawing/2014/main" id="{09FC7C17-8D21-43DA-AA7D-9F8A054CEFAF}"/>
               </a:ext>
             </a:extLst>
           </p:cNvPr>
@@ -8349,35 +9324,35 @@
           <p:cNvPr id="15" name="">
             <a:extLst xmlns:a="http://schemas.openxmlformats.org/drawingml/2006/main">
               <a:ext uri="{FF2B5EF4-FFF2-40B4-BE49-F238E27FC236}">
-                <a16:creationId xmlns:a16="http://schemas.microsoft.com/office/drawing/2014/main" id="{1C4C69F8-7795-4193-9997-BCB9B7E95F79}"/>
-              </a:ext>
-            </a:extLst>
-          </p:cNvPr>
-          <p:cNvSpPr>
-            <a:spLocks xmlns:a="http://schemas.openxmlformats.org/drawingml/2006/main" noGrp="1"/>
-          </p:cNvSpPr>
-          <p:nvPr/>
-        </p:nvSpPr>
-        <p:spPr>
-          <a:xfrm xmlns:a="http://schemas.openxmlformats.org/drawingml/2006/main">
-            <a:off x="6791325" y="2771775"/>
-            <a:ext cx="1952625" cy="419100"/>
-          </a:xfrm>
-          <a:prstGeom xmlns:a="http://schemas.openxmlformats.org/drawingml/2006/main" prst="rect">
-            <a:avLst/>
-          </a:prstGeom>
-          <a:noFill xmlns:a="http://schemas.openxmlformats.org/drawingml/2006/main"/>
-          <a:ln xmlns:a="http://schemas.openxmlformats.org/drawingml/2006/main" w="0">
-            <a:noFill/>
-          </a:ln>
-        </p:spPr>
-        <p:txBody>
-          <a:bodyPr xmlns:a="http://schemas.openxmlformats.org/drawingml/2006/main">
-            <a:noAutofit/>
-          </a:bodyPr>
-          <a:lstStyle xmlns:a="http://schemas.openxmlformats.org/drawingml/2006/main"/>
-          <a:p xmlns:a="http://schemas.openxmlformats.org/drawingml/2006/main">
-            <a:pPr>
+                <a16:creationId xmlns:a16="http://schemas.microsoft.com/office/drawing/2014/main" id="{163A6BA7-59F0-437C-AFD7-80320C33894B}"/>
+              </a:ext>
+            </a:extLst>
+          </p:cNvPr>
+          <p:cNvSpPr>
+            <a:spLocks xmlns:a="http://schemas.openxmlformats.org/drawingml/2006/main" noGrp="1"/>
+          </p:cNvSpPr>
+          <p:nvPr/>
+        </p:nvSpPr>
+        <p:spPr>
+          <a:xfrm xmlns:a="http://schemas.openxmlformats.org/drawingml/2006/main">
+            <a:off x="6734175" y="2609850"/>
+            <a:ext cx="2047875" cy="714375"/>
+          </a:xfrm>
+          <a:prstGeom xmlns:a="http://schemas.openxmlformats.org/drawingml/2006/main" prst="rect">
+            <a:avLst/>
+          </a:prstGeom>
+          <a:noFill xmlns:a="http://schemas.openxmlformats.org/drawingml/2006/main"/>
+          <a:ln xmlns:a="http://schemas.openxmlformats.org/drawingml/2006/main" w="0">
+            <a:noFill/>
+          </a:ln>
+        </p:spPr>
+        <p:txBody>
+          <a:bodyPr xmlns:a="http://schemas.openxmlformats.org/drawingml/2006/main" anchor="ctr">
+            <a:noAutofit/>
+          </a:bodyPr>
+          <a:lstStyle xmlns:a="http://schemas.openxmlformats.org/drawingml/2006/main"/>
+          <a:p xmlns:a="http://schemas.openxmlformats.org/drawingml/2006/main">
+            <a:pPr algn="ctr">
               <a:defRPr sz="2025" b="1">
                 <a:solidFill>
                   <a:srgbClr val="F5F7FF"/>
@@ -8406,7 +9381,7 @@
           <p:cNvPr id="16" name="">
             <a:extLst xmlns:a="http://schemas.openxmlformats.org/drawingml/2006/main">
               <a:ext uri="{FF2B5EF4-FFF2-40B4-BE49-F238E27FC236}">
-                <a16:creationId xmlns:a16="http://schemas.microsoft.com/office/drawing/2014/main" id="{FF78ACCE-198A-400E-9A3F-E7C6CBCA79A5}"/>
+                <a16:creationId xmlns:a16="http://schemas.microsoft.com/office/drawing/2014/main" id="{A9689CE8-7849-4149-BD9E-8905619CA949}"/>
               </a:ext>
             </a:extLst>
           </p:cNvPr>
@@ -8439,7 +9414,7 @@
           <p:cNvPr id="17" name="">
             <a:extLst xmlns:a="http://schemas.openxmlformats.org/drawingml/2006/main">
               <a:ext uri="{FF2B5EF4-FFF2-40B4-BE49-F238E27FC236}">
-                <a16:creationId xmlns:a16="http://schemas.microsoft.com/office/drawing/2014/main" id="{7ADF721A-E6A8-40AD-9D6D-463E7C269043}"/>
+                <a16:creationId xmlns:a16="http://schemas.microsoft.com/office/drawing/2014/main" id="{DAFD2734-45BE-4EB8-AF06-E62651ABAC51}"/>
               </a:ext>
             </a:extLst>
           </p:cNvPr>
@@ -8496,7 +9471,7 @@
           <p:cNvPr id="18" name="">
             <a:extLst xmlns:a="http://schemas.openxmlformats.org/drawingml/2006/main">
               <a:ext uri="{FF2B5EF4-FFF2-40B4-BE49-F238E27FC236}">
-                <a16:creationId xmlns:a16="http://schemas.microsoft.com/office/drawing/2014/main" id="{53A9DEE1-5D23-4EC0-ABCA-BA118FCF10E1}"/>
+                <a16:creationId xmlns:a16="http://schemas.microsoft.com/office/drawing/2014/main" id="{3FDC69E5-B8B8-4080-9682-D728C3B58985}"/>
               </a:ext>
             </a:extLst>
           </p:cNvPr>
@@ -8535,35 +9510,35 @@
           <p:cNvPr id="19" name="">
             <a:extLst xmlns:a="http://schemas.openxmlformats.org/drawingml/2006/main">
               <a:ext uri="{FF2B5EF4-FFF2-40B4-BE49-F238E27FC236}">
-                <a16:creationId xmlns:a16="http://schemas.microsoft.com/office/drawing/2014/main" id="{7FC6E34C-CEAD-4767-915F-B38B6CDEC7C8}"/>
-              </a:ext>
-            </a:extLst>
-          </p:cNvPr>
-          <p:cNvSpPr>
-            <a:spLocks xmlns:a="http://schemas.openxmlformats.org/drawingml/2006/main" noGrp="1"/>
-          </p:cNvSpPr>
-          <p:nvPr/>
-        </p:nvSpPr>
-        <p:spPr>
-          <a:xfrm xmlns:a="http://schemas.openxmlformats.org/drawingml/2006/main">
-            <a:off x="9677400" y="2771775"/>
-            <a:ext cx="1952625" cy="419100"/>
-          </a:xfrm>
-          <a:prstGeom xmlns:a="http://schemas.openxmlformats.org/drawingml/2006/main" prst="rect">
-            <a:avLst/>
-          </a:prstGeom>
-          <a:noFill xmlns:a="http://schemas.openxmlformats.org/drawingml/2006/main"/>
-          <a:ln xmlns:a="http://schemas.openxmlformats.org/drawingml/2006/main" w="0">
-            <a:noFill/>
-          </a:ln>
-        </p:spPr>
-        <p:txBody>
-          <a:bodyPr xmlns:a="http://schemas.openxmlformats.org/drawingml/2006/main">
-            <a:noAutofit/>
-          </a:bodyPr>
-          <a:lstStyle xmlns:a="http://schemas.openxmlformats.org/drawingml/2006/main"/>
-          <a:p xmlns:a="http://schemas.openxmlformats.org/drawingml/2006/main">
-            <a:pPr>
+                <a16:creationId xmlns:a16="http://schemas.microsoft.com/office/drawing/2014/main" id="{82D79087-7EA6-496B-9A49-4F4CB883B969}"/>
+              </a:ext>
+            </a:extLst>
+          </p:cNvPr>
+          <p:cNvSpPr>
+            <a:spLocks xmlns:a="http://schemas.openxmlformats.org/drawingml/2006/main" noGrp="1"/>
+          </p:cNvSpPr>
+          <p:nvPr/>
+        </p:nvSpPr>
+        <p:spPr>
+          <a:xfrm xmlns:a="http://schemas.openxmlformats.org/drawingml/2006/main">
+            <a:off x="9620250" y="2609850"/>
+            <a:ext cx="2047875" cy="714375"/>
+          </a:xfrm>
+          <a:prstGeom xmlns:a="http://schemas.openxmlformats.org/drawingml/2006/main" prst="rect">
+            <a:avLst/>
+          </a:prstGeom>
+          <a:noFill xmlns:a="http://schemas.openxmlformats.org/drawingml/2006/main"/>
+          <a:ln xmlns:a="http://schemas.openxmlformats.org/drawingml/2006/main" w="0">
+            <a:noFill/>
+          </a:ln>
+        </p:spPr>
+        <p:txBody>
+          <a:bodyPr xmlns:a="http://schemas.openxmlformats.org/drawingml/2006/main" anchor="ctr">
+            <a:noAutofit/>
+          </a:bodyPr>
+          <a:lstStyle xmlns:a="http://schemas.openxmlformats.org/drawingml/2006/main"/>
+          <a:p xmlns:a="http://schemas.openxmlformats.org/drawingml/2006/main">
+            <a:pPr algn="ctr">
               <a:defRPr sz="2025" b="1">
                 <a:solidFill>
                   <a:srgbClr val="F5F7FF"/>
@@ -8592,7 +9567,7 @@
           <p:cNvPr id="20" name="">
             <a:extLst xmlns:a="http://schemas.openxmlformats.org/drawingml/2006/main">
               <a:ext uri="{FF2B5EF4-FFF2-40B4-BE49-F238E27FC236}">
-                <a16:creationId xmlns:a16="http://schemas.microsoft.com/office/drawing/2014/main" id="{E978F199-CE72-41F1-8732-74CB6084A5C3}"/>
+                <a16:creationId xmlns:a16="http://schemas.microsoft.com/office/drawing/2014/main" id="{92807554-373D-4233-A7E2-878177AEE241}"/>
               </a:ext>
             </a:extLst>
           </p:cNvPr>
@@ -8639,7 +9614,7 @@
                 <a:ea typeface="Microsoft YaHei"/>
                 <a:cs typeface="Microsoft YaHei"/>
               </a:rPr>
-              <a:t>主问题：固定 2 道 + 专业 3 道 + 情景 1 道</a:t>
+              <a:t>按岗位题库组织问答，结合实际回答判断追问</a:t>
             </a:r>
           </a:p>
         </p:txBody>
@@ -8649,7 +9624,7 @@
           <p:cNvPr id="21" name="">
             <a:extLst xmlns:a="http://schemas.openxmlformats.org/drawingml/2006/main">
               <a:ext uri="{FF2B5EF4-FFF2-40B4-BE49-F238E27FC236}">
-                <a16:creationId xmlns:a16="http://schemas.microsoft.com/office/drawing/2014/main" id="{8507D756-C71F-498A-8B8D-B37B99F37FF9}"/>
+                <a16:creationId xmlns:a16="http://schemas.microsoft.com/office/drawing/2014/main" id="{F0E1B9DD-51E1-4622-939C-2EB811D8BBC7}"/>
               </a:ext>
             </a:extLst>
           </p:cNvPr>
@@ -8696,7 +9671,7 @@
                 <a:ea typeface="Microsoft YaHei"/>
                 <a:cs typeface="Microsoft YaHei"/>
               </a:rPr>
-              <a:t>追问最多一层；状态落库，刷新后可恢复</a:t>
+              <a:t>系统根据回答决定追问；进度保存，刷新后可继续</a:t>
             </a:r>
           </a:p>
         </p:txBody>
@@ -8704,7 +9679,7 @@
     </p:spTree>
     <p:extLst>
       <p:ext uri="{BB962C8B-B14F-4D97-AF65-F5344CB8AC3E}">
-        <p14:creationId xmlns:p14="http://schemas.microsoft.com/office/powerpoint/2010/main" val="556353269"/>
+        <p14:creationId xmlns:p14="http://schemas.microsoft.com/office/powerpoint/2010/main" val="892759082"/>
       </p:ext>
     </p:extLst>
   </p:cSld>
@@ -8735,15 +9710,15 @@
       </p:grpSpPr>
       <p:pic>
         <p:nvPicPr>
-          <p:cNvPr id="16" name=""/>
+          <p:cNvPr id="25" name=""/>
           <p:cNvPicPr>
             <a:picLocks xmlns:a="http://schemas.openxmlformats.org/drawingml/2006/main" noChangeAspect="1"/>
           </p:cNvPicPr>
           <p:nvPr/>
         </p:nvPicPr>
         <p:blipFill>
-          <a:blip xmlns:r="http://schemas.openxmlformats.org/officeDocument/2006/relationships" xmlns:a="http://schemas.openxmlformats.org/drawingml/2006/main" r:embed="Rb34afcb9c37a4a46"/>
-          <a:srcRect xmlns:a="http://schemas.openxmlformats.org/drawingml/2006/main" l="0" t="0" r="0" b="0"/>
+          <a:blip xmlns:r="http://schemas.openxmlformats.org/officeDocument/2006/relationships" xmlns:a="http://schemas.openxmlformats.org/drawingml/2006/main" r:embed="Re20b443af20c4645"/>
+          <a:srcRect xmlns:a="http://schemas.openxmlformats.org/drawingml/2006/main" l="0" t="27" r="0" b="27"/>
           <a:stretch xmlns:a="http://schemas.openxmlformats.org/drawingml/2006/main">
             <a:fillRect l="0" t="0" r="0" b="0"/>
           </a:stretch>
@@ -8763,7 +9738,7 @@
           <p:cNvPr id="2" name="">
             <a:extLst xmlns:a="http://schemas.openxmlformats.org/drawingml/2006/main">
               <a:ext uri="{FF2B5EF4-FFF2-40B4-BE49-F238E27FC236}">
-                <a16:creationId xmlns:a16="http://schemas.microsoft.com/office/drawing/2014/main" id="{AA0C6C3D-C624-45FF-8797-CA3BEF1F3C93}"/>
+                <a16:creationId xmlns:a16="http://schemas.microsoft.com/office/drawing/2014/main" id="{1D5A0C99-385B-4E33-BF68-DAC2E3471864}"/>
               </a:ext>
             </a:extLst>
           </p:cNvPr>
@@ -8800,7 +9775,7 @@
           <p:cNvPr id="3" name="">
             <a:extLst xmlns:a="http://schemas.openxmlformats.org/drawingml/2006/main">
               <a:ext uri="{FF2B5EF4-FFF2-40B4-BE49-F238E27FC236}">
-                <a16:creationId xmlns:a16="http://schemas.microsoft.com/office/drawing/2014/main" id="{DD98457E-F5D9-4538-A450-E8DE41256D54}"/>
+                <a16:creationId xmlns:a16="http://schemas.microsoft.com/office/drawing/2014/main" id="{234D0892-C0D5-4963-BA20-4486E1D3B85F}"/>
               </a:ext>
             </a:extLst>
           </p:cNvPr>
@@ -8857,7 +9832,7 @@
           <p:cNvPr id="4" name="">
             <a:extLst xmlns:a="http://schemas.openxmlformats.org/drawingml/2006/main">
               <a:ext uri="{FF2B5EF4-FFF2-40B4-BE49-F238E27FC236}">
-                <a16:creationId xmlns:a16="http://schemas.microsoft.com/office/drawing/2014/main" id="{594A6E90-EEF9-4CA9-9998-A71436385998}"/>
+                <a16:creationId xmlns:a16="http://schemas.microsoft.com/office/drawing/2014/main" id="{533B6168-799F-4D88-A1A4-9C3B16547A1F}"/>
               </a:ext>
             </a:extLst>
           </p:cNvPr>
@@ -8904,7 +9879,7 @@
                 <a:ea typeface="Microsoft YaHei"/>
                 <a:cs typeface="Microsoft YaHei"/>
               </a:rPr>
-              <a:t>岗位题库按 2＋3＋1 组织</a:t>
+              <a:t>按岗位配置题库与评价重点</a:t>
             </a:r>
           </a:p>
         </p:txBody>
@@ -8914,7 +9889,7 @@
           <p:cNvPr id="5" name="">
             <a:extLst xmlns:a="http://schemas.openxmlformats.org/drawingml/2006/main">
               <a:ext uri="{FF2B5EF4-FFF2-40B4-BE49-F238E27FC236}">
-                <a16:creationId xmlns:a16="http://schemas.microsoft.com/office/drawing/2014/main" id="{1C33BFEB-7185-401D-A633-72198DB1E9E6}"/>
+                <a16:creationId xmlns:a16="http://schemas.microsoft.com/office/drawing/2014/main" id="{0C41E756-7FCF-4544-AA02-8246CEFB8E8C}"/>
               </a:ext>
             </a:extLst>
           </p:cNvPr>
@@ -8975,23 +9950,23 @@
           <p:cNvPr id="6" name="">
             <a:extLst xmlns:a="http://schemas.openxmlformats.org/drawingml/2006/main">
               <a:ext uri="{FF2B5EF4-FFF2-40B4-BE49-F238E27FC236}">
-                <a16:creationId xmlns:a16="http://schemas.microsoft.com/office/drawing/2014/main" id="{4F446DB3-96B2-4DFB-9AD8-25AAFB231363}"/>
-              </a:ext>
-            </a:extLst>
-          </p:cNvPr>
-          <p:cNvSpPr>
-            <a:spLocks xmlns:a="http://schemas.openxmlformats.org/drawingml/2006/main" noGrp="1"/>
-          </p:cNvSpPr>
-          <p:nvPr/>
-        </p:nvSpPr>
-        <p:spPr>
-          <a:xfrm xmlns:a="http://schemas.openxmlformats.org/drawingml/2006/main">
-            <a:off x="762000" y="2095500"/>
-            <a:ext cx="3333750" cy="3267075"/>
+                <a16:creationId xmlns:a16="http://schemas.microsoft.com/office/drawing/2014/main" id="{F279255F-7FCC-4442-A0BA-E418D25E611D}"/>
+              </a:ext>
+            </a:extLst>
+          </p:cNvPr>
+          <p:cNvSpPr>
+            <a:spLocks xmlns:a="http://schemas.openxmlformats.org/drawingml/2006/main" noGrp="1"/>
+          </p:cNvSpPr>
+          <p:nvPr/>
+        </p:nvSpPr>
+        <p:spPr>
+          <a:xfrm xmlns:a="http://schemas.openxmlformats.org/drawingml/2006/main">
+            <a:off x="762000" y="2047875"/>
+            <a:ext cx="3333750" cy="3457575"/>
           </a:xfrm>
           <a:prstGeom xmlns:a="http://schemas.openxmlformats.org/drawingml/2006/main" prst="roundRect">
             <a:avLst>
-              <a:gd name="adj" fmla="val 2332"/>
+              <a:gd name="adj" fmla="val 2286"/>
             </a:avLst>
           </a:prstGeom>
           <a:solidFill xmlns:a="http://schemas.openxmlformats.org/drawingml/2006/main">
@@ -9001,8 +9976,8 @@
           </a:solidFill>
           <a:ln xmlns:a="http://schemas.openxmlformats.org/drawingml/2006/main" w="10478">
             <a:solidFill>
-              <a:srgbClr val="7CFFCB">
-                <a:alpha val="58000"/>
+              <a:srgbClr val="F5F7FF">
+                <a:alpha val="20000"/>
               </a:srgbClr>
             </a:solidFill>
             <a:prstDash val="solid"/>
@@ -9014,19 +9989,19 @@
           <p:cNvPr id="7" name="">
             <a:extLst xmlns:a="http://schemas.openxmlformats.org/drawingml/2006/main">
               <a:ext uri="{FF2B5EF4-FFF2-40B4-BE49-F238E27FC236}">
-                <a16:creationId xmlns:a16="http://schemas.microsoft.com/office/drawing/2014/main" id="{0EC2E4E2-B10A-405B-B082-B6DD82902624}"/>
-              </a:ext>
-            </a:extLst>
-          </p:cNvPr>
-          <p:cNvSpPr>
-            <a:spLocks xmlns:a="http://schemas.openxmlformats.org/drawingml/2006/main" noGrp="1"/>
-          </p:cNvSpPr>
-          <p:nvPr/>
-        </p:nvSpPr>
-        <p:spPr>
-          <a:xfrm xmlns:a="http://schemas.openxmlformats.org/drawingml/2006/main">
-            <a:off x="1133475" y="2381250"/>
-            <a:ext cx="2476500" cy="1714500"/>
+                <a16:creationId xmlns:a16="http://schemas.microsoft.com/office/drawing/2014/main" id="{F7FE2875-B756-4177-B469-6E4BDD79968E}"/>
+              </a:ext>
+            </a:extLst>
+          </p:cNvPr>
+          <p:cNvSpPr>
+            <a:spLocks xmlns:a="http://schemas.openxmlformats.org/drawingml/2006/main" noGrp="1"/>
+          </p:cNvSpPr>
+          <p:nvPr/>
+        </p:nvSpPr>
+        <p:spPr>
+          <a:xfrm xmlns:a="http://schemas.openxmlformats.org/drawingml/2006/main">
+            <a:off x="1019175" y="2247900"/>
+            <a:ext cx="2762250" cy="742950"/>
           </a:xfrm>
           <a:prstGeom xmlns:a="http://schemas.openxmlformats.org/drawingml/2006/main" prst="rect">
             <a:avLst/>
@@ -9043,7 +10018,7 @@
           <a:lstStyle xmlns:a="http://schemas.openxmlformats.org/drawingml/2006/main"/>
           <a:p xmlns:a="http://schemas.openxmlformats.org/drawingml/2006/main">
             <a:pPr>
-              <a:defRPr sz="8775" b="1">
+              <a:defRPr sz="4500" b="1">
                 <a:solidFill>
                   <a:srgbClr val="7CFFCB"/>
                 </a:solidFill>
@@ -9053,7 +10028,7 @@
               </a:defRPr>
             </a:pPr>
             <a:r>
-              <a:rPr sz="8775" b="1">
+              <a:rPr sz="4500" b="1">
                 <a:solidFill>
                   <a:srgbClr val="7CFFCB"/>
                 </a:solidFill>
@@ -9061,7 +10036,7 @@
                 <a:ea typeface="Microsoft YaHei"/>
                 <a:cs typeface="Microsoft YaHei"/>
               </a:rPr>
-              <a:t>2</a:t>
+              <a:t>01</a:t>
             </a:r>
           </a:p>
         </p:txBody>
@@ -9071,19 +10046,19 @@
           <p:cNvPr id="8" name="">
             <a:extLst xmlns:a="http://schemas.openxmlformats.org/drawingml/2006/main">
               <a:ext uri="{FF2B5EF4-FFF2-40B4-BE49-F238E27FC236}">
-                <a16:creationId xmlns:a16="http://schemas.microsoft.com/office/drawing/2014/main" id="{82E215B1-7A15-4BA9-A3D9-5077EDF4CDB2}"/>
-              </a:ext>
-            </a:extLst>
-          </p:cNvPr>
-          <p:cNvSpPr>
-            <a:spLocks xmlns:a="http://schemas.openxmlformats.org/drawingml/2006/main" noGrp="1"/>
-          </p:cNvSpPr>
-          <p:nvPr/>
-        </p:nvSpPr>
-        <p:spPr>
-          <a:xfrm xmlns:a="http://schemas.openxmlformats.org/drawingml/2006/main">
-            <a:off x="1162050" y="4400550"/>
-            <a:ext cx="2476500" cy="571500"/>
+                <a16:creationId xmlns:a16="http://schemas.microsoft.com/office/drawing/2014/main" id="{C6D0F886-7FD7-4C58-8E42-956F8808A5CC}"/>
+              </a:ext>
+            </a:extLst>
+          </p:cNvPr>
+          <p:cNvSpPr>
+            <a:spLocks xmlns:a="http://schemas.openxmlformats.org/drawingml/2006/main" noGrp="1"/>
+          </p:cNvSpPr>
+          <p:nvPr/>
+        </p:nvSpPr>
+        <p:spPr>
+          <a:xfrm xmlns:a="http://schemas.openxmlformats.org/drawingml/2006/main">
+            <a:off x="1019175" y="3190875"/>
+            <a:ext cx="2809875" cy="457200"/>
           </a:xfrm>
           <a:prstGeom xmlns:a="http://schemas.openxmlformats.org/drawingml/2006/main" prst="rect">
             <a:avLst/>
@@ -9100,25 +10075,25 @@
           <a:lstStyle xmlns:a="http://schemas.openxmlformats.org/drawingml/2006/main"/>
           <a:p xmlns:a="http://schemas.openxmlformats.org/drawingml/2006/main">
             <a:pPr>
-              <a:defRPr sz="2400" b="1">
-                <a:solidFill>
-                  <a:srgbClr val="F5F7FF"/>
-                </a:solidFill>
-                <a:latin typeface="Microsoft YaHei"/>
-                <a:ea typeface="Microsoft YaHei"/>
-                <a:cs typeface="Microsoft YaHei"/>
-              </a:defRPr>
-            </a:pPr>
-            <a:r>
-              <a:rPr sz="2400" b="1">
-                <a:solidFill>
-                  <a:srgbClr val="F5F7FF"/>
-                </a:solidFill>
-                <a:latin typeface="Microsoft YaHei"/>
-                <a:ea typeface="Microsoft YaHei"/>
-                <a:cs typeface="Microsoft YaHei"/>
-              </a:rPr>
-              <a:t>固定题</a:t>
+              <a:defRPr sz="2325" b="1">
+                <a:solidFill>
+                  <a:srgbClr val="F5F7FF"/>
+                </a:solidFill>
+                <a:latin typeface="Microsoft YaHei"/>
+                <a:ea typeface="Microsoft YaHei"/>
+                <a:cs typeface="Microsoft YaHei"/>
+              </a:defRPr>
+            </a:pPr>
+            <a:r>
+              <a:rPr sz="2325" b="1">
+                <a:solidFill>
+                  <a:srgbClr val="F5F7FF"/>
+                </a:solidFill>
+                <a:latin typeface="Microsoft YaHei"/>
+                <a:ea typeface="Microsoft YaHei"/>
+                <a:cs typeface="Microsoft YaHei"/>
+              </a:rPr>
+              <a:t>题目配置</a:t>
             </a:r>
           </a:p>
         </p:txBody>
@@ -9128,23 +10103,194 @@
           <p:cNvPr id="9" name="">
             <a:extLst xmlns:a="http://schemas.openxmlformats.org/drawingml/2006/main">
               <a:ext uri="{FF2B5EF4-FFF2-40B4-BE49-F238E27FC236}">
-                <a16:creationId xmlns:a16="http://schemas.microsoft.com/office/drawing/2014/main" id="{618276E9-FB72-4421-AA7C-ED3DB5D11241}"/>
-              </a:ext>
-            </a:extLst>
-          </p:cNvPr>
-          <p:cNvSpPr>
-            <a:spLocks xmlns:a="http://schemas.openxmlformats.org/drawingml/2006/main" noGrp="1"/>
-          </p:cNvSpPr>
-          <p:nvPr/>
-        </p:nvSpPr>
-        <p:spPr>
-          <a:xfrm xmlns:a="http://schemas.openxmlformats.org/drawingml/2006/main">
-            <a:off x="4486275" y="2095500"/>
-            <a:ext cx="3333750" cy="3267075"/>
+                <a16:creationId xmlns:a16="http://schemas.microsoft.com/office/drawing/2014/main" id="{6718A97C-EE28-4932-9234-9A38A72D5EB1}"/>
+              </a:ext>
+            </a:extLst>
+          </p:cNvPr>
+          <p:cNvSpPr>
+            <a:spLocks xmlns:a="http://schemas.openxmlformats.org/drawingml/2006/main" noGrp="1"/>
+          </p:cNvSpPr>
+          <p:nvPr/>
+        </p:nvSpPr>
+        <p:spPr>
+          <a:xfrm xmlns:a="http://schemas.openxmlformats.org/drawingml/2006/main">
+            <a:off x="1019175" y="3886200"/>
+            <a:ext cx="2809875" cy="342900"/>
+          </a:xfrm>
+          <a:prstGeom xmlns:a="http://schemas.openxmlformats.org/drawingml/2006/main" prst="rect">
+            <a:avLst/>
+          </a:prstGeom>
+          <a:noFill xmlns:a="http://schemas.openxmlformats.org/drawingml/2006/main"/>
+          <a:ln xmlns:a="http://schemas.openxmlformats.org/drawingml/2006/main" w="0">
+            <a:noFill/>
+          </a:ln>
+        </p:spPr>
+        <p:txBody>
+          <a:bodyPr xmlns:a="http://schemas.openxmlformats.org/drawingml/2006/main">
+            <a:noAutofit/>
+          </a:bodyPr>
+          <a:lstStyle xmlns:a="http://schemas.openxmlformats.org/drawingml/2006/main"/>
+          <a:p xmlns:a="http://schemas.openxmlformats.org/drawingml/2006/main">
+            <a:pPr>
+              <a:defRPr sz="1575" b="0">
+                <a:solidFill>
+                  <a:srgbClr val="F5F7FF"/>
+                </a:solidFill>
+                <a:latin typeface="Microsoft YaHei"/>
+                <a:ea typeface="Microsoft YaHei"/>
+                <a:cs typeface="Microsoft YaHei"/>
+              </a:defRPr>
+            </a:pPr>
+            <a:r>
+              <a:rPr sz="1575" b="0">
+                <a:solidFill>
+                  <a:srgbClr val="F5F7FF"/>
+                </a:solidFill>
+                <a:latin typeface="Microsoft YaHei"/>
+                <a:ea typeface="Microsoft YaHei"/>
+                <a:cs typeface="Microsoft YaHei"/>
+              </a:rPr>
+              <a:t>根据岗位要求生成题库草案</a:t>
+            </a:r>
+          </a:p>
+        </p:txBody>
+      </p:sp>
+      <p:sp>
+        <p:nvSpPr>
+          <p:cNvPr id="10" name="">
+            <a:extLst xmlns:a="http://schemas.openxmlformats.org/drawingml/2006/main">
+              <a:ext uri="{FF2B5EF4-FFF2-40B4-BE49-F238E27FC236}">
+                <a16:creationId xmlns:a16="http://schemas.microsoft.com/office/drawing/2014/main" id="{17950C4F-6C01-4DAA-BAC5-08DBEA16A70B}"/>
+              </a:ext>
+            </a:extLst>
+          </p:cNvPr>
+          <p:cNvSpPr>
+            <a:spLocks xmlns:a="http://schemas.openxmlformats.org/drawingml/2006/main" noGrp="1"/>
+          </p:cNvSpPr>
+          <p:nvPr/>
+        </p:nvSpPr>
+        <p:spPr>
+          <a:xfrm xmlns:a="http://schemas.openxmlformats.org/drawingml/2006/main">
+            <a:off x="1019175" y="4352925"/>
+            <a:ext cx="2809875" cy="342900"/>
+          </a:xfrm>
+          <a:prstGeom xmlns:a="http://schemas.openxmlformats.org/drawingml/2006/main" prst="rect">
+            <a:avLst/>
+          </a:prstGeom>
+          <a:noFill xmlns:a="http://schemas.openxmlformats.org/drawingml/2006/main"/>
+          <a:ln xmlns:a="http://schemas.openxmlformats.org/drawingml/2006/main" w="0">
+            <a:noFill/>
+          </a:ln>
+        </p:spPr>
+        <p:txBody>
+          <a:bodyPr xmlns:a="http://schemas.openxmlformats.org/drawingml/2006/main">
+            <a:noAutofit/>
+          </a:bodyPr>
+          <a:lstStyle xmlns:a="http://schemas.openxmlformats.org/drawingml/2006/main"/>
+          <a:p xmlns:a="http://schemas.openxmlformats.org/drawingml/2006/main">
+            <a:pPr>
+              <a:defRPr sz="1575" b="0">
+                <a:solidFill>
+                  <a:srgbClr val="F5F7FF"/>
+                </a:solidFill>
+                <a:latin typeface="Microsoft YaHei"/>
+                <a:ea typeface="Microsoft YaHei"/>
+                <a:cs typeface="Microsoft YaHei"/>
+              </a:defRPr>
+            </a:pPr>
+            <a:r>
+              <a:rPr sz="1575" b="0">
+                <a:solidFill>
+                  <a:srgbClr val="F5F7FF"/>
+                </a:solidFill>
+                <a:latin typeface="Microsoft YaHei"/>
+                <a:ea typeface="Microsoft YaHei"/>
+                <a:cs typeface="Microsoft YaHei"/>
+              </a:rPr>
+              <a:t>增删题目，维护题型与内容</a:t>
+            </a:r>
+          </a:p>
+        </p:txBody>
+      </p:sp>
+      <p:sp>
+        <p:nvSpPr>
+          <p:cNvPr id="11" name="">
+            <a:extLst xmlns:a="http://schemas.openxmlformats.org/drawingml/2006/main">
+              <a:ext uri="{FF2B5EF4-FFF2-40B4-BE49-F238E27FC236}">
+                <a16:creationId xmlns:a16="http://schemas.microsoft.com/office/drawing/2014/main" id="{F8EC2FDC-B070-4C92-8E21-12A187CBF96B}"/>
+              </a:ext>
+            </a:extLst>
+          </p:cNvPr>
+          <p:cNvSpPr>
+            <a:spLocks xmlns:a="http://schemas.openxmlformats.org/drawingml/2006/main" noGrp="1"/>
+          </p:cNvSpPr>
+          <p:nvPr/>
+        </p:nvSpPr>
+        <p:spPr>
+          <a:xfrm xmlns:a="http://schemas.openxmlformats.org/drawingml/2006/main">
+            <a:off x="1019175" y="4924425"/>
+            <a:ext cx="2809875" cy="342900"/>
+          </a:xfrm>
+          <a:prstGeom xmlns:a="http://schemas.openxmlformats.org/drawingml/2006/main" prst="rect">
+            <a:avLst/>
+          </a:prstGeom>
+          <a:noFill xmlns:a="http://schemas.openxmlformats.org/drawingml/2006/main"/>
+          <a:ln xmlns:a="http://schemas.openxmlformats.org/drawingml/2006/main" w="0">
+            <a:noFill/>
+          </a:ln>
+        </p:spPr>
+        <p:txBody>
+          <a:bodyPr xmlns:a="http://schemas.openxmlformats.org/drawingml/2006/main">
+            <a:noAutofit/>
+          </a:bodyPr>
+          <a:lstStyle xmlns:a="http://schemas.openxmlformats.org/drawingml/2006/main"/>
+          <a:p xmlns:a="http://schemas.openxmlformats.org/drawingml/2006/main">
+            <a:pPr>
+              <a:defRPr sz="1350" b="0">
+                <a:solidFill>
+                  <a:srgbClr val="7CFFCB"/>
+                </a:solidFill>
+                <a:latin typeface="Microsoft YaHei"/>
+                <a:ea typeface="Microsoft YaHei"/>
+                <a:cs typeface="Microsoft YaHei"/>
+              </a:defRPr>
+            </a:pPr>
+            <a:r>
+              <a:rPr sz="1350" b="0">
+                <a:solidFill>
+                  <a:srgbClr val="7CFFCB"/>
+                </a:solidFill>
+                <a:latin typeface="Microsoft YaHei"/>
+                <a:ea typeface="Microsoft YaHei"/>
+                <a:cs typeface="Microsoft YaHei"/>
+              </a:rPr>
+              <a:t>通用问答 / 专业问题 / 情景题</a:t>
+            </a:r>
+          </a:p>
+        </p:txBody>
+      </p:sp>
+      <p:sp>
+        <p:nvSpPr>
+          <p:cNvPr id="12" name="">
+            <a:extLst xmlns:a="http://schemas.openxmlformats.org/drawingml/2006/main">
+              <a:ext uri="{FF2B5EF4-FFF2-40B4-BE49-F238E27FC236}">
+                <a16:creationId xmlns:a16="http://schemas.microsoft.com/office/drawing/2014/main" id="{3F782B6A-5D13-4CE1-9184-06361BC6D292}"/>
+              </a:ext>
+            </a:extLst>
+          </p:cNvPr>
+          <p:cNvSpPr>
+            <a:spLocks xmlns:a="http://schemas.openxmlformats.org/drawingml/2006/main" noGrp="1"/>
+          </p:cNvSpPr>
+          <p:nvPr/>
+        </p:nvSpPr>
+        <p:spPr>
+          <a:xfrm xmlns:a="http://schemas.openxmlformats.org/drawingml/2006/main">
+            <a:off x="4486275" y="2047875"/>
+            <a:ext cx="3333750" cy="3457575"/>
           </a:xfrm>
           <a:prstGeom xmlns:a="http://schemas.openxmlformats.org/drawingml/2006/main" prst="roundRect">
             <a:avLst>
-              <a:gd name="adj" fmla="val 2332"/>
+              <a:gd name="adj" fmla="val 2286"/>
             </a:avLst>
           </a:prstGeom>
           <a:solidFill xmlns:a="http://schemas.openxmlformats.org/drawingml/2006/main">
@@ -9154,8 +10300,8 @@
           </a:solidFill>
           <a:ln xmlns:a="http://schemas.openxmlformats.org/drawingml/2006/main" w="10478">
             <a:solidFill>
-              <a:srgbClr val="FF7AD9">
-                <a:alpha val="58000"/>
+              <a:srgbClr val="F5F7FF">
+                <a:alpha val="20000"/>
               </a:srgbClr>
             </a:solidFill>
             <a:prstDash val="solid"/>
@@ -9164,22 +10310,22 @@
       </p:sp>
       <p:sp>
         <p:nvSpPr>
-          <p:cNvPr id="10" name="">
-            <a:extLst xmlns:a="http://schemas.openxmlformats.org/drawingml/2006/main">
-              <a:ext uri="{FF2B5EF4-FFF2-40B4-BE49-F238E27FC236}">
-                <a16:creationId xmlns:a16="http://schemas.microsoft.com/office/drawing/2014/main" id="{F99A5F92-2C26-41E9-84B9-F3F9281B60AE}"/>
-              </a:ext>
-            </a:extLst>
-          </p:cNvPr>
-          <p:cNvSpPr>
-            <a:spLocks xmlns:a="http://schemas.openxmlformats.org/drawingml/2006/main" noGrp="1"/>
-          </p:cNvSpPr>
-          <p:nvPr/>
-        </p:nvSpPr>
-        <p:spPr>
-          <a:xfrm xmlns:a="http://schemas.openxmlformats.org/drawingml/2006/main">
-            <a:off x="4857750" y="2381250"/>
-            <a:ext cx="2476500" cy="1714500"/>
+          <p:cNvPr id="13" name="">
+            <a:extLst xmlns:a="http://schemas.openxmlformats.org/drawingml/2006/main">
+              <a:ext uri="{FF2B5EF4-FFF2-40B4-BE49-F238E27FC236}">
+                <a16:creationId xmlns:a16="http://schemas.microsoft.com/office/drawing/2014/main" id="{A7D32508-1A78-42C8-8656-C5787A424DE6}"/>
+              </a:ext>
+            </a:extLst>
+          </p:cNvPr>
+          <p:cNvSpPr>
+            <a:spLocks xmlns:a="http://schemas.openxmlformats.org/drawingml/2006/main" noGrp="1"/>
+          </p:cNvSpPr>
+          <p:nvPr/>
+        </p:nvSpPr>
+        <p:spPr>
+          <a:xfrm xmlns:a="http://schemas.openxmlformats.org/drawingml/2006/main">
+            <a:off x="4743450" y="2247900"/>
+            <a:ext cx="2762250" cy="742950"/>
           </a:xfrm>
           <a:prstGeom xmlns:a="http://schemas.openxmlformats.org/drawingml/2006/main" prst="rect">
             <a:avLst/>
@@ -9196,47 +10342,47 @@
           <a:lstStyle xmlns:a="http://schemas.openxmlformats.org/drawingml/2006/main"/>
           <a:p xmlns:a="http://schemas.openxmlformats.org/drawingml/2006/main">
             <a:pPr>
-              <a:defRPr sz="8775" b="1">
-                <a:solidFill>
-                  <a:srgbClr val="FF7AD9"/>
-                </a:solidFill>
-                <a:latin typeface="Microsoft YaHei"/>
-                <a:ea typeface="Microsoft YaHei"/>
-                <a:cs typeface="Microsoft YaHei"/>
-              </a:defRPr>
-            </a:pPr>
-            <a:r>
-              <a:rPr sz="8775" b="1">
-                <a:solidFill>
-                  <a:srgbClr val="FF7AD9"/>
-                </a:solidFill>
-                <a:latin typeface="Microsoft YaHei"/>
-                <a:ea typeface="Microsoft YaHei"/>
-                <a:cs typeface="Microsoft YaHei"/>
-              </a:rPr>
-              <a:t>3</a:t>
-            </a:r>
-          </a:p>
-        </p:txBody>
-      </p:sp>
-      <p:sp>
-        <p:nvSpPr>
-          <p:cNvPr id="11" name="">
-            <a:extLst xmlns:a="http://schemas.openxmlformats.org/drawingml/2006/main">
-              <a:ext uri="{FF2B5EF4-FFF2-40B4-BE49-F238E27FC236}">
-                <a16:creationId xmlns:a16="http://schemas.microsoft.com/office/drawing/2014/main" id="{53CC49D4-8F35-4A59-8CC1-1FDA7774256D}"/>
-              </a:ext>
-            </a:extLst>
-          </p:cNvPr>
-          <p:cNvSpPr>
-            <a:spLocks xmlns:a="http://schemas.openxmlformats.org/drawingml/2006/main" noGrp="1"/>
-          </p:cNvSpPr>
-          <p:nvPr/>
-        </p:nvSpPr>
-        <p:spPr>
-          <a:xfrm xmlns:a="http://schemas.openxmlformats.org/drawingml/2006/main">
-            <a:off x="4886325" y="4400550"/>
-            <a:ext cx="2476500" cy="571500"/>
+              <a:defRPr sz="4500" b="1">
+                <a:solidFill>
+                  <a:srgbClr val="7CFFCB"/>
+                </a:solidFill>
+                <a:latin typeface="Microsoft YaHei"/>
+                <a:ea typeface="Microsoft YaHei"/>
+                <a:cs typeface="Microsoft YaHei"/>
+              </a:defRPr>
+            </a:pPr>
+            <a:r>
+              <a:rPr sz="4500" b="1">
+                <a:solidFill>
+                  <a:srgbClr val="7CFFCB"/>
+                </a:solidFill>
+                <a:latin typeface="Microsoft YaHei"/>
+                <a:ea typeface="Microsoft YaHei"/>
+                <a:cs typeface="Microsoft YaHei"/>
+              </a:rPr>
+              <a:t>02</a:t>
+            </a:r>
+          </a:p>
+        </p:txBody>
+      </p:sp>
+      <p:sp>
+        <p:nvSpPr>
+          <p:cNvPr id="14" name="">
+            <a:extLst xmlns:a="http://schemas.openxmlformats.org/drawingml/2006/main">
+              <a:ext uri="{FF2B5EF4-FFF2-40B4-BE49-F238E27FC236}">
+                <a16:creationId xmlns:a16="http://schemas.microsoft.com/office/drawing/2014/main" id="{57D8987A-3629-402B-ABEF-E5DA9902B01C}"/>
+              </a:ext>
+            </a:extLst>
+          </p:cNvPr>
+          <p:cNvSpPr>
+            <a:spLocks xmlns:a="http://schemas.openxmlformats.org/drawingml/2006/main" noGrp="1"/>
+          </p:cNvSpPr>
+          <p:nvPr/>
+        </p:nvSpPr>
+        <p:spPr>
+          <a:xfrm xmlns:a="http://schemas.openxmlformats.org/drawingml/2006/main">
+            <a:off x="4743450" y="3190875"/>
+            <a:ext cx="2809875" cy="457200"/>
           </a:xfrm>
           <a:prstGeom xmlns:a="http://schemas.openxmlformats.org/drawingml/2006/main" prst="rect">
             <a:avLst/>
@@ -9253,51 +10399,222 @@
           <a:lstStyle xmlns:a="http://schemas.openxmlformats.org/drawingml/2006/main"/>
           <a:p xmlns:a="http://schemas.openxmlformats.org/drawingml/2006/main">
             <a:pPr>
-              <a:defRPr sz="2400" b="1">
-                <a:solidFill>
-                  <a:srgbClr val="F5F7FF"/>
-                </a:solidFill>
-                <a:latin typeface="Microsoft YaHei"/>
-                <a:ea typeface="Microsoft YaHei"/>
-                <a:cs typeface="Microsoft YaHei"/>
-              </a:defRPr>
-            </a:pPr>
-            <a:r>
-              <a:rPr sz="2400" b="1">
-                <a:solidFill>
-                  <a:srgbClr val="F5F7FF"/>
-                </a:solidFill>
-                <a:latin typeface="Microsoft YaHei"/>
-                <a:ea typeface="Microsoft YaHei"/>
-                <a:cs typeface="Microsoft YaHei"/>
-              </a:rPr>
-              <a:t>专业题</a:t>
-            </a:r>
-          </a:p>
-        </p:txBody>
-      </p:sp>
-      <p:sp>
-        <p:nvSpPr>
-          <p:cNvPr id="12" name="">
-            <a:extLst xmlns:a="http://schemas.openxmlformats.org/drawingml/2006/main">
-              <a:ext uri="{FF2B5EF4-FFF2-40B4-BE49-F238E27FC236}">
-                <a16:creationId xmlns:a16="http://schemas.microsoft.com/office/drawing/2014/main" id="{E9E190A9-463D-44CB-963B-621D994A68B4}"/>
-              </a:ext>
-            </a:extLst>
-          </p:cNvPr>
-          <p:cNvSpPr>
-            <a:spLocks xmlns:a="http://schemas.openxmlformats.org/drawingml/2006/main" noGrp="1"/>
-          </p:cNvSpPr>
-          <p:nvPr/>
-        </p:nvSpPr>
-        <p:spPr>
-          <a:xfrm xmlns:a="http://schemas.openxmlformats.org/drawingml/2006/main">
-            <a:off x="8210550" y="2095500"/>
-            <a:ext cx="3333750" cy="3267075"/>
+              <a:defRPr sz="2325" b="1">
+                <a:solidFill>
+                  <a:srgbClr val="F5F7FF"/>
+                </a:solidFill>
+                <a:latin typeface="Microsoft YaHei"/>
+                <a:ea typeface="Microsoft YaHei"/>
+                <a:cs typeface="Microsoft YaHei"/>
+              </a:defRPr>
+            </a:pPr>
+            <a:r>
+              <a:rPr sz="2325" b="1">
+                <a:solidFill>
+                  <a:srgbClr val="F5F7FF"/>
+                </a:solidFill>
+                <a:latin typeface="Microsoft YaHei"/>
+                <a:ea typeface="Microsoft YaHei"/>
+                <a:cs typeface="Microsoft YaHei"/>
+              </a:rPr>
+              <a:t>评价标准</a:t>
+            </a:r>
+          </a:p>
+        </p:txBody>
+      </p:sp>
+      <p:sp>
+        <p:nvSpPr>
+          <p:cNvPr id="15" name="">
+            <a:extLst xmlns:a="http://schemas.openxmlformats.org/drawingml/2006/main">
+              <a:ext uri="{FF2B5EF4-FFF2-40B4-BE49-F238E27FC236}">
+                <a16:creationId xmlns:a16="http://schemas.microsoft.com/office/drawing/2014/main" id="{E7109598-B52C-44F3-8854-26FFA14A986A}"/>
+              </a:ext>
+            </a:extLst>
+          </p:cNvPr>
+          <p:cNvSpPr>
+            <a:spLocks xmlns:a="http://schemas.openxmlformats.org/drawingml/2006/main" noGrp="1"/>
+          </p:cNvSpPr>
+          <p:nvPr/>
+        </p:nvSpPr>
+        <p:spPr>
+          <a:xfrm xmlns:a="http://schemas.openxmlformats.org/drawingml/2006/main">
+            <a:off x="4743450" y="3886200"/>
+            <a:ext cx="2809875" cy="342900"/>
+          </a:xfrm>
+          <a:prstGeom xmlns:a="http://schemas.openxmlformats.org/drawingml/2006/main" prst="rect">
+            <a:avLst/>
+          </a:prstGeom>
+          <a:noFill xmlns:a="http://schemas.openxmlformats.org/drawingml/2006/main"/>
+          <a:ln xmlns:a="http://schemas.openxmlformats.org/drawingml/2006/main" w="0">
+            <a:noFill/>
+          </a:ln>
+        </p:spPr>
+        <p:txBody>
+          <a:bodyPr xmlns:a="http://schemas.openxmlformats.org/drawingml/2006/main">
+            <a:noAutofit/>
+          </a:bodyPr>
+          <a:lstStyle xmlns:a="http://schemas.openxmlformats.org/drawingml/2006/main"/>
+          <a:p xmlns:a="http://schemas.openxmlformats.org/drawingml/2006/main">
+            <a:pPr>
+              <a:defRPr sz="1575" b="0">
+                <a:solidFill>
+                  <a:srgbClr val="F5F7FF"/>
+                </a:solidFill>
+                <a:latin typeface="Microsoft YaHei"/>
+                <a:ea typeface="Microsoft YaHei"/>
+                <a:cs typeface="Microsoft YaHei"/>
+              </a:defRPr>
+            </a:pPr>
+            <a:r>
+              <a:rPr sz="1575" b="0">
+                <a:solidFill>
+                  <a:srgbClr val="F5F7FF"/>
+                </a:solidFill>
+                <a:latin typeface="Microsoft YaHei"/>
+                <a:ea typeface="Microsoft YaHei"/>
+                <a:cs typeface="Microsoft YaHei"/>
+              </a:rPr>
+              <a:t>根据岗位描述生成评估建议</a:t>
+            </a:r>
+          </a:p>
+        </p:txBody>
+      </p:sp>
+      <p:sp>
+        <p:nvSpPr>
+          <p:cNvPr id="16" name="">
+            <a:extLst xmlns:a="http://schemas.openxmlformats.org/drawingml/2006/main">
+              <a:ext uri="{FF2B5EF4-FFF2-40B4-BE49-F238E27FC236}">
+                <a16:creationId xmlns:a16="http://schemas.microsoft.com/office/drawing/2014/main" id="{DC6EBB74-C6B9-4866-AF29-DB89531346DD}"/>
+              </a:ext>
+            </a:extLst>
+          </p:cNvPr>
+          <p:cNvSpPr>
+            <a:spLocks xmlns:a="http://schemas.openxmlformats.org/drawingml/2006/main" noGrp="1"/>
+          </p:cNvSpPr>
+          <p:nvPr/>
+        </p:nvSpPr>
+        <p:spPr>
+          <a:xfrm xmlns:a="http://schemas.openxmlformats.org/drawingml/2006/main">
+            <a:off x="4743450" y="4352925"/>
+            <a:ext cx="2809875" cy="342900"/>
+          </a:xfrm>
+          <a:prstGeom xmlns:a="http://schemas.openxmlformats.org/drawingml/2006/main" prst="rect">
+            <a:avLst/>
+          </a:prstGeom>
+          <a:noFill xmlns:a="http://schemas.openxmlformats.org/drawingml/2006/main"/>
+          <a:ln xmlns:a="http://schemas.openxmlformats.org/drawingml/2006/main" w="0">
+            <a:noFill/>
+          </a:ln>
+        </p:spPr>
+        <p:txBody>
+          <a:bodyPr xmlns:a="http://schemas.openxmlformats.org/drawingml/2006/main">
+            <a:noAutofit/>
+          </a:bodyPr>
+          <a:lstStyle xmlns:a="http://schemas.openxmlformats.org/drawingml/2006/main"/>
+          <a:p xmlns:a="http://schemas.openxmlformats.org/drawingml/2006/main">
+            <a:pPr>
+              <a:defRPr sz="1575" b="0">
+                <a:solidFill>
+                  <a:srgbClr val="F5F7FF"/>
+                </a:solidFill>
+                <a:latin typeface="Microsoft YaHei"/>
+                <a:ea typeface="Microsoft YaHei"/>
+                <a:cs typeface="Microsoft YaHei"/>
+              </a:defRPr>
+            </a:pPr>
+            <a:r>
+              <a:rPr sz="1575" b="0">
+                <a:solidFill>
+                  <a:srgbClr val="F5F7FF"/>
+                </a:solidFill>
+                <a:latin typeface="Microsoft YaHei"/>
+                <a:ea typeface="Microsoft YaHei"/>
+                <a:cs typeface="Microsoft YaHei"/>
+              </a:rPr>
+              <a:t>调整候选排序的各项权重</a:t>
+            </a:r>
+          </a:p>
+        </p:txBody>
+      </p:sp>
+      <p:sp>
+        <p:nvSpPr>
+          <p:cNvPr id="17" name="">
+            <a:extLst xmlns:a="http://schemas.openxmlformats.org/drawingml/2006/main">
+              <a:ext uri="{FF2B5EF4-FFF2-40B4-BE49-F238E27FC236}">
+                <a16:creationId xmlns:a16="http://schemas.microsoft.com/office/drawing/2014/main" id="{B9172741-EA01-4AC5-9129-F702D32E5AD1}"/>
+              </a:ext>
+            </a:extLst>
+          </p:cNvPr>
+          <p:cNvSpPr>
+            <a:spLocks xmlns:a="http://schemas.openxmlformats.org/drawingml/2006/main" noGrp="1"/>
+          </p:cNvSpPr>
+          <p:nvPr/>
+        </p:nvSpPr>
+        <p:spPr>
+          <a:xfrm xmlns:a="http://schemas.openxmlformats.org/drawingml/2006/main">
+            <a:off x="4743450" y="4924425"/>
+            <a:ext cx="2809875" cy="342900"/>
+          </a:xfrm>
+          <a:prstGeom xmlns:a="http://schemas.openxmlformats.org/drawingml/2006/main" prst="rect">
+            <a:avLst/>
+          </a:prstGeom>
+          <a:noFill xmlns:a="http://schemas.openxmlformats.org/drawingml/2006/main"/>
+          <a:ln xmlns:a="http://schemas.openxmlformats.org/drawingml/2006/main" w="0">
+            <a:noFill/>
+          </a:ln>
+        </p:spPr>
+        <p:txBody>
+          <a:bodyPr xmlns:a="http://schemas.openxmlformats.org/drawingml/2006/main">
+            <a:noAutofit/>
+          </a:bodyPr>
+          <a:lstStyle xmlns:a="http://schemas.openxmlformats.org/drawingml/2006/main"/>
+          <a:p xmlns:a="http://schemas.openxmlformats.org/drawingml/2006/main">
+            <a:pPr>
+              <a:defRPr sz="1350" b="0">
+                <a:solidFill>
+                  <a:srgbClr val="7CFFCB"/>
+                </a:solidFill>
+                <a:latin typeface="Microsoft YaHei"/>
+                <a:ea typeface="Microsoft YaHei"/>
+                <a:cs typeface="Microsoft YaHei"/>
+              </a:defRPr>
+            </a:pPr>
+            <a:r>
+              <a:rPr sz="1350" b="0">
+                <a:solidFill>
+                  <a:srgbClr val="7CFFCB"/>
+                </a:solidFill>
+                <a:latin typeface="Microsoft YaHei"/>
+                <a:ea typeface="Microsoft YaHei"/>
+                <a:cs typeface="Microsoft YaHei"/>
+              </a:rPr>
+              <a:t>突出不同岗位的考察重点</a:t>
+            </a:r>
+          </a:p>
+        </p:txBody>
+      </p:sp>
+      <p:sp>
+        <p:nvSpPr>
+          <p:cNvPr id="18" name="">
+            <a:extLst xmlns:a="http://schemas.openxmlformats.org/drawingml/2006/main">
+              <a:ext uri="{FF2B5EF4-FFF2-40B4-BE49-F238E27FC236}">
+                <a16:creationId xmlns:a16="http://schemas.microsoft.com/office/drawing/2014/main" id="{B51A745D-2FE9-4CF1-A68B-3E42871E17E0}"/>
+              </a:ext>
+            </a:extLst>
+          </p:cNvPr>
+          <p:cNvSpPr>
+            <a:spLocks xmlns:a="http://schemas.openxmlformats.org/drawingml/2006/main" noGrp="1"/>
+          </p:cNvSpPr>
+          <p:nvPr/>
+        </p:nvSpPr>
+        <p:spPr>
+          <a:xfrm xmlns:a="http://schemas.openxmlformats.org/drawingml/2006/main">
+            <a:off x="8210550" y="2047875"/>
+            <a:ext cx="3333750" cy="3457575"/>
           </a:xfrm>
           <a:prstGeom xmlns:a="http://schemas.openxmlformats.org/drawingml/2006/main" prst="roundRect">
             <a:avLst>
-              <a:gd name="adj" fmla="val 2332"/>
+              <a:gd name="adj" fmla="val 2286"/>
             </a:avLst>
           </a:prstGeom>
           <a:solidFill xmlns:a="http://schemas.openxmlformats.org/drawingml/2006/main">
@@ -9307,8 +10624,8 @@
           </a:solidFill>
           <a:ln xmlns:a="http://schemas.openxmlformats.org/drawingml/2006/main" w="10478">
             <a:solidFill>
-              <a:srgbClr val="7CFFCB">
-                <a:alpha val="58000"/>
+              <a:srgbClr val="F5F7FF">
+                <a:alpha val="20000"/>
               </a:srgbClr>
             </a:solidFill>
             <a:prstDash val="solid"/>
@@ -9317,22 +10634,22 @@
       </p:sp>
       <p:sp>
         <p:nvSpPr>
-          <p:cNvPr id="13" name="">
-            <a:extLst xmlns:a="http://schemas.openxmlformats.org/drawingml/2006/main">
-              <a:ext uri="{FF2B5EF4-FFF2-40B4-BE49-F238E27FC236}">
-                <a16:creationId xmlns:a16="http://schemas.microsoft.com/office/drawing/2014/main" id="{269CACEC-9B34-45F3-83BD-52E1D33AD20E}"/>
-              </a:ext>
-            </a:extLst>
-          </p:cNvPr>
-          <p:cNvSpPr>
-            <a:spLocks xmlns:a="http://schemas.openxmlformats.org/drawingml/2006/main" noGrp="1"/>
-          </p:cNvSpPr>
-          <p:nvPr/>
-        </p:nvSpPr>
-        <p:spPr>
-          <a:xfrm xmlns:a="http://schemas.openxmlformats.org/drawingml/2006/main">
-            <a:off x="8582025" y="2381250"/>
-            <a:ext cx="2476500" cy="1714500"/>
+          <p:cNvPr id="19" name="">
+            <a:extLst xmlns:a="http://schemas.openxmlformats.org/drawingml/2006/main">
+              <a:ext uri="{FF2B5EF4-FFF2-40B4-BE49-F238E27FC236}">
+                <a16:creationId xmlns:a16="http://schemas.microsoft.com/office/drawing/2014/main" id="{16CFC57E-5B4B-4198-A9B8-1F097B1E60D8}"/>
+              </a:ext>
+            </a:extLst>
+          </p:cNvPr>
+          <p:cNvSpPr>
+            <a:spLocks xmlns:a="http://schemas.openxmlformats.org/drawingml/2006/main" noGrp="1"/>
+          </p:cNvSpPr>
+          <p:nvPr/>
+        </p:nvSpPr>
+        <p:spPr>
+          <a:xfrm xmlns:a="http://schemas.openxmlformats.org/drawingml/2006/main">
+            <a:off x="8467725" y="2247900"/>
+            <a:ext cx="2762250" cy="742950"/>
           </a:xfrm>
           <a:prstGeom xmlns:a="http://schemas.openxmlformats.org/drawingml/2006/main" prst="rect">
             <a:avLst/>
@@ -9349,7 +10666,7 @@
           <a:lstStyle xmlns:a="http://schemas.openxmlformats.org/drawingml/2006/main"/>
           <a:p xmlns:a="http://schemas.openxmlformats.org/drawingml/2006/main">
             <a:pPr>
-              <a:defRPr sz="8775" b="1">
+              <a:defRPr sz="4500" b="1">
                 <a:solidFill>
                   <a:srgbClr val="7CFFCB"/>
                 </a:solidFill>
@@ -9359,7 +10676,7 @@
               </a:defRPr>
             </a:pPr>
             <a:r>
-              <a:rPr sz="8775" b="1">
+              <a:rPr sz="4500" b="1">
                 <a:solidFill>
                   <a:srgbClr val="7CFFCB"/>
                 </a:solidFill>
@@ -9367,29 +10684,29 @@
                 <a:ea typeface="Microsoft YaHei"/>
                 <a:cs typeface="Microsoft YaHei"/>
               </a:rPr>
-              <a:t>1</a:t>
-            </a:r>
-          </a:p>
-        </p:txBody>
-      </p:sp>
-      <p:sp>
-        <p:nvSpPr>
-          <p:cNvPr id="14" name="">
-            <a:extLst xmlns:a="http://schemas.openxmlformats.org/drawingml/2006/main">
-              <a:ext uri="{FF2B5EF4-FFF2-40B4-BE49-F238E27FC236}">
-                <a16:creationId xmlns:a16="http://schemas.microsoft.com/office/drawing/2014/main" id="{B3A8ECD1-C728-4328-B40A-F812EB410C62}"/>
-              </a:ext>
-            </a:extLst>
-          </p:cNvPr>
-          <p:cNvSpPr>
-            <a:spLocks xmlns:a="http://schemas.openxmlformats.org/drawingml/2006/main" noGrp="1"/>
-          </p:cNvSpPr>
-          <p:nvPr/>
-        </p:nvSpPr>
-        <p:spPr>
-          <a:xfrm xmlns:a="http://schemas.openxmlformats.org/drawingml/2006/main">
-            <a:off x="8610600" y="4400550"/>
-            <a:ext cx="2476500" cy="571500"/>
+              <a:t>03</a:t>
+            </a:r>
+          </a:p>
+        </p:txBody>
+      </p:sp>
+      <p:sp>
+        <p:nvSpPr>
+          <p:cNvPr id="20" name="">
+            <a:extLst xmlns:a="http://schemas.openxmlformats.org/drawingml/2006/main">
+              <a:ext uri="{FF2B5EF4-FFF2-40B4-BE49-F238E27FC236}">
+                <a16:creationId xmlns:a16="http://schemas.microsoft.com/office/drawing/2014/main" id="{0DC71C95-4830-4498-AABC-BDFE7DC67E44}"/>
+              </a:ext>
+            </a:extLst>
+          </p:cNvPr>
+          <p:cNvSpPr>
+            <a:spLocks xmlns:a="http://schemas.openxmlformats.org/drawingml/2006/main" noGrp="1"/>
+          </p:cNvSpPr>
+          <p:nvPr/>
+        </p:nvSpPr>
+        <p:spPr>
+          <a:xfrm xmlns:a="http://schemas.openxmlformats.org/drawingml/2006/main">
+            <a:off x="8467725" y="3190875"/>
+            <a:ext cx="2809875" cy="457200"/>
           </a:xfrm>
           <a:prstGeom xmlns:a="http://schemas.openxmlformats.org/drawingml/2006/main" prst="rect">
             <a:avLst/>
@@ -9406,46 +10723,217 @@
           <a:lstStyle xmlns:a="http://schemas.openxmlformats.org/drawingml/2006/main"/>
           <a:p xmlns:a="http://schemas.openxmlformats.org/drawingml/2006/main">
             <a:pPr>
-              <a:defRPr sz="2400" b="1">
-                <a:solidFill>
-                  <a:srgbClr val="F5F7FF"/>
-                </a:solidFill>
-                <a:latin typeface="Microsoft YaHei"/>
-                <a:ea typeface="Microsoft YaHei"/>
-                <a:cs typeface="Microsoft YaHei"/>
-              </a:defRPr>
-            </a:pPr>
-            <a:r>
-              <a:rPr sz="2400" b="1">
-                <a:solidFill>
-                  <a:srgbClr val="F5F7FF"/>
-                </a:solidFill>
-                <a:latin typeface="Microsoft YaHei"/>
-                <a:ea typeface="Microsoft YaHei"/>
-                <a:cs typeface="Microsoft YaHei"/>
-              </a:rPr>
-              <a:t>情景题</a:t>
-            </a:r>
-          </a:p>
-        </p:txBody>
-      </p:sp>
-      <p:sp>
-        <p:nvSpPr>
-          <p:cNvPr id="15" name="">
-            <a:extLst xmlns:a="http://schemas.openxmlformats.org/drawingml/2006/main">
-              <a:ext uri="{FF2B5EF4-FFF2-40B4-BE49-F238E27FC236}">
-                <a16:creationId xmlns:a16="http://schemas.microsoft.com/office/drawing/2014/main" id="{AEA64328-75FE-4AAF-B483-27B9A1DBA9C9}"/>
-              </a:ext>
-            </a:extLst>
-          </p:cNvPr>
-          <p:cNvSpPr>
-            <a:spLocks xmlns:a="http://schemas.openxmlformats.org/drawingml/2006/main" noGrp="1"/>
-          </p:cNvSpPr>
-          <p:nvPr/>
-        </p:nvSpPr>
-        <p:spPr>
-          <a:xfrm xmlns:a="http://schemas.openxmlformats.org/drawingml/2006/main">
-            <a:off x="762000" y="5781675"/>
+              <a:defRPr sz="2325" b="1">
+                <a:solidFill>
+                  <a:srgbClr val="F5F7FF"/>
+                </a:solidFill>
+                <a:latin typeface="Microsoft YaHei"/>
+                <a:ea typeface="Microsoft YaHei"/>
+                <a:cs typeface="Microsoft YaHei"/>
+              </a:defRPr>
+            </a:pPr>
+            <a:r>
+              <a:rPr sz="2325" b="1">
+                <a:solidFill>
+                  <a:srgbClr val="F5F7FF"/>
+                </a:solidFill>
+                <a:latin typeface="Microsoft YaHei"/>
+                <a:ea typeface="Microsoft YaHei"/>
+                <a:cs typeface="Microsoft YaHei"/>
+              </a:rPr>
+              <a:t>训练方案</a:t>
+            </a:r>
+          </a:p>
+        </p:txBody>
+      </p:sp>
+      <p:sp>
+        <p:nvSpPr>
+          <p:cNvPr id="21" name="">
+            <a:extLst xmlns:a="http://schemas.openxmlformats.org/drawingml/2006/main">
+              <a:ext uri="{FF2B5EF4-FFF2-40B4-BE49-F238E27FC236}">
+                <a16:creationId xmlns:a16="http://schemas.microsoft.com/office/drawing/2014/main" id="{AE0BF90C-7EF1-4FF6-B647-57EB42121E70}"/>
+              </a:ext>
+            </a:extLst>
+          </p:cNvPr>
+          <p:cNvSpPr>
+            <a:spLocks xmlns:a="http://schemas.openxmlformats.org/drawingml/2006/main" noGrp="1"/>
+          </p:cNvSpPr>
+          <p:nvPr/>
+        </p:nvSpPr>
+        <p:spPr>
+          <a:xfrm xmlns:a="http://schemas.openxmlformats.org/drawingml/2006/main">
+            <a:off x="8467725" y="3886200"/>
+            <a:ext cx="2809875" cy="342900"/>
+          </a:xfrm>
+          <a:prstGeom xmlns:a="http://schemas.openxmlformats.org/drawingml/2006/main" prst="rect">
+            <a:avLst/>
+          </a:prstGeom>
+          <a:noFill xmlns:a="http://schemas.openxmlformats.org/drawingml/2006/main"/>
+          <a:ln xmlns:a="http://schemas.openxmlformats.org/drawingml/2006/main" w="0">
+            <a:noFill/>
+          </a:ln>
+        </p:spPr>
+        <p:txBody>
+          <a:bodyPr xmlns:a="http://schemas.openxmlformats.org/drawingml/2006/main">
+            <a:noAutofit/>
+          </a:bodyPr>
+          <a:lstStyle xmlns:a="http://schemas.openxmlformats.org/drawingml/2006/main"/>
+          <a:p xmlns:a="http://schemas.openxmlformats.org/drawingml/2006/main">
+            <a:pPr>
+              <a:defRPr sz="1575" b="0">
+                <a:solidFill>
+                  <a:srgbClr val="F5F7FF"/>
+                </a:solidFill>
+                <a:latin typeface="Microsoft YaHei"/>
+                <a:ea typeface="Microsoft YaHei"/>
+                <a:cs typeface="Microsoft YaHei"/>
+              </a:defRPr>
+            </a:pPr>
+            <a:r>
+              <a:rPr sz="1575" b="0">
+                <a:solidFill>
+                  <a:srgbClr val="F5F7FF"/>
+                </a:solidFill>
+                <a:latin typeface="Microsoft YaHei"/>
+                <a:ea typeface="Microsoft YaHei"/>
+                <a:cs typeface="Microsoft YaHei"/>
+              </a:rPr>
+              <a:t>选择岗位后读取相应题库</a:t>
+            </a:r>
+          </a:p>
+        </p:txBody>
+      </p:sp>
+      <p:sp>
+        <p:nvSpPr>
+          <p:cNvPr id="22" name="">
+            <a:extLst xmlns:a="http://schemas.openxmlformats.org/drawingml/2006/main">
+              <a:ext uri="{FF2B5EF4-FFF2-40B4-BE49-F238E27FC236}">
+                <a16:creationId xmlns:a16="http://schemas.microsoft.com/office/drawing/2014/main" id="{33C20A5E-CEE3-418D-BFB8-DFDB2DAD6399}"/>
+              </a:ext>
+            </a:extLst>
+          </p:cNvPr>
+          <p:cNvSpPr>
+            <a:spLocks xmlns:a="http://schemas.openxmlformats.org/drawingml/2006/main" noGrp="1"/>
+          </p:cNvSpPr>
+          <p:nvPr/>
+        </p:nvSpPr>
+        <p:spPr>
+          <a:xfrm xmlns:a="http://schemas.openxmlformats.org/drawingml/2006/main">
+            <a:off x="8467725" y="4352925"/>
+            <a:ext cx="2809875" cy="342900"/>
+          </a:xfrm>
+          <a:prstGeom xmlns:a="http://schemas.openxmlformats.org/drawingml/2006/main" prst="rect">
+            <a:avLst/>
+          </a:prstGeom>
+          <a:noFill xmlns:a="http://schemas.openxmlformats.org/drawingml/2006/main"/>
+          <a:ln xmlns:a="http://schemas.openxmlformats.org/drawingml/2006/main" w="0">
+            <a:noFill/>
+          </a:ln>
+        </p:spPr>
+        <p:txBody>
+          <a:bodyPr xmlns:a="http://schemas.openxmlformats.org/drawingml/2006/main">
+            <a:noAutofit/>
+          </a:bodyPr>
+          <a:lstStyle xmlns:a="http://schemas.openxmlformats.org/drawingml/2006/main"/>
+          <a:p xmlns:a="http://schemas.openxmlformats.org/drawingml/2006/main">
+            <a:pPr>
+              <a:defRPr sz="1575" b="0">
+                <a:solidFill>
+                  <a:srgbClr val="F5F7FF"/>
+                </a:solidFill>
+                <a:latin typeface="Microsoft YaHei"/>
+                <a:ea typeface="Microsoft YaHei"/>
+                <a:cs typeface="Microsoft YaHei"/>
+              </a:defRPr>
+            </a:pPr>
+            <a:r>
+              <a:rPr sz="1575" b="0">
+                <a:solidFill>
+                  <a:srgbClr val="F5F7FF"/>
+                </a:solidFill>
+                <a:latin typeface="Microsoft YaHei"/>
+                <a:ea typeface="Microsoft YaHei"/>
+                <a:cs typeface="Microsoft YaHei"/>
+              </a:rPr>
+              <a:t>训练报告支撑企业候选比较</a:t>
+            </a:r>
+          </a:p>
+        </p:txBody>
+      </p:sp>
+      <p:sp>
+        <p:nvSpPr>
+          <p:cNvPr id="23" name="">
+            <a:extLst xmlns:a="http://schemas.openxmlformats.org/drawingml/2006/main">
+              <a:ext uri="{FF2B5EF4-FFF2-40B4-BE49-F238E27FC236}">
+                <a16:creationId xmlns:a16="http://schemas.microsoft.com/office/drawing/2014/main" id="{CFB5E5D8-90D2-4897-9601-2280073D17A0}"/>
+              </a:ext>
+            </a:extLst>
+          </p:cNvPr>
+          <p:cNvSpPr>
+            <a:spLocks xmlns:a="http://schemas.openxmlformats.org/drawingml/2006/main" noGrp="1"/>
+          </p:cNvSpPr>
+          <p:nvPr/>
+        </p:nvSpPr>
+        <p:spPr>
+          <a:xfrm xmlns:a="http://schemas.openxmlformats.org/drawingml/2006/main">
+            <a:off x="8467725" y="4924425"/>
+            <a:ext cx="2809875" cy="342900"/>
+          </a:xfrm>
+          <a:prstGeom xmlns:a="http://schemas.openxmlformats.org/drawingml/2006/main" prst="rect">
+            <a:avLst/>
+          </a:prstGeom>
+          <a:noFill xmlns:a="http://schemas.openxmlformats.org/drawingml/2006/main"/>
+          <a:ln xmlns:a="http://schemas.openxmlformats.org/drawingml/2006/main" w="0">
+            <a:noFill/>
+          </a:ln>
+        </p:spPr>
+        <p:txBody>
+          <a:bodyPr xmlns:a="http://schemas.openxmlformats.org/drawingml/2006/main">
+            <a:noAutofit/>
+          </a:bodyPr>
+          <a:lstStyle xmlns:a="http://schemas.openxmlformats.org/drawingml/2006/main"/>
+          <a:p xmlns:a="http://schemas.openxmlformats.org/drawingml/2006/main">
+            <a:pPr>
+              <a:defRPr sz="1350" b="0">
+                <a:solidFill>
+                  <a:srgbClr val="7CFFCB"/>
+                </a:solidFill>
+                <a:latin typeface="Microsoft YaHei"/>
+                <a:ea typeface="Microsoft YaHei"/>
+                <a:cs typeface="Microsoft YaHei"/>
+              </a:defRPr>
+            </a:pPr>
+            <a:r>
+              <a:rPr sz="1350" b="0">
+                <a:solidFill>
+                  <a:srgbClr val="7CFFCB"/>
+                </a:solidFill>
+                <a:latin typeface="Microsoft YaHei"/>
+                <a:ea typeface="Microsoft YaHei"/>
+                <a:cs typeface="Microsoft YaHei"/>
+              </a:rPr>
+              <a:t>便于学生练习、企业比较</a:t>
+            </a:r>
+          </a:p>
+        </p:txBody>
+      </p:sp>
+      <p:sp>
+        <p:nvSpPr>
+          <p:cNvPr id="24" name="">
+            <a:extLst xmlns:a="http://schemas.openxmlformats.org/drawingml/2006/main">
+              <a:ext uri="{FF2B5EF4-FFF2-40B4-BE49-F238E27FC236}">
+                <a16:creationId xmlns:a16="http://schemas.microsoft.com/office/drawing/2014/main" id="{45E73F92-8FCF-471C-9B67-8617558A1ACE}"/>
+              </a:ext>
+            </a:extLst>
+          </p:cNvPr>
+          <p:cNvSpPr>
+            <a:spLocks xmlns:a="http://schemas.openxmlformats.org/drawingml/2006/main" noGrp="1"/>
+          </p:cNvSpPr>
+          <p:nvPr/>
+        </p:nvSpPr>
+        <p:spPr>
+          <a:xfrm xmlns:a="http://schemas.openxmlformats.org/drawingml/2006/main">
+            <a:off x="762000" y="5762625"/>
             <a:ext cx="10572750" cy="361950"/>
           </a:xfrm>
           <a:prstGeom xmlns:a="http://schemas.openxmlformats.org/drawingml/2006/main" prst="rect">
@@ -9481,7 +10969,7 @@
                 <a:ea typeface="Microsoft YaHei"/>
                 <a:cs typeface="Microsoft YaHei"/>
               </a:rPr>
-              <a:t>种子岗位：智驾测试 / 三电系统测试</a:t>
+              <a:t>题库内容、岗位评估建议与初筛权重可维护，适配不同岗位需求</a:t>
             </a:r>
           </a:p>
         </p:txBody>
@@ -9489,7 +10977,7 @@
     </p:spTree>
     <p:extLst>
       <p:ext uri="{BB962C8B-B14F-4D97-AF65-F5344CB8AC3E}">
-        <p14:creationId xmlns:p14="http://schemas.microsoft.com/office/powerpoint/2010/main" val="202716578"/>
+        <p14:creationId xmlns:p14="http://schemas.microsoft.com/office/powerpoint/2010/main" val="1874095899"/>
       </p:ext>
     </p:extLst>
   </p:cSld>
@@ -9520,15 +11008,15 @@
       </p:grpSpPr>
       <p:pic>
         <p:nvPicPr>
-          <p:cNvPr id="26" name=""/>
+          <p:cNvPr id="27" name=""/>
           <p:cNvPicPr>
             <a:picLocks xmlns:a="http://schemas.openxmlformats.org/drawingml/2006/main" noChangeAspect="1"/>
           </p:cNvPicPr>
           <p:nvPr/>
         </p:nvPicPr>
         <p:blipFill>
-          <a:blip xmlns:r="http://schemas.openxmlformats.org/officeDocument/2006/relationships" xmlns:a="http://schemas.openxmlformats.org/drawingml/2006/main" r:embed="Rf4a48444e33747a2"/>
-          <a:srcRect xmlns:a="http://schemas.openxmlformats.org/drawingml/2006/main" l="0" t="0" r="0" b="0"/>
+          <a:blip xmlns:r="http://schemas.openxmlformats.org/officeDocument/2006/relationships" xmlns:a="http://schemas.openxmlformats.org/drawingml/2006/main" r:embed="R7fbcb0c564704dce"/>
+          <a:srcRect xmlns:a="http://schemas.openxmlformats.org/drawingml/2006/main" l="0" t="27" r="0" b="27"/>
           <a:stretch xmlns:a="http://schemas.openxmlformats.org/drawingml/2006/main">
             <a:fillRect l="0" t="0" r="0" b="0"/>
           </a:stretch>
@@ -9548,7 +11036,7 @@
           <p:cNvPr id="2" name="">
             <a:extLst xmlns:a="http://schemas.openxmlformats.org/drawingml/2006/main">
               <a:ext uri="{FF2B5EF4-FFF2-40B4-BE49-F238E27FC236}">
-                <a16:creationId xmlns:a16="http://schemas.microsoft.com/office/drawing/2014/main" id="{DBDD0EBB-CD7D-41EB-A2B3-52310B089320}"/>
+                <a16:creationId xmlns:a16="http://schemas.microsoft.com/office/drawing/2014/main" id="{B866E0D4-3EA2-4BD3-960A-A3B042FFB36C}"/>
               </a:ext>
             </a:extLst>
           </p:cNvPr>
@@ -9585,7 +11073,7 @@
           <p:cNvPr id="3" name="">
             <a:extLst xmlns:a="http://schemas.openxmlformats.org/drawingml/2006/main">
               <a:ext uri="{FF2B5EF4-FFF2-40B4-BE49-F238E27FC236}">
-                <a16:creationId xmlns:a16="http://schemas.microsoft.com/office/drawing/2014/main" id="{0A880FD3-679C-4D54-9725-721C91CF76E7}"/>
+                <a16:creationId xmlns:a16="http://schemas.microsoft.com/office/drawing/2014/main" id="{D0762C9C-EDC3-4971-9382-1FD1FA4C5E8E}"/>
               </a:ext>
             </a:extLst>
           </p:cNvPr>
@@ -9642,7 +11130,7 @@
           <p:cNvPr id="4" name="">
             <a:extLst xmlns:a="http://schemas.openxmlformats.org/drawingml/2006/main">
               <a:ext uri="{FF2B5EF4-FFF2-40B4-BE49-F238E27FC236}">
-                <a16:creationId xmlns:a16="http://schemas.microsoft.com/office/drawing/2014/main" id="{98770979-B90F-43B5-97C6-ECE4400CB9E1}"/>
+                <a16:creationId xmlns:a16="http://schemas.microsoft.com/office/drawing/2014/main" id="{D280DB9D-8BC1-476A-B01A-D43EDAB5E044}"/>
               </a:ext>
             </a:extLst>
           </p:cNvPr>
@@ -9689,7 +11177,7 @@
                 <a:ea typeface="Microsoft YaHei"/>
                 <a:cs typeface="Microsoft YaHei"/>
               </a:rPr>
-              <a:t>语音数据进入可解释评分</a:t>
+              <a:t>语音回答如何转成有依据的报告</a:t>
             </a:r>
           </a:p>
         </p:txBody>
@@ -9699,7 +11187,7 @@
           <p:cNvPr id="5" name="">
             <a:extLst xmlns:a="http://schemas.openxmlformats.org/drawingml/2006/main">
               <a:ext uri="{FF2B5EF4-FFF2-40B4-BE49-F238E27FC236}">
-                <a16:creationId xmlns:a16="http://schemas.microsoft.com/office/drawing/2014/main" id="{7AC28837-D71D-47A3-83AC-F868BA8F72EE}"/>
+                <a16:creationId xmlns:a16="http://schemas.microsoft.com/office/drawing/2014/main" id="{0D3AA6D6-8F06-4B46-8EC9-FBB15A3A0617}"/>
               </a:ext>
             </a:extLst>
           </p:cNvPr>
@@ -9760,7 +11248,7 @@
           <p:cNvPr id="6" name="">
             <a:extLst xmlns:a="http://schemas.openxmlformats.org/drawingml/2006/main">
               <a:ext uri="{FF2B5EF4-FFF2-40B4-BE49-F238E27FC236}">
-                <a16:creationId xmlns:a16="http://schemas.microsoft.com/office/drawing/2014/main" id="{DD79110F-38B3-49FB-B3C3-07CAFE53975F}"/>
+                <a16:creationId xmlns:a16="http://schemas.microsoft.com/office/drawing/2014/main" id="{E7F9168A-3EE9-4E18-ACAF-A986F775B0F7}"/>
               </a:ext>
             </a:extLst>
           </p:cNvPr>
@@ -9799,35 +11287,35 @@
           <p:cNvPr id="7" name="">
             <a:extLst xmlns:a="http://schemas.openxmlformats.org/drawingml/2006/main">
               <a:ext uri="{FF2B5EF4-FFF2-40B4-BE49-F238E27FC236}">
-                <a16:creationId xmlns:a16="http://schemas.microsoft.com/office/drawing/2014/main" id="{0B02F358-0B0D-493A-AFF8-8AA4DC8D5BCA}"/>
-              </a:ext>
-            </a:extLst>
-          </p:cNvPr>
-          <p:cNvSpPr>
-            <a:spLocks xmlns:a="http://schemas.openxmlformats.org/drawingml/2006/main" noGrp="1"/>
-          </p:cNvSpPr>
-          <p:nvPr/>
-        </p:nvSpPr>
-        <p:spPr>
-          <a:xfrm xmlns:a="http://schemas.openxmlformats.org/drawingml/2006/main">
-            <a:off x="914400" y="2409825"/>
-            <a:ext cx="1943100" cy="419100"/>
-          </a:xfrm>
-          <a:prstGeom xmlns:a="http://schemas.openxmlformats.org/drawingml/2006/main" prst="rect">
-            <a:avLst/>
-          </a:prstGeom>
-          <a:noFill xmlns:a="http://schemas.openxmlformats.org/drawingml/2006/main"/>
-          <a:ln xmlns:a="http://schemas.openxmlformats.org/drawingml/2006/main" w="0">
-            <a:noFill/>
-          </a:ln>
-        </p:spPr>
-        <p:txBody>
-          <a:bodyPr xmlns:a="http://schemas.openxmlformats.org/drawingml/2006/main">
-            <a:noAutofit/>
-          </a:bodyPr>
-          <a:lstStyle xmlns:a="http://schemas.openxmlformats.org/drawingml/2006/main"/>
-          <a:p xmlns:a="http://schemas.openxmlformats.org/drawingml/2006/main">
-            <a:pPr>
+                <a16:creationId xmlns:a16="http://schemas.microsoft.com/office/drawing/2014/main" id="{505C598E-A366-4144-AAC2-7FA03D0FBE06}"/>
+              </a:ext>
+            </a:extLst>
+          </p:cNvPr>
+          <p:cNvSpPr>
+            <a:spLocks xmlns:a="http://schemas.openxmlformats.org/drawingml/2006/main" noGrp="1"/>
+          </p:cNvSpPr>
+          <p:nvPr/>
+        </p:nvSpPr>
+        <p:spPr>
+          <a:xfrm xmlns:a="http://schemas.openxmlformats.org/drawingml/2006/main">
+            <a:off x="857250" y="2247900"/>
+            <a:ext cx="2038350" cy="714375"/>
+          </a:xfrm>
+          <a:prstGeom xmlns:a="http://schemas.openxmlformats.org/drawingml/2006/main" prst="rect">
+            <a:avLst/>
+          </a:prstGeom>
+          <a:noFill xmlns:a="http://schemas.openxmlformats.org/drawingml/2006/main"/>
+          <a:ln xmlns:a="http://schemas.openxmlformats.org/drawingml/2006/main" w="0">
+            <a:noFill/>
+          </a:ln>
+        </p:spPr>
+        <p:txBody>
+          <a:bodyPr xmlns:a="http://schemas.openxmlformats.org/drawingml/2006/main" anchor="ctr">
+            <a:noAutofit/>
+          </a:bodyPr>
+          <a:lstStyle xmlns:a="http://schemas.openxmlformats.org/drawingml/2006/main"/>
+          <a:p xmlns:a="http://schemas.openxmlformats.org/drawingml/2006/main">
+            <a:pPr algn="ctr">
               <a:defRPr sz="2025" b="1">
                 <a:solidFill>
                   <a:srgbClr val="F5F7FF"/>
@@ -9856,7 +11344,7 @@
           <p:cNvPr id="8" name="">
             <a:extLst xmlns:a="http://schemas.openxmlformats.org/drawingml/2006/main">
               <a:ext uri="{FF2B5EF4-FFF2-40B4-BE49-F238E27FC236}">
-                <a16:creationId xmlns:a16="http://schemas.microsoft.com/office/drawing/2014/main" id="{5415A5C2-D6FA-41A8-A79A-F710445B12A0}"/>
+                <a16:creationId xmlns:a16="http://schemas.microsoft.com/office/drawing/2014/main" id="{473C3C20-71D4-4A4A-BEF1-D9E717F9008E}"/>
               </a:ext>
             </a:extLst>
           </p:cNvPr>
@@ -9889,7 +11377,7 @@
           <p:cNvPr id="9" name="">
             <a:extLst xmlns:a="http://schemas.openxmlformats.org/drawingml/2006/main">
               <a:ext uri="{FF2B5EF4-FFF2-40B4-BE49-F238E27FC236}">
-                <a16:creationId xmlns:a16="http://schemas.microsoft.com/office/drawing/2014/main" id="{794F76B7-1953-4149-BE77-B962178258FB}"/>
+                <a16:creationId xmlns:a16="http://schemas.microsoft.com/office/drawing/2014/main" id="{8702AD77-FAA2-4F65-9947-0BDF439B61FF}"/>
               </a:ext>
             </a:extLst>
           </p:cNvPr>
@@ -9946,7 +11434,7 @@
           <p:cNvPr id="10" name="">
             <a:extLst xmlns:a="http://schemas.openxmlformats.org/drawingml/2006/main">
               <a:ext uri="{FF2B5EF4-FFF2-40B4-BE49-F238E27FC236}">
-                <a16:creationId xmlns:a16="http://schemas.microsoft.com/office/drawing/2014/main" id="{6B9AA9C6-55A6-48B7-B047-510B0B9FB1C7}"/>
+                <a16:creationId xmlns:a16="http://schemas.microsoft.com/office/drawing/2014/main" id="{4D66959A-96B0-4F85-94C7-9C6779738295}"/>
               </a:ext>
             </a:extLst>
           </p:cNvPr>
@@ -9985,35 +11473,35 @@
           <p:cNvPr id="11" name="">
             <a:extLst xmlns:a="http://schemas.openxmlformats.org/drawingml/2006/main">
               <a:ext uri="{FF2B5EF4-FFF2-40B4-BE49-F238E27FC236}">
-                <a16:creationId xmlns:a16="http://schemas.microsoft.com/office/drawing/2014/main" id="{B79C7E2C-D567-4C7C-9370-385CE9007BC2}"/>
-              </a:ext>
-            </a:extLst>
-          </p:cNvPr>
-          <p:cNvSpPr>
-            <a:spLocks xmlns:a="http://schemas.openxmlformats.org/drawingml/2006/main" noGrp="1"/>
-          </p:cNvSpPr>
-          <p:nvPr/>
-        </p:nvSpPr>
-        <p:spPr>
-          <a:xfrm xmlns:a="http://schemas.openxmlformats.org/drawingml/2006/main">
-            <a:off x="3810000" y="2409825"/>
-            <a:ext cx="1943100" cy="419100"/>
-          </a:xfrm>
-          <a:prstGeom xmlns:a="http://schemas.openxmlformats.org/drawingml/2006/main" prst="rect">
-            <a:avLst/>
-          </a:prstGeom>
-          <a:noFill xmlns:a="http://schemas.openxmlformats.org/drawingml/2006/main"/>
-          <a:ln xmlns:a="http://schemas.openxmlformats.org/drawingml/2006/main" w="0">
-            <a:noFill/>
-          </a:ln>
-        </p:spPr>
-        <p:txBody>
-          <a:bodyPr xmlns:a="http://schemas.openxmlformats.org/drawingml/2006/main">
-            <a:noAutofit/>
-          </a:bodyPr>
-          <a:lstStyle xmlns:a="http://schemas.openxmlformats.org/drawingml/2006/main"/>
-          <a:p xmlns:a="http://schemas.openxmlformats.org/drawingml/2006/main">
-            <a:pPr>
+                <a16:creationId xmlns:a16="http://schemas.microsoft.com/office/drawing/2014/main" id="{50C2E4BA-1AEC-43F8-B901-7D94F081AB2F}"/>
+              </a:ext>
+            </a:extLst>
+          </p:cNvPr>
+          <p:cNvSpPr>
+            <a:spLocks xmlns:a="http://schemas.openxmlformats.org/drawingml/2006/main" noGrp="1"/>
+          </p:cNvSpPr>
+          <p:nvPr/>
+        </p:nvSpPr>
+        <p:spPr>
+          <a:xfrm xmlns:a="http://schemas.openxmlformats.org/drawingml/2006/main">
+            <a:off x="3752850" y="2247900"/>
+            <a:ext cx="2038350" cy="714375"/>
+          </a:xfrm>
+          <a:prstGeom xmlns:a="http://schemas.openxmlformats.org/drawingml/2006/main" prst="rect">
+            <a:avLst/>
+          </a:prstGeom>
+          <a:noFill xmlns:a="http://schemas.openxmlformats.org/drawingml/2006/main"/>
+          <a:ln xmlns:a="http://schemas.openxmlformats.org/drawingml/2006/main" w="0">
+            <a:noFill/>
+          </a:ln>
+        </p:spPr>
+        <p:txBody>
+          <a:bodyPr xmlns:a="http://schemas.openxmlformats.org/drawingml/2006/main" anchor="ctr">
+            <a:noAutofit/>
+          </a:bodyPr>
+          <a:lstStyle xmlns:a="http://schemas.openxmlformats.org/drawingml/2006/main"/>
+          <a:p xmlns:a="http://schemas.openxmlformats.org/drawingml/2006/main">
+            <a:pPr algn="ctr">
               <a:defRPr sz="2025" b="1">
                 <a:solidFill>
                   <a:srgbClr val="F5F7FF"/>
@@ -10042,7 +11530,7 @@
           <p:cNvPr id="12" name="">
             <a:extLst xmlns:a="http://schemas.openxmlformats.org/drawingml/2006/main">
               <a:ext uri="{FF2B5EF4-FFF2-40B4-BE49-F238E27FC236}">
-                <a16:creationId xmlns:a16="http://schemas.microsoft.com/office/drawing/2014/main" id="{BC96697D-AD6A-4E95-BEF1-1D0B04756DA2}"/>
+                <a16:creationId xmlns:a16="http://schemas.microsoft.com/office/drawing/2014/main" id="{2124FB0A-7300-43B8-AF6D-C60B07817BE2}"/>
               </a:ext>
             </a:extLst>
           </p:cNvPr>
@@ -10075,7 +11563,7 @@
           <p:cNvPr id="13" name="">
             <a:extLst xmlns:a="http://schemas.openxmlformats.org/drawingml/2006/main">
               <a:ext uri="{FF2B5EF4-FFF2-40B4-BE49-F238E27FC236}">
-                <a16:creationId xmlns:a16="http://schemas.microsoft.com/office/drawing/2014/main" id="{E9B41AD8-C0A5-4CD4-B155-5AD4755AA221}"/>
+                <a16:creationId xmlns:a16="http://schemas.microsoft.com/office/drawing/2014/main" id="{BB2E536B-41D5-4B7C-850F-512381D8B163}"/>
               </a:ext>
             </a:extLst>
           </p:cNvPr>
@@ -10132,7 +11620,7 @@
           <p:cNvPr id="14" name="">
             <a:extLst xmlns:a="http://schemas.openxmlformats.org/drawingml/2006/main">
               <a:ext uri="{FF2B5EF4-FFF2-40B4-BE49-F238E27FC236}">
-                <a16:creationId xmlns:a16="http://schemas.microsoft.com/office/drawing/2014/main" id="{CDC1C765-0C66-4843-A413-F192BDE4BDD3}"/>
+                <a16:creationId xmlns:a16="http://schemas.microsoft.com/office/drawing/2014/main" id="{91601B35-207F-4691-ADFC-79779EC4878B}"/>
               </a:ext>
             </a:extLst>
           </p:cNvPr>
@@ -10171,35 +11659,35 @@
           <p:cNvPr id="15" name="">
             <a:extLst xmlns:a="http://schemas.openxmlformats.org/drawingml/2006/main">
               <a:ext uri="{FF2B5EF4-FFF2-40B4-BE49-F238E27FC236}">
-                <a16:creationId xmlns:a16="http://schemas.microsoft.com/office/drawing/2014/main" id="{F0BC8EEE-8CA3-43E6-90AF-916397329B0D}"/>
-              </a:ext>
-            </a:extLst>
-          </p:cNvPr>
-          <p:cNvSpPr>
-            <a:spLocks xmlns:a="http://schemas.openxmlformats.org/drawingml/2006/main" noGrp="1"/>
-          </p:cNvSpPr>
-          <p:nvPr/>
-        </p:nvSpPr>
-        <p:spPr>
-          <a:xfrm xmlns:a="http://schemas.openxmlformats.org/drawingml/2006/main">
-            <a:off x="6705600" y="2409825"/>
-            <a:ext cx="1943100" cy="419100"/>
-          </a:xfrm>
-          <a:prstGeom xmlns:a="http://schemas.openxmlformats.org/drawingml/2006/main" prst="rect">
-            <a:avLst/>
-          </a:prstGeom>
-          <a:noFill xmlns:a="http://schemas.openxmlformats.org/drawingml/2006/main"/>
-          <a:ln xmlns:a="http://schemas.openxmlformats.org/drawingml/2006/main" w="0">
-            <a:noFill/>
-          </a:ln>
-        </p:spPr>
-        <p:txBody>
-          <a:bodyPr xmlns:a="http://schemas.openxmlformats.org/drawingml/2006/main">
-            <a:noAutofit/>
-          </a:bodyPr>
-          <a:lstStyle xmlns:a="http://schemas.openxmlformats.org/drawingml/2006/main"/>
-          <a:p xmlns:a="http://schemas.openxmlformats.org/drawingml/2006/main">
-            <a:pPr>
+                <a16:creationId xmlns:a16="http://schemas.microsoft.com/office/drawing/2014/main" id="{54DF931C-E62D-4C4C-94BB-6880E2D5FEE9}"/>
+              </a:ext>
+            </a:extLst>
+          </p:cNvPr>
+          <p:cNvSpPr>
+            <a:spLocks xmlns:a="http://schemas.openxmlformats.org/drawingml/2006/main" noGrp="1"/>
+          </p:cNvSpPr>
+          <p:nvPr/>
+        </p:nvSpPr>
+        <p:spPr>
+          <a:xfrm xmlns:a="http://schemas.openxmlformats.org/drawingml/2006/main">
+            <a:off x="6648450" y="2247900"/>
+            <a:ext cx="2038350" cy="714375"/>
+          </a:xfrm>
+          <a:prstGeom xmlns:a="http://schemas.openxmlformats.org/drawingml/2006/main" prst="rect">
+            <a:avLst/>
+          </a:prstGeom>
+          <a:noFill xmlns:a="http://schemas.openxmlformats.org/drawingml/2006/main"/>
+          <a:ln xmlns:a="http://schemas.openxmlformats.org/drawingml/2006/main" w="0">
+            <a:noFill/>
+          </a:ln>
+        </p:spPr>
+        <p:txBody>
+          <a:bodyPr xmlns:a="http://schemas.openxmlformats.org/drawingml/2006/main" anchor="ctr">
+            <a:noAutofit/>
+          </a:bodyPr>
+          <a:lstStyle xmlns:a="http://schemas.openxmlformats.org/drawingml/2006/main"/>
+          <a:p xmlns:a="http://schemas.openxmlformats.org/drawingml/2006/main">
+            <a:pPr algn="ctr">
               <a:defRPr sz="2025" b="1">
                 <a:solidFill>
                   <a:srgbClr val="F5F7FF"/>
@@ -10228,7 +11716,7 @@
           <p:cNvPr id="16" name="">
             <a:extLst xmlns:a="http://schemas.openxmlformats.org/drawingml/2006/main">
               <a:ext uri="{FF2B5EF4-FFF2-40B4-BE49-F238E27FC236}">
-                <a16:creationId xmlns:a16="http://schemas.microsoft.com/office/drawing/2014/main" id="{C2D51DAB-4E6E-43F8-AD67-7B4DB9639891}"/>
+                <a16:creationId xmlns:a16="http://schemas.microsoft.com/office/drawing/2014/main" id="{87505A2B-948E-4052-B718-9A2408A4CF1D}"/>
               </a:ext>
             </a:extLst>
           </p:cNvPr>
@@ -10261,7 +11749,7 @@
           <p:cNvPr id="17" name="">
             <a:extLst xmlns:a="http://schemas.openxmlformats.org/drawingml/2006/main">
               <a:ext uri="{FF2B5EF4-FFF2-40B4-BE49-F238E27FC236}">
-                <a16:creationId xmlns:a16="http://schemas.microsoft.com/office/drawing/2014/main" id="{D760448B-D81B-4829-9147-1C1B04C32964}"/>
+                <a16:creationId xmlns:a16="http://schemas.microsoft.com/office/drawing/2014/main" id="{44D7E4BA-FCA4-4269-9508-0F3718301BDF}"/>
               </a:ext>
             </a:extLst>
           </p:cNvPr>
@@ -10318,7 +11806,7 @@
           <p:cNvPr id="18" name="">
             <a:extLst xmlns:a="http://schemas.openxmlformats.org/drawingml/2006/main">
               <a:ext uri="{FF2B5EF4-FFF2-40B4-BE49-F238E27FC236}">
-                <a16:creationId xmlns:a16="http://schemas.microsoft.com/office/drawing/2014/main" id="{A594CD41-65D1-4C87-BBC7-7532CA2012E9}"/>
+                <a16:creationId xmlns:a16="http://schemas.microsoft.com/office/drawing/2014/main" id="{9D9FC6E7-9421-4748-ACD9-2F6524627885}"/>
               </a:ext>
             </a:extLst>
           </p:cNvPr>
@@ -10357,35 +11845,35 @@
           <p:cNvPr id="19" name="">
             <a:extLst xmlns:a="http://schemas.openxmlformats.org/drawingml/2006/main">
               <a:ext uri="{FF2B5EF4-FFF2-40B4-BE49-F238E27FC236}">
-                <a16:creationId xmlns:a16="http://schemas.microsoft.com/office/drawing/2014/main" id="{37EABE91-4AFC-4ABF-916B-FC526C7E328B}"/>
-              </a:ext>
-            </a:extLst>
-          </p:cNvPr>
-          <p:cNvSpPr>
-            <a:spLocks xmlns:a="http://schemas.openxmlformats.org/drawingml/2006/main" noGrp="1"/>
-          </p:cNvSpPr>
-          <p:nvPr/>
-        </p:nvSpPr>
-        <p:spPr>
-          <a:xfrm xmlns:a="http://schemas.openxmlformats.org/drawingml/2006/main">
-            <a:off x="9601200" y="2409825"/>
-            <a:ext cx="1943100" cy="419100"/>
-          </a:xfrm>
-          <a:prstGeom xmlns:a="http://schemas.openxmlformats.org/drawingml/2006/main" prst="rect">
-            <a:avLst/>
-          </a:prstGeom>
-          <a:noFill xmlns:a="http://schemas.openxmlformats.org/drawingml/2006/main"/>
-          <a:ln xmlns:a="http://schemas.openxmlformats.org/drawingml/2006/main" w="0">
-            <a:noFill/>
-          </a:ln>
-        </p:spPr>
-        <p:txBody>
-          <a:bodyPr xmlns:a="http://schemas.openxmlformats.org/drawingml/2006/main">
-            <a:noAutofit/>
-          </a:bodyPr>
-          <a:lstStyle xmlns:a="http://schemas.openxmlformats.org/drawingml/2006/main"/>
-          <a:p xmlns:a="http://schemas.openxmlformats.org/drawingml/2006/main">
-            <a:pPr>
+                <a16:creationId xmlns:a16="http://schemas.microsoft.com/office/drawing/2014/main" id="{8B5946CB-A27B-4BCF-A764-11F418E1AE38}"/>
+              </a:ext>
+            </a:extLst>
+          </p:cNvPr>
+          <p:cNvSpPr>
+            <a:spLocks xmlns:a="http://schemas.openxmlformats.org/drawingml/2006/main" noGrp="1"/>
+          </p:cNvSpPr>
+          <p:nvPr/>
+        </p:nvSpPr>
+        <p:spPr>
+          <a:xfrm xmlns:a="http://schemas.openxmlformats.org/drawingml/2006/main">
+            <a:off x="9544050" y="2247900"/>
+            <a:ext cx="2038350" cy="714375"/>
+          </a:xfrm>
+          <a:prstGeom xmlns:a="http://schemas.openxmlformats.org/drawingml/2006/main" prst="rect">
+            <a:avLst/>
+          </a:prstGeom>
+          <a:noFill xmlns:a="http://schemas.openxmlformats.org/drawingml/2006/main"/>
+          <a:ln xmlns:a="http://schemas.openxmlformats.org/drawingml/2006/main" w="0">
+            <a:noFill/>
+          </a:ln>
+        </p:spPr>
+        <p:txBody>
+          <a:bodyPr xmlns:a="http://schemas.openxmlformats.org/drawingml/2006/main" anchor="ctr">
+            <a:noAutofit/>
+          </a:bodyPr>
+          <a:lstStyle xmlns:a="http://schemas.openxmlformats.org/drawingml/2006/main"/>
+          <a:p xmlns:a="http://schemas.openxmlformats.org/drawingml/2006/main">
+            <a:pPr algn="ctr">
               <a:defRPr sz="2025" b="1">
                 <a:solidFill>
                   <a:srgbClr val="F5F7FF"/>
@@ -10404,7 +11892,7 @@
                 <a:ea typeface="Microsoft YaHei"/>
                 <a:cs typeface="Microsoft YaHei"/>
               </a:rPr>
-              <a:t>四维评分</a:t>
+              <a:t>岗位评分</a:t>
             </a:r>
           </a:p>
         </p:txBody>
@@ -10414,18 +11902,18 @@
           <p:cNvPr id="20" name="">
             <a:extLst xmlns:a="http://schemas.openxmlformats.org/drawingml/2006/main">
               <a:ext uri="{FF2B5EF4-FFF2-40B4-BE49-F238E27FC236}">
-                <a16:creationId xmlns:a16="http://schemas.microsoft.com/office/drawing/2014/main" id="{440E22DB-1E5C-4574-98D8-752349961591}"/>
-              </a:ext>
-            </a:extLst>
-          </p:cNvPr>
-          <p:cNvSpPr>
-            <a:spLocks xmlns:a="http://schemas.openxmlformats.org/drawingml/2006/main" noGrp="1"/>
-          </p:cNvSpPr>
-          <p:nvPr/>
-        </p:nvSpPr>
-        <p:spPr>
-          <a:xfrm xmlns:a="http://schemas.openxmlformats.org/drawingml/2006/main">
-            <a:off x="781050" y="3886200"/>
+                <a16:creationId xmlns:a16="http://schemas.microsoft.com/office/drawing/2014/main" id="{394C6D32-E6FA-46BF-97C0-C6DEB444B78B}"/>
+              </a:ext>
+            </a:extLst>
+          </p:cNvPr>
+          <p:cNvSpPr>
+            <a:spLocks xmlns:a="http://schemas.openxmlformats.org/drawingml/2006/main" noGrp="1"/>
+          </p:cNvSpPr>
+          <p:nvPr/>
+        </p:nvSpPr>
+        <p:spPr>
+          <a:xfrm xmlns:a="http://schemas.openxmlformats.org/drawingml/2006/main">
+            <a:off x="781050" y="3638550"/>
             <a:ext cx="5000625" cy="1504950"/>
           </a:xfrm>
           <a:prstGeom xmlns:a="http://schemas.openxmlformats.org/drawingml/2006/main" prst="roundRect">
@@ -10453,18 +11941,18 @@
           <p:cNvPr id="21" name="">
             <a:extLst xmlns:a="http://schemas.openxmlformats.org/drawingml/2006/main">
               <a:ext uri="{FF2B5EF4-FFF2-40B4-BE49-F238E27FC236}">
-                <a16:creationId xmlns:a16="http://schemas.microsoft.com/office/drawing/2014/main" id="{776B69DF-8C22-4715-8EBE-4BEA57E9D664}"/>
-              </a:ext>
-            </a:extLst>
-          </p:cNvPr>
-          <p:cNvSpPr>
-            <a:spLocks xmlns:a="http://schemas.openxmlformats.org/drawingml/2006/main" noGrp="1"/>
-          </p:cNvSpPr>
-          <p:nvPr/>
-        </p:nvSpPr>
-        <p:spPr>
-          <a:xfrm xmlns:a="http://schemas.openxmlformats.org/drawingml/2006/main">
-            <a:off x="1038225" y="4124325"/>
+                <a16:creationId xmlns:a16="http://schemas.microsoft.com/office/drawing/2014/main" id="{17AA8FEC-07DC-4E1D-9B95-2D5B44E7ED5B}"/>
+              </a:ext>
+            </a:extLst>
+          </p:cNvPr>
+          <p:cNvSpPr>
+            <a:spLocks xmlns:a="http://schemas.openxmlformats.org/drawingml/2006/main" noGrp="1"/>
+          </p:cNvSpPr>
+          <p:nvPr/>
+        </p:nvSpPr>
+        <p:spPr>
+          <a:xfrm xmlns:a="http://schemas.openxmlformats.org/drawingml/2006/main">
+            <a:off x="1038225" y="3848100"/>
             <a:ext cx="4429125" cy="400050"/>
           </a:xfrm>
           <a:prstGeom xmlns:a="http://schemas.openxmlformats.org/drawingml/2006/main" prst="rect">
@@ -10510,18 +11998,18 @@
           <p:cNvPr id="22" name="">
             <a:extLst xmlns:a="http://schemas.openxmlformats.org/drawingml/2006/main">
               <a:ext uri="{FF2B5EF4-FFF2-40B4-BE49-F238E27FC236}">
-                <a16:creationId xmlns:a16="http://schemas.microsoft.com/office/drawing/2014/main" id="{17EFA6DF-38C5-41D6-9E90-7ADD04083464}"/>
-              </a:ext>
-            </a:extLst>
-          </p:cNvPr>
-          <p:cNvSpPr>
-            <a:spLocks xmlns:a="http://schemas.openxmlformats.org/drawingml/2006/main" noGrp="1"/>
-          </p:cNvSpPr>
-          <p:nvPr/>
-        </p:nvSpPr>
-        <p:spPr>
-          <a:xfrm xmlns:a="http://schemas.openxmlformats.org/drawingml/2006/main">
-            <a:off x="1038225" y="4638675"/>
+                <a16:creationId xmlns:a16="http://schemas.microsoft.com/office/drawing/2014/main" id="{0B37454C-E4D5-4F4E-A1C1-5E70A7A4BC3E}"/>
+              </a:ext>
+            </a:extLst>
+          </p:cNvPr>
+          <p:cNvSpPr>
+            <a:spLocks xmlns:a="http://schemas.openxmlformats.org/drawingml/2006/main" noGrp="1"/>
+          </p:cNvSpPr>
+          <p:nvPr/>
+        </p:nvSpPr>
+        <p:spPr>
+          <a:xfrm xmlns:a="http://schemas.openxmlformats.org/drawingml/2006/main">
+            <a:off x="1038225" y="4371975"/>
             <a:ext cx="4429125" cy="419100"/>
           </a:xfrm>
           <a:prstGeom xmlns:a="http://schemas.openxmlformats.org/drawingml/2006/main" prst="rect">
@@ -10539,25 +12027,25 @@
           <a:lstStyle xmlns:a="http://schemas.openxmlformats.org/drawingml/2006/main"/>
           <a:p xmlns:a="http://schemas.openxmlformats.org/drawingml/2006/main">
             <a:pPr>
-              <a:defRPr sz="2025" b="0">
-                <a:solidFill>
-                  <a:srgbClr val="F5F7FF"/>
-                </a:solidFill>
-                <a:latin typeface="Microsoft YaHei"/>
-                <a:ea typeface="Microsoft YaHei"/>
-                <a:cs typeface="Microsoft YaHei"/>
-              </a:defRPr>
-            </a:pPr>
-            <a:r>
-              <a:rPr sz="2025" b="0">
-                <a:solidFill>
-                  <a:srgbClr val="F5F7FF"/>
-                </a:solidFill>
-                <a:latin typeface="Microsoft YaHei"/>
-                <a:ea typeface="Microsoft YaHei"/>
-                <a:cs typeface="Microsoft YaHei"/>
-              </a:rPr>
-              <a:t>语速 · 停顿 · 填充词</a:t>
+              <a:defRPr sz="1725" b="0">
+                <a:solidFill>
+                  <a:srgbClr val="F5F7FF"/>
+                </a:solidFill>
+                <a:latin typeface="Microsoft YaHei"/>
+                <a:ea typeface="Microsoft YaHei"/>
+                <a:cs typeface="Microsoft YaHei"/>
+              </a:defRPr>
+            </a:pPr>
+            <a:r>
+              <a:rPr sz="1725" b="0">
+                <a:solidFill>
+                  <a:srgbClr val="F5F7FF"/>
+                </a:solidFill>
+                <a:latin typeface="Microsoft YaHei"/>
+                <a:ea typeface="Microsoft YaHei"/>
+                <a:cs typeface="Microsoft YaHei"/>
+              </a:rPr>
+              <a:t>结合语速、停顿与口头禅评估表达</a:t>
             </a:r>
           </a:p>
         </p:txBody>
@@ -10567,18 +12055,18 @@
           <p:cNvPr id="23" name="">
             <a:extLst xmlns:a="http://schemas.openxmlformats.org/drawingml/2006/main">
               <a:ext uri="{FF2B5EF4-FFF2-40B4-BE49-F238E27FC236}">
-                <a16:creationId xmlns:a16="http://schemas.microsoft.com/office/drawing/2014/main" id="{CB8BF04E-C23F-40EF-8892-4CB4C5F97CE6}"/>
-              </a:ext>
-            </a:extLst>
-          </p:cNvPr>
-          <p:cNvSpPr>
-            <a:spLocks xmlns:a="http://schemas.openxmlformats.org/drawingml/2006/main" noGrp="1"/>
-          </p:cNvSpPr>
-          <p:nvPr/>
-        </p:nvSpPr>
-        <p:spPr>
-          <a:xfrm xmlns:a="http://schemas.openxmlformats.org/drawingml/2006/main">
-            <a:off x="6372225" y="3886200"/>
+                <a16:creationId xmlns:a16="http://schemas.microsoft.com/office/drawing/2014/main" id="{0902DD6E-A7B8-472E-887E-A085E0D3E1ED}"/>
+              </a:ext>
+            </a:extLst>
+          </p:cNvPr>
+          <p:cNvSpPr>
+            <a:spLocks xmlns:a="http://schemas.openxmlformats.org/drawingml/2006/main" noGrp="1"/>
+          </p:cNvSpPr>
+          <p:nvPr/>
+        </p:nvSpPr>
+        <p:spPr>
+          <a:xfrm xmlns:a="http://schemas.openxmlformats.org/drawingml/2006/main">
+            <a:off x="6372225" y="3638550"/>
             <a:ext cx="4991100" cy="1504950"/>
           </a:xfrm>
           <a:prstGeom xmlns:a="http://schemas.openxmlformats.org/drawingml/2006/main" prst="roundRect">
@@ -10606,18 +12094,18 @@
           <p:cNvPr id="24" name="">
             <a:extLst xmlns:a="http://schemas.openxmlformats.org/drawingml/2006/main">
               <a:ext uri="{FF2B5EF4-FFF2-40B4-BE49-F238E27FC236}">
-                <a16:creationId xmlns:a16="http://schemas.microsoft.com/office/drawing/2014/main" id="{2CCBA3B5-0C3A-4896-8008-058EC0FDCD64}"/>
-              </a:ext>
-            </a:extLst>
-          </p:cNvPr>
-          <p:cNvSpPr>
-            <a:spLocks xmlns:a="http://schemas.openxmlformats.org/drawingml/2006/main" noGrp="1"/>
-          </p:cNvSpPr>
-          <p:nvPr/>
-        </p:nvSpPr>
-        <p:spPr>
-          <a:xfrm xmlns:a="http://schemas.openxmlformats.org/drawingml/2006/main">
-            <a:off x="6629400" y="4124325"/>
+                <a16:creationId xmlns:a16="http://schemas.microsoft.com/office/drawing/2014/main" id="{0D2AF5F8-7CC5-41EB-AB05-02837DE5106A}"/>
+              </a:ext>
+            </a:extLst>
+          </p:cNvPr>
+          <p:cNvSpPr>
+            <a:spLocks xmlns:a="http://schemas.openxmlformats.org/drawingml/2006/main" noGrp="1"/>
+          </p:cNvSpPr>
+          <p:nvPr/>
+        </p:nvSpPr>
+        <p:spPr>
+          <a:xfrm xmlns:a="http://schemas.openxmlformats.org/drawingml/2006/main">
+            <a:off x="6629400" y="3848100"/>
             <a:ext cx="4429125" cy="400050"/>
           </a:xfrm>
           <a:prstGeom xmlns:a="http://schemas.openxmlformats.org/drawingml/2006/main" prst="rect">
@@ -10663,18 +12151,18 @@
           <p:cNvPr id="25" name="">
             <a:extLst xmlns:a="http://schemas.openxmlformats.org/drawingml/2006/main">
               <a:ext uri="{FF2B5EF4-FFF2-40B4-BE49-F238E27FC236}">
-                <a16:creationId xmlns:a16="http://schemas.microsoft.com/office/drawing/2014/main" id="{C643BF53-4EC6-4D30-ADE6-DA02BA4C832A}"/>
-              </a:ext>
-            </a:extLst>
-          </p:cNvPr>
-          <p:cNvSpPr>
-            <a:spLocks xmlns:a="http://schemas.openxmlformats.org/drawingml/2006/main" noGrp="1"/>
-          </p:cNvSpPr>
-          <p:nvPr/>
-        </p:nvSpPr>
-        <p:spPr>
-          <a:xfrm xmlns:a="http://schemas.openxmlformats.org/drawingml/2006/main">
-            <a:off x="6629400" y="4638675"/>
+                <a16:creationId xmlns:a16="http://schemas.microsoft.com/office/drawing/2014/main" id="{0032677B-AF44-401D-96EC-04A95C67E45D}"/>
+              </a:ext>
+            </a:extLst>
+          </p:cNvPr>
+          <p:cNvSpPr>
+            <a:spLocks xmlns:a="http://schemas.openxmlformats.org/drawingml/2006/main" noGrp="1"/>
+          </p:cNvSpPr>
+          <p:nvPr/>
+        </p:nvSpPr>
+        <p:spPr>
+          <a:xfrm xmlns:a="http://schemas.openxmlformats.org/drawingml/2006/main">
+            <a:off x="6629400" y="4371975"/>
             <a:ext cx="4429125" cy="419100"/>
           </a:xfrm>
           <a:prstGeom xmlns:a="http://schemas.openxmlformats.org/drawingml/2006/main" prst="rect">
@@ -10692,25 +12180,82 @@
           <a:lstStyle xmlns:a="http://schemas.openxmlformats.org/drawingml/2006/main"/>
           <a:p xmlns:a="http://schemas.openxmlformats.org/drawingml/2006/main">
             <a:pPr>
-              <a:defRPr sz="2025" b="0">
-                <a:solidFill>
-                  <a:srgbClr val="F5F7FF"/>
-                </a:solidFill>
-                <a:latin typeface="Microsoft YaHei"/>
-                <a:ea typeface="Microsoft YaHei"/>
-                <a:cs typeface="Microsoft YaHei"/>
-              </a:defRPr>
-            </a:pPr>
-            <a:r>
-              <a:rPr sz="2025" b="0">
-                <a:solidFill>
-                  <a:srgbClr val="F5F7FF"/>
-                </a:solidFill>
-                <a:latin typeface="Microsoft YaHei"/>
-                <a:ea typeface="Microsoft YaHei"/>
-                <a:cs typeface="Microsoft YaHei"/>
-              </a:rPr>
-              <a:t>双次评分 · 原文证据</a:t>
+              <a:defRPr sz="1725" b="0">
+                <a:solidFill>
+                  <a:srgbClr val="F5F7FF"/>
+                </a:solidFill>
+                <a:latin typeface="Microsoft YaHei"/>
+                <a:ea typeface="Microsoft YaHei"/>
+                <a:cs typeface="Microsoft YaHei"/>
+              </a:defRPr>
+            </a:pPr>
+            <a:r>
+              <a:rPr sz="1725" b="0">
+                <a:solidFill>
+                  <a:srgbClr val="F5F7FF"/>
+                </a:solidFill>
+                <a:latin typeface="Microsoft YaHei"/>
+                <a:ea typeface="Microsoft YaHei"/>
+                <a:cs typeface="Microsoft YaHei"/>
+              </a:rPr>
+              <a:t>按岗位标准评分，附回答原话与理由</a:t>
+            </a:r>
+          </a:p>
+        </p:txBody>
+      </p:sp>
+      <p:sp>
+        <p:nvSpPr>
+          <p:cNvPr id="26" name="">
+            <a:extLst xmlns:a="http://schemas.openxmlformats.org/drawingml/2006/main">
+              <a:ext uri="{FF2B5EF4-FFF2-40B4-BE49-F238E27FC236}">
+                <a16:creationId xmlns:a16="http://schemas.microsoft.com/office/drawing/2014/main" id="{996E4863-B6C2-49BC-AB5F-5A6286D775C9}"/>
+              </a:ext>
+            </a:extLst>
+          </p:cNvPr>
+          <p:cNvSpPr>
+            <a:spLocks xmlns:a="http://schemas.openxmlformats.org/drawingml/2006/main" noGrp="1"/>
+          </p:cNvSpPr>
+          <p:nvPr/>
+        </p:nvSpPr>
+        <p:spPr>
+          <a:xfrm xmlns:a="http://schemas.openxmlformats.org/drawingml/2006/main">
+            <a:off x="781050" y="5486400"/>
+            <a:ext cx="10572750" cy="400050"/>
+          </a:xfrm>
+          <a:prstGeom xmlns:a="http://schemas.openxmlformats.org/drawingml/2006/main" prst="rect">
+            <a:avLst/>
+          </a:prstGeom>
+          <a:noFill xmlns:a="http://schemas.openxmlformats.org/drawingml/2006/main"/>
+          <a:ln xmlns:a="http://schemas.openxmlformats.org/drawingml/2006/main" w="0">
+            <a:noFill/>
+          </a:ln>
+        </p:spPr>
+        <p:txBody>
+          <a:bodyPr xmlns:a="http://schemas.openxmlformats.org/drawingml/2006/main">
+            <a:noAutofit/>
+          </a:bodyPr>
+          <a:lstStyle xmlns:a="http://schemas.openxmlformats.org/drawingml/2006/main"/>
+          <a:p xmlns:a="http://schemas.openxmlformats.org/drawingml/2006/main">
+            <a:pPr>
+              <a:defRPr sz="1650" b="0">
+                <a:solidFill>
+                  <a:srgbClr val="F5F7FF"/>
+                </a:solidFill>
+                <a:latin typeface="Microsoft YaHei"/>
+                <a:ea typeface="Microsoft YaHei"/>
+                <a:cs typeface="Microsoft YaHei"/>
+              </a:defRPr>
+            </a:pPr>
+            <a:r>
+              <a:rPr sz="1650" b="0">
+                <a:solidFill>
+                  <a:srgbClr val="F5F7FF"/>
+                </a:solidFill>
+                <a:latin typeface="Microsoft YaHei"/>
+                <a:ea typeface="Microsoft YaHei"/>
+                <a:cs typeface="Microsoft YaHei"/>
+              </a:rPr>
+              <a:t>系统朗读问题 → 学生录音作答 → 转为文字并统计表达特征 → 生成报告</a:t>
             </a:r>
           </a:p>
         </p:txBody>
@@ -10718,7 +12263,7 @@
     </p:spTree>
     <p:extLst>
       <p:ext uri="{BB962C8B-B14F-4D97-AF65-F5344CB8AC3E}">
-        <p14:creationId xmlns:p14="http://schemas.microsoft.com/office/powerpoint/2010/main" val="1451889910"/>
+        <p14:creationId xmlns:p14="http://schemas.microsoft.com/office/powerpoint/2010/main" val="1168138813"/>
       </p:ext>
     </p:extLst>
   </p:cSld>
@@ -10749,15 +12294,15 @@
       </p:grpSpPr>
       <p:pic>
         <p:nvPicPr>
-          <p:cNvPr id="22" name=""/>
+          <p:cNvPr id="19" name=""/>
           <p:cNvPicPr>
             <a:picLocks xmlns:a="http://schemas.openxmlformats.org/drawingml/2006/main" noChangeAspect="1"/>
           </p:cNvPicPr>
           <p:nvPr/>
         </p:nvPicPr>
         <p:blipFill>
-          <a:blip xmlns:r="http://schemas.openxmlformats.org/officeDocument/2006/relationships" xmlns:a="http://schemas.openxmlformats.org/drawingml/2006/main" r:embed="R449f1266b189447d"/>
-          <a:srcRect xmlns:a="http://schemas.openxmlformats.org/drawingml/2006/main" l="0" t="0" r="0" b="0"/>
+          <a:blip xmlns:r="http://schemas.openxmlformats.org/officeDocument/2006/relationships" xmlns:a="http://schemas.openxmlformats.org/drawingml/2006/main" r:embed="Rdad357cb29f347a2"/>
+          <a:srcRect xmlns:a="http://schemas.openxmlformats.org/drawingml/2006/main" l="0" t="27" r="0" b="27"/>
           <a:stretch xmlns:a="http://schemas.openxmlformats.org/drawingml/2006/main">
             <a:fillRect l="0" t="0" r="0" b="0"/>
           </a:stretch>
@@ -10777,7 +12322,7 @@
           <p:cNvPr id="2" name="">
             <a:extLst xmlns:a="http://schemas.openxmlformats.org/drawingml/2006/main">
               <a:ext uri="{FF2B5EF4-FFF2-40B4-BE49-F238E27FC236}">
-                <a16:creationId xmlns:a16="http://schemas.microsoft.com/office/drawing/2014/main" id="{36EFA980-6004-4D3D-A308-4D8410538D79}"/>
+                <a16:creationId xmlns:a16="http://schemas.microsoft.com/office/drawing/2014/main" id="{CC8F3A01-70F0-408D-897A-886B7721F94B}"/>
               </a:ext>
             </a:extLst>
           </p:cNvPr>
@@ -10814,7 +12359,7 @@
           <p:cNvPr id="3" name="">
             <a:extLst xmlns:a="http://schemas.openxmlformats.org/drawingml/2006/main">
               <a:ext uri="{FF2B5EF4-FFF2-40B4-BE49-F238E27FC236}">
-                <a16:creationId xmlns:a16="http://schemas.microsoft.com/office/drawing/2014/main" id="{A0E15E3F-01A3-4CF0-8A51-7511188DB712}"/>
+                <a16:creationId xmlns:a16="http://schemas.microsoft.com/office/drawing/2014/main" id="{6D78BA36-06AB-472D-BD91-D389536A0F11}"/>
               </a:ext>
             </a:extLst>
           </p:cNvPr>
@@ -10871,7 +12416,7 @@
           <p:cNvPr id="4" name="">
             <a:extLst xmlns:a="http://schemas.openxmlformats.org/drawingml/2006/main">
               <a:ext uri="{FF2B5EF4-FFF2-40B4-BE49-F238E27FC236}">
-                <a16:creationId xmlns:a16="http://schemas.microsoft.com/office/drawing/2014/main" id="{29D1D77F-A3E8-4522-85A0-7DBC99EE55AF}"/>
+                <a16:creationId xmlns:a16="http://schemas.microsoft.com/office/drawing/2014/main" id="{217D757D-C670-4779-8E04-42C79002E7AB}"/>
               </a:ext>
             </a:extLst>
           </p:cNvPr>
@@ -10918,7 +12463,7 @@
                 <a:ea typeface="Microsoft YaHei"/>
                 <a:cs typeface="Microsoft YaHei"/>
               </a:rPr>
-              <a:t>文本报告保留“未评估”</a:t>
+              <a:t>评分报告指出问题，并给出练习方向</a:t>
             </a:r>
           </a:p>
         </p:txBody>
@@ -10928,7 +12473,7 @@
           <p:cNvPr id="5" name="">
             <a:extLst xmlns:a="http://schemas.openxmlformats.org/drawingml/2006/main">
               <a:ext uri="{FF2B5EF4-FFF2-40B4-BE49-F238E27FC236}">
-                <a16:creationId xmlns:a16="http://schemas.microsoft.com/office/drawing/2014/main" id="{AD556AAA-8022-43DD-AE62-8758752CD4D3}"/>
+                <a16:creationId xmlns:a16="http://schemas.microsoft.com/office/drawing/2014/main" id="{B7E12D0F-420F-4EF6-AD58-72BB6FCED01E}"/>
               </a:ext>
             </a:extLst>
           </p:cNvPr>
@@ -10989,23 +12534,23 @@
           <p:cNvPr id="6" name="">
             <a:extLst xmlns:a="http://schemas.openxmlformats.org/drawingml/2006/main">
               <a:ext uri="{FF2B5EF4-FFF2-40B4-BE49-F238E27FC236}">
-                <a16:creationId xmlns:a16="http://schemas.microsoft.com/office/drawing/2014/main" id="{CD9AC10D-E3AC-4236-A29B-712F94C7D25D}"/>
-              </a:ext>
-            </a:extLst>
-          </p:cNvPr>
-          <p:cNvSpPr>
-            <a:spLocks xmlns:a="http://schemas.openxmlformats.org/drawingml/2006/main" noGrp="1"/>
-          </p:cNvSpPr>
-          <p:nvPr/>
-        </p:nvSpPr>
-        <p:spPr>
-          <a:xfrm xmlns:a="http://schemas.openxmlformats.org/drawingml/2006/main">
-            <a:off x="819150" y="1819275"/>
-            <a:ext cx="10544175" cy="3857625"/>
+                <a16:creationId xmlns:a16="http://schemas.microsoft.com/office/drawing/2014/main" id="{2214E0F3-C02C-493F-9219-F61562AC94A0}"/>
+              </a:ext>
+            </a:extLst>
+          </p:cNvPr>
+          <p:cNvSpPr>
+            <a:spLocks xmlns:a="http://schemas.openxmlformats.org/drawingml/2006/main" noGrp="1"/>
+          </p:cNvSpPr>
+          <p:nvPr/>
+        </p:nvSpPr>
+        <p:spPr>
+          <a:xfrm xmlns:a="http://schemas.openxmlformats.org/drawingml/2006/main">
+            <a:off x="781050" y="2009775"/>
+            <a:ext cx="10591800" cy="1009650"/>
           </a:xfrm>
           <a:prstGeom xmlns:a="http://schemas.openxmlformats.org/drawingml/2006/main" prst="roundRect">
             <a:avLst>
-              <a:gd name="adj" fmla="val 1975"/>
+              <a:gd name="adj" fmla="val 7547"/>
             </a:avLst>
           </a:prstGeom>
           <a:solidFill xmlns:a="http://schemas.openxmlformats.org/drawingml/2006/main">
@@ -11028,19 +12573,19 @@
           <p:cNvPr id="7" name="">
             <a:extLst xmlns:a="http://schemas.openxmlformats.org/drawingml/2006/main">
               <a:ext uri="{FF2B5EF4-FFF2-40B4-BE49-F238E27FC236}">
-                <a16:creationId xmlns:a16="http://schemas.microsoft.com/office/drawing/2014/main" id="{9F919F3D-A9BF-45D9-87B7-EED67C6EFCFD}"/>
-              </a:ext>
-            </a:extLst>
-          </p:cNvPr>
-          <p:cNvSpPr>
-            <a:spLocks xmlns:a="http://schemas.openxmlformats.org/drawingml/2006/main" noGrp="1"/>
-          </p:cNvSpPr>
-          <p:nvPr/>
-        </p:nvSpPr>
-        <p:spPr>
-          <a:xfrm xmlns:a="http://schemas.openxmlformats.org/drawingml/2006/main">
-            <a:off x="1181100" y="2209800"/>
-            <a:ext cx="2286000" cy="428625"/>
+                <a16:creationId xmlns:a16="http://schemas.microsoft.com/office/drawing/2014/main" id="{947058DA-9634-4736-A7AC-8AA18800A040}"/>
+              </a:ext>
+            </a:extLst>
+          </p:cNvPr>
+          <p:cNvSpPr>
+            <a:spLocks xmlns:a="http://schemas.openxmlformats.org/drawingml/2006/main" noGrp="1"/>
+          </p:cNvSpPr>
+          <p:nvPr/>
+        </p:nvSpPr>
+        <p:spPr>
+          <a:xfrm xmlns:a="http://schemas.openxmlformats.org/drawingml/2006/main">
+            <a:off x="1019175" y="2266950"/>
+            <a:ext cx="1476375" cy="428625"/>
           </a:xfrm>
           <a:prstGeom xmlns:a="http://schemas.openxmlformats.org/drawingml/2006/main" prst="rect">
             <a:avLst/>
@@ -11057,25 +12602,25 @@
           <a:lstStyle xmlns:a="http://schemas.openxmlformats.org/drawingml/2006/main"/>
           <a:p xmlns:a="http://schemas.openxmlformats.org/drawingml/2006/main">
             <a:pPr>
-              <a:defRPr sz="1800" b="1">
-                <a:solidFill>
-                  <a:srgbClr val="F5F7FF"/>
-                </a:solidFill>
-                <a:latin typeface="Microsoft YaHei"/>
-                <a:ea typeface="Microsoft YaHei"/>
-                <a:cs typeface="Microsoft YaHei"/>
-              </a:defRPr>
-            </a:pPr>
-            <a:r>
-              <a:rPr sz="1800" b="1">
-                <a:solidFill>
-                  <a:srgbClr val="F5F7FF"/>
-                </a:solidFill>
-                <a:latin typeface="Microsoft YaHei"/>
-                <a:ea typeface="Microsoft YaHei"/>
-                <a:cs typeface="Microsoft YaHei"/>
-              </a:rPr>
-              <a:t>专业匹配度</a:t>
+              <a:defRPr sz="2100" b="1">
+                <a:solidFill>
+                  <a:srgbClr val="7CFFCB"/>
+                </a:solidFill>
+                <a:latin typeface="Microsoft YaHei"/>
+                <a:ea typeface="Microsoft YaHei"/>
+                <a:cs typeface="Microsoft YaHei"/>
+              </a:defRPr>
+            </a:pPr>
+            <a:r>
+              <a:rPr sz="2100" b="1">
+                <a:solidFill>
+                  <a:srgbClr val="7CFFCB"/>
+                </a:solidFill>
+                <a:latin typeface="Microsoft YaHei"/>
+                <a:ea typeface="Microsoft YaHei"/>
+                <a:cs typeface="Microsoft YaHei"/>
+              </a:rPr>
+              <a:t>看表现</a:t>
             </a:r>
           </a:p>
         </p:txBody>
@@ -11085,269 +12630,382 @@
           <p:cNvPr id="8" name="">
             <a:extLst xmlns:a="http://schemas.openxmlformats.org/drawingml/2006/main">
               <a:ext uri="{FF2B5EF4-FFF2-40B4-BE49-F238E27FC236}">
-                <a16:creationId xmlns:a16="http://schemas.microsoft.com/office/drawing/2014/main" id="{D6DF2D1D-8449-482A-8DA6-90FBCC0BA15C}"/>
-              </a:ext>
-            </a:extLst>
-          </p:cNvPr>
-          <p:cNvSpPr>
-            <a:spLocks xmlns:a="http://schemas.openxmlformats.org/drawingml/2006/main" noGrp="1"/>
-          </p:cNvSpPr>
-          <p:nvPr/>
-        </p:nvSpPr>
-        <p:spPr>
-          <a:xfrm xmlns:a="http://schemas.openxmlformats.org/drawingml/2006/main">
-            <a:off x="3609975" y="2295525"/>
-            <a:ext cx="6143625" cy="200025"/>
+                <a16:creationId xmlns:a16="http://schemas.microsoft.com/office/drawing/2014/main" id="{848BA4EF-32CF-4561-A0D9-37B455BB99FC}"/>
+              </a:ext>
+            </a:extLst>
+          </p:cNvPr>
+          <p:cNvSpPr>
+            <a:spLocks xmlns:a="http://schemas.openxmlformats.org/drawingml/2006/main" noGrp="1"/>
+          </p:cNvSpPr>
+          <p:nvPr/>
+        </p:nvSpPr>
+        <p:spPr>
+          <a:xfrm xmlns:a="http://schemas.openxmlformats.org/drawingml/2006/main">
+            <a:off x="2733675" y="2143125"/>
+            <a:ext cx="8191500" cy="342900"/>
+          </a:xfrm>
+          <a:prstGeom xmlns:a="http://schemas.openxmlformats.org/drawingml/2006/main" prst="rect">
+            <a:avLst/>
+          </a:prstGeom>
+          <a:noFill xmlns:a="http://schemas.openxmlformats.org/drawingml/2006/main"/>
+          <a:ln xmlns:a="http://schemas.openxmlformats.org/drawingml/2006/main" w="0">
+            <a:noFill/>
+          </a:ln>
+        </p:spPr>
+        <p:txBody>
+          <a:bodyPr xmlns:a="http://schemas.openxmlformats.org/drawingml/2006/main">
+            <a:noAutofit/>
+          </a:bodyPr>
+          <a:lstStyle xmlns:a="http://schemas.openxmlformats.org/drawingml/2006/main"/>
+          <a:p xmlns:a="http://schemas.openxmlformats.org/drawingml/2006/main">
+            <a:pPr>
+              <a:defRPr sz="1875" b="1">
+                <a:solidFill>
+                  <a:srgbClr val="F5F7FF"/>
+                </a:solidFill>
+                <a:latin typeface="Microsoft YaHei"/>
+                <a:ea typeface="Microsoft YaHei"/>
+                <a:cs typeface="Microsoft YaHei"/>
+              </a:defRPr>
+            </a:pPr>
+            <a:r>
+              <a:rPr sz="1875" b="1">
+                <a:solidFill>
+                  <a:srgbClr val="F5F7FF"/>
+                </a:solidFill>
+                <a:latin typeface="Microsoft YaHei"/>
+                <a:ea typeface="Microsoft YaHei"/>
+                <a:cs typeface="Microsoft YaHei"/>
+              </a:rPr>
+              <a:t>各项得分与总体表现</a:t>
+            </a:r>
+          </a:p>
+        </p:txBody>
+      </p:sp>
+      <p:sp>
+        <p:nvSpPr>
+          <p:cNvPr id="9" name="">
+            <a:extLst xmlns:a="http://schemas.openxmlformats.org/drawingml/2006/main">
+              <a:ext uri="{FF2B5EF4-FFF2-40B4-BE49-F238E27FC236}">
+                <a16:creationId xmlns:a16="http://schemas.microsoft.com/office/drawing/2014/main" id="{21C7099B-8816-4EA2-ABB8-98296A6ABE51}"/>
+              </a:ext>
+            </a:extLst>
+          </p:cNvPr>
+          <p:cNvSpPr>
+            <a:spLocks xmlns:a="http://schemas.openxmlformats.org/drawingml/2006/main" noGrp="1"/>
+          </p:cNvSpPr>
+          <p:nvPr/>
+        </p:nvSpPr>
+        <p:spPr>
+          <a:xfrm xmlns:a="http://schemas.openxmlformats.org/drawingml/2006/main">
+            <a:off x="2733675" y="2581275"/>
+            <a:ext cx="8191500" cy="323850"/>
+          </a:xfrm>
+          <a:prstGeom xmlns:a="http://schemas.openxmlformats.org/drawingml/2006/main" prst="rect">
+            <a:avLst/>
+          </a:prstGeom>
+          <a:noFill xmlns:a="http://schemas.openxmlformats.org/drawingml/2006/main"/>
+          <a:ln xmlns:a="http://schemas.openxmlformats.org/drawingml/2006/main" w="0">
+            <a:noFill/>
+          </a:ln>
+        </p:spPr>
+        <p:txBody>
+          <a:bodyPr xmlns:a="http://schemas.openxmlformats.org/drawingml/2006/main">
+            <a:noAutofit/>
+          </a:bodyPr>
+          <a:lstStyle xmlns:a="http://schemas.openxmlformats.org/drawingml/2006/main"/>
+          <a:p xmlns:a="http://schemas.openxmlformats.org/drawingml/2006/main">
+            <a:pPr>
+              <a:defRPr sz="1575" b="0">
+                <a:solidFill>
+                  <a:srgbClr val="F5F7FF"/>
+                </a:solidFill>
+                <a:latin typeface="Microsoft YaHei"/>
+                <a:ea typeface="Microsoft YaHei"/>
+                <a:cs typeface="Microsoft YaHei"/>
+              </a:defRPr>
+            </a:pPr>
+            <a:r>
+              <a:rPr sz="1575" b="0">
+                <a:solidFill>
+                  <a:srgbClr val="F5F7FF"/>
+                </a:solidFill>
+                <a:latin typeface="Microsoft YaHei"/>
+                <a:ea typeface="Microsoft YaHei"/>
+                <a:cs typeface="Microsoft YaHei"/>
+              </a:rPr>
+              <a:t>按当前岗位的评价标准，了解优势与薄弱项</a:t>
+            </a:r>
+          </a:p>
+        </p:txBody>
+      </p:sp>
+      <p:sp>
+        <p:nvSpPr>
+          <p:cNvPr id="10" name="">
+            <a:extLst xmlns:a="http://schemas.openxmlformats.org/drawingml/2006/main">
+              <a:ext uri="{FF2B5EF4-FFF2-40B4-BE49-F238E27FC236}">
+                <a16:creationId xmlns:a16="http://schemas.microsoft.com/office/drawing/2014/main" id="{9F90B05B-04E1-4129-8302-0337DD2E6C87}"/>
+              </a:ext>
+            </a:extLst>
+          </p:cNvPr>
+          <p:cNvSpPr>
+            <a:spLocks xmlns:a="http://schemas.openxmlformats.org/drawingml/2006/main" noGrp="1"/>
+          </p:cNvSpPr>
+          <p:nvPr/>
+        </p:nvSpPr>
+        <p:spPr>
+          <a:xfrm xmlns:a="http://schemas.openxmlformats.org/drawingml/2006/main">
+            <a:off x="781050" y="3200400"/>
+            <a:ext cx="10591800" cy="1009650"/>
           </a:xfrm>
           <a:prstGeom xmlns:a="http://schemas.openxmlformats.org/drawingml/2006/main" prst="roundRect">
             <a:avLst>
-              <a:gd name="adj" fmla="val 38095"/>
+              <a:gd name="adj" fmla="val 7547"/>
             </a:avLst>
           </a:prstGeom>
           <a:solidFill xmlns:a="http://schemas.openxmlformats.org/drawingml/2006/main">
-            <a:srgbClr val="F5F7FF">
-              <a:alpha val="14000"/>
+            <a:srgbClr val="0B1020">
+              <a:alpha val="72000"/>
             </a:srgbClr>
           </a:solidFill>
-          <a:ln xmlns:a="http://schemas.openxmlformats.org/drawingml/2006/main" w="0">
-            <a:noFill/>
+          <a:ln xmlns:a="http://schemas.openxmlformats.org/drawingml/2006/main" w="10478">
+            <a:solidFill>
+              <a:srgbClr val="F5F7FF">
+                <a:alpha val="20000"/>
+              </a:srgbClr>
+            </a:solidFill>
             <a:prstDash val="solid"/>
           </a:ln>
         </p:spPr>
       </p:sp>
       <p:sp>
         <p:nvSpPr>
-          <p:cNvPr id="9" name="">
-            <a:extLst xmlns:a="http://schemas.openxmlformats.org/drawingml/2006/main">
-              <a:ext uri="{FF2B5EF4-FFF2-40B4-BE49-F238E27FC236}">
-                <a16:creationId xmlns:a16="http://schemas.microsoft.com/office/drawing/2014/main" id="{403D30E1-4656-495A-A005-074CB6CB04E4}"/>
-              </a:ext>
-            </a:extLst>
-          </p:cNvPr>
-          <p:cNvSpPr>
-            <a:spLocks xmlns:a="http://schemas.openxmlformats.org/drawingml/2006/main" noGrp="1"/>
-          </p:cNvSpPr>
-          <p:nvPr/>
-        </p:nvSpPr>
-        <p:spPr>
-          <a:xfrm xmlns:a="http://schemas.openxmlformats.org/drawingml/2006/main">
-            <a:off x="3609975" y="2295525"/>
-            <a:ext cx="3993356" cy="200025"/>
+          <p:cNvPr id="11" name="">
+            <a:extLst xmlns:a="http://schemas.openxmlformats.org/drawingml/2006/main">
+              <a:ext uri="{FF2B5EF4-FFF2-40B4-BE49-F238E27FC236}">
+                <a16:creationId xmlns:a16="http://schemas.microsoft.com/office/drawing/2014/main" id="{4155D9D8-B1F8-4EF3-A566-7C70BA49363A}"/>
+              </a:ext>
+            </a:extLst>
+          </p:cNvPr>
+          <p:cNvSpPr>
+            <a:spLocks xmlns:a="http://schemas.openxmlformats.org/drawingml/2006/main" noGrp="1"/>
+          </p:cNvSpPr>
+          <p:nvPr/>
+        </p:nvSpPr>
+        <p:spPr>
+          <a:xfrm xmlns:a="http://schemas.openxmlformats.org/drawingml/2006/main">
+            <a:off x="1019175" y="3457575"/>
+            <a:ext cx="1476375" cy="428625"/>
+          </a:xfrm>
+          <a:prstGeom xmlns:a="http://schemas.openxmlformats.org/drawingml/2006/main" prst="rect">
+            <a:avLst/>
+          </a:prstGeom>
+          <a:noFill xmlns:a="http://schemas.openxmlformats.org/drawingml/2006/main"/>
+          <a:ln xmlns:a="http://schemas.openxmlformats.org/drawingml/2006/main" w="0">
+            <a:noFill/>
+          </a:ln>
+        </p:spPr>
+        <p:txBody>
+          <a:bodyPr xmlns:a="http://schemas.openxmlformats.org/drawingml/2006/main">
+            <a:noAutofit/>
+          </a:bodyPr>
+          <a:lstStyle xmlns:a="http://schemas.openxmlformats.org/drawingml/2006/main"/>
+          <a:p xmlns:a="http://schemas.openxmlformats.org/drawingml/2006/main">
+            <a:pPr>
+              <a:defRPr sz="2100" b="1">
+                <a:solidFill>
+                  <a:srgbClr val="7CFFCB"/>
+                </a:solidFill>
+                <a:latin typeface="Microsoft YaHei"/>
+                <a:ea typeface="Microsoft YaHei"/>
+                <a:cs typeface="Microsoft YaHei"/>
+              </a:defRPr>
+            </a:pPr>
+            <a:r>
+              <a:rPr sz="2100" b="1">
+                <a:solidFill>
+                  <a:srgbClr val="7CFFCB"/>
+                </a:solidFill>
+                <a:latin typeface="Microsoft YaHei"/>
+                <a:ea typeface="Microsoft YaHei"/>
+                <a:cs typeface="Microsoft YaHei"/>
+              </a:rPr>
+              <a:t>找原因</a:t>
+            </a:r>
+          </a:p>
+        </p:txBody>
+      </p:sp>
+      <p:sp>
+        <p:nvSpPr>
+          <p:cNvPr id="12" name="">
+            <a:extLst xmlns:a="http://schemas.openxmlformats.org/drawingml/2006/main">
+              <a:ext uri="{FF2B5EF4-FFF2-40B4-BE49-F238E27FC236}">
+                <a16:creationId xmlns:a16="http://schemas.microsoft.com/office/drawing/2014/main" id="{2529CBED-904A-4AA7-B1FC-652080F169DD}"/>
+              </a:ext>
+            </a:extLst>
+          </p:cNvPr>
+          <p:cNvSpPr>
+            <a:spLocks xmlns:a="http://schemas.openxmlformats.org/drawingml/2006/main" noGrp="1"/>
+          </p:cNvSpPr>
+          <p:nvPr/>
+        </p:nvSpPr>
+        <p:spPr>
+          <a:xfrm xmlns:a="http://schemas.openxmlformats.org/drawingml/2006/main">
+            <a:off x="2733675" y="3333750"/>
+            <a:ext cx="8191500" cy="342900"/>
+          </a:xfrm>
+          <a:prstGeom xmlns:a="http://schemas.openxmlformats.org/drawingml/2006/main" prst="rect">
+            <a:avLst/>
+          </a:prstGeom>
+          <a:noFill xmlns:a="http://schemas.openxmlformats.org/drawingml/2006/main"/>
+          <a:ln xmlns:a="http://schemas.openxmlformats.org/drawingml/2006/main" w="0">
+            <a:noFill/>
+          </a:ln>
+        </p:spPr>
+        <p:txBody>
+          <a:bodyPr xmlns:a="http://schemas.openxmlformats.org/drawingml/2006/main">
+            <a:noAutofit/>
+          </a:bodyPr>
+          <a:lstStyle xmlns:a="http://schemas.openxmlformats.org/drawingml/2006/main"/>
+          <a:p xmlns:a="http://schemas.openxmlformats.org/drawingml/2006/main">
+            <a:pPr>
+              <a:defRPr sz="1875" b="1">
+                <a:solidFill>
+                  <a:srgbClr val="F5F7FF"/>
+                </a:solidFill>
+                <a:latin typeface="Microsoft YaHei"/>
+                <a:ea typeface="Microsoft YaHei"/>
+                <a:cs typeface="Microsoft YaHei"/>
+              </a:defRPr>
+            </a:pPr>
+            <a:r>
+              <a:rPr sz="1875" b="1">
+                <a:solidFill>
+                  <a:srgbClr val="F5F7FF"/>
+                </a:solidFill>
+                <a:latin typeface="Microsoft YaHei"/>
+                <a:ea typeface="Microsoft YaHei"/>
+                <a:cs typeface="Microsoft YaHei"/>
+              </a:rPr>
+              <a:t>回答原话与评分理由</a:t>
+            </a:r>
+          </a:p>
+        </p:txBody>
+      </p:sp>
+      <p:sp>
+        <p:nvSpPr>
+          <p:cNvPr id="13" name="">
+            <a:extLst xmlns:a="http://schemas.openxmlformats.org/drawingml/2006/main">
+              <a:ext uri="{FF2B5EF4-FFF2-40B4-BE49-F238E27FC236}">
+                <a16:creationId xmlns:a16="http://schemas.microsoft.com/office/drawing/2014/main" id="{17C499C3-455E-44A2-9136-2248D7480A0B}"/>
+              </a:ext>
+            </a:extLst>
+          </p:cNvPr>
+          <p:cNvSpPr>
+            <a:spLocks xmlns:a="http://schemas.openxmlformats.org/drawingml/2006/main" noGrp="1"/>
+          </p:cNvSpPr>
+          <p:nvPr/>
+        </p:nvSpPr>
+        <p:spPr>
+          <a:xfrm xmlns:a="http://schemas.openxmlformats.org/drawingml/2006/main">
+            <a:off x="2733675" y="3771900"/>
+            <a:ext cx="8191500" cy="323850"/>
+          </a:xfrm>
+          <a:prstGeom xmlns:a="http://schemas.openxmlformats.org/drawingml/2006/main" prst="rect">
+            <a:avLst/>
+          </a:prstGeom>
+          <a:noFill xmlns:a="http://schemas.openxmlformats.org/drawingml/2006/main"/>
+          <a:ln xmlns:a="http://schemas.openxmlformats.org/drawingml/2006/main" w="0">
+            <a:noFill/>
+          </a:ln>
+        </p:spPr>
+        <p:txBody>
+          <a:bodyPr xmlns:a="http://schemas.openxmlformats.org/drawingml/2006/main">
+            <a:noAutofit/>
+          </a:bodyPr>
+          <a:lstStyle xmlns:a="http://schemas.openxmlformats.org/drawingml/2006/main"/>
+          <a:p xmlns:a="http://schemas.openxmlformats.org/drawingml/2006/main">
+            <a:pPr>
+              <a:defRPr sz="1575" b="0">
+                <a:solidFill>
+                  <a:srgbClr val="F5F7FF"/>
+                </a:solidFill>
+                <a:latin typeface="Microsoft YaHei"/>
+                <a:ea typeface="Microsoft YaHei"/>
+                <a:cs typeface="Microsoft YaHei"/>
+              </a:defRPr>
+            </a:pPr>
+            <a:r>
+              <a:rPr sz="1575" b="0">
+                <a:solidFill>
+                  <a:srgbClr val="F5F7FF"/>
+                </a:solidFill>
+                <a:latin typeface="Microsoft YaHei"/>
+                <a:ea typeface="Microsoft YaHei"/>
+                <a:cs typeface="Microsoft YaHei"/>
+              </a:rPr>
+              <a:t>把分数对应到具体回答，说明哪里做得好、哪里不足</a:t>
+            </a:r>
+          </a:p>
+        </p:txBody>
+      </p:sp>
+      <p:sp>
+        <p:nvSpPr>
+          <p:cNvPr id="14" name="">
+            <a:extLst xmlns:a="http://schemas.openxmlformats.org/drawingml/2006/main">
+              <a:ext uri="{FF2B5EF4-FFF2-40B4-BE49-F238E27FC236}">
+                <a16:creationId xmlns:a16="http://schemas.microsoft.com/office/drawing/2014/main" id="{71A1C1EE-72FD-494F-A6E2-2515BE688489}"/>
+              </a:ext>
+            </a:extLst>
+          </p:cNvPr>
+          <p:cNvSpPr>
+            <a:spLocks xmlns:a="http://schemas.openxmlformats.org/drawingml/2006/main" noGrp="1"/>
+          </p:cNvSpPr>
+          <p:nvPr/>
+        </p:nvSpPr>
+        <p:spPr>
+          <a:xfrm xmlns:a="http://schemas.openxmlformats.org/drawingml/2006/main">
+            <a:off x="781050" y="4391025"/>
+            <a:ext cx="10591800" cy="1009650"/>
           </a:xfrm>
           <a:prstGeom xmlns:a="http://schemas.openxmlformats.org/drawingml/2006/main" prst="roundRect">
             <a:avLst>
-              <a:gd name="adj" fmla="val 38095"/>
+              <a:gd name="adj" fmla="val 7547"/>
             </a:avLst>
           </a:prstGeom>
           <a:solidFill xmlns:a="http://schemas.openxmlformats.org/drawingml/2006/main">
-            <a:srgbClr val="6A8DFF"/>
-          </a:solidFill>
-          <a:ln xmlns:a="http://schemas.openxmlformats.org/drawingml/2006/main" w="0">
-            <a:noFill/>
-            <a:prstDash val="solid"/>
-          </a:ln>
-        </p:spPr>
-      </p:sp>
-      <p:sp>
-        <p:nvSpPr>
-          <p:cNvPr id="10" name="">
-            <a:extLst xmlns:a="http://schemas.openxmlformats.org/drawingml/2006/main">
-              <a:ext uri="{FF2B5EF4-FFF2-40B4-BE49-F238E27FC236}">
-                <a16:creationId xmlns:a16="http://schemas.microsoft.com/office/drawing/2014/main" id="{E037A5F8-8907-45EC-89EA-6C6106ADC649}"/>
-              </a:ext>
-            </a:extLst>
-          </p:cNvPr>
-          <p:cNvSpPr>
-            <a:spLocks xmlns:a="http://schemas.openxmlformats.org/drawingml/2006/main" noGrp="1"/>
-          </p:cNvSpPr>
-          <p:nvPr/>
-        </p:nvSpPr>
-        <p:spPr>
-          <a:xfrm xmlns:a="http://schemas.openxmlformats.org/drawingml/2006/main">
-            <a:off x="9934575" y="2200275"/>
-            <a:ext cx="1047750" cy="428625"/>
-          </a:xfrm>
-          <a:prstGeom xmlns:a="http://schemas.openxmlformats.org/drawingml/2006/main" prst="rect">
-            <a:avLst/>
-          </a:prstGeom>
-          <a:noFill xmlns:a="http://schemas.openxmlformats.org/drawingml/2006/main"/>
-          <a:ln xmlns:a="http://schemas.openxmlformats.org/drawingml/2006/main" w="0">
-            <a:noFill/>
-          </a:ln>
-        </p:spPr>
-        <p:txBody>
-          <a:bodyPr xmlns:a="http://schemas.openxmlformats.org/drawingml/2006/main">
-            <a:noAutofit/>
-          </a:bodyPr>
-          <a:lstStyle xmlns:a="http://schemas.openxmlformats.org/drawingml/2006/main"/>
-          <a:p xmlns:a="http://schemas.openxmlformats.org/drawingml/2006/main">
-            <a:pPr>
-              <a:defRPr sz="1950" b="1">
-                <a:solidFill>
-                  <a:srgbClr val="F5F7FF"/>
-                </a:solidFill>
-                <a:latin typeface="Microsoft YaHei"/>
-                <a:ea typeface="Microsoft YaHei"/>
-                <a:cs typeface="Microsoft YaHei"/>
-              </a:defRPr>
-            </a:pPr>
-            <a:r>
-              <a:rPr sz="1950" b="1">
-                <a:solidFill>
-                  <a:srgbClr val="F5F7FF"/>
-                </a:solidFill>
-                <a:latin typeface="Microsoft YaHei"/>
-                <a:ea typeface="Microsoft YaHei"/>
-                <a:cs typeface="Microsoft YaHei"/>
-              </a:rPr>
-              <a:t>65.0</a:t>
-            </a:r>
-          </a:p>
-        </p:txBody>
-      </p:sp>
-      <p:sp>
-        <p:nvSpPr>
-          <p:cNvPr id="11" name="">
-            <a:extLst xmlns:a="http://schemas.openxmlformats.org/drawingml/2006/main">
-              <a:ext uri="{FF2B5EF4-FFF2-40B4-BE49-F238E27FC236}">
-                <a16:creationId xmlns:a16="http://schemas.microsoft.com/office/drawing/2014/main" id="{F3A37C6F-73EB-4919-86E7-987E08DF4A4F}"/>
-              </a:ext>
-            </a:extLst>
-          </p:cNvPr>
-          <p:cNvSpPr>
-            <a:spLocks xmlns:a="http://schemas.openxmlformats.org/drawingml/2006/main" noGrp="1"/>
-          </p:cNvSpPr>
-          <p:nvPr/>
-        </p:nvSpPr>
-        <p:spPr>
-          <a:xfrm xmlns:a="http://schemas.openxmlformats.org/drawingml/2006/main">
-            <a:off x="1181100" y="3086100"/>
-            <a:ext cx="2286000" cy="428625"/>
-          </a:xfrm>
-          <a:prstGeom xmlns:a="http://schemas.openxmlformats.org/drawingml/2006/main" prst="rect">
-            <a:avLst/>
-          </a:prstGeom>
-          <a:noFill xmlns:a="http://schemas.openxmlformats.org/drawingml/2006/main"/>
-          <a:ln xmlns:a="http://schemas.openxmlformats.org/drawingml/2006/main" w="0">
-            <a:noFill/>
-          </a:ln>
-        </p:spPr>
-        <p:txBody>
-          <a:bodyPr xmlns:a="http://schemas.openxmlformats.org/drawingml/2006/main">
-            <a:noAutofit/>
-          </a:bodyPr>
-          <a:lstStyle xmlns:a="http://schemas.openxmlformats.org/drawingml/2006/main"/>
-          <a:p xmlns:a="http://schemas.openxmlformats.org/drawingml/2006/main">
-            <a:pPr>
-              <a:defRPr sz="1800" b="1">
-                <a:solidFill>
-                  <a:srgbClr val="F5F7FF"/>
-                </a:solidFill>
-                <a:latin typeface="Microsoft YaHei"/>
-                <a:ea typeface="Microsoft YaHei"/>
-                <a:cs typeface="Microsoft YaHei"/>
-              </a:defRPr>
-            </a:pPr>
-            <a:r>
-              <a:rPr sz="1800" b="1">
-                <a:solidFill>
-                  <a:srgbClr val="F5F7FF"/>
-                </a:solidFill>
-                <a:latin typeface="Microsoft YaHei"/>
-                <a:ea typeface="Microsoft YaHei"/>
-                <a:cs typeface="Microsoft YaHei"/>
-              </a:rPr>
-              <a:t>逻辑结构</a:t>
-            </a:r>
-          </a:p>
-        </p:txBody>
-      </p:sp>
-      <p:sp>
-        <p:nvSpPr>
-          <p:cNvPr id="12" name="">
-            <a:extLst xmlns:a="http://schemas.openxmlformats.org/drawingml/2006/main">
-              <a:ext uri="{FF2B5EF4-FFF2-40B4-BE49-F238E27FC236}">
-                <a16:creationId xmlns:a16="http://schemas.microsoft.com/office/drawing/2014/main" id="{FA3D3EE5-E4C3-4E6F-800B-9609DB8239F5}"/>
-              </a:ext>
-            </a:extLst>
-          </p:cNvPr>
-          <p:cNvSpPr>
-            <a:spLocks xmlns:a="http://schemas.openxmlformats.org/drawingml/2006/main" noGrp="1"/>
-          </p:cNvSpPr>
-          <p:nvPr/>
-        </p:nvSpPr>
-        <p:spPr>
-          <a:xfrm xmlns:a="http://schemas.openxmlformats.org/drawingml/2006/main">
-            <a:off x="3609975" y="3171825"/>
-            <a:ext cx="6143625" cy="200025"/>
-          </a:xfrm>
-          <a:prstGeom xmlns:a="http://schemas.openxmlformats.org/drawingml/2006/main" prst="roundRect">
-            <a:avLst>
-              <a:gd name="adj" fmla="val 38095"/>
-            </a:avLst>
-          </a:prstGeom>
-          <a:solidFill xmlns:a="http://schemas.openxmlformats.org/drawingml/2006/main">
-            <a:srgbClr val="F5F7FF">
-              <a:alpha val="14000"/>
+            <a:srgbClr val="0B1020">
+              <a:alpha val="72000"/>
             </a:srgbClr>
           </a:solidFill>
-          <a:ln xmlns:a="http://schemas.openxmlformats.org/drawingml/2006/main" w="0">
-            <a:noFill/>
+          <a:ln xmlns:a="http://schemas.openxmlformats.org/drawingml/2006/main" w="10478">
+            <a:solidFill>
+              <a:srgbClr val="F5F7FF">
+                <a:alpha val="20000"/>
+              </a:srgbClr>
+            </a:solidFill>
             <a:prstDash val="solid"/>
           </a:ln>
         </p:spPr>
       </p:sp>
       <p:sp>
         <p:nvSpPr>
-          <p:cNvPr id="13" name="">
-            <a:extLst xmlns:a="http://schemas.openxmlformats.org/drawingml/2006/main">
-              <a:ext uri="{FF2B5EF4-FFF2-40B4-BE49-F238E27FC236}">
-                <a16:creationId xmlns:a16="http://schemas.microsoft.com/office/drawing/2014/main" id="{CF1A6755-9987-4497-B57D-EF3214E127AA}"/>
-              </a:ext>
-            </a:extLst>
-          </p:cNvPr>
-          <p:cNvSpPr>
-            <a:spLocks xmlns:a="http://schemas.openxmlformats.org/drawingml/2006/main" noGrp="1"/>
-          </p:cNvSpPr>
-          <p:nvPr/>
-        </p:nvSpPr>
-        <p:spPr>
-          <a:xfrm xmlns:a="http://schemas.openxmlformats.org/drawingml/2006/main">
-            <a:off x="3609975" y="3171825"/>
-            <a:ext cx="4454128" cy="200025"/>
-          </a:xfrm>
-          <a:prstGeom xmlns:a="http://schemas.openxmlformats.org/drawingml/2006/main" prst="roundRect">
-            <a:avLst>
-              <a:gd name="adj" fmla="val 38095"/>
-            </a:avLst>
-          </a:prstGeom>
-          <a:solidFill xmlns:a="http://schemas.openxmlformats.org/drawingml/2006/main">
-            <a:srgbClr val="FF7AD9"/>
-          </a:solidFill>
-          <a:ln xmlns:a="http://schemas.openxmlformats.org/drawingml/2006/main" w="0">
-            <a:noFill/>
-            <a:prstDash val="solid"/>
-          </a:ln>
-        </p:spPr>
-      </p:sp>
-      <p:sp>
-        <p:nvSpPr>
-          <p:cNvPr id="14" name="">
-            <a:extLst xmlns:a="http://schemas.openxmlformats.org/drawingml/2006/main">
-              <a:ext uri="{FF2B5EF4-FFF2-40B4-BE49-F238E27FC236}">
-                <a16:creationId xmlns:a16="http://schemas.microsoft.com/office/drawing/2014/main" id="{EC85BE9A-081E-4CF1-AAC5-498CF5278A61}"/>
-              </a:ext>
-            </a:extLst>
-          </p:cNvPr>
-          <p:cNvSpPr>
-            <a:spLocks xmlns:a="http://schemas.openxmlformats.org/drawingml/2006/main" noGrp="1"/>
-          </p:cNvSpPr>
-          <p:nvPr/>
-        </p:nvSpPr>
-        <p:spPr>
-          <a:xfrm xmlns:a="http://schemas.openxmlformats.org/drawingml/2006/main">
-            <a:off x="9934575" y="3076575"/>
-            <a:ext cx="1047750" cy="428625"/>
+          <p:cNvPr id="15" name="">
+            <a:extLst xmlns:a="http://schemas.openxmlformats.org/drawingml/2006/main">
+              <a:ext uri="{FF2B5EF4-FFF2-40B4-BE49-F238E27FC236}">
+                <a16:creationId xmlns:a16="http://schemas.microsoft.com/office/drawing/2014/main" id="{2673AF79-9A36-4E5E-BE6A-C471201E61D6}"/>
+              </a:ext>
+            </a:extLst>
+          </p:cNvPr>
+          <p:cNvSpPr>
+            <a:spLocks xmlns:a="http://schemas.openxmlformats.org/drawingml/2006/main" noGrp="1"/>
+          </p:cNvSpPr>
+          <p:nvPr/>
+        </p:nvSpPr>
+        <p:spPr>
+          <a:xfrm xmlns:a="http://schemas.openxmlformats.org/drawingml/2006/main">
+            <a:off x="1019175" y="4648200"/>
+            <a:ext cx="1476375" cy="428625"/>
           </a:xfrm>
           <a:prstGeom xmlns:a="http://schemas.openxmlformats.org/drawingml/2006/main" prst="rect">
             <a:avLst/>
@@ -11364,47 +13022,47 @@
           <a:lstStyle xmlns:a="http://schemas.openxmlformats.org/drawingml/2006/main"/>
           <a:p xmlns:a="http://schemas.openxmlformats.org/drawingml/2006/main">
             <a:pPr>
-              <a:defRPr sz="1950" b="1">
-                <a:solidFill>
-                  <a:srgbClr val="FF7AD9"/>
-                </a:solidFill>
-                <a:latin typeface="Microsoft YaHei"/>
-                <a:ea typeface="Microsoft YaHei"/>
-                <a:cs typeface="Microsoft YaHei"/>
-              </a:defRPr>
-            </a:pPr>
-            <a:r>
-              <a:rPr sz="1950" b="1">
-                <a:solidFill>
-                  <a:srgbClr val="FF7AD9"/>
-                </a:solidFill>
-                <a:latin typeface="Microsoft YaHei"/>
-                <a:ea typeface="Microsoft YaHei"/>
-                <a:cs typeface="Microsoft YaHei"/>
-              </a:rPr>
-              <a:t>72.5</a:t>
-            </a:r>
-          </a:p>
-        </p:txBody>
-      </p:sp>
-      <p:sp>
-        <p:nvSpPr>
-          <p:cNvPr id="15" name="">
-            <a:extLst xmlns:a="http://schemas.openxmlformats.org/drawingml/2006/main">
-              <a:ext uri="{FF2B5EF4-FFF2-40B4-BE49-F238E27FC236}">
-                <a16:creationId xmlns:a16="http://schemas.microsoft.com/office/drawing/2014/main" id="{D673B6E6-1F59-4BF9-BEBC-18C96C4A2BA2}"/>
-              </a:ext>
-            </a:extLst>
-          </p:cNvPr>
-          <p:cNvSpPr>
-            <a:spLocks xmlns:a="http://schemas.openxmlformats.org/drawingml/2006/main" noGrp="1"/>
-          </p:cNvSpPr>
-          <p:nvPr/>
-        </p:nvSpPr>
-        <p:spPr>
-          <a:xfrm xmlns:a="http://schemas.openxmlformats.org/drawingml/2006/main">
-            <a:off x="1181100" y="3962400"/>
-            <a:ext cx="2286000" cy="428625"/>
+              <a:defRPr sz="2100" b="1">
+                <a:solidFill>
+                  <a:srgbClr val="7CFFCB"/>
+                </a:solidFill>
+                <a:latin typeface="Microsoft YaHei"/>
+                <a:ea typeface="Microsoft YaHei"/>
+                <a:cs typeface="Microsoft YaHei"/>
+              </a:defRPr>
+            </a:pPr>
+            <a:r>
+              <a:rPr sz="2100" b="1">
+                <a:solidFill>
+                  <a:srgbClr val="7CFFCB"/>
+                </a:solidFill>
+                <a:latin typeface="Microsoft YaHei"/>
+                <a:ea typeface="Microsoft YaHei"/>
+                <a:cs typeface="Microsoft YaHei"/>
+              </a:rPr>
+              <a:t>再练习</a:t>
+            </a:r>
+          </a:p>
+        </p:txBody>
+      </p:sp>
+      <p:sp>
+        <p:nvSpPr>
+          <p:cNvPr id="16" name="">
+            <a:extLst xmlns:a="http://schemas.openxmlformats.org/drawingml/2006/main">
+              <a:ext uri="{FF2B5EF4-FFF2-40B4-BE49-F238E27FC236}">
+                <a16:creationId xmlns:a16="http://schemas.microsoft.com/office/drawing/2014/main" id="{C11AFE28-3768-4E43-A184-C93FDA19D841}"/>
+              </a:ext>
+            </a:extLst>
+          </p:cNvPr>
+          <p:cNvSpPr>
+            <a:spLocks xmlns:a="http://schemas.openxmlformats.org/drawingml/2006/main" noGrp="1"/>
+          </p:cNvSpPr>
+          <p:nvPr/>
+        </p:nvSpPr>
+        <p:spPr>
+          <a:xfrm xmlns:a="http://schemas.openxmlformats.org/drawingml/2006/main">
+            <a:off x="2733675" y="4524375"/>
+            <a:ext cx="8191500" cy="342900"/>
           </a:xfrm>
           <a:prstGeom xmlns:a="http://schemas.openxmlformats.org/drawingml/2006/main" prst="rect">
             <a:avLst/>
@@ -11421,115 +13079,104 @@
           <a:lstStyle xmlns:a="http://schemas.openxmlformats.org/drawingml/2006/main"/>
           <a:p xmlns:a="http://schemas.openxmlformats.org/drawingml/2006/main">
             <a:pPr>
-              <a:defRPr sz="1800" b="1">
-                <a:solidFill>
-                  <a:srgbClr val="F5F7FF"/>
-                </a:solidFill>
-                <a:latin typeface="Microsoft YaHei"/>
-                <a:ea typeface="Microsoft YaHei"/>
-                <a:cs typeface="Microsoft YaHei"/>
-              </a:defRPr>
-            </a:pPr>
-            <a:r>
-              <a:rPr sz="1800" b="1">
-                <a:solidFill>
-                  <a:srgbClr val="F5F7FF"/>
-                </a:solidFill>
-                <a:latin typeface="Microsoft YaHei"/>
-                <a:ea typeface="Microsoft YaHei"/>
-                <a:cs typeface="Microsoft YaHei"/>
-              </a:rPr>
-              <a:t>岗位素养</a:t>
-            </a:r>
-          </a:p>
-        </p:txBody>
-      </p:sp>
-      <p:sp>
-        <p:nvSpPr>
-          <p:cNvPr id="16" name="">
-            <a:extLst xmlns:a="http://schemas.openxmlformats.org/drawingml/2006/main">
-              <a:ext uri="{FF2B5EF4-FFF2-40B4-BE49-F238E27FC236}">
-                <a16:creationId xmlns:a16="http://schemas.microsoft.com/office/drawing/2014/main" id="{F2E1F58C-9917-4EE1-87A4-47CAD7C16547}"/>
-              </a:ext>
-            </a:extLst>
-          </p:cNvPr>
-          <p:cNvSpPr>
-            <a:spLocks xmlns:a="http://schemas.openxmlformats.org/drawingml/2006/main" noGrp="1"/>
-          </p:cNvSpPr>
-          <p:nvPr/>
-        </p:nvSpPr>
-        <p:spPr>
-          <a:xfrm xmlns:a="http://schemas.openxmlformats.org/drawingml/2006/main">
-            <a:off x="3609975" y="4048125"/>
-            <a:ext cx="6143625" cy="200025"/>
-          </a:xfrm>
-          <a:prstGeom xmlns:a="http://schemas.openxmlformats.org/drawingml/2006/main" prst="roundRect">
-            <a:avLst>
-              <a:gd name="adj" fmla="val 38095"/>
-            </a:avLst>
-          </a:prstGeom>
-          <a:solidFill xmlns:a="http://schemas.openxmlformats.org/drawingml/2006/main">
-            <a:srgbClr val="F5F7FF">
-              <a:alpha val="14000"/>
-            </a:srgbClr>
-          </a:solidFill>
-          <a:ln xmlns:a="http://schemas.openxmlformats.org/drawingml/2006/main" w="0">
-            <a:noFill/>
-            <a:prstDash val="solid"/>
-          </a:ln>
-        </p:spPr>
+              <a:defRPr sz="1875" b="1">
+                <a:solidFill>
+                  <a:srgbClr val="F5F7FF"/>
+                </a:solidFill>
+                <a:latin typeface="Microsoft YaHei"/>
+                <a:ea typeface="Microsoft YaHei"/>
+                <a:cs typeface="Microsoft YaHei"/>
+              </a:defRPr>
+            </a:pPr>
+            <a:r>
+              <a:rPr sz="1875" b="1">
+                <a:solidFill>
+                  <a:srgbClr val="F5F7FF"/>
+                </a:solidFill>
+                <a:latin typeface="Microsoft YaHei"/>
+                <a:ea typeface="Microsoft YaHei"/>
+                <a:cs typeface="Microsoft YaHei"/>
+              </a:rPr>
+              <a:t>改进建议与历史记录</a:t>
+            </a:r>
+          </a:p>
+        </p:txBody>
       </p:sp>
       <p:sp>
         <p:nvSpPr>
           <p:cNvPr id="17" name="">
             <a:extLst xmlns:a="http://schemas.openxmlformats.org/drawingml/2006/main">
               <a:ext uri="{FF2B5EF4-FFF2-40B4-BE49-F238E27FC236}">
-                <a16:creationId xmlns:a16="http://schemas.microsoft.com/office/drawing/2014/main" id="{D0ACBEBE-F617-4AF0-A601-B6DC0E7DB82A}"/>
-              </a:ext>
-            </a:extLst>
-          </p:cNvPr>
-          <p:cNvSpPr>
-            <a:spLocks xmlns:a="http://schemas.openxmlformats.org/drawingml/2006/main" noGrp="1"/>
-          </p:cNvSpPr>
-          <p:nvPr/>
-        </p:nvSpPr>
-        <p:spPr>
-          <a:xfrm xmlns:a="http://schemas.openxmlformats.org/drawingml/2006/main">
-            <a:off x="3609975" y="4048125"/>
-            <a:ext cx="3993356" cy="200025"/>
-          </a:xfrm>
-          <a:prstGeom xmlns:a="http://schemas.openxmlformats.org/drawingml/2006/main" prst="roundRect">
-            <a:avLst>
-              <a:gd name="adj" fmla="val 38095"/>
-            </a:avLst>
-          </a:prstGeom>
-          <a:solidFill xmlns:a="http://schemas.openxmlformats.org/drawingml/2006/main">
-            <a:srgbClr val="6A8DFF"/>
-          </a:solidFill>
-          <a:ln xmlns:a="http://schemas.openxmlformats.org/drawingml/2006/main" w="0">
-            <a:noFill/>
-            <a:prstDash val="solid"/>
-          </a:ln>
-        </p:spPr>
+                <a16:creationId xmlns:a16="http://schemas.microsoft.com/office/drawing/2014/main" id="{0C3632A2-3C01-470F-830B-AEC1D20BA09F}"/>
+              </a:ext>
+            </a:extLst>
+          </p:cNvPr>
+          <p:cNvSpPr>
+            <a:spLocks xmlns:a="http://schemas.openxmlformats.org/drawingml/2006/main" noGrp="1"/>
+          </p:cNvSpPr>
+          <p:nvPr/>
+        </p:nvSpPr>
+        <p:spPr>
+          <a:xfrm xmlns:a="http://schemas.openxmlformats.org/drawingml/2006/main">
+            <a:off x="2733675" y="4962525"/>
+            <a:ext cx="8191500" cy="323850"/>
+          </a:xfrm>
+          <a:prstGeom xmlns:a="http://schemas.openxmlformats.org/drawingml/2006/main" prst="rect">
+            <a:avLst/>
+          </a:prstGeom>
+          <a:noFill xmlns:a="http://schemas.openxmlformats.org/drawingml/2006/main"/>
+          <a:ln xmlns:a="http://schemas.openxmlformats.org/drawingml/2006/main" w="0">
+            <a:noFill/>
+          </a:ln>
+        </p:spPr>
+        <p:txBody>
+          <a:bodyPr xmlns:a="http://schemas.openxmlformats.org/drawingml/2006/main">
+            <a:noAutofit/>
+          </a:bodyPr>
+          <a:lstStyle xmlns:a="http://schemas.openxmlformats.org/drawingml/2006/main"/>
+          <a:p xmlns:a="http://schemas.openxmlformats.org/drawingml/2006/main">
+            <a:pPr>
+              <a:defRPr sz="1575" b="0">
+                <a:solidFill>
+                  <a:srgbClr val="F5F7FF"/>
+                </a:solidFill>
+                <a:latin typeface="Microsoft YaHei"/>
+                <a:ea typeface="Microsoft YaHei"/>
+                <a:cs typeface="Microsoft YaHei"/>
+              </a:defRPr>
+            </a:pPr>
+            <a:r>
+              <a:rPr sz="1575" b="0">
+                <a:solidFill>
+                  <a:srgbClr val="F5F7FF"/>
+                </a:solidFill>
+                <a:latin typeface="Microsoft YaHei"/>
+                <a:ea typeface="Microsoft YaHei"/>
+                <a:cs typeface="Microsoft YaHei"/>
+              </a:rPr>
+              <a:t>根据建议重新组织答案，完成训练后回看变化</a:t>
+            </a:r>
+          </a:p>
+        </p:txBody>
       </p:sp>
       <p:sp>
         <p:nvSpPr>
           <p:cNvPr id="18" name="">
             <a:extLst xmlns:a="http://schemas.openxmlformats.org/drawingml/2006/main">
               <a:ext uri="{FF2B5EF4-FFF2-40B4-BE49-F238E27FC236}">
-                <a16:creationId xmlns:a16="http://schemas.microsoft.com/office/drawing/2014/main" id="{63344771-C632-4834-91C4-91B5E86ACA20}"/>
-              </a:ext>
-            </a:extLst>
-          </p:cNvPr>
-          <p:cNvSpPr>
-            <a:spLocks xmlns:a="http://schemas.openxmlformats.org/drawingml/2006/main" noGrp="1"/>
-          </p:cNvSpPr>
-          <p:nvPr/>
-        </p:nvSpPr>
-        <p:spPr>
-          <a:xfrm xmlns:a="http://schemas.openxmlformats.org/drawingml/2006/main">
-            <a:off x="9934575" y="3952875"/>
-            <a:ext cx="1047750" cy="428625"/>
+                <a16:creationId xmlns:a16="http://schemas.microsoft.com/office/drawing/2014/main" id="{6B8FF725-EC3C-4C0E-91B0-A808358830D0}"/>
+              </a:ext>
+            </a:extLst>
+          </p:cNvPr>
+          <p:cNvSpPr>
+            <a:spLocks xmlns:a="http://schemas.openxmlformats.org/drawingml/2006/main" noGrp="1"/>
+          </p:cNvSpPr>
+          <p:nvPr/>
+        </p:nvSpPr>
+        <p:spPr>
+          <a:xfrm xmlns:a="http://schemas.openxmlformats.org/drawingml/2006/main">
+            <a:off x="809625" y="5857875"/>
+            <a:ext cx="10477500" cy="333375"/>
           </a:xfrm>
           <a:prstGeom xmlns:a="http://schemas.openxmlformats.org/drawingml/2006/main" prst="rect">
             <a:avLst/>
@@ -11546,121 +13193,7 @@
           <a:lstStyle xmlns:a="http://schemas.openxmlformats.org/drawingml/2006/main"/>
           <a:p xmlns:a="http://schemas.openxmlformats.org/drawingml/2006/main">
             <a:pPr>
-              <a:defRPr sz="1950" b="1">
-                <a:solidFill>
-                  <a:srgbClr val="F5F7FF"/>
-                </a:solidFill>
-                <a:latin typeface="Microsoft YaHei"/>
-                <a:ea typeface="Microsoft YaHei"/>
-                <a:cs typeface="Microsoft YaHei"/>
-              </a:defRPr>
-            </a:pPr>
-            <a:r>
-              <a:rPr sz="1950" b="1">
-                <a:solidFill>
-                  <a:srgbClr val="F5F7FF"/>
-                </a:solidFill>
-                <a:latin typeface="Microsoft YaHei"/>
-                <a:ea typeface="Microsoft YaHei"/>
-                <a:cs typeface="Microsoft YaHei"/>
-              </a:rPr>
-              <a:t>65.0</a:t>
-            </a:r>
-          </a:p>
-        </p:txBody>
-      </p:sp>
-      <p:sp>
-        <p:nvSpPr>
-          <p:cNvPr id="19" name="">
-            <a:extLst xmlns:a="http://schemas.openxmlformats.org/drawingml/2006/main">
-              <a:ext uri="{FF2B5EF4-FFF2-40B4-BE49-F238E27FC236}">
-                <a16:creationId xmlns:a16="http://schemas.microsoft.com/office/drawing/2014/main" id="{133B6EEE-4102-4489-90CA-C3BDD0A5F2F9}"/>
-              </a:ext>
-            </a:extLst>
-          </p:cNvPr>
-          <p:cNvSpPr>
-            <a:spLocks xmlns:a="http://schemas.openxmlformats.org/drawingml/2006/main" noGrp="1"/>
-          </p:cNvSpPr>
-          <p:nvPr/>
-        </p:nvSpPr>
-        <p:spPr>
-          <a:xfrm xmlns:a="http://schemas.openxmlformats.org/drawingml/2006/main">
-            <a:off x="1181100" y="4933950"/>
-            <a:ext cx="2286000" cy="400050"/>
-          </a:xfrm>
-          <a:prstGeom xmlns:a="http://schemas.openxmlformats.org/drawingml/2006/main" prst="rect">
-            <a:avLst/>
-          </a:prstGeom>
-          <a:noFill xmlns:a="http://schemas.openxmlformats.org/drawingml/2006/main"/>
-          <a:ln xmlns:a="http://schemas.openxmlformats.org/drawingml/2006/main" w="0">
-            <a:noFill/>
-          </a:ln>
-        </p:spPr>
-        <p:txBody>
-          <a:bodyPr xmlns:a="http://schemas.openxmlformats.org/drawingml/2006/main">
-            <a:noAutofit/>
-          </a:bodyPr>
-          <a:lstStyle xmlns:a="http://schemas.openxmlformats.org/drawingml/2006/main"/>
-          <a:p xmlns:a="http://schemas.openxmlformats.org/drawingml/2006/main">
-            <a:pPr>
-              <a:defRPr sz="1800" b="1">
-                <a:solidFill>
-                  <a:srgbClr val="F5F7FF"/>
-                </a:solidFill>
-                <a:latin typeface="Microsoft YaHei"/>
-                <a:ea typeface="Microsoft YaHei"/>
-                <a:cs typeface="Microsoft YaHei"/>
-              </a:defRPr>
-            </a:pPr>
-            <a:r>
-              <a:rPr sz="1800" b="1">
-                <a:solidFill>
-                  <a:srgbClr val="F5F7FF"/>
-                </a:solidFill>
-                <a:latin typeface="Microsoft YaHei"/>
-                <a:ea typeface="Microsoft YaHei"/>
-                <a:cs typeface="Microsoft YaHei"/>
-              </a:rPr>
-              <a:t>表达流畅度</a:t>
-            </a:r>
-          </a:p>
-        </p:txBody>
-      </p:sp>
-      <p:sp>
-        <p:nvSpPr>
-          <p:cNvPr id="20" name="">
-            <a:extLst xmlns:a="http://schemas.openxmlformats.org/drawingml/2006/main">
-              <a:ext uri="{FF2B5EF4-FFF2-40B4-BE49-F238E27FC236}">
-                <a16:creationId xmlns:a16="http://schemas.microsoft.com/office/drawing/2014/main" id="{79E3A89E-77BB-4B64-8D11-F9373B94B5B3}"/>
-              </a:ext>
-            </a:extLst>
-          </p:cNvPr>
-          <p:cNvSpPr>
-            <a:spLocks xmlns:a="http://schemas.openxmlformats.org/drawingml/2006/main" noGrp="1"/>
-          </p:cNvSpPr>
-          <p:nvPr/>
-        </p:nvSpPr>
-        <p:spPr>
-          <a:xfrm xmlns:a="http://schemas.openxmlformats.org/drawingml/2006/main">
-            <a:off x="3609975" y="4933950"/>
-            <a:ext cx="5715000" cy="400050"/>
-          </a:xfrm>
-          <a:prstGeom xmlns:a="http://schemas.openxmlformats.org/drawingml/2006/main" prst="rect">
-            <a:avLst/>
-          </a:prstGeom>
-          <a:noFill xmlns:a="http://schemas.openxmlformats.org/drawingml/2006/main"/>
-          <a:ln xmlns:a="http://schemas.openxmlformats.org/drawingml/2006/main" w="0">
-            <a:noFill/>
-          </a:ln>
-        </p:spPr>
-        <p:txBody>
-          <a:bodyPr xmlns:a="http://schemas.openxmlformats.org/drawingml/2006/main">
-            <a:noAutofit/>
-          </a:bodyPr>
-          <a:lstStyle xmlns:a="http://schemas.openxmlformats.org/drawingml/2006/main"/>
-          <a:p xmlns:a="http://schemas.openxmlformats.org/drawingml/2006/main">
-            <a:pPr>
-              <a:defRPr sz="1800" b="0">
+              <a:defRPr sz="1575" b="0">
                 <a:solidFill>
                   <a:srgbClr val="7CFFCB"/>
                 </a:solidFill>
@@ -11670,7 +13203,7 @@
               </a:defRPr>
             </a:pPr>
             <a:r>
-              <a:rPr sz="1800" b="0">
+              <a:rPr sz="1575" b="0">
                 <a:solidFill>
                   <a:srgbClr val="7CFFCB"/>
                 </a:solidFill>
@@ -11678,64 +13211,7 @@
                 <a:ea typeface="Microsoft YaHei"/>
                 <a:cs typeface="Microsoft YaHei"/>
               </a:rPr>
-              <a:t>未评估（文本模式）</a:t>
-            </a:r>
-          </a:p>
-        </p:txBody>
-      </p:sp>
-      <p:sp>
-        <p:nvSpPr>
-          <p:cNvPr id="21" name="">
-            <a:extLst xmlns:a="http://schemas.openxmlformats.org/drawingml/2006/main">
-              <a:ext uri="{FF2B5EF4-FFF2-40B4-BE49-F238E27FC236}">
-                <a16:creationId xmlns:a16="http://schemas.microsoft.com/office/drawing/2014/main" id="{9BA2BCE9-BDBB-418A-9A81-6D1A6C12C0A0}"/>
-              </a:ext>
-            </a:extLst>
-          </p:cNvPr>
-          <p:cNvSpPr>
-            <a:spLocks xmlns:a="http://schemas.openxmlformats.org/drawingml/2006/main" noGrp="1"/>
-          </p:cNvSpPr>
-          <p:nvPr/>
-        </p:nvSpPr>
-        <p:spPr>
-          <a:xfrm xmlns:a="http://schemas.openxmlformats.org/drawingml/2006/main">
-            <a:off x="847725" y="5829300"/>
-            <a:ext cx="9906000" cy="323850"/>
-          </a:xfrm>
-          <a:prstGeom xmlns:a="http://schemas.openxmlformats.org/drawingml/2006/main" prst="rect">
-            <a:avLst/>
-          </a:prstGeom>
-          <a:noFill xmlns:a="http://schemas.openxmlformats.org/drawingml/2006/main"/>
-          <a:ln xmlns:a="http://schemas.openxmlformats.org/drawingml/2006/main" w="0">
-            <a:noFill/>
-          </a:ln>
-        </p:spPr>
-        <p:txBody>
-          <a:bodyPr xmlns:a="http://schemas.openxmlformats.org/drawingml/2006/main">
-            <a:noAutofit/>
-          </a:bodyPr>
-          <a:lstStyle xmlns:a="http://schemas.openxmlformats.org/drawingml/2006/main"/>
-          <a:p xmlns:a="http://schemas.openxmlformats.org/drawingml/2006/main">
-            <a:pPr>
-              <a:defRPr sz="1275" b="0">
-                <a:solidFill>
-                  <a:srgbClr val="F5F7FF"/>
-                </a:solidFill>
-                <a:latin typeface="Microsoft YaHei"/>
-                <a:ea typeface="Microsoft YaHei"/>
-                <a:cs typeface="Microsoft YaHei"/>
-              </a:defRPr>
-            </a:pPr>
-            <a:r>
-              <a:rPr sz="1275" b="0">
-                <a:solidFill>
-                  <a:srgbClr val="F5F7FF"/>
-                </a:solidFill>
-                <a:latin typeface="Microsoft YaHei"/>
-                <a:ea typeface="Microsoft YaHei"/>
-                <a:cs typeface="Microsoft YaHei"/>
-              </a:rPr>
-              <a:t>单份真实报告示例 · 不代表总体能力变化</a:t>
+              <a:t>未获得的数据不打分：例如纯文字回答不评估语音流畅度</a:t>
             </a:r>
           </a:p>
         </p:txBody>
@@ -11743,7 +13219,7 @@
     </p:spTree>
     <p:extLst>
       <p:ext uri="{BB962C8B-B14F-4D97-AF65-F5344CB8AC3E}">
-        <p14:creationId xmlns:p14="http://schemas.microsoft.com/office/powerpoint/2010/main" val="1844266350"/>
+        <p14:creationId xmlns:p14="http://schemas.microsoft.com/office/powerpoint/2010/main" val="362388094"/>
       </p:ext>
     </p:extLst>
   </p:cSld>
